--- a/output/wordlabs-thank-3day.pptx
+++ b/output/wordlabs-thank-3day.pptx
@@ -4240,7 +4240,7 @@
                 <a:ea typeface="Calibri" pitchFamily="34" charset="-122"/>
                 <a:cs typeface="Calibri" pitchFamily="34" charset="-120"/>
               </a:rPr>
-              <a:t>"express gratitude or appreciation"</a:t>
+              <a:t>"express gratitude or praise"</a:t>
             </a:r>
             <a:endParaRPr lang="en-US" sz="2200" dirty="0"/>
           </a:p>
@@ -5288,7 +5288,7 @@
                 <a:ea typeface="Calibri" pitchFamily="34" charset="-122"/>
                 <a:cs typeface="Calibri" pitchFamily="34" charset="-120"/>
               </a:rPr>
-              <a:t>Word Labs  •  wordlabs.app  •  Root: 'thank' = express gratitude or appreciation</a:t>
+              <a:t>Word Labs  •  wordlabs.app  •  Root: 'thank' = express gratitude or praise</a:t>
             </a:r>
             <a:endParaRPr lang="en-US" sz="800" dirty="0"/>
           </a:p>
@@ -5928,7 +5928,7 @@
                 <a:ea typeface="Calibri" pitchFamily="34" charset="-122"/>
                 <a:cs typeface="Calibri" pitchFamily="34" charset="-120"/>
               </a:rPr>
-              <a:t>Word Labs  •  wordlabs.app  •  Root: 'thank' = express gratitude or appreciation</a:t>
+              <a:t>Word Labs  •  wordlabs.app  •  Root: 'thank' = express gratitude or praise</a:t>
             </a:r>
             <a:endParaRPr lang="en-US" sz="800" dirty="0"/>
           </a:p>
@@ -6071,7 +6071,7 @@
                 <a:ea typeface="Calibri" pitchFamily="34" charset="-122"/>
                 <a:cs typeface="Calibri" pitchFamily="34" charset="-120"/>
               </a:rPr>
-              <a:t> for the help, and she spent the afternoon </a:t>
+              <a:t> for the help, and she </a:t>
             </a:r>
             <a:pPr algn="l" indent="0" marL="0">
               <a:buNone/>
@@ -6088,7 +6088,7 @@
                 <a:ea typeface="Calibri" pitchFamily="34" charset="-122"/>
                 <a:cs typeface="Calibri" pitchFamily="34" charset="-120"/>
               </a:rPr>
-              <a:t>thankfully</a:t>
+              <a:t>thanked</a:t>
             </a:r>
             <a:pPr algn="l" indent="0" marL="0">
               <a:buNone/>
@@ -6102,7 +6102,7 @@
                 <a:ea typeface="Calibri" pitchFamily="34" charset="-122"/>
                 <a:cs typeface="Calibri" pitchFamily="34" charset="-120"/>
               </a:rPr>
-              <a:t> writing cards to everyone.</a:t>
+              <a:t> her friend warmly.</a:t>
             </a:r>
             <a:endParaRPr lang="en-US" sz="1800" dirty="0"/>
           </a:p>
@@ -6385,7 +6385,7 @@
                 <a:ea typeface="Trebuchet MS" pitchFamily="34" charset="-122"/>
                 <a:cs typeface="Trebuchet MS" pitchFamily="34" charset="-120"/>
               </a:rPr>
-              <a:t>thankfully</a:t>
+              <a:t>thanked</a:t>
             </a:r>
             <a:endParaRPr lang="en-US" sz="1400" dirty="0"/>
           </a:p>
@@ -6716,7 +6716,7 @@
                 <a:ea typeface="Calibri" pitchFamily="34" charset="-122"/>
                 <a:cs typeface="Calibri" pitchFamily="34" charset="-120"/>
               </a:rPr>
-              <a:t>Word Labs  •  wordlabs.app  •  Root: 'thank' = express gratitude or appreciation</a:t>
+              <a:t>Word Labs  •  wordlabs.app  •  Root: 'thank' = express gratitude or praise</a:t>
             </a:r>
             <a:endParaRPr lang="en-US" sz="800" dirty="0"/>
           </a:p>
@@ -7543,7 +7543,7 @@
                 <a:ea typeface="Calibri" pitchFamily="34" charset="-122"/>
                 <a:cs typeface="Calibri" pitchFamily="34" charset="-120"/>
               </a:rPr>
-              <a:t>Word Labs  •  wordlabs.app  •  Root: 'thank' = express gratitude or appreciation</a:t>
+              <a:t>Word Labs  •  wordlabs.app  •  Root: 'thank' = express gratitude or praise</a:t>
             </a:r>
             <a:endParaRPr lang="en-US" sz="800" dirty="0"/>
           </a:p>
@@ -7972,7 +7972,7 @@
                 <a:ea typeface="Calibri" pitchFamily="34" charset="-122"/>
                 <a:cs typeface="Calibri" pitchFamily="34" charset="-120"/>
               </a:rPr>
-              <a:t>full of</a:t>
+              <a:t>full of; having the quality of</a:t>
             </a:r>
             <a:endParaRPr lang="en-US" sz="850" dirty="0"/>
           </a:p>
@@ -8528,7 +8528,7 @@
                 <a:ea typeface="Calibri" pitchFamily="34" charset="-122"/>
                 <a:cs typeface="Calibri" pitchFamily="34" charset="-120"/>
               </a:rPr>
-              <a:t>Word Labs  •  wordlabs.app  •  Root: 'thank' = express gratitude or appreciation</a:t>
+              <a:t>Word Labs  •  wordlabs.app  •  Root: 'thank' = express gratitude or praise</a:t>
             </a:r>
             <a:endParaRPr lang="en-US" sz="800" dirty="0"/>
           </a:p>
@@ -8957,7 +8957,7 @@
                 <a:ea typeface="Calibri" pitchFamily="34" charset="-122"/>
                 <a:cs typeface="Calibri" pitchFamily="34" charset="-120"/>
               </a:rPr>
-              <a:t>full of</a:t>
+              <a:t>full of; having the quality of</a:t>
             </a:r>
             <a:endParaRPr lang="en-US" sz="850" dirty="0"/>
           </a:p>
@@ -9645,7 +9645,7 @@
                 <a:ea typeface="Calibri" pitchFamily="34" charset="-122"/>
                 <a:cs typeface="Calibri" pitchFamily="34" charset="-120"/>
               </a:rPr>
-              <a:t>Word Labs  •  wordlabs.app  •  Root: 'thank' = express gratitude or appreciation</a:t>
+              <a:t>Word Labs  •  wordlabs.app  •  Root: 'thank' = express gratitude or praise</a:t>
             </a:r>
             <a:endParaRPr lang="en-US" sz="800" dirty="0"/>
           </a:p>
@@ -10074,7 +10074,7 @@
                 <a:ea typeface="Calibri" pitchFamily="34" charset="-122"/>
                 <a:cs typeface="Calibri" pitchFamily="34" charset="-120"/>
               </a:rPr>
-              <a:t>full of</a:t>
+              <a:t>full of; having the quality of</a:t>
             </a:r>
             <a:endParaRPr lang="en-US" sz="850" dirty="0"/>
           </a:p>
@@ -11185,7 +11185,7 @@
                 <a:ea typeface="Calibri" pitchFamily="34" charset="-122"/>
                 <a:cs typeface="Calibri" pitchFamily="34" charset="-120"/>
               </a:rPr>
-              <a:t>Word Labs  •  wordlabs.app  •  Root: 'thank' = express gratitude or appreciation</a:t>
+              <a:t>Word Labs  •  wordlabs.app  •  Root: 'thank' = express gratitude or praise</a:t>
             </a:r>
             <a:endParaRPr lang="en-US" sz="800" dirty="0"/>
           </a:p>
@@ -11324,7 +11324,7 @@
                 <a:ea typeface="Trebuchet MS" pitchFamily="34" charset="-122"/>
                 <a:cs typeface="Trebuchet MS" pitchFamily="34" charset="-120"/>
               </a:rPr>
-              <a:t>thankfully</a:t>
+              <a:t>thanked</a:t>
             </a:r>
             <a:endParaRPr lang="en-US" sz="2800" dirty="0"/>
           </a:p>
@@ -12012,7 +12012,7 @@
                 <a:ea typeface="Calibri" pitchFamily="34" charset="-122"/>
                 <a:cs typeface="Calibri" pitchFamily="34" charset="-120"/>
               </a:rPr>
-              <a:t>Word Labs  •  wordlabs.app  •  Root: 'thank' = express gratitude or appreciation</a:t>
+              <a:t>Word Labs  •  wordlabs.app  •  Root: 'thank' = express gratitude or praise</a:t>
             </a:r>
             <a:endParaRPr lang="en-US" sz="800" dirty="0"/>
           </a:p>
@@ -12151,7 +12151,7 @@
                 <a:ea typeface="Trebuchet MS" pitchFamily="34" charset="-122"/>
                 <a:cs typeface="Trebuchet MS" pitchFamily="34" charset="-120"/>
               </a:rPr>
-              <a:t>thankfully</a:t>
+              <a:t>thanked</a:t>
             </a:r>
             <a:endParaRPr lang="en-US" sz="2800" dirty="0"/>
           </a:p>
@@ -12231,7 +12231,7 @@
         </p:nvSpPr>
         <p:spPr>
           <a:xfrm>
-            <a:off x="2221992" y="2258568"/>
+            <a:off x="2938272" y="2258568"/>
             <a:ext cx="1828800" cy="292608"/>
           </a:xfrm>
           <a:prstGeom prst="rect">
@@ -12265,7 +12265,7 @@
         </p:nvSpPr>
         <p:spPr>
           <a:xfrm>
-            <a:off x="2221992" y="2258568"/>
+            <a:off x="2938272" y="2258568"/>
             <a:ext cx="1828800" cy="292608"/>
           </a:xfrm>
           <a:prstGeom prst="rect">
@@ -12304,7 +12304,7 @@
         </p:nvSpPr>
         <p:spPr>
           <a:xfrm>
-            <a:off x="2221992" y="2569464"/>
+            <a:off x="2938272" y="2569464"/>
             <a:ext cx="1828800" cy="201168"/>
           </a:xfrm>
           <a:prstGeom prst="rect">
@@ -12343,7 +12343,7 @@
         </p:nvSpPr>
         <p:spPr>
           <a:xfrm>
-            <a:off x="4370832" y="2258568"/>
+            <a:off x="5803392" y="2258568"/>
             <a:ext cx="1828800" cy="292608"/>
           </a:xfrm>
           <a:prstGeom prst="rect">
@@ -12377,7 +12377,7 @@
         </p:nvSpPr>
         <p:spPr>
           <a:xfrm>
-            <a:off x="4370832" y="2258568"/>
+            <a:off x="5803392" y="2258568"/>
             <a:ext cx="1828800" cy="292608"/>
           </a:xfrm>
           <a:prstGeom prst="rect">
@@ -12402,7 +12402,7 @@
                 <a:ea typeface="Trebuchet MS" pitchFamily="34" charset="-122"/>
                 <a:cs typeface="Trebuchet MS" pitchFamily="34" charset="-120"/>
               </a:rPr>
-              <a:t>ful</a:t>
+              <a:t>ed</a:t>
             </a:r>
             <a:endParaRPr lang="en-US" sz="1300" dirty="0"/>
           </a:p>
@@ -12416,7 +12416,7 @@
         </p:nvSpPr>
         <p:spPr>
           <a:xfrm>
-            <a:off x="4370832" y="2569464"/>
+            <a:off x="5803392" y="2569464"/>
             <a:ext cx="1828800" cy="201168"/>
           </a:xfrm>
           <a:prstGeom prst="rect">
@@ -12441,7 +12441,7 @@
                 <a:ea typeface="Calibri" pitchFamily="34" charset="-122"/>
                 <a:cs typeface="Calibri" pitchFamily="34" charset="-120"/>
               </a:rPr>
-              <a:t>full of</a:t>
+              <a:t>past tense</a:t>
             </a:r>
             <a:endParaRPr lang="en-US" sz="850" dirty="0"/>
           </a:p>
@@ -12455,30 +12455,23 @@
         </p:nvSpPr>
         <p:spPr>
           <a:xfrm>
-            <a:off x="6519672" y="2258568"/>
-            <a:ext cx="1828800" cy="292608"/>
+            <a:off x="365760" y="3273552"/>
+            <a:ext cx="1371600" cy="658368"/>
           </a:xfrm>
           <a:prstGeom prst="rect">
             <a:avLst>
-              <a:gd name="adj" fmla="val 25000"/>
+              <a:gd name="adj" fmla="val 8333"/>
             </a:avLst>
           </a:prstGeom>
           <a:solidFill>
-            <a:srgbClr val="FCE7F3"/>
-          </a:solidFill>
-          <a:ln w="19050">
-            <a:solidFill>
-              <a:srgbClr val="DB2777"/>
-            </a:solidFill>
-            <a:prstDash val="solid"/>
-          </a:ln>
-          <a:effectLst>
-            <a:outerShdw sx="100000" sy="100000" kx="0" ky="0" algn="bl" rotWithShape="0" blurRad="101600" dist="38100" dir="8100000">
-              <a:srgbClr val="000000">
-                <a:alpha val="12000"/>
-              </a:srgbClr>
-            </a:outerShdw>
-          </a:effectLst>
+            <a:srgbClr val="E2E8F0"/>
+          </a:solidFill>
+          <a:ln w="12700">
+            <a:solidFill>
+              <a:srgbClr val="E2E8F0"/>
+            </a:solidFill>
+            <a:prstDash val="solid"/>
+          </a:ln>
         </p:spPr>
       </p:sp>
       <p:sp>
@@ -12489,8 +12482,8 @@
         </p:nvSpPr>
         <p:spPr>
           <a:xfrm>
-            <a:off x="6519672" y="2258568"/>
-            <a:ext cx="1828800" cy="292608"/>
+            <a:off x="365760" y="3273552"/>
+            <a:ext cx="1371600" cy="658368"/>
           </a:xfrm>
           <a:prstGeom prst="rect">
             <a:avLst/>
@@ -12506,73 +12499,100 @@
               <a:buNone/>
             </a:pPr>
             <a:r>
-              <a:rPr lang="en-US" sz="1300" b="1" dirty="0">
-                <a:solidFill>
-                  <a:srgbClr val="9D174D"/>
+              <a:rPr lang="en-US" sz="1100" b="1" dirty="0">
+                <a:solidFill>
+                  <a:srgbClr val="475569"/>
                 </a:solidFill>
                 <a:latin typeface="Trebuchet MS" pitchFamily="34" charset="0"/>
                 <a:ea typeface="Trebuchet MS" pitchFamily="34" charset="-122"/>
                 <a:cs typeface="Trebuchet MS" pitchFamily="34" charset="-120"/>
               </a:rPr>
-              <a:t>ly</a:t>
-            </a:r>
-            <a:endParaRPr lang="en-US" sz="1300" dirty="0"/>
-          </a:p>
-        </p:txBody>
-      </p:sp>
-      <p:sp>
-        <p:nvSpPr>
-          <p:cNvPr id="24" name="Text 22"/>
-          <p:cNvSpPr/>
-          <p:nvPr/>
-        </p:nvSpPr>
-        <p:spPr>
-          <a:xfrm>
-            <a:off x="6519672" y="2569464"/>
-            <a:ext cx="1828800" cy="201168"/>
-          </a:xfrm>
-          <a:prstGeom prst="rect">
-            <a:avLst/>
-          </a:prstGeom>
-          <a:noFill/>
-          <a:ln/>
-        </p:spPr>
-        <p:txBody>
-          <a:bodyPr wrap="square" lIns="0" tIns="0" rIns="0" bIns="0" rtlCol="0" anchor="t"/>
-          <a:lstStyle/>
-          <a:p>
-            <a:pPr algn="ctr" indent="0" marL="0">
-              <a:buNone/>
-            </a:pPr>
-            <a:r>
-              <a:rPr lang="en-US" sz="850" dirty="0">
-                <a:solidFill>
-                  <a:srgbClr val="475569"/>
+              <a:t>Syllables</a:t>
+            </a:r>
+            <a:endParaRPr lang="en-US" sz="1100" dirty="0"/>
+          </a:p>
+        </p:txBody>
+      </p:sp>
+      <p:sp>
+        <p:nvSpPr>
+          <p:cNvPr id="24" name="Shape 22"/>
+          <p:cNvSpPr/>
+          <p:nvPr/>
+        </p:nvSpPr>
+        <p:spPr>
+          <a:xfrm>
+            <a:off x="1874520" y="3273552"/>
+            <a:ext cx="6903720" cy="658368"/>
+          </a:xfrm>
+          <a:prstGeom prst="rect">
+            <a:avLst>
+              <a:gd name="adj" fmla="val 8333"/>
+            </a:avLst>
+          </a:prstGeom>
+          <a:solidFill>
+            <a:srgbClr val="F8FAFC"/>
+          </a:solidFill>
+          <a:ln w="12700">
+            <a:solidFill>
+              <a:srgbClr val="E2E8F0"/>
+            </a:solidFill>
+            <a:prstDash val="dash"/>
+          </a:ln>
+        </p:spPr>
+      </p:sp>
+      <p:sp>
+        <p:nvSpPr>
+          <p:cNvPr id="25" name="Text 23"/>
+          <p:cNvSpPr/>
+          <p:nvPr/>
+        </p:nvSpPr>
+        <p:spPr>
+          <a:xfrm>
+            <a:off x="1874520" y="3273552"/>
+            <a:ext cx="6903720" cy="658368"/>
+          </a:xfrm>
+          <a:prstGeom prst="rect">
+            <a:avLst/>
+          </a:prstGeom>
+          <a:noFill/>
+          <a:ln/>
+        </p:spPr>
+        <p:txBody>
+          <a:bodyPr wrap="square" rtlCol="0" anchor="ctr"/>
+          <a:lstStyle/>
+          <a:p>
+            <a:pPr algn="ctr" indent="0" marL="0">
+              <a:buNone/>
+            </a:pPr>
+            <a:r>
+              <a:rPr lang="en-US" sz="1100" i="1" dirty="0">
+                <a:solidFill>
+                  <a:srgbClr val="CBD5E1"/>
                 </a:solidFill>
                 <a:latin typeface="Calibri" pitchFamily="34" charset="0"/>
                 <a:ea typeface="Calibri" pitchFamily="34" charset="-122"/>
                 <a:cs typeface="Calibri" pitchFamily="34" charset="-120"/>
               </a:rPr>
-              <a:t>in a way that is</a:t>
-            </a:r>
-            <a:endParaRPr lang="en-US" sz="850" dirty="0"/>
-          </a:p>
-        </p:txBody>
-      </p:sp>
-      <p:sp>
-        <p:nvSpPr>
-          <p:cNvPr id="25" name="Shape 23"/>
-          <p:cNvSpPr/>
-          <p:nvPr/>
-        </p:nvSpPr>
-        <p:spPr>
-          <a:xfrm>
-            <a:off x="365760" y="3273552"/>
-            <a:ext cx="1371600" cy="658368"/>
+              <a:t>Write here...</a:t>
+            </a:r>
+            <a:endParaRPr lang="en-US" sz="1100" dirty="0"/>
+          </a:p>
+        </p:txBody>
+      </p:sp>
+      <p:sp>
+        <p:nvSpPr>
+          <p:cNvPr id="26" name="Shape 24"/>
+          <p:cNvSpPr/>
+          <p:nvPr/>
+        </p:nvSpPr>
+        <p:spPr>
+          <a:xfrm>
+            <a:off x="365760" y="4096512"/>
+            <a:ext cx="1371600" cy="804672"/>
           </a:xfrm>
           <a:prstGeom prst="rect">
             <a:avLst>
-              <a:gd name="adj" fmla="val 8333"/>
+              <a:gd name="adj" fmla="val 6818"/>
             </a:avLst>
           </a:prstGeom>
           <a:solidFill>
@@ -12588,14 +12608,14 @@
       </p:sp>
       <p:sp>
         <p:nvSpPr>
-          <p:cNvPr id="26" name="Text 24"/>
-          <p:cNvSpPr/>
-          <p:nvPr/>
-        </p:nvSpPr>
-        <p:spPr>
-          <a:xfrm>
-            <a:off x="365760" y="3273552"/>
-            <a:ext cx="1371600" cy="658368"/>
+          <p:cNvPr id="27" name="Text 25"/>
+          <p:cNvSpPr/>
+          <p:nvPr/>
+        </p:nvSpPr>
+        <p:spPr>
+          <a:xfrm>
+            <a:off x="365760" y="4096512"/>
+            <a:ext cx="1371600" cy="804672"/>
           </a:xfrm>
           <a:prstGeom prst="rect">
             <a:avLst/>
@@ -12619,7 +12639,7 @@
                 <a:ea typeface="Trebuchet MS" pitchFamily="34" charset="-122"/>
                 <a:cs typeface="Trebuchet MS" pitchFamily="34" charset="-120"/>
               </a:rPr>
-              <a:t>Syllables</a:t>
+              <a:t>Phonemes</a:t>
             </a:r>
             <a:endParaRPr lang="en-US" sz="1100" dirty="0"/>
           </a:p>
@@ -12627,80 +12647,14 @@
       </p:sp>
       <p:sp>
         <p:nvSpPr>
-          <p:cNvPr id="27" name="Shape 25"/>
-          <p:cNvSpPr/>
-          <p:nvPr/>
-        </p:nvSpPr>
-        <p:spPr>
-          <a:xfrm>
-            <a:off x="1874520" y="3273552"/>
-            <a:ext cx="6903720" cy="658368"/>
-          </a:xfrm>
-          <a:prstGeom prst="rect">
-            <a:avLst>
-              <a:gd name="adj" fmla="val 8333"/>
-            </a:avLst>
-          </a:prstGeom>
-          <a:solidFill>
-            <a:srgbClr val="F8FAFC"/>
-          </a:solidFill>
-          <a:ln w="12700">
-            <a:solidFill>
-              <a:srgbClr val="E2E8F0"/>
-            </a:solidFill>
-            <a:prstDash val="dash"/>
-          </a:ln>
-        </p:spPr>
-      </p:sp>
-      <p:sp>
-        <p:nvSpPr>
-          <p:cNvPr id="28" name="Text 26"/>
-          <p:cNvSpPr/>
-          <p:nvPr/>
-        </p:nvSpPr>
-        <p:spPr>
-          <a:xfrm>
-            <a:off x="1874520" y="3273552"/>
-            <a:ext cx="6903720" cy="658368"/>
-          </a:xfrm>
-          <a:prstGeom prst="rect">
-            <a:avLst/>
-          </a:prstGeom>
-          <a:noFill/>
-          <a:ln/>
-        </p:spPr>
-        <p:txBody>
-          <a:bodyPr wrap="square" rtlCol="0" anchor="ctr"/>
-          <a:lstStyle/>
-          <a:p>
-            <a:pPr algn="ctr" indent="0" marL="0">
-              <a:buNone/>
-            </a:pPr>
-            <a:r>
-              <a:rPr lang="en-US" sz="1100" i="1" dirty="0">
-                <a:solidFill>
-                  <a:srgbClr val="CBD5E1"/>
-                </a:solidFill>
-                <a:latin typeface="Calibri" pitchFamily="34" charset="0"/>
-                <a:ea typeface="Calibri" pitchFamily="34" charset="-122"/>
-                <a:cs typeface="Calibri" pitchFamily="34" charset="-120"/>
-              </a:rPr>
-              <a:t>Write here...</a:t>
-            </a:r>
-            <a:endParaRPr lang="en-US" sz="1100" dirty="0"/>
-          </a:p>
-        </p:txBody>
-      </p:sp>
-      <p:sp>
-        <p:nvSpPr>
-          <p:cNvPr id="29" name="Shape 27"/>
-          <p:cNvSpPr/>
-          <p:nvPr/>
-        </p:nvSpPr>
-        <p:spPr>
-          <a:xfrm>
-            <a:off x="365760" y="4096512"/>
-            <a:ext cx="1371600" cy="804672"/>
+          <p:cNvPr id="28" name="Shape 26"/>
+          <p:cNvSpPr/>
+          <p:nvPr/>
+        </p:nvSpPr>
+        <p:spPr>
+          <a:xfrm>
+            <a:off x="1874520" y="4096512"/>
+            <a:ext cx="6903720" cy="804672"/>
           </a:xfrm>
           <a:prstGeom prst="rect">
             <a:avLst>
@@ -12708,85 +12662,19 @@
             </a:avLst>
           </a:prstGeom>
           <a:solidFill>
-            <a:srgbClr val="E2E8F0"/>
+            <a:srgbClr val="F8FAFC"/>
           </a:solidFill>
           <a:ln w="12700">
             <a:solidFill>
               <a:srgbClr val="E2E8F0"/>
             </a:solidFill>
-            <a:prstDash val="solid"/>
-          </a:ln>
-        </p:spPr>
-      </p:sp>
-      <p:sp>
-        <p:nvSpPr>
-          <p:cNvPr id="30" name="Text 28"/>
-          <p:cNvSpPr/>
-          <p:nvPr/>
-        </p:nvSpPr>
-        <p:spPr>
-          <a:xfrm>
-            <a:off x="365760" y="4096512"/>
-            <a:ext cx="1371600" cy="804672"/>
-          </a:xfrm>
-          <a:prstGeom prst="rect">
-            <a:avLst/>
-          </a:prstGeom>
-          <a:noFill/>
-          <a:ln/>
-        </p:spPr>
-        <p:txBody>
-          <a:bodyPr wrap="square" lIns="0" tIns="0" rIns="0" bIns="0" rtlCol="0" anchor="ctr"/>
-          <a:lstStyle/>
-          <a:p>
-            <a:pPr algn="ctr" indent="0" marL="0">
-              <a:buNone/>
-            </a:pPr>
-            <a:r>
-              <a:rPr lang="en-US" sz="1100" b="1" dirty="0">
-                <a:solidFill>
-                  <a:srgbClr val="475569"/>
-                </a:solidFill>
-                <a:latin typeface="Trebuchet MS" pitchFamily="34" charset="0"/>
-                <a:ea typeface="Trebuchet MS" pitchFamily="34" charset="-122"/>
-                <a:cs typeface="Trebuchet MS" pitchFamily="34" charset="-120"/>
-              </a:rPr>
-              <a:t>Phonemes</a:t>
-            </a:r>
-            <a:endParaRPr lang="en-US" sz="1100" dirty="0"/>
-          </a:p>
-        </p:txBody>
-      </p:sp>
-      <p:sp>
-        <p:nvSpPr>
-          <p:cNvPr id="31" name="Shape 29"/>
-          <p:cNvSpPr/>
-          <p:nvPr/>
-        </p:nvSpPr>
-        <p:spPr>
-          <a:xfrm>
-            <a:off x="1874520" y="4096512"/>
-            <a:ext cx="6903720" cy="804672"/>
-          </a:xfrm>
-          <a:prstGeom prst="rect">
-            <a:avLst>
-              <a:gd name="adj" fmla="val 6818"/>
-            </a:avLst>
-          </a:prstGeom>
-          <a:solidFill>
-            <a:srgbClr val="F8FAFC"/>
-          </a:solidFill>
-          <a:ln w="12700">
-            <a:solidFill>
-              <a:srgbClr val="E2E8F0"/>
-            </a:solidFill>
             <a:prstDash val="dash"/>
           </a:ln>
         </p:spPr>
       </p:sp>
       <p:sp>
         <p:nvSpPr>
-          <p:cNvPr id="32" name="Text 30"/>
+          <p:cNvPr id="29" name="Text 27"/>
           <p:cNvSpPr/>
           <p:nvPr/>
         </p:nvSpPr>
@@ -13109,7 +12997,7 @@
                 <a:ea typeface="Calibri" pitchFamily="34" charset="-122"/>
                 <a:cs typeface="Calibri" pitchFamily="34" charset="-120"/>
               </a:rPr>
-              <a:t>Word Labs  •  wordlabs.app  •  Root: 'thank' = express gratitude or appreciation</a:t>
+              <a:t>Word Labs  •  wordlabs.app  •  Root: 'thank' = express gratitude or praise</a:t>
             </a:r>
             <a:endParaRPr lang="en-US" sz="800" dirty="0"/>
           </a:p>
@@ -13248,7 +13136,7 @@
                 <a:ea typeface="Trebuchet MS" pitchFamily="34" charset="-122"/>
                 <a:cs typeface="Trebuchet MS" pitchFamily="34" charset="-120"/>
               </a:rPr>
-              <a:t>thankfully</a:t>
+              <a:t>thanked</a:t>
             </a:r>
             <a:endParaRPr lang="en-US" sz="2800" dirty="0"/>
           </a:p>
@@ -13328,7 +13216,7 @@
         </p:nvSpPr>
         <p:spPr>
           <a:xfrm>
-            <a:off x="2221992" y="2258568"/>
+            <a:off x="2938272" y="2258568"/>
             <a:ext cx="1828800" cy="292608"/>
           </a:xfrm>
           <a:prstGeom prst="rect">
@@ -13362,7 +13250,7 @@
         </p:nvSpPr>
         <p:spPr>
           <a:xfrm>
-            <a:off x="2221992" y="2258568"/>
+            <a:off x="2938272" y="2258568"/>
             <a:ext cx="1828800" cy="292608"/>
           </a:xfrm>
           <a:prstGeom prst="rect">
@@ -13401,7 +13289,7 @@
         </p:nvSpPr>
         <p:spPr>
           <a:xfrm>
-            <a:off x="2221992" y="2569464"/>
+            <a:off x="2938272" y="2569464"/>
             <a:ext cx="1828800" cy="201168"/>
           </a:xfrm>
           <a:prstGeom prst="rect">
@@ -13440,7 +13328,7 @@
         </p:nvSpPr>
         <p:spPr>
           <a:xfrm>
-            <a:off x="4370832" y="2258568"/>
+            <a:off x="5803392" y="2258568"/>
             <a:ext cx="1828800" cy="292608"/>
           </a:xfrm>
           <a:prstGeom prst="rect">
@@ -13474,7 +13362,7 @@
         </p:nvSpPr>
         <p:spPr>
           <a:xfrm>
-            <a:off x="4370832" y="2258568"/>
+            <a:off x="5803392" y="2258568"/>
             <a:ext cx="1828800" cy="292608"/>
           </a:xfrm>
           <a:prstGeom prst="rect">
@@ -13499,7 +13387,7 @@
                 <a:ea typeface="Trebuchet MS" pitchFamily="34" charset="-122"/>
                 <a:cs typeface="Trebuchet MS" pitchFamily="34" charset="-120"/>
               </a:rPr>
-              <a:t>ful</a:t>
+              <a:t>ed</a:t>
             </a:r>
             <a:endParaRPr lang="en-US" sz="1300" dirty="0"/>
           </a:p>
@@ -13513,7 +13401,7 @@
         </p:nvSpPr>
         <p:spPr>
           <a:xfrm>
-            <a:off x="4370832" y="2569464"/>
+            <a:off x="5803392" y="2569464"/>
             <a:ext cx="1828800" cy="201168"/>
           </a:xfrm>
           <a:prstGeom prst="rect">
@@ -13538,7 +13426,7 @@
                 <a:ea typeface="Calibri" pitchFamily="34" charset="-122"/>
                 <a:cs typeface="Calibri" pitchFamily="34" charset="-120"/>
               </a:rPr>
-              <a:t>full of</a:t>
+              <a:t>past tense</a:t>
             </a:r>
             <a:endParaRPr lang="en-US" sz="850" dirty="0"/>
           </a:p>
@@ -13552,30 +13440,23 @@
         </p:nvSpPr>
         <p:spPr>
           <a:xfrm>
-            <a:off x="6519672" y="2258568"/>
-            <a:ext cx="1828800" cy="292608"/>
+            <a:off x="365760" y="3273552"/>
+            <a:ext cx="1371600" cy="658368"/>
           </a:xfrm>
           <a:prstGeom prst="rect">
             <a:avLst>
-              <a:gd name="adj" fmla="val 25000"/>
+              <a:gd name="adj" fmla="val 8333"/>
             </a:avLst>
           </a:prstGeom>
           <a:solidFill>
-            <a:srgbClr val="FCE7F3"/>
-          </a:solidFill>
-          <a:ln w="19050">
-            <a:solidFill>
-              <a:srgbClr val="DB2777"/>
-            </a:solidFill>
-            <a:prstDash val="solid"/>
-          </a:ln>
-          <a:effectLst>
-            <a:outerShdw sx="100000" sy="100000" kx="0" ky="0" algn="bl" rotWithShape="0" blurRad="101600" dist="38100" dir="8100000">
-              <a:srgbClr val="000000">
-                <a:alpha val="12000"/>
-              </a:srgbClr>
-            </a:outerShdw>
-          </a:effectLst>
+            <a:srgbClr val="E2E8F0"/>
+          </a:solidFill>
+          <a:ln w="12700">
+            <a:solidFill>
+              <a:srgbClr val="E2E8F0"/>
+            </a:solidFill>
+            <a:prstDash val="solid"/>
+          </a:ln>
         </p:spPr>
       </p:sp>
       <p:sp>
@@ -13586,8 +13467,8 @@
         </p:nvSpPr>
         <p:spPr>
           <a:xfrm>
-            <a:off x="6519672" y="2258568"/>
-            <a:ext cx="1828800" cy="292608"/>
+            <a:off x="365760" y="3273552"/>
+            <a:ext cx="1371600" cy="658368"/>
           </a:xfrm>
           <a:prstGeom prst="rect">
             <a:avLst/>
@@ -13603,69 +13484,30 @@
               <a:buNone/>
             </a:pPr>
             <a:r>
-              <a:rPr lang="en-US" sz="1300" b="1" dirty="0">
-                <a:solidFill>
-                  <a:srgbClr val="9D174D"/>
+              <a:rPr lang="en-US" sz="1100" b="1" dirty="0">
+                <a:solidFill>
+                  <a:srgbClr val="475569"/>
                 </a:solidFill>
                 <a:latin typeface="Trebuchet MS" pitchFamily="34" charset="0"/>
                 <a:ea typeface="Trebuchet MS" pitchFamily="34" charset="-122"/>
                 <a:cs typeface="Trebuchet MS" pitchFamily="34" charset="-120"/>
               </a:rPr>
-              <a:t>ly</a:t>
-            </a:r>
-            <a:endParaRPr lang="en-US" sz="1300" dirty="0"/>
-          </a:p>
-        </p:txBody>
-      </p:sp>
-      <p:sp>
-        <p:nvSpPr>
-          <p:cNvPr id="24" name="Text 22"/>
-          <p:cNvSpPr/>
-          <p:nvPr/>
-        </p:nvSpPr>
-        <p:spPr>
-          <a:xfrm>
-            <a:off x="6519672" y="2569464"/>
-            <a:ext cx="1828800" cy="201168"/>
-          </a:xfrm>
-          <a:prstGeom prst="rect">
-            <a:avLst/>
-          </a:prstGeom>
-          <a:noFill/>
-          <a:ln/>
-        </p:spPr>
-        <p:txBody>
-          <a:bodyPr wrap="square" lIns="0" tIns="0" rIns="0" bIns="0" rtlCol="0" anchor="t"/>
-          <a:lstStyle/>
-          <a:p>
-            <a:pPr algn="ctr" indent="0" marL="0">
-              <a:buNone/>
-            </a:pPr>
-            <a:r>
-              <a:rPr lang="en-US" sz="850" dirty="0">
-                <a:solidFill>
-                  <a:srgbClr val="475569"/>
-                </a:solidFill>
-                <a:latin typeface="Calibri" pitchFamily="34" charset="0"/>
-                <a:ea typeface="Calibri" pitchFamily="34" charset="-122"/>
-                <a:cs typeface="Calibri" pitchFamily="34" charset="-120"/>
-              </a:rPr>
-              <a:t>in a way that is</a:t>
-            </a:r>
-            <a:endParaRPr lang="en-US" sz="850" dirty="0"/>
-          </a:p>
-        </p:txBody>
-      </p:sp>
-      <p:sp>
-        <p:nvSpPr>
-          <p:cNvPr id="25" name="Shape 23"/>
-          <p:cNvSpPr/>
-          <p:nvPr/>
-        </p:nvSpPr>
-        <p:spPr>
-          <a:xfrm>
-            <a:off x="365760" y="3273552"/>
-            <a:ext cx="1371600" cy="658368"/>
+              <a:t>Syllables</a:t>
+            </a:r>
+            <a:endParaRPr lang="en-US" sz="1100" dirty="0"/>
+          </a:p>
+        </p:txBody>
+      </p:sp>
+      <p:sp>
+        <p:nvSpPr>
+          <p:cNvPr id="24" name="Shape 22"/>
+          <p:cNvSpPr/>
+          <p:nvPr/>
+        </p:nvSpPr>
+        <p:spPr>
+          <a:xfrm>
+            <a:off x="1874520" y="3273552"/>
+            <a:ext cx="6903720" cy="658368"/>
           </a:xfrm>
           <a:prstGeom prst="rect">
             <a:avLst>
@@ -13673,11 +13515,38 @@
             </a:avLst>
           </a:prstGeom>
           <a:solidFill>
-            <a:srgbClr val="E2E8F0"/>
-          </a:solidFill>
-          <a:ln w="12700">
-            <a:solidFill>
-              <a:srgbClr val="E2E8F0"/>
+            <a:srgbClr val="CCFBF1"/>
+          </a:solidFill>
+          <a:ln w="12700">
+            <a:solidFill>
+              <a:srgbClr val="0D9488"/>
+            </a:solidFill>
+            <a:prstDash val="solid"/>
+          </a:ln>
+        </p:spPr>
+      </p:sp>
+      <p:sp>
+        <p:nvSpPr>
+          <p:cNvPr id="25" name="Shape 23"/>
+          <p:cNvSpPr/>
+          <p:nvPr/>
+        </p:nvSpPr>
+        <p:spPr>
+          <a:xfrm>
+            <a:off x="4370832" y="3364992"/>
+            <a:ext cx="1645920" cy="475488"/>
+          </a:xfrm>
+          <a:prstGeom prst="rect">
+            <a:avLst>
+              <a:gd name="adj" fmla="val 9615"/>
+            </a:avLst>
+          </a:prstGeom>
+          <a:solidFill>
+            <a:srgbClr val="FFFFFF"/>
+          </a:solidFill>
+          <a:ln w="12700">
+            <a:solidFill>
+              <a:srgbClr val="0D9488"/>
             </a:solidFill>
             <a:prstDash val="solid"/>
           </a:ln>
@@ -13691,8 +13560,8 @@
         </p:nvSpPr>
         <p:spPr>
           <a:xfrm>
-            <a:off x="365760" y="3273552"/>
-            <a:ext cx="1371600" cy="658368"/>
+            <a:off x="4370832" y="3364992"/>
+            <a:ext cx="1645920" cy="475488"/>
           </a:xfrm>
           <a:prstGeom prst="rect">
             <a:avLst/>
@@ -13708,17 +13577,17 @@
               <a:buNone/>
             </a:pPr>
             <a:r>
-              <a:rPr lang="en-US" sz="1100" b="1" dirty="0">
-                <a:solidFill>
-                  <a:srgbClr val="475569"/>
+              <a:rPr lang="en-US" sz="1400" b="1" dirty="0">
+                <a:solidFill>
+                  <a:srgbClr val="0D9488"/>
                 </a:solidFill>
                 <a:latin typeface="Trebuchet MS" pitchFamily="34" charset="0"/>
                 <a:ea typeface="Trebuchet MS" pitchFamily="34" charset="-122"/>
                 <a:cs typeface="Trebuchet MS" pitchFamily="34" charset="-120"/>
               </a:rPr>
-              <a:t>Syllables</a:t>
-            </a:r>
-            <a:endParaRPr lang="en-US" sz="1100" dirty="0"/>
+              <a:t>thanked</a:t>
+            </a:r>
+            <a:endParaRPr lang="en-US" sz="1400" dirty="0"/>
           </a:p>
         </p:txBody>
       </p:sp>
@@ -13730,62 +13599,35 @@
         </p:nvSpPr>
         <p:spPr>
           <a:xfrm>
-            <a:off x="1874520" y="3273552"/>
-            <a:ext cx="6903720" cy="658368"/>
+            <a:off x="365760" y="4096512"/>
+            <a:ext cx="1371600" cy="804672"/>
           </a:xfrm>
           <a:prstGeom prst="rect">
             <a:avLst>
-              <a:gd name="adj" fmla="val 8333"/>
+              <a:gd name="adj" fmla="val 6818"/>
             </a:avLst>
           </a:prstGeom>
           <a:solidFill>
-            <a:srgbClr val="CCFBF1"/>
-          </a:solidFill>
-          <a:ln w="12700">
-            <a:solidFill>
-              <a:srgbClr val="0D9488"/>
-            </a:solidFill>
-            <a:prstDash val="solid"/>
-          </a:ln>
-        </p:spPr>
-      </p:sp>
-      <p:sp>
-        <p:nvSpPr>
-          <p:cNvPr id="28" name="Shape 26"/>
-          <p:cNvSpPr/>
-          <p:nvPr/>
-        </p:nvSpPr>
-        <p:spPr>
-          <a:xfrm>
-            <a:off x="2313432" y="3364992"/>
-            <a:ext cx="1645920" cy="475488"/>
-          </a:xfrm>
-          <a:prstGeom prst="rect">
-            <a:avLst>
-              <a:gd name="adj" fmla="val 9615"/>
-            </a:avLst>
-          </a:prstGeom>
-          <a:solidFill>
-            <a:srgbClr val="FFFFFF"/>
-          </a:solidFill>
-          <a:ln w="12700">
-            <a:solidFill>
-              <a:srgbClr val="0D9488"/>
-            </a:solidFill>
-            <a:prstDash val="solid"/>
-          </a:ln>
-        </p:spPr>
-      </p:sp>
-      <p:sp>
-        <p:nvSpPr>
-          <p:cNvPr id="29" name="Text 27"/>
-          <p:cNvSpPr/>
-          <p:nvPr/>
-        </p:nvSpPr>
-        <p:spPr>
-          <a:xfrm>
-            <a:off x="2313432" y="3364992"/>
-            <a:ext cx="1645920" cy="475488"/>
+            <a:srgbClr val="E2E8F0"/>
+          </a:solidFill>
+          <a:ln w="12700">
+            <a:solidFill>
+              <a:srgbClr val="E2E8F0"/>
+            </a:solidFill>
+            <a:prstDash val="solid"/>
+          </a:ln>
+        </p:spPr>
+      </p:sp>
+      <p:sp>
+        <p:nvSpPr>
+          <p:cNvPr id="28" name="Text 26"/>
+          <p:cNvSpPr/>
+          <p:nvPr/>
+        </p:nvSpPr>
+        <p:spPr>
+          <a:xfrm>
+            <a:off x="365760" y="4096512"/>
+            <a:ext cx="1371600" cy="804672"/>
           </a:xfrm>
           <a:prstGeom prst="rect">
             <a:avLst/>
@@ -13801,240 +13643,30 @@
               <a:buNone/>
             </a:pPr>
             <a:r>
-              <a:rPr lang="en-US" sz="1400" b="1" dirty="0">
-                <a:solidFill>
-                  <a:srgbClr val="0D9488"/>
+              <a:rPr lang="en-US" sz="1100" b="1" dirty="0">
+                <a:solidFill>
+                  <a:srgbClr val="475569"/>
                 </a:solidFill>
                 <a:latin typeface="Trebuchet MS" pitchFamily="34" charset="0"/>
                 <a:ea typeface="Trebuchet MS" pitchFamily="34" charset="-122"/>
                 <a:cs typeface="Trebuchet MS" pitchFamily="34" charset="-120"/>
               </a:rPr>
-              <a:t>thank</a:t>
-            </a:r>
-            <a:endParaRPr lang="en-US" sz="1400" dirty="0"/>
-          </a:p>
-        </p:txBody>
-      </p:sp>
-      <p:sp>
-        <p:nvSpPr>
-          <p:cNvPr id="30" name="Text 28"/>
-          <p:cNvSpPr/>
-          <p:nvPr/>
-        </p:nvSpPr>
-        <p:spPr>
-          <a:xfrm>
-            <a:off x="3959352" y="3364992"/>
-            <a:ext cx="411480" cy="475488"/>
-          </a:xfrm>
-          <a:prstGeom prst="rect">
-            <a:avLst/>
-          </a:prstGeom>
-          <a:noFill/>
-          <a:ln/>
-        </p:spPr>
-        <p:txBody>
-          <a:bodyPr wrap="square" lIns="0" tIns="0" rIns="0" bIns="0" rtlCol="0" anchor="ctr"/>
-          <a:lstStyle/>
-          <a:p>
-            <a:pPr algn="ctr" indent="0" marL="0">
-              <a:buNone/>
-            </a:pPr>
-            <a:r>
-              <a:rPr lang="en-US" sz="1600" b="1" dirty="0">
-                <a:solidFill>
-                  <a:srgbClr val="0D9488"/>
-                </a:solidFill>
-                <a:latin typeface="Trebuchet MS" pitchFamily="34" charset="0"/>
-                <a:ea typeface="Trebuchet MS" pitchFamily="34" charset="-122"/>
-                <a:cs typeface="Trebuchet MS" pitchFamily="34" charset="-120"/>
-              </a:rPr>
-              <a:t>·</a:t>
-            </a:r>
-            <a:endParaRPr lang="en-US" sz="1600" dirty="0"/>
-          </a:p>
-        </p:txBody>
-      </p:sp>
-      <p:sp>
-        <p:nvSpPr>
-          <p:cNvPr id="31" name="Shape 29"/>
-          <p:cNvSpPr/>
-          <p:nvPr/>
-        </p:nvSpPr>
-        <p:spPr>
-          <a:xfrm>
-            <a:off x="4370832" y="3364992"/>
-            <a:ext cx="1645920" cy="475488"/>
-          </a:xfrm>
-          <a:prstGeom prst="rect">
-            <a:avLst>
-              <a:gd name="adj" fmla="val 9615"/>
-            </a:avLst>
-          </a:prstGeom>
-          <a:solidFill>
-            <a:srgbClr val="FFFFFF"/>
-          </a:solidFill>
-          <a:ln w="12700">
-            <a:solidFill>
-              <a:srgbClr val="0D9488"/>
-            </a:solidFill>
-            <a:prstDash val="solid"/>
-          </a:ln>
-        </p:spPr>
-      </p:sp>
-      <p:sp>
-        <p:nvSpPr>
-          <p:cNvPr id="32" name="Text 30"/>
-          <p:cNvSpPr/>
-          <p:nvPr/>
-        </p:nvSpPr>
-        <p:spPr>
-          <a:xfrm>
-            <a:off x="4370832" y="3364992"/>
-            <a:ext cx="1645920" cy="475488"/>
-          </a:xfrm>
-          <a:prstGeom prst="rect">
-            <a:avLst/>
-          </a:prstGeom>
-          <a:noFill/>
-          <a:ln/>
-        </p:spPr>
-        <p:txBody>
-          <a:bodyPr wrap="square" lIns="0" tIns="0" rIns="0" bIns="0" rtlCol="0" anchor="ctr"/>
-          <a:lstStyle/>
-          <a:p>
-            <a:pPr algn="ctr" indent="0" marL="0">
-              <a:buNone/>
-            </a:pPr>
-            <a:r>
-              <a:rPr lang="en-US" sz="1400" b="1" dirty="0">
-                <a:solidFill>
-                  <a:srgbClr val="0D9488"/>
-                </a:solidFill>
-                <a:latin typeface="Trebuchet MS" pitchFamily="34" charset="0"/>
-                <a:ea typeface="Trebuchet MS" pitchFamily="34" charset="-122"/>
-                <a:cs typeface="Trebuchet MS" pitchFamily="34" charset="-120"/>
-              </a:rPr>
-              <a:t>ful</a:t>
-            </a:r>
-            <a:endParaRPr lang="en-US" sz="1400" dirty="0"/>
-          </a:p>
-        </p:txBody>
-      </p:sp>
-      <p:sp>
-        <p:nvSpPr>
-          <p:cNvPr id="33" name="Text 31"/>
-          <p:cNvSpPr/>
-          <p:nvPr/>
-        </p:nvSpPr>
-        <p:spPr>
-          <a:xfrm>
-            <a:off x="6016752" y="3364992"/>
-            <a:ext cx="411480" cy="475488"/>
-          </a:xfrm>
-          <a:prstGeom prst="rect">
-            <a:avLst/>
-          </a:prstGeom>
-          <a:noFill/>
-          <a:ln/>
-        </p:spPr>
-        <p:txBody>
-          <a:bodyPr wrap="square" lIns="0" tIns="0" rIns="0" bIns="0" rtlCol="0" anchor="ctr"/>
-          <a:lstStyle/>
-          <a:p>
-            <a:pPr algn="ctr" indent="0" marL="0">
-              <a:buNone/>
-            </a:pPr>
-            <a:r>
-              <a:rPr lang="en-US" sz="1600" b="1" dirty="0">
-                <a:solidFill>
-                  <a:srgbClr val="0D9488"/>
-                </a:solidFill>
-                <a:latin typeface="Trebuchet MS" pitchFamily="34" charset="0"/>
-                <a:ea typeface="Trebuchet MS" pitchFamily="34" charset="-122"/>
-                <a:cs typeface="Trebuchet MS" pitchFamily="34" charset="-120"/>
-              </a:rPr>
-              <a:t>·</a:t>
-            </a:r>
-            <a:endParaRPr lang="en-US" sz="1600" dirty="0"/>
-          </a:p>
-        </p:txBody>
-      </p:sp>
-      <p:sp>
-        <p:nvSpPr>
-          <p:cNvPr id="34" name="Shape 32"/>
-          <p:cNvSpPr/>
-          <p:nvPr/>
-        </p:nvSpPr>
-        <p:spPr>
-          <a:xfrm>
-            <a:off x="6428232" y="3364992"/>
-            <a:ext cx="1645920" cy="475488"/>
-          </a:xfrm>
-          <a:prstGeom prst="rect">
-            <a:avLst>
-              <a:gd name="adj" fmla="val 9615"/>
-            </a:avLst>
-          </a:prstGeom>
-          <a:solidFill>
-            <a:srgbClr val="FFFFFF"/>
-          </a:solidFill>
-          <a:ln w="12700">
-            <a:solidFill>
-              <a:srgbClr val="0D9488"/>
-            </a:solidFill>
-            <a:prstDash val="solid"/>
-          </a:ln>
-        </p:spPr>
-      </p:sp>
-      <p:sp>
-        <p:nvSpPr>
-          <p:cNvPr id="35" name="Text 33"/>
-          <p:cNvSpPr/>
-          <p:nvPr/>
-        </p:nvSpPr>
-        <p:spPr>
-          <a:xfrm>
-            <a:off x="6428232" y="3364992"/>
-            <a:ext cx="1645920" cy="475488"/>
-          </a:xfrm>
-          <a:prstGeom prst="rect">
-            <a:avLst/>
-          </a:prstGeom>
-          <a:noFill/>
-          <a:ln/>
-        </p:spPr>
-        <p:txBody>
-          <a:bodyPr wrap="square" lIns="0" tIns="0" rIns="0" bIns="0" rtlCol="0" anchor="ctr"/>
-          <a:lstStyle/>
-          <a:p>
-            <a:pPr algn="ctr" indent="0" marL="0">
-              <a:buNone/>
-            </a:pPr>
-            <a:r>
-              <a:rPr lang="en-US" sz="1400" b="1" dirty="0">
-                <a:solidFill>
-                  <a:srgbClr val="0D9488"/>
-                </a:solidFill>
-                <a:latin typeface="Trebuchet MS" pitchFamily="34" charset="0"/>
-                <a:ea typeface="Trebuchet MS" pitchFamily="34" charset="-122"/>
-                <a:cs typeface="Trebuchet MS" pitchFamily="34" charset="-120"/>
-              </a:rPr>
-              <a:t>ly</a:t>
-            </a:r>
-            <a:endParaRPr lang="en-US" sz="1400" dirty="0"/>
-          </a:p>
-        </p:txBody>
-      </p:sp>
-      <p:sp>
-        <p:nvSpPr>
-          <p:cNvPr id="36" name="Shape 34"/>
-          <p:cNvSpPr/>
-          <p:nvPr/>
-        </p:nvSpPr>
-        <p:spPr>
-          <a:xfrm>
-            <a:off x="365760" y="4096512"/>
-            <a:ext cx="1371600" cy="804672"/>
+              <a:t>Phonemes</a:t>
+            </a:r>
+            <a:endParaRPr lang="en-US" sz="1100" dirty="0"/>
+          </a:p>
+        </p:txBody>
+      </p:sp>
+      <p:sp>
+        <p:nvSpPr>
+          <p:cNvPr id="29" name="Shape 27"/>
+          <p:cNvSpPr/>
+          <p:nvPr/>
+        </p:nvSpPr>
+        <p:spPr>
+          <a:xfrm>
+            <a:off x="1874520" y="4096512"/>
+            <a:ext cx="6903720" cy="804672"/>
           </a:xfrm>
           <a:prstGeom prst="rect">
             <a:avLst>
@@ -14042,85 +13674,19 @@
             </a:avLst>
           </a:prstGeom>
           <a:solidFill>
-            <a:srgbClr val="E2E8F0"/>
+            <a:srgbClr val="F8FAFC"/>
           </a:solidFill>
           <a:ln w="12700">
             <a:solidFill>
               <a:srgbClr val="E2E8F0"/>
             </a:solidFill>
-            <a:prstDash val="solid"/>
-          </a:ln>
-        </p:spPr>
-      </p:sp>
-      <p:sp>
-        <p:nvSpPr>
-          <p:cNvPr id="37" name="Text 35"/>
-          <p:cNvSpPr/>
-          <p:nvPr/>
-        </p:nvSpPr>
-        <p:spPr>
-          <a:xfrm>
-            <a:off x="365760" y="4096512"/>
-            <a:ext cx="1371600" cy="804672"/>
-          </a:xfrm>
-          <a:prstGeom prst="rect">
-            <a:avLst/>
-          </a:prstGeom>
-          <a:noFill/>
-          <a:ln/>
-        </p:spPr>
-        <p:txBody>
-          <a:bodyPr wrap="square" lIns="0" tIns="0" rIns="0" bIns="0" rtlCol="0" anchor="ctr"/>
-          <a:lstStyle/>
-          <a:p>
-            <a:pPr algn="ctr" indent="0" marL="0">
-              <a:buNone/>
-            </a:pPr>
-            <a:r>
-              <a:rPr lang="en-US" sz="1100" b="1" dirty="0">
-                <a:solidFill>
-                  <a:srgbClr val="475569"/>
-                </a:solidFill>
-                <a:latin typeface="Trebuchet MS" pitchFamily="34" charset="0"/>
-                <a:ea typeface="Trebuchet MS" pitchFamily="34" charset="-122"/>
-                <a:cs typeface="Trebuchet MS" pitchFamily="34" charset="-120"/>
-              </a:rPr>
-              <a:t>Phonemes</a:t>
-            </a:r>
-            <a:endParaRPr lang="en-US" sz="1100" dirty="0"/>
-          </a:p>
-        </p:txBody>
-      </p:sp>
-      <p:sp>
-        <p:nvSpPr>
-          <p:cNvPr id="38" name="Shape 36"/>
-          <p:cNvSpPr/>
-          <p:nvPr/>
-        </p:nvSpPr>
-        <p:spPr>
-          <a:xfrm>
-            <a:off x="1874520" y="4096512"/>
-            <a:ext cx="6903720" cy="804672"/>
-          </a:xfrm>
-          <a:prstGeom prst="rect">
-            <a:avLst>
-              <a:gd name="adj" fmla="val 6818"/>
-            </a:avLst>
-          </a:prstGeom>
-          <a:solidFill>
-            <a:srgbClr val="F8FAFC"/>
-          </a:solidFill>
-          <a:ln w="12700">
-            <a:solidFill>
-              <a:srgbClr val="E2E8F0"/>
-            </a:solidFill>
             <a:prstDash val="dash"/>
           </a:ln>
         </p:spPr>
       </p:sp>
       <p:sp>
         <p:nvSpPr>
-          <p:cNvPr id="39" name="Text 37"/>
+          <p:cNvPr id="30" name="Text 28"/>
           <p:cNvSpPr/>
           <p:nvPr/>
         </p:nvSpPr>
@@ -14352,7 +13918,7 @@
                 <a:ea typeface="Calibri" pitchFamily="34" charset="-122"/>
                 <a:cs typeface="Calibri" pitchFamily="34" charset="-120"/>
               </a:rPr>
-              <a:t>Root 'thank' — express gratitude or appreciation</a:t>
+              <a:t>Root 'thank' — express gratitude or praise</a:t>
             </a:r>
             <a:endParaRPr lang="en-US" sz="1600" dirty="0"/>
           </a:p>
@@ -14708,7 +14274,7 @@
                 <a:ea typeface="Calibri" pitchFamily="34" charset="-122"/>
                 <a:cs typeface="Calibri" pitchFamily="34" charset="-120"/>
               </a:rPr>
-              <a:t>Word Labs  •  wordlabs.app  •  Root: 'thank' = express gratitude or appreciation</a:t>
+              <a:t>Word Labs  •  wordlabs.app  •  Root: 'thank' = express gratitude or praise</a:t>
             </a:r>
             <a:endParaRPr lang="en-US" sz="800" dirty="0"/>
           </a:p>
@@ -14847,7 +14413,7 @@
                 <a:ea typeface="Trebuchet MS" pitchFamily="34" charset="-122"/>
                 <a:cs typeface="Trebuchet MS" pitchFamily="34" charset="-120"/>
               </a:rPr>
-              <a:t>thankfully</a:t>
+              <a:t>thanked</a:t>
             </a:r>
             <a:endParaRPr lang="en-US" sz="2800" dirty="0"/>
           </a:p>
@@ -14927,7 +14493,7 @@
         </p:nvSpPr>
         <p:spPr>
           <a:xfrm>
-            <a:off x="2221992" y="2258568"/>
+            <a:off x="2938272" y="2258568"/>
             <a:ext cx="1828800" cy="292608"/>
           </a:xfrm>
           <a:prstGeom prst="rect">
@@ -14961,7 +14527,7 @@
         </p:nvSpPr>
         <p:spPr>
           <a:xfrm>
-            <a:off x="2221992" y="2258568"/>
+            <a:off x="2938272" y="2258568"/>
             <a:ext cx="1828800" cy="292608"/>
           </a:xfrm>
           <a:prstGeom prst="rect">
@@ -15000,7 +14566,7 @@
         </p:nvSpPr>
         <p:spPr>
           <a:xfrm>
-            <a:off x="2221992" y="2569464"/>
+            <a:off x="2938272" y="2569464"/>
             <a:ext cx="1828800" cy="201168"/>
           </a:xfrm>
           <a:prstGeom prst="rect">
@@ -15039,7 +14605,7 @@
         </p:nvSpPr>
         <p:spPr>
           <a:xfrm>
-            <a:off x="4370832" y="2258568"/>
+            <a:off x="5803392" y="2258568"/>
             <a:ext cx="1828800" cy="292608"/>
           </a:xfrm>
           <a:prstGeom prst="rect">
@@ -15073,7 +14639,7 @@
         </p:nvSpPr>
         <p:spPr>
           <a:xfrm>
-            <a:off x="4370832" y="2258568"/>
+            <a:off x="5803392" y="2258568"/>
             <a:ext cx="1828800" cy="292608"/>
           </a:xfrm>
           <a:prstGeom prst="rect">
@@ -15098,7 +14664,7 @@
                 <a:ea typeface="Trebuchet MS" pitchFamily="34" charset="-122"/>
                 <a:cs typeface="Trebuchet MS" pitchFamily="34" charset="-120"/>
               </a:rPr>
-              <a:t>ful</a:t>
+              <a:t>ed</a:t>
             </a:r>
             <a:endParaRPr lang="en-US" sz="1300" dirty="0"/>
           </a:p>
@@ -15112,7 +14678,7 @@
         </p:nvSpPr>
         <p:spPr>
           <a:xfrm>
-            <a:off x="4370832" y="2569464"/>
+            <a:off x="5803392" y="2569464"/>
             <a:ext cx="1828800" cy="201168"/>
           </a:xfrm>
           <a:prstGeom prst="rect">
@@ -15137,7 +14703,7 @@
                 <a:ea typeface="Calibri" pitchFamily="34" charset="-122"/>
                 <a:cs typeface="Calibri" pitchFamily="34" charset="-120"/>
               </a:rPr>
-              <a:t>full of</a:t>
+              <a:t>past tense</a:t>
             </a:r>
             <a:endParaRPr lang="en-US" sz="850" dirty="0"/>
           </a:p>
@@ -15151,30 +14717,23 @@
         </p:nvSpPr>
         <p:spPr>
           <a:xfrm>
-            <a:off x="6519672" y="2258568"/>
-            <a:ext cx="1828800" cy="292608"/>
+            <a:off x="365760" y="3273552"/>
+            <a:ext cx="1371600" cy="658368"/>
           </a:xfrm>
           <a:prstGeom prst="rect">
             <a:avLst>
-              <a:gd name="adj" fmla="val 25000"/>
+              <a:gd name="adj" fmla="val 8333"/>
             </a:avLst>
           </a:prstGeom>
           <a:solidFill>
-            <a:srgbClr val="FCE7F3"/>
-          </a:solidFill>
-          <a:ln w="19050">
-            <a:solidFill>
-              <a:srgbClr val="DB2777"/>
-            </a:solidFill>
-            <a:prstDash val="solid"/>
-          </a:ln>
-          <a:effectLst>
-            <a:outerShdw sx="100000" sy="100000" kx="0" ky="0" algn="bl" rotWithShape="0" blurRad="101600" dist="38100" dir="8100000">
-              <a:srgbClr val="000000">
-                <a:alpha val="12000"/>
-              </a:srgbClr>
-            </a:outerShdw>
-          </a:effectLst>
+            <a:srgbClr val="E2E8F0"/>
+          </a:solidFill>
+          <a:ln w="12700">
+            <a:solidFill>
+              <a:srgbClr val="E2E8F0"/>
+            </a:solidFill>
+            <a:prstDash val="solid"/>
+          </a:ln>
         </p:spPr>
       </p:sp>
       <p:sp>
@@ -15185,8 +14744,8 @@
         </p:nvSpPr>
         <p:spPr>
           <a:xfrm>
-            <a:off x="6519672" y="2258568"/>
-            <a:ext cx="1828800" cy="292608"/>
+            <a:off x="365760" y="3273552"/>
+            <a:ext cx="1371600" cy="658368"/>
           </a:xfrm>
           <a:prstGeom prst="rect">
             <a:avLst/>
@@ -15202,30 +14761,546 @@
               <a:buNone/>
             </a:pPr>
             <a:r>
-              <a:rPr lang="en-US" sz="1300" b="1" dirty="0">
-                <a:solidFill>
-                  <a:srgbClr val="9D174D"/>
+              <a:rPr lang="en-US" sz="1100" b="1" dirty="0">
+                <a:solidFill>
+                  <a:srgbClr val="475569"/>
                 </a:solidFill>
                 <a:latin typeface="Trebuchet MS" pitchFamily="34" charset="0"/>
                 <a:ea typeface="Trebuchet MS" pitchFamily="34" charset="-122"/>
                 <a:cs typeface="Trebuchet MS" pitchFamily="34" charset="-120"/>
               </a:rPr>
-              <a:t>ly</a:t>
-            </a:r>
-            <a:endParaRPr lang="en-US" sz="1300" dirty="0"/>
-          </a:p>
-        </p:txBody>
-      </p:sp>
-      <p:sp>
-        <p:nvSpPr>
-          <p:cNvPr id="24" name="Text 22"/>
-          <p:cNvSpPr/>
-          <p:nvPr/>
-        </p:nvSpPr>
-        <p:spPr>
-          <a:xfrm>
-            <a:off x="6519672" y="2569464"/>
-            <a:ext cx="1828800" cy="201168"/>
+              <a:t>Syllables</a:t>
+            </a:r>
+            <a:endParaRPr lang="en-US" sz="1100" dirty="0"/>
+          </a:p>
+        </p:txBody>
+      </p:sp>
+      <p:sp>
+        <p:nvSpPr>
+          <p:cNvPr id="24" name="Shape 22"/>
+          <p:cNvSpPr/>
+          <p:nvPr/>
+        </p:nvSpPr>
+        <p:spPr>
+          <a:xfrm>
+            <a:off x="1874520" y="3273552"/>
+            <a:ext cx="6903720" cy="658368"/>
+          </a:xfrm>
+          <a:prstGeom prst="rect">
+            <a:avLst>
+              <a:gd name="adj" fmla="val 8333"/>
+            </a:avLst>
+          </a:prstGeom>
+          <a:solidFill>
+            <a:srgbClr val="CCFBF1"/>
+          </a:solidFill>
+          <a:ln w="12700">
+            <a:solidFill>
+              <a:srgbClr val="0D9488"/>
+            </a:solidFill>
+            <a:prstDash val="solid"/>
+          </a:ln>
+        </p:spPr>
+      </p:sp>
+      <p:sp>
+        <p:nvSpPr>
+          <p:cNvPr id="25" name="Shape 23"/>
+          <p:cNvSpPr/>
+          <p:nvPr/>
+        </p:nvSpPr>
+        <p:spPr>
+          <a:xfrm>
+            <a:off x="4370832" y="3364992"/>
+            <a:ext cx="1645920" cy="475488"/>
+          </a:xfrm>
+          <a:prstGeom prst="rect">
+            <a:avLst>
+              <a:gd name="adj" fmla="val 9615"/>
+            </a:avLst>
+          </a:prstGeom>
+          <a:solidFill>
+            <a:srgbClr val="FFFFFF"/>
+          </a:solidFill>
+          <a:ln w="12700">
+            <a:solidFill>
+              <a:srgbClr val="0D9488"/>
+            </a:solidFill>
+            <a:prstDash val="solid"/>
+          </a:ln>
+        </p:spPr>
+      </p:sp>
+      <p:sp>
+        <p:nvSpPr>
+          <p:cNvPr id="26" name="Text 24"/>
+          <p:cNvSpPr/>
+          <p:nvPr/>
+        </p:nvSpPr>
+        <p:spPr>
+          <a:xfrm>
+            <a:off x="4370832" y="3364992"/>
+            <a:ext cx="1645920" cy="475488"/>
+          </a:xfrm>
+          <a:prstGeom prst="rect">
+            <a:avLst/>
+          </a:prstGeom>
+          <a:noFill/>
+          <a:ln/>
+        </p:spPr>
+        <p:txBody>
+          <a:bodyPr wrap="square" lIns="0" tIns="0" rIns="0" bIns="0" rtlCol="0" anchor="ctr"/>
+          <a:lstStyle/>
+          <a:p>
+            <a:pPr algn="ctr" indent="0" marL="0">
+              <a:buNone/>
+            </a:pPr>
+            <a:r>
+              <a:rPr lang="en-US" sz="1400" b="1" dirty="0">
+                <a:solidFill>
+                  <a:srgbClr val="0D9488"/>
+                </a:solidFill>
+                <a:latin typeface="Trebuchet MS" pitchFamily="34" charset="0"/>
+                <a:ea typeface="Trebuchet MS" pitchFamily="34" charset="-122"/>
+                <a:cs typeface="Trebuchet MS" pitchFamily="34" charset="-120"/>
+              </a:rPr>
+              <a:t>thanked</a:t>
+            </a:r>
+            <a:endParaRPr lang="en-US" sz="1400" dirty="0"/>
+          </a:p>
+        </p:txBody>
+      </p:sp>
+      <p:sp>
+        <p:nvSpPr>
+          <p:cNvPr id="27" name="Shape 25"/>
+          <p:cNvSpPr/>
+          <p:nvPr/>
+        </p:nvSpPr>
+        <p:spPr>
+          <a:xfrm>
+            <a:off x="365760" y="4096512"/>
+            <a:ext cx="1371600" cy="804672"/>
+          </a:xfrm>
+          <a:prstGeom prst="rect">
+            <a:avLst>
+              <a:gd name="adj" fmla="val 6818"/>
+            </a:avLst>
+          </a:prstGeom>
+          <a:solidFill>
+            <a:srgbClr val="E2E8F0"/>
+          </a:solidFill>
+          <a:ln w="12700">
+            <a:solidFill>
+              <a:srgbClr val="E2E8F0"/>
+            </a:solidFill>
+            <a:prstDash val="solid"/>
+          </a:ln>
+        </p:spPr>
+      </p:sp>
+      <p:sp>
+        <p:nvSpPr>
+          <p:cNvPr id="28" name="Text 26"/>
+          <p:cNvSpPr/>
+          <p:nvPr/>
+        </p:nvSpPr>
+        <p:spPr>
+          <a:xfrm>
+            <a:off x="365760" y="4096512"/>
+            <a:ext cx="1371600" cy="804672"/>
+          </a:xfrm>
+          <a:prstGeom prst="rect">
+            <a:avLst/>
+          </a:prstGeom>
+          <a:noFill/>
+          <a:ln/>
+        </p:spPr>
+        <p:txBody>
+          <a:bodyPr wrap="square" lIns="0" tIns="0" rIns="0" bIns="0" rtlCol="0" anchor="ctr"/>
+          <a:lstStyle/>
+          <a:p>
+            <a:pPr algn="ctr" indent="0" marL="0">
+              <a:buNone/>
+            </a:pPr>
+            <a:r>
+              <a:rPr lang="en-US" sz="1100" b="1" dirty="0">
+                <a:solidFill>
+                  <a:srgbClr val="475569"/>
+                </a:solidFill>
+                <a:latin typeface="Trebuchet MS" pitchFamily="34" charset="0"/>
+                <a:ea typeface="Trebuchet MS" pitchFamily="34" charset="-122"/>
+                <a:cs typeface="Trebuchet MS" pitchFamily="34" charset="-120"/>
+              </a:rPr>
+              <a:t>Phonemes</a:t>
+            </a:r>
+            <a:endParaRPr lang="en-US" sz="1100" dirty="0"/>
+          </a:p>
+        </p:txBody>
+      </p:sp>
+      <p:sp>
+        <p:nvSpPr>
+          <p:cNvPr id="29" name="Shape 27"/>
+          <p:cNvSpPr/>
+          <p:nvPr/>
+        </p:nvSpPr>
+        <p:spPr>
+          <a:xfrm>
+            <a:off x="1874520" y="4096512"/>
+            <a:ext cx="6903720" cy="804672"/>
+          </a:xfrm>
+          <a:prstGeom prst="rect">
+            <a:avLst>
+              <a:gd name="adj" fmla="val 6818"/>
+            </a:avLst>
+          </a:prstGeom>
+          <a:solidFill>
+            <a:srgbClr val="FCE7F3"/>
+          </a:solidFill>
+          <a:ln w="12700">
+            <a:solidFill>
+              <a:srgbClr val="DB2777"/>
+            </a:solidFill>
+            <a:prstDash val="solid"/>
+          </a:ln>
+        </p:spPr>
+      </p:sp>
+      <p:sp>
+        <p:nvSpPr>
+          <p:cNvPr id="30" name="Shape 28"/>
+          <p:cNvSpPr/>
+          <p:nvPr/>
+        </p:nvSpPr>
+        <p:spPr>
+          <a:xfrm>
+            <a:off x="2427732" y="4169664"/>
+            <a:ext cx="685800" cy="384048"/>
+          </a:xfrm>
+          <a:prstGeom prst="rect">
+            <a:avLst>
+              <a:gd name="adj" fmla="val 9524"/>
+            </a:avLst>
+          </a:prstGeom>
+          <a:solidFill>
+            <a:srgbClr val="FFFFFF"/>
+          </a:solidFill>
+          <a:ln w="12700">
+            <a:solidFill>
+              <a:srgbClr val="DB2777"/>
+            </a:solidFill>
+            <a:prstDash val="solid"/>
+          </a:ln>
+        </p:spPr>
+      </p:sp>
+      <p:sp>
+        <p:nvSpPr>
+          <p:cNvPr id="31" name="Text 29"/>
+          <p:cNvSpPr/>
+          <p:nvPr/>
+        </p:nvSpPr>
+        <p:spPr>
+          <a:xfrm>
+            <a:off x="2427732" y="4169664"/>
+            <a:ext cx="685800" cy="384048"/>
+          </a:xfrm>
+          <a:prstGeom prst="rect">
+            <a:avLst/>
+          </a:prstGeom>
+          <a:noFill/>
+          <a:ln/>
+        </p:spPr>
+        <p:txBody>
+          <a:bodyPr wrap="square" lIns="0" tIns="0" rIns="0" bIns="0" rtlCol="0" anchor="ctr"/>
+          <a:lstStyle/>
+          <a:p>
+            <a:pPr algn="ctr" indent="0" marL="0">
+              <a:buNone/>
+            </a:pPr>
+            <a:r>
+              <a:rPr lang="en-US" sz="900" b="1" dirty="0">
+                <a:solidFill>
+                  <a:srgbClr val="9D174D"/>
+                </a:solidFill>
+                <a:latin typeface="Trebuchet MS" pitchFamily="34" charset="0"/>
+                <a:ea typeface="Trebuchet MS" pitchFamily="34" charset="-122"/>
+                <a:cs typeface="Trebuchet MS" pitchFamily="34" charset="-120"/>
+              </a:rPr>
+              <a:t>th</a:t>
+            </a:r>
+            <a:endParaRPr lang="en-US" sz="900" dirty="0"/>
+          </a:p>
+        </p:txBody>
+      </p:sp>
+      <p:sp>
+        <p:nvSpPr>
+          <p:cNvPr id="32" name="Shape 30"/>
+          <p:cNvSpPr/>
+          <p:nvPr/>
+        </p:nvSpPr>
+        <p:spPr>
+          <a:xfrm>
+            <a:off x="3639312" y="4169664"/>
+            <a:ext cx="685800" cy="384048"/>
+          </a:xfrm>
+          <a:prstGeom prst="rect">
+            <a:avLst>
+              <a:gd name="adj" fmla="val 9524"/>
+            </a:avLst>
+          </a:prstGeom>
+          <a:solidFill>
+            <a:srgbClr val="FFFFFF"/>
+          </a:solidFill>
+          <a:ln w="12700">
+            <a:solidFill>
+              <a:srgbClr val="DB2777"/>
+            </a:solidFill>
+            <a:prstDash val="solid"/>
+          </a:ln>
+        </p:spPr>
+      </p:sp>
+      <p:sp>
+        <p:nvSpPr>
+          <p:cNvPr id="33" name="Text 31"/>
+          <p:cNvSpPr/>
+          <p:nvPr/>
+        </p:nvSpPr>
+        <p:spPr>
+          <a:xfrm>
+            <a:off x="3639312" y="4169664"/>
+            <a:ext cx="685800" cy="384048"/>
+          </a:xfrm>
+          <a:prstGeom prst="rect">
+            <a:avLst/>
+          </a:prstGeom>
+          <a:noFill/>
+          <a:ln/>
+        </p:spPr>
+        <p:txBody>
+          <a:bodyPr wrap="square" lIns="0" tIns="0" rIns="0" bIns="0" rtlCol="0" anchor="ctr"/>
+          <a:lstStyle/>
+          <a:p>
+            <a:pPr algn="ctr" indent="0" marL="0">
+              <a:buNone/>
+            </a:pPr>
+            <a:r>
+              <a:rPr lang="en-US" sz="900" b="1" dirty="0">
+                <a:solidFill>
+                  <a:srgbClr val="9D174D"/>
+                </a:solidFill>
+                <a:latin typeface="Trebuchet MS" pitchFamily="34" charset="0"/>
+                <a:ea typeface="Trebuchet MS" pitchFamily="34" charset="-122"/>
+                <a:cs typeface="Trebuchet MS" pitchFamily="34" charset="-120"/>
+              </a:rPr>
+              <a:t>a</a:t>
+            </a:r>
+            <a:endParaRPr lang="en-US" sz="900" dirty="0"/>
+          </a:p>
+        </p:txBody>
+      </p:sp>
+      <p:sp>
+        <p:nvSpPr>
+          <p:cNvPr id="34" name="Shape 32"/>
+          <p:cNvSpPr/>
+          <p:nvPr/>
+        </p:nvSpPr>
+        <p:spPr>
+          <a:xfrm>
+            <a:off x="4850892" y="4169664"/>
+            <a:ext cx="685800" cy="384048"/>
+          </a:xfrm>
+          <a:prstGeom prst="rect">
+            <a:avLst>
+              <a:gd name="adj" fmla="val 9524"/>
+            </a:avLst>
+          </a:prstGeom>
+          <a:solidFill>
+            <a:srgbClr val="FFFFFF"/>
+          </a:solidFill>
+          <a:ln w="12700">
+            <a:solidFill>
+              <a:srgbClr val="DB2777"/>
+            </a:solidFill>
+            <a:prstDash val="solid"/>
+          </a:ln>
+        </p:spPr>
+      </p:sp>
+      <p:sp>
+        <p:nvSpPr>
+          <p:cNvPr id="35" name="Text 33"/>
+          <p:cNvSpPr/>
+          <p:nvPr/>
+        </p:nvSpPr>
+        <p:spPr>
+          <a:xfrm>
+            <a:off x="4850892" y="4169664"/>
+            <a:ext cx="685800" cy="384048"/>
+          </a:xfrm>
+          <a:prstGeom prst="rect">
+            <a:avLst/>
+          </a:prstGeom>
+          <a:noFill/>
+          <a:ln/>
+        </p:spPr>
+        <p:txBody>
+          <a:bodyPr wrap="square" lIns="0" tIns="0" rIns="0" bIns="0" rtlCol="0" anchor="ctr"/>
+          <a:lstStyle/>
+          <a:p>
+            <a:pPr algn="ctr" indent="0" marL="0">
+              <a:buNone/>
+            </a:pPr>
+            <a:r>
+              <a:rPr lang="en-US" sz="900" b="1" dirty="0">
+                <a:solidFill>
+                  <a:srgbClr val="9D174D"/>
+                </a:solidFill>
+                <a:latin typeface="Trebuchet MS" pitchFamily="34" charset="0"/>
+                <a:ea typeface="Trebuchet MS" pitchFamily="34" charset="-122"/>
+                <a:cs typeface="Trebuchet MS" pitchFamily="34" charset="-120"/>
+              </a:rPr>
+              <a:t>n</a:t>
+            </a:r>
+            <a:endParaRPr lang="en-US" sz="900" dirty="0"/>
+          </a:p>
+        </p:txBody>
+      </p:sp>
+      <p:sp>
+        <p:nvSpPr>
+          <p:cNvPr id="36" name="Shape 34"/>
+          <p:cNvSpPr/>
+          <p:nvPr/>
+        </p:nvSpPr>
+        <p:spPr>
+          <a:xfrm>
+            <a:off x="6062472" y="4169664"/>
+            <a:ext cx="685800" cy="384048"/>
+          </a:xfrm>
+          <a:prstGeom prst="rect">
+            <a:avLst>
+              <a:gd name="adj" fmla="val 9524"/>
+            </a:avLst>
+          </a:prstGeom>
+          <a:solidFill>
+            <a:srgbClr val="FFFFFF"/>
+          </a:solidFill>
+          <a:ln w="12700">
+            <a:solidFill>
+              <a:srgbClr val="DB2777"/>
+            </a:solidFill>
+            <a:prstDash val="solid"/>
+          </a:ln>
+        </p:spPr>
+      </p:sp>
+      <p:sp>
+        <p:nvSpPr>
+          <p:cNvPr id="37" name="Text 35"/>
+          <p:cNvSpPr/>
+          <p:nvPr/>
+        </p:nvSpPr>
+        <p:spPr>
+          <a:xfrm>
+            <a:off x="6062472" y="4169664"/>
+            <a:ext cx="685800" cy="384048"/>
+          </a:xfrm>
+          <a:prstGeom prst="rect">
+            <a:avLst/>
+          </a:prstGeom>
+          <a:noFill/>
+          <a:ln/>
+        </p:spPr>
+        <p:txBody>
+          <a:bodyPr wrap="square" lIns="0" tIns="0" rIns="0" bIns="0" rtlCol="0" anchor="ctr"/>
+          <a:lstStyle/>
+          <a:p>
+            <a:pPr algn="ctr" indent="0" marL="0">
+              <a:buNone/>
+            </a:pPr>
+            <a:r>
+              <a:rPr lang="en-US" sz="900" b="1" dirty="0">
+                <a:solidFill>
+                  <a:srgbClr val="9D174D"/>
+                </a:solidFill>
+                <a:latin typeface="Trebuchet MS" pitchFamily="34" charset="0"/>
+                <a:ea typeface="Trebuchet MS" pitchFamily="34" charset="-122"/>
+                <a:cs typeface="Trebuchet MS" pitchFamily="34" charset="-120"/>
+              </a:rPr>
+              <a:t>k</a:t>
+            </a:r>
+            <a:endParaRPr lang="en-US" sz="900" dirty="0"/>
+          </a:p>
+        </p:txBody>
+      </p:sp>
+      <p:sp>
+        <p:nvSpPr>
+          <p:cNvPr id="38" name="Shape 36"/>
+          <p:cNvSpPr/>
+          <p:nvPr/>
+        </p:nvSpPr>
+        <p:spPr>
+          <a:xfrm>
+            <a:off x="7274052" y="4169664"/>
+            <a:ext cx="685800" cy="384048"/>
+          </a:xfrm>
+          <a:prstGeom prst="rect">
+            <a:avLst>
+              <a:gd name="adj" fmla="val 9524"/>
+            </a:avLst>
+          </a:prstGeom>
+          <a:solidFill>
+            <a:srgbClr val="FFFFFF"/>
+          </a:solidFill>
+          <a:ln w="12700">
+            <a:solidFill>
+              <a:srgbClr val="DB2777"/>
+            </a:solidFill>
+            <a:prstDash val="solid"/>
+          </a:ln>
+        </p:spPr>
+      </p:sp>
+      <p:sp>
+        <p:nvSpPr>
+          <p:cNvPr id="39" name="Text 37"/>
+          <p:cNvSpPr/>
+          <p:nvPr/>
+        </p:nvSpPr>
+        <p:spPr>
+          <a:xfrm>
+            <a:off x="7274052" y="4169664"/>
+            <a:ext cx="685800" cy="384048"/>
+          </a:xfrm>
+          <a:prstGeom prst="rect">
+            <a:avLst/>
+          </a:prstGeom>
+          <a:noFill/>
+          <a:ln/>
+        </p:spPr>
+        <p:txBody>
+          <a:bodyPr wrap="square" lIns="0" tIns="0" rIns="0" bIns="0" rtlCol="0" anchor="ctr"/>
+          <a:lstStyle/>
+          <a:p>
+            <a:pPr algn="ctr" indent="0" marL="0">
+              <a:buNone/>
+            </a:pPr>
+            <a:r>
+              <a:rPr lang="en-US" sz="900" b="1" dirty="0">
+                <a:solidFill>
+                  <a:srgbClr val="9D174D"/>
+                </a:solidFill>
+                <a:latin typeface="Trebuchet MS" pitchFamily="34" charset="0"/>
+                <a:ea typeface="Trebuchet MS" pitchFamily="34" charset="-122"/>
+                <a:cs typeface="Trebuchet MS" pitchFamily="34" charset="-120"/>
+              </a:rPr>
+              <a:t>t</a:t>
+            </a:r>
+            <a:endParaRPr lang="en-US" sz="900" dirty="0"/>
+          </a:p>
+        </p:txBody>
+      </p:sp>
+      <p:sp>
+        <p:nvSpPr>
+          <p:cNvPr id="40" name="Text 38"/>
+          <p:cNvSpPr/>
+          <p:nvPr/>
+        </p:nvSpPr>
+        <p:spPr>
+          <a:xfrm>
+            <a:off x="7274052" y="4572000"/>
+            <a:ext cx="685800" cy="219456"/>
           </a:xfrm>
           <a:prstGeom prst="rect">
             <a:avLst/>
@@ -15241,1007 +15316,17 @@
               <a:buNone/>
             </a:pPr>
             <a:r>
-              <a:rPr lang="en-US" sz="850" dirty="0">
-                <a:solidFill>
-                  <a:srgbClr val="475569"/>
+              <a:rPr lang="en-US" sz="750" i="1" dirty="0">
+                <a:solidFill>
+                  <a:srgbClr val="94A3B8"/>
                 </a:solidFill>
                 <a:latin typeface="Calibri" pitchFamily="34" charset="0"/>
                 <a:ea typeface="Calibri" pitchFamily="34" charset="-122"/>
                 <a:cs typeface="Calibri" pitchFamily="34" charset="-120"/>
               </a:rPr>
-              <a:t>in a way that is</a:t>
-            </a:r>
-            <a:endParaRPr lang="en-US" sz="850" dirty="0"/>
-          </a:p>
-        </p:txBody>
-      </p:sp>
-      <p:sp>
-        <p:nvSpPr>
-          <p:cNvPr id="25" name="Shape 23"/>
-          <p:cNvSpPr/>
-          <p:nvPr/>
-        </p:nvSpPr>
-        <p:spPr>
-          <a:xfrm>
-            <a:off x="365760" y="3273552"/>
-            <a:ext cx="1371600" cy="658368"/>
-          </a:xfrm>
-          <a:prstGeom prst="rect">
-            <a:avLst>
-              <a:gd name="adj" fmla="val 8333"/>
-            </a:avLst>
-          </a:prstGeom>
-          <a:solidFill>
-            <a:srgbClr val="E2E8F0"/>
-          </a:solidFill>
-          <a:ln w="12700">
-            <a:solidFill>
-              <a:srgbClr val="E2E8F0"/>
-            </a:solidFill>
-            <a:prstDash val="solid"/>
-          </a:ln>
-        </p:spPr>
-      </p:sp>
-      <p:sp>
-        <p:nvSpPr>
-          <p:cNvPr id="26" name="Text 24"/>
-          <p:cNvSpPr/>
-          <p:nvPr/>
-        </p:nvSpPr>
-        <p:spPr>
-          <a:xfrm>
-            <a:off x="365760" y="3273552"/>
-            <a:ext cx="1371600" cy="658368"/>
-          </a:xfrm>
-          <a:prstGeom prst="rect">
-            <a:avLst/>
-          </a:prstGeom>
-          <a:noFill/>
-          <a:ln/>
-        </p:spPr>
-        <p:txBody>
-          <a:bodyPr wrap="square" lIns="0" tIns="0" rIns="0" bIns="0" rtlCol="0" anchor="ctr"/>
-          <a:lstStyle/>
-          <a:p>
-            <a:pPr algn="ctr" indent="0" marL="0">
-              <a:buNone/>
-            </a:pPr>
-            <a:r>
-              <a:rPr lang="en-US" sz="1100" b="1" dirty="0">
-                <a:solidFill>
-                  <a:srgbClr val="475569"/>
-                </a:solidFill>
-                <a:latin typeface="Trebuchet MS" pitchFamily="34" charset="0"/>
-                <a:ea typeface="Trebuchet MS" pitchFamily="34" charset="-122"/>
-                <a:cs typeface="Trebuchet MS" pitchFamily="34" charset="-120"/>
-              </a:rPr>
-              <a:t>Syllables</a:t>
-            </a:r>
-            <a:endParaRPr lang="en-US" sz="1100" dirty="0"/>
-          </a:p>
-        </p:txBody>
-      </p:sp>
-      <p:sp>
-        <p:nvSpPr>
-          <p:cNvPr id="27" name="Shape 25"/>
-          <p:cNvSpPr/>
-          <p:nvPr/>
-        </p:nvSpPr>
-        <p:spPr>
-          <a:xfrm>
-            <a:off x="1874520" y="3273552"/>
-            <a:ext cx="6903720" cy="658368"/>
-          </a:xfrm>
-          <a:prstGeom prst="rect">
-            <a:avLst>
-              <a:gd name="adj" fmla="val 8333"/>
-            </a:avLst>
-          </a:prstGeom>
-          <a:solidFill>
-            <a:srgbClr val="CCFBF1"/>
-          </a:solidFill>
-          <a:ln w="12700">
-            <a:solidFill>
-              <a:srgbClr val="0D9488"/>
-            </a:solidFill>
-            <a:prstDash val="solid"/>
-          </a:ln>
-        </p:spPr>
-      </p:sp>
-      <p:sp>
-        <p:nvSpPr>
-          <p:cNvPr id="28" name="Shape 26"/>
-          <p:cNvSpPr/>
-          <p:nvPr/>
-        </p:nvSpPr>
-        <p:spPr>
-          <a:xfrm>
-            <a:off x="2313432" y="3364992"/>
-            <a:ext cx="1645920" cy="475488"/>
-          </a:xfrm>
-          <a:prstGeom prst="rect">
-            <a:avLst>
-              <a:gd name="adj" fmla="val 9615"/>
-            </a:avLst>
-          </a:prstGeom>
-          <a:solidFill>
-            <a:srgbClr val="FFFFFF"/>
-          </a:solidFill>
-          <a:ln w="12700">
-            <a:solidFill>
-              <a:srgbClr val="0D9488"/>
-            </a:solidFill>
-            <a:prstDash val="solid"/>
-          </a:ln>
-        </p:spPr>
-      </p:sp>
-      <p:sp>
-        <p:nvSpPr>
-          <p:cNvPr id="29" name="Text 27"/>
-          <p:cNvSpPr/>
-          <p:nvPr/>
-        </p:nvSpPr>
-        <p:spPr>
-          <a:xfrm>
-            <a:off x="2313432" y="3364992"/>
-            <a:ext cx="1645920" cy="475488"/>
-          </a:xfrm>
-          <a:prstGeom prst="rect">
-            <a:avLst/>
-          </a:prstGeom>
-          <a:noFill/>
-          <a:ln/>
-        </p:spPr>
-        <p:txBody>
-          <a:bodyPr wrap="square" lIns="0" tIns="0" rIns="0" bIns="0" rtlCol="0" anchor="ctr"/>
-          <a:lstStyle/>
-          <a:p>
-            <a:pPr algn="ctr" indent="0" marL="0">
-              <a:buNone/>
-            </a:pPr>
-            <a:r>
-              <a:rPr lang="en-US" sz="1400" b="1" dirty="0">
-                <a:solidFill>
-                  <a:srgbClr val="0D9488"/>
-                </a:solidFill>
-                <a:latin typeface="Trebuchet MS" pitchFamily="34" charset="0"/>
-                <a:ea typeface="Trebuchet MS" pitchFamily="34" charset="-122"/>
-                <a:cs typeface="Trebuchet MS" pitchFamily="34" charset="-120"/>
-              </a:rPr>
-              <a:t>thank</a:t>
-            </a:r>
-            <a:endParaRPr lang="en-US" sz="1400" dirty="0"/>
-          </a:p>
-        </p:txBody>
-      </p:sp>
-      <p:sp>
-        <p:nvSpPr>
-          <p:cNvPr id="30" name="Text 28"/>
-          <p:cNvSpPr/>
-          <p:nvPr/>
-        </p:nvSpPr>
-        <p:spPr>
-          <a:xfrm>
-            <a:off x="3959352" y="3364992"/>
-            <a:ext cx="411480" cy="475488"/>
-          </a:xfrm>
-          <a:prstGeom prst="rect">
-            <a:avLst/>
-          </a:prstGeom>
-          <a:noFill/>
-          <a:ln/>
-        </p:spPr>
-        <p:txBody>
-          <a:bodyPr wrap="square" lIns="0" tIns="0" rIns="0" bIns="0" rtlCol="0" anchor="ctr"/>
-          <a:lstStyle/>
-          <a:p>
-            <a:pPr algn="ctr" indent="0" marL="0">
-              <a:buNone/>
-            </a:pPr>
-            <a:r>
-              <a:rPr lang="en-US" sz="1600" b="1" dirty="0">
-                <a:solidFill>
-                  <a:srgbClr val="0D9488"/>
-                </a:solidFill>
-                <a:latin typeface="Trebuchet MS" pitchFamily="34" charset="0"/>
-                <a:ea typeface="Trebuchet MS" pitchFamily="34" charset="-122"/>
-                <a:cs typeface="Trebuchet MS" pitchFamily="34" charset="-120"/>
-              </a:rPr>
-              <a:t>·</a:t>
-            </a:r>
-            <a:endParaRPr lang="en-US" sz="1600" dirty="0"/>
-          </a:p>
-        </p:txBody>
-      </p:sp>
-      <p:sp>
-        <p:nvSpPr>
-          <p:cNvPr id="31" name="Shape 29"/>
-          <p:cNvSpPr/>
-          <p:nvPr/>
-        </p:nvSpPr>
-        <p:spPr>
-          <a:xfrm>
-            <a:off x="4370832" y="3364992"/>
-            <a:ext cx="1645920" cy="475488"/>
-          </a:xfrm>
-          <a:prstGeom prst="rect">
-            <a:avLst>
-              <a:gd name="adj" fmla="val 9615"/>
-            </a:avLst>
-          </a:prstGeom>
-          <a:solidFill>
-            <a:srgbClr val="FFFFFF"/>
-          </a:solidFill>
-          <a:ln w="12700">
-            <a:solidFill>
-              <a:srgbClr val="0D9488"/>
-            </a:solidFill>
-            <a:prstDash val="solid"/>
-          </a:ln>
-        </p:spPr>
-      </p:sp>
-      <p:sp>
-        <p:nvSpPr>
-          <p:cNvPr id="32" name="Text 30"/>
-          <p:cNvSpPr/>
-          <p:nvPr/>
-        </p:nvSpPr>
-        <p:spPr>
-          <a:xfrm>
-            <a:off x="4370832" y="3364992"/>
-            <a:ext cx="1645920" cy="475488"/>
-          </a:xfrm>
-          <a:prstGeom prst="rect">
-            <a:avLst/>
-          </a:prstGeom>
-          <a:noFill/>
-          <a:ln/>
-        </p:spPr>
-        <p:txBody>
-          <a:bodyPr wrap="square" lIns="0" tIns="0" rIns="0" bIns="0" rtlCol="0" anchor="ctr"/>
-          <a:lstStyle/>
-          <a:p>
-            <a:pPr algn="ctr" indent="0" marL="0">
-              <a:buNone/>
-            </a:pPr>
-            <a:r>
-              <a:rPr lang="en-US" sz="1400" b="1" dirty="0">
-                <a:solidFill>
-                  <a:srgbClr val="0D9488"/>
-                </a:solidFill>
-                <a:latin typeface="Trebuchet MS" pitchFamily="34" charset="0"/>
-                <a:ea typeface="Trebuchet MS" pitchFamily="34" charset="-122"/>
-                <a:cs typeface="Trebuchet MS" pitchFamily="34" charset="-120"/>
-              </a:rPr>
-              <a:t>ful</a:t>
-            </a:r>
-            <a:endParaRPr lang="en-US" sz="1400" dirty="0"/>
-          </a:p>
-        </p:txBody>
-      </p:sp>
-      <p:sp>
-        <p:nvSpPr>
-          <p:cNvPr id="33" name="Text 31"/>
-          <p:cNvSpPr/>
-          <p:nvPr/>
-        </p:nvSpPr>
-        <p:spPr>
-          <a:xfrm>
-            <a:off x="6016752" y="3364992"/>
-            <a:ext cx="411480" cy="475488"/>
-          </a:xfrm>
-          <a:prstGeom prst="rect">
-            <a:avLst/>
-          </a:prstGeom>
-          <a:noFill/>
-          <a:ln/>
-        </p:spPr>
-        <p:txBody>
-          <a:bodyPr wrap="square" lIns="0" tIns="0" rIns="0" bIns="0" rtlCol="0" anchor="ctr"/>
-          <a:lstStyle/>
-          <a:p>
-            <a:pPr algn="ctr" indent="0" marL="0">
-              <a:buNone/>
-            </a:pPr>
-            <a:r>
-              <a:rPr lang="en-US" sz="1600" b="1" dirty="0">
-                <a:solidFill>
-                  <a:srgbClr val="0D9488"/>
-                </a:solidFill>
-                <a:latin typeface="Trebuchet MS" pitchFamily="34" charset="0"/>
-                <a:ea typeface="Trebuchet MS" pitchFamily="34" charset="-122"/>
-                <a:cs typeface="Trebuchet MS" pitchFamily="34" charset="-120"/>
-              </a:rPr>
-              <a:t>·</a:t>
-            </a:r>
-            <a:endParaRPr lang="en-US" sz="1600" dirty="0"/>
-          </a:p>
-        </p:txBody>
-      </p:sp>
-      <p:sp>
-        <p:nvSpPr>
-          <p:cNvPr id="34" name="Shape 32"/>
-          <p:cNvSpPr/>
-          <p:nvPr/>
-        </p:nvSpPr>
-        <p:spPr>
-          <a:xfrm>
-            <a:off x="6428232" y="3364992"/>
-            <a:ext cx="1645920" cy="475488"/>
-          </a:xfrm>
-          <a:prstGeom prst="rect">
-            <a:avLst>
-              <a:gd name="adj" fmla="val 9615"/>
-            </a:avLst>
-          </a:prstGeom>
-          <a:solidFill>
-            <a:srgbClr val="FFFFFF"/>
-          </a:solidFill>
-          <a:ln w="12700">
-            <a:solidFill>
-              <a:srgbClr val="0D9488"/>
-            </a:solidFill>
-            <a:prstDash val="solid"/>
-          </a:ln>
-        </p:spPr>
-      </p:sp>
-      <p:sp>
-        <p:nvSpPr>
-          <p:cNvPr id="35" name="Text 33"/>
-          <p:cNvSpPr/>
-          <p:nvPr/>
-        </p:nvSpPr>
-        <p:spPr>
-          <a:xfrm>
-            <a:off x="6428232" y="3364992"/>
-            <a:ext cx="1645920" cy="475488"/>
-          </a:xfrm>
-          <a:prstGeom prst="rect">
-            <a:avLst/>
-          </a:prstGeom>
-          <a:noFill/>
-          <a:ln/>
-        </p:spPr>
-        <p:txBody>
-          <a:bodyPr wrap="square" lIns="0" tIns="0" rIns="0" bIns="0" rtlCol="0" anchor="ctr"/>
-          <a:lstStyle/>
-          <a:p>
-            <a:pPr algn="ctr" indent="0" marL="0">
-              <a:buNone/>
-            </a:pPr>
-            <a:r>
-              <a:rPr lang="en-US" sz="1400" b="1" dirty="0">
-                <a:solidFill>
-                  <a:srgbClr val="0D9488"/>
-                </a:solidFill>
-                <a:latin typeface="Trebuchet MS" pitchFamily="34" charset="0"/>
-                <a:ea typeface="Trebuchet MS" pitchFamily="34" charset="-122"/>
-                <a:cs typeface="Trebuchet MS" pitchFamily="34" charset="-120"/>
-              </a:rPr>
-              <a:t>ly</a:t>
-            </a:r>
-            <a:endParaRPr lang="en-US" sz="1400" dirty="0"/>
-          </a:p>
-        </p:txBody>
-      </p:sp>
-      <p:sp>
-        <p:nvSpPr>
-          <p:cNvPr id="36" name="Shape 34"/>
-          <p:cNvSpPr/>
-          <p:nvPr/>
-        </p:nvSpPr>
-        <p:spPr>
-          <a:xfrm>
-            <a:off x="365760" y="4096512"/>
-            <a:ext cx="1371600" cy="804672"/>
-          </a:xfrm>
-          <a:prstGeom prst="rect">
-            <a:avLst>
-              <a:gd name="adj" fmla="val 6818"/>
-            </a:avLst>
-          </a:prstGeom>
-          <a:solidFill>
-            <a:srgbClr val="E2E8F0"/>
-          </a:solidFill>
-          <a:ln w="12700">
-            <a:solidFill>
-              <a:srgbClr val="E2E8F0"/>
-            </a:solidFill>
-            <a:prstDash val="solid"/>
-          </a:ln>
-        </p:spPr>
-      </p:sp>
-      <p:sp>
-        <p:nvSpPr>
-          <p:cNvPr id="37" name="Text 35"/>
-          <p:cNvSpPr/>
-          <p:nvPr/>
-        </p:nvSpPr>
-        <p:spPr>
-          <a:xfrm>
-            <a:off x="365760" y="4096512"/>
-            <a:ext cx="1371600" cy="804672"/>
-          </a:xfrm>
-          <a:prstGeom prst="rect">
-            <a:avLst/>
-          </a:prstGeom>
-          <a:noFill/>
-          <a:ln/>
-        </p:spPr>
-        <p:txBody>
-          <a:bodyPr wrap="square" lIns="0" tIns="0" rIns="0" bIns="0" rtlCol="0" anchor="ctr"/>
-          <a:lstStyle/>
-          <a:p>
-            <a:pPr algn="ctr" indent="0" marL="0">
-              <a:buNone/>
-            </a:pPr>
-            <a:r>
-              <a:rPr lang="en-US" sz="1100" b="1" dirty="0">
-                <a:solidFill>
-                  <a:srgbClr val="475569"/>
-                </a:solidFill>
-                <a:latin typeface="Trebuchet MS" pitchFamily="34" charset="0"/>
-                <a:ea typeface="Trebuchet MS" pitchFamily="34" charset="-122"/>
-                <a:cs typeface="Trebuchet MS" pitchFamily="34" charset="-120"/>
-              </a:rPr>
-              <a:t>Phonemes</a:t>
-            </a:r>
-            <a:endParaRPr lang="en-US" sz="1100" dirty="0"/>
-          </a:p>
-        </p:txBody>
-      </p:sp>
-      <p:sp>
-        <p:nvSpPr>
-          <p:cNvPr id="38" name="Shape 36"/>
-          <p:cNvSpPr/>
-          <p:nvPr/>
-        </p:nvSpPr>
-        <p:spPr>
-          <a:xfrm>
-            <a:off x="1874520" y="4096512"/>
-            <a:ext cx="6903720" cy="658368"/>
-          </a:xfrm>
-          <a:prstGeom prst="rect">
-            <a:avLst>
-              <a:gd name="adj" fmla="val 8333"/>
-            </a:avLst>
-          </a:prstGeom>
-          <a:solidFill>
-            <a:srgbClr val="FCE7F3"/>
-          </a:solidFill>
-          <a:ln w="12700">
-            <a:solidFill>
-              <a:srgbClr val="DB2777"/>
-            </a:solidFill>
-            <a:prstDash val="solid"/>
-          </a:ln>
-        </p:spPr>
-      </p:sp>
-      <p:sp>
-        <p:nvSpPr>
-          <p:cNvPr id="39" name="Shape 37"/>
-          <p:cNvSpPr/>
-          <p:nvPr/>
-        </p:nvSpPr>
-        <p:spPr>
-          <a:xfrm>
-            <a:off x="2023872" y="4169664"/>
-            <a:ext cx="685800" cy="475488"/>
-          </a:xfrm>
-          <a:prstGeom prst="rect">
-            <a:avLst>
-              <a:gd name="adj" fmla="val 7692"/>
-            </a:avLst>
-          </a:prstGeom>
-          <a:solidFill>
-            <a:srgbClr val="FFFFFF"/>
-          </a:solidFill>
-          <a:ln w="12700">
-            <a:solidFill>
-              <a:srgbClr val="DB2777"/>
-            </a:solidFill>
-            <a:prstDash val="solid"/>
-          </a:ln>
-        </p:spPr>
-      </p:sp>
-      <p:sp>
-        <p:nvSpPr>
-          <p:cNvPr id="40" name="Text 38"/>
-          <p:cNvSpPr/>
-          <p:nvPr/>
-        </p:nvSpPr>
-        <p:spPr>
-          <a:xfrm>
-            <a:off x="2023872" y="4169664"/>
-            <a:ext cx="685800" cy="475488"/>
-          </a:xfrm>
-          <a:prstGeom prst="rect">
-            <a:avLst/>
-          </a:prstGeom>
-          <a:noFill/>
-          <a:ln/>
-        </p:spPr>
-        <p:txBody>
-          <a:bodyPr wrap="square" lIns="0" tIns="0" rIns="0" bIns="0" rtlCol="0" anchor="ctr"/>
-          <a:lstStyle/>
-          <a:p>
-            <a:pPr algn="ctr" indent="0" marL="0">
-              <a:buNone/>
-            </a:pPr>
-            <a:r>
-              <a:rPr lang="en-US" sz="900" b="1" dirty="0">
-                <a:solidFill>
-                  <a:srgbClr val="9D174D"/>
-                </a:solidFill>
-                <a:latin typeface="Trebuchet MS" pitchFamily="34" charset="0"/>
-                <a:ea typeface="Trebuchet MS" pitchFamily="34" charset="-122"/>
-                <a:cs typeface="Trebuchet MS" pitchFamily="34" charset="-120"/>
-              </a:rPr>
-              <a:t>th</a:t>
-            </a:r>
-            <a:endParaRPr lang="en-US" sz="900" dirty="0"/>
-          </a:p>
-        </p:txBody>
-      </p:sp>
-      <p:sp>
-        <p:nvSpPr>
-          <p:cNvPr id="41" name="Shape 39"/>
-          <p:cNvSpPr/>
-          <p:nvPr/>
-        </p:nvSpPr>
-        <p:spPr>
-          <a:xfrm>
-            <a:off x="2831592" y="4169664"/>
-            <a:ext cx="685800" cy="475488"/>
-          </a:xfrm>
-          <a:prstGeom prst="rect">
-            <a:avLst>
-              <a:gd name="adj" fmla="val 7692"/>
-            </a:avLst>
-          </a:prstGeom>
-          <a:solidFill>
-            <a:srgbClr val="FFFFFF"/>
-          </a:solidFill>
-          <a:ln w="12700">
-            <a:solidFill>
-              <a:srgbClr val="DB2777"/>
-            </a:solidFill>
-            <a:prstDash val="solid"/>
-          </a:ln>
-        </p:spPr>
-      </p:sp>
-      <p:sp>
-        <p:nvSpPr>
-          <p:cNvPr id="42" name="Text 40"/>
-          <p:cNvSpPr/>
-          <p:nvPr/>
-        </p:nvSpPr>
-        <p:spPr>
-          <a:xfrm>
-            <a:off x="2831592" y="4169664"/>
-            <a:ext cx="685800" cy="475488"/>
-          </a:xfrm>
-          <a:prstGeom prst="rect">
-            <a:avLst/>
-          </a:prstGeom>
-          <a:noFill/>
-          <a:ln/>
-        </p:spPr>
-        <p:txBody>
-          <a:bodyPr wrap="square" lIns="0" tIns="0" rIns="0" bIns="0" rtlCol="0" anchor="ctr"/>
-          <a:lstStyle/>
-          <a:p>
-            <a:pPr algn="ctr" indent="0" marL="0">
-              <a:buNone/>
-            </a:pPr>
-            <a:r>
-              <a:rPr lang="en-US" sz="900" b="1" dirty="0">
-                <a:solidFill>
-                  <a:srgbClr val="9D174D"/>
-                </a:solidFill>
-                <a:latin typeface="Trebuchet MS" pitchFamily="34" charset="0"/>
-                <a:ea typeface="Trebuchet MS" pitchFamily="34" charset="-122"/>
-                <a:cs typeface="Trebuchet MS" pitchFamily="34" charset="-120"/>
-              </a:rPr>
-              <a:t>a</a:t>
-            </a:r>
-            <a:endParaRPr lang="en-US" sz="900" dirty="0"/>
-          </a:p>
-        </p:txBody>
-      </p:sp>
-      <p:sp>
-        <p:nvSpPr>
-          <p:cNvPr id="43" name="Shape 41"/>
-          <p:cNvSpPr/>
-          <p:nvPr/>
-        </p:nvSpPr>
-        <p:spPr>
-          <a:xfrm>
-            <a:off x="3639312" y="4169664"/>
-            <a:ext cx="685800" cy="475488"/>
-          </a:xfrm>
-          <a:prstGeom prst="rect">
-            <a:avLst>
-              <a:gd name="adj" fmla="val 7692"/>
-            </a:avLst>
-          </a:prstGeom>
-          <a:solidFill>
-            <a:srgbClr val="FFFFFF"/>
-          </a:solidFill>
-          <a:ln w="12700">
-            <a:solidFill>
-              <a:srgbClr val="DB2777"/>
-            </a:solidFill>
-            <a:prstDash val="solid"/>
-          </a:ln>
-        </p:spPr>
-      </p:sp>
-      <p:sp>
-        <p:nvSpPr>
-          <p:cNvPr id="44" name="Text 42"/>
-          <p:cNvSpPr/>
-          <p:nvPr/>
-        </p:nvSpPr>
-        <p:spPr>
-          <a:xfrm>
-            <a:off x="3639312" y="4169664"/>
-            <a:ext cx="685800" cy="475488"/>
-          </a:xfrm>
-          <a:prstGeom prst="rect">
-            <a:avLst/>
-          </a:prstGeom>
-          <a:noFill/>
-          <a:ln/>
-        </p:spPr>
-        <p:txBody>
-          <a:bodyPr wrap="square" lIns="0" tIns="0" rIns="0" bIns="0" rtlCol="0" anchor="ctr"/>
-          <a:lstStyle/>
-          <a:p>
-            <a:pPr algn="ctr" indent="0" marL="0">
-              <a:buNone/>
-            </a:pPr>
-            <a:r>
-              <a:rPr lang="en-US" sz="900" b="1" dirty="0">
-                <a:solidFill>
-                  <a:srgbClr val="9D174D"/>
-                </a:solidFill>
-                <a:latin typeface="Trebuchet MS" pitchFamily="34" charset="0"/>
-                <a:ea typeface="Trebuchet MS" pitchFamily="34" charset="-122"/>
-                <a:cs typeface="Trebuchet MS" pitchFamily="34" charset="-120"/>
-              </a:rPr>
-              <a:t>n</a:t>
-            </a:r>
-            <a:endParaRPr lang="en-US" sz="900" dirty="0"/>
-          </a:p>
-        </p:txBody>
-      </p:sp>
-      <p:sp>
-        <p:nvSpPr>
-          <p:cNvPr id="45" name="Shape 43"/>
-          <p:cNvSpPr/>
-          <p:nvPr/>
-        </p:nvSpPr>
-        <p:spPr>
-          <a:xfrm>
-            <a:off x="4447032" y="4169664"/>
-            <a:ext cx="685800" cy="475488"/>
-          </a:xfrm>
-          <a:prstGeom prst="rect">
-            <a:avLst>
-              <a:gd name="adj" fmla="val 7692"/>
-            </a:avLst>
-          </a:prstGeom>
-          <a:solidFill>
-            <a:srgbClr val="FFFFFF"/>
-          </a:solidFill>
-          <a:ln w="12700">
-            <a:solidFill>
-              <a:srgbClr val="DB2777"/>
-            </a:solidFill>
-            <a:prstDash val="solid"/>
-          </a:ln>
-        </p:spPr>
-      </p:sp>
-      <p:sp>
-        <p:nvSpPr>
-          <p:cNvPr id="46" name="Text 44"/>
-          <p:cNvSpPr/>
-          <p:nvPr/>
-        </p:nvSpPr>
-        <p:spPr>
-          <a:xfrm>
-            <a:off x="4447032" y="4169664"/>
-            <a:ext cx="685800" cy="475488"/>
-          </a:xfrm>
-          <a:prstGeom prst="rect">
-            <a:avLst/>
-          </a:prstGeom>
-          <a:noFill/>
-          <a:ln/>
-        </p:spPr>
-        <p:txBody>
-          <a:bodyPr wrap="square" lIns="0" tIns="0" rIns="0" bIns="0" rtlCol="0" anchor="ctr"/>
-          <a:lstStyle/>
-          <a:p>
-            <a:pPr algn="ctr" indent="0" marL="0">
-              <a:buNone/>
-            </a:pPr>
-            <a:r>
-              <a:rPr lang="en-US" sz="900" b="1" dirty="0">
-                <a:solidFill>
-                  <a:srgbClr val="9D174D"/>
-                </a:solidFill>
-                <a:latin typeface="Trebuchet MS" pitchFamily="34" charset="0"/>
-                <a:ea typeface="Trebuchet MS" pitchFamily="34" charset="-122"/>
-                <a:cs typeface="Trebuchet MS" pitchFamily="34" charset="-120"/>
-              </a:rPr>
-              <a:t>k</a:t>
-            </a:r>
-            <a:endParaRPr lang="en-US" sz="900" dirty="0"/>
-          </a:p>
-        </p:txBody>
-      </p:sp>
-      <p:sp>
-        <p:nvSpPr>
-          <p:cNvPr id="47" name="Shape 45"/>
-          <p:cNvSpPr/>
-          <p:nvPr/>
-        </p:nvSpPr>
-        <p:spPr>
-          <a:xfrm>
-            <a:off x="5254752" y="4169664"/>
-            <a:ext cx="685800" cy="475488"/>
-          </a:xfrm>
-          <a:prstGeom prst="rect">
-            <a:avLst>
-              <a:gd name="adj" fmla="val 7692"/>
-            </a:avLst>
-          </a:prstGeom>
-          <a:solidFill>
-            <a:srgbClr val="FFFFFF"/>
-          </a:solidFill>
-          <a:ln w="12700">
-            <a:solidFill>
-              <a:srgbClr val="DB2777"/>
-            </a:solidFill>
-            <a:prstDash val="solid"/>
-          </a:ln>
-        </p:spPr>
-      </p:sp>
-      <p:sp>
-        <p:nvSpPr>
-          <p:cNvPr id="48" name="Text 46"/>
-          <p:cNvSpPr/>
-          <p:nvPr/>
-        </p:nvSpPr>
-        <p:spPr>
-          <a:xfrm>
-            <a:off x="5254752" y="4169664"/>
-            <a:ext cx="685800" cy="475488"/>
-          </a:xfrm>
-          <a:prstGeom prst="rect">
-            <a:avLst/>
-          </a:prstGeom>
-          <a:noFill/>
-          <a:ln/>
-        </p:spPr>
-        <p:txBody>
-          <a:bodyPr wrap="square" lIns="0" tIns="0" rIns="0" bIns="0" rtlCol="0" anchor="ctr"/>
-          <a:lstStyle/>
-          <a:p>
-            <a:pPr algn="ctr" indent="0" marL="0">
-              <a:buNone/>
-            </a:pPr>
-            <a:r>
-              <a:rPr lang="en-US" sz="900" b="1" dirty="0">
-                <a:solidFill>
-                  <a:srgbClr val="9D174D"/>
-                </a:solidFill>
-                <a:latin typeface="Trebuchet MS" pitchFamily="34" charset="0"/>
-                <a:ea typeface="Trebuchet MS" pitchFamily="34" charset="-122"/>
-                <a:cs typeface="Trebuchet MS" pitchFamily="34" charset="-120"/>
-              </a:rPr>
-              <a:t>f</a:t>
-            </a:r>
-            <a:endParaRPr lang="en-US" sz="900" dirty="0"/>
-          </a:p>
-        </p:txBody>
-      </p:sp>
-      <p:sp>
-        <p:nvSpPr>
-          <p:cNvPr id="49" name="Shape 47"/>
-          <p:cNvSpPr/>
-          <p:nvPr/>
-        </p:nvSpPr>
-        <p:spPr>
-          <a:xfrm>
-            <a:off x="6062472" y="4169664"/>
-            <a:ext cx="685800" cy="475488"/>
-          </a:xfrm>
-          <a:prstGeom prst="rect">
-            <a:avLst>
-              <a:gd name="adj" fmla="val 7692"/>
-            </a:avLst>
-          </a:prstGeom>
-          <a:solidFill>
-            <a:srgbClr val="FFFFFF"/>
-          </a:solidFill>
-          <a:ln w="12700">
-            <a:solidFill>
-              <a:srgbClr val="DB2777"/>
-            </a:solidFill>
-            <a:prstDash val="solid"/>
-          </a:ln>
-        </p:spPr>
-      </p:sp>
-      <p:sp>
-        <p:nvSpPr>
-          <p:cNvPr id="50" name="Text 48"/>
-          <p:cNvSpPr/>
-          <p:nvPr/>
-        </p:nvSpPr>
-        <p:spPr>
-          <a:xfrm>
-            <a:off x="6062472" y="4169664"/>
-            <a:ext cx="685800" cy="475488"/>
-          </a:xfrm>
-          <a:prstGeom prst="rect">
-            <a:avLst/>
-          </a:prstGeom>
-          <a:noFill/>
-          <a:ln/>
-        </p:spPr>
-        <p:txBody>
-          <a:bodyPr wrap="square" lIns="0" tIns="0" rIns="0" bIns="0" rtlCol="0" anchor="ctr"/>
-          <a:lstStyle/>
-          <a:p>
-            <a:pPr algn="ctr" indent="0" marL="0">
-              <a:buNone/>
-            </a:pPr>
-            <a:r>
-              <a:rPr lang="en-US" sz="900" b="1" dirty="0">
-                <a:solidFill>
-                  <a:srgbClr val="9D174D"/>
-                </a:solidFill>
-                <a:latin typeface="Trebuchet MS" pitchFamily="34" charset="0"/>
-                <a:ea typeface="Trebuchet MS" pitchFamily="34" charset="-122"/>
-                <a:cs typeface="Trebuchet MS" pitchFamily="34" charset="-120"/>
-              </a:rPr>
-              <a:t>u</a:t>
-            </a:r>
-            <a:endParaRPr lang="en-US" sz="900" dirty="0"/>
-          </a:p>
-        </p:txBody>
-      </p:sp>
-      <p:sp>
-        <p:nvSpPr>
-          <p:cNvPr id="51" name="Shape 49"/>
-          <p:cNvSpPr/>
-          <p:nvPr/>
-        </p:nvSpPr>
-        <p:spPr>
-          <a:xfrm>
-            <a:off x="6870192" y="4169664"/>
-            <a:ext cx="685800" cy="475488"/>
-          </a:xfrm>
-          <a:prstGeom prst="rect">
-            <a:avLst>
-              <a:gd name="adj" fmla="val 7692"/>
-            </a:avLst>
-          </a:prstGeom>
-          <a:solidFill>
-            <a:srgbClr val="FFFFFF"/>
-          </a:solidFill>
-          <a:ln w="12700">
-            <a:solidFill>
-              <a:srgbClr val="DB2777"/>
-            </a:solidFill>
-            <a:prstDash val="solid"/>
-          </a:ln>
-        </p:spPr>
-      </p:sp>
-      <p:sp>
-        <p:nvSpPr>
-          <p:cNvPr id="52" name="Text 50"/>
-          <p:cNvSpPr/>
-          <p:nvPr/>
-        </p:nvSpPr>
-        <p:spPr>
-          <a:xfrm>
-            <a:off x="6870192" y="4169664"/>
-            <a:ext cx="685800" cy="475488"/>
-          </a:xfrm>
-          <a:prstGeom prst="rect">
-            <a:avLst/>
-          </a:prstGeom>
-          <a:noFill/>
-          <a:ln/>
-        </p:spPr>
-        <p:txBody>
-          <a:bodyPr wrap="square" lIns="0" tIns="0" rIns="0" bIns="0" rtlCol="0" anchor="ctr"/>
-          <a:lstStyle/>
-          <a:p>
-            <a:pPr algn="ctr" indent="0" marL="0">
-              <a:buNone/>
-            </a:pPr>
-            <a:r>
-              <a:rPr lang="en-US" sz="900" b="1" dirty="0">
-                <a:solidFill>
-                  <a:srgbClr val="9D174D"/>
-                </a:solidFill>
-                <a:latin typeface="Trebuchet MS" pitchFamily="34" charset="0"/>
-                <a:ea typeface="Trebuchet MS" pitchFamily="34" charset="-122"/>
-                <a:cs typeface="Trebuchet MS" pitchFamily="34" charset="-120"/>
-              </a:rPr>
-              <a:t>ll</a:t>
-            </a:r>
-            <a:endParaRPr lang="en-US" sz="900" dirty="0"/>
-          </a:p>
-        </p:txBody>
-      </p:sp>
-      <p:sp>
-        <p:nvSpPr>
-          <p:cNvPr id="53" name="Shape 51"/>
-          <p:cNvSpPr/>
-          <p:nvPr/>
-        </p:nvSpPr>
-        <p:spPr>
-          <a:xfrm>
-            <a:off x="7677912" y="4169664"/>
-            <a:ext cx="685800" cy="475488"/>
-          </a:xfrm>
-          <a:prstGeom prst="rect">
-            <a:avLst>
-              <a:gd name="adj" fmla="val 7692"/>
-            </a:avLst>
-          </a:prstGeom>
-          <a:solidFill>
-            <a:srgbClr val="FFFFFF"/>
-          </a:solidFill>
-          <a:ln w="12700">
-            <a:solidFill>
-              <a:srgbClr val="DB2777"/>
-            </a:solidFill>
-            <a:prstDash val="solid"/>
-          </a:ln>
-        </p:spPr>
-      </p:sp>
-      <p:sp>
-        <p:nvSpPr>
-          <p:cNvPr id="54" name="Text 52"/>
-          <p:cNvSpPr/>
-          <p:nvPr/>
-        </p:nvSpPr>
-        <p:spPr>
-          <a:xfrm>
-            <a:off x="7677912" y="4169664"/>
-            <a:ext cx="685800" cy="475488"/>
-          </a:xfrm>
-          <a:prstGeom prst="rect">
-            <a:avLst/>
-          </a:prstGeom>
-          <a:noFill/>
-          <a:ln/>
-        </p:spPr>
-        <p:txBody>
-          <a:bodyPr wrap="square" lIns="0" tIns="0" rIns="0" bIns="0" rtlCol="0" anchor="ctr"/>
-          <a:lstStyle/>
-          <a:p>
-            <a:pPr algn="ctr" indent="0" marL="0">
-              <a:buNone/>
-            </a:pPr>
-            <a:r>
-              <a:rPr lang="en-US" sz="900" b="1" dirty="0">
-                <a:solidFill>
-                  <a:srgbClr val="9D174D"/>
-                </a:solidFill>
-                <a:latin typeface="Trebuchet MS" pitchFamily="34" charset="0"/>
-                <a:ea typeface="Trebuchet MS" pitchFamily="34" charset="-122"/>
-                <a:cs typeface="Trebuchet MS" pitchFamily="34" charset="-120"/>
-              </a:rPr>
-              <a:t>y</a:t>
-            </a:r>
-            <a:endParaRPr lang="en-US" sz="900" dirty="0"/>
+              <a:t>/t/</a:t>
+            </a:r>
+            <a:endParaRPr lang="en-US" sz="750" dirty="0"/>
           </a:p>
         </p:txBody>
       </p:sp>
@@ -16813,7 +15898,7 @@
                 <a:ea typeface="Calibri" pitchFamily="34" charset="-122"/>
                 <a:cs typeface="Calibri" pitchFamily="34" charset="-120"/>
               </a:rPr>
-              <a:t>Word Labs  •  wordlabs.app  •  Root: 'thank' = express gratitude or appreciation</a:t>
+              <a:t>Word Labs  •  wordlabs.app  •  Root: 'thank' = express gratitude or praise</a:t>
             </a:r>
             <a:endParaRPr lang="en-US" sz="800" dirty="0"/>
           </a:p>
@@ -17453,7 +16538,7 @@
                 <a:ea typeface="Calibri" pitchFamily="34" charset="-122"/>
                 <a:cs typeface="Calibri" pitchFamily="34" charset="-120"/>
               </a:rPr>
-              <a:t>Word Labs  •  wordlabs.app  •  Root: 'thank' = express gratitude or appreciation</a:t>
+              <a:t>Word Labs  •  wordlabs.app  •  Root: 'thank' = express gratitude or praise</a:t>
             </a:r>
             <a:endParaRPr lang="en-US" sz="800" dirty="0"/>
           </a:p>
@@ -17557,20 +16642,6 @@
               <a:buNone/>
             </a:pPr>
             <a:r>
-              <a:rPr lang="en-US" sz="1800" dirty="0">
-                <a:solidFill>
-                  <a:srgbClr val="0F172A"/>
-                </a:solidFill>
-                <a:latin typeface="Calibri" pitchFamily="34" charset="0"/>
-                <a:ea typeface="Calibri" pitchFamily="34" charset="-122"/>
-                <a:cs typeface="Calibri" pitchFamily="34" charset="-120"/>
-              </a:rPr>
-              <a:t>The </a:t>
-            </a:r>
-            <a:pPr algn="l" indent="0" marL="0">
-              <a:buNone/>
-            </a:pPr>
-            <a:r>
               <a:rPr lang="en-US" sz="1800" b="1" dirty="0">
                 <a:solidFill>
                   <a:srgbClr val="0D9488"/>
@@ -17582,7 +16653,7 @@
                 <a:ea typeface="Calibri" pitchFamily="34" charset="-122"/>
                 <a:cs typeface="Calibri" pitchFamily="34" charset="-120"/>
               </a:rPr>
-              <a:t>unthankful</a:t>
+              <a:t>Thankfully</a:t>
             </a:r>
             <a:pPr algn="l" indent="0" marL="0">
               <a:buNone/>
@@ -17596,7 +16667,7 @@
                 <a:ea typeface="Calibri" pitchFamily="34" charset="-122"/>
                 <a:cs typeface="Calibri" pitchFamily="34" charset="-120"/>
               </a:rPr>
-              <a:t> student gave a </a:t>
+              <a:t>, she showed great </a:t>
             </a:r>
             <a:pPr algn="l" indent="0" marL="0">
               <a:buNone/>
@@ -17613,7 +16684,7 @@
                 <a:ea typeface="Calibri" pitchFamily="34" charset="-122"/>
                 <a:cs typeface="Calibri" pitchFamily="34" charset="-120"/>
               </a:rPr>
-              <a:t>thankless</a:t>
+              <a:t>thankfulness</a:t>
             </a:r>
             <a:pPr algn="l" indent="0" marL="0">
               <a:buNone/>
@@ -17627,7 +16698,7 @@
                 <a:ea typeface="Calibri" pitchFamily="34" charset="-122"/>
                 <a:cs typeface="Calibri" pitchFamily="34" charset="-120"/>
               </a:rPr>
-              <a:t> shrug, but the rest of the class spent the morning </a:t>
+              <a:t>, and her </a:t>
             </a:r>
             <a:pPr algn="l" indent="0" marL="0">
               <a:buNone/>
@@ -17644,7 +16715,7 @@
                 <a:ea typeface="Calibri" pitchFamily="34" charset="-122"/>
                 <a:cs typeface="Calibri" pitchFamily="34" charset="-120"/>
               </a:rPr>
-              <a:t>thankfully</a:t>
+              <a:t>thanks</a:t>
             </a:r>
             <a:pPr algn="l" indent="0" marL="0">
               <a:buNone/>
@@ -17658,7 +16729,7 @@
                 <a:ea typeface="Calibri" pitchFamily="34" charset="-122"/>
                 <a:cs typeface="Calibri" pitchFamily="34" charset="-120"/>
               </a:rPr>
-              <a:t> cheering for their coach.</a:t>
+              <a:t> made everyone smile.</a:t>
             </a:r>
             <a:endParaRPr lang="en-US" sz="1800" dirty="0"/>
           </a:p>
@@ -17813,7 +16884,7 @@
                 <a:ea typeface="Trebuchet MS" pitchFamily="34" charset="-122"/>
                 <a:cs typeface="Trebuchet MS" pitchFamily="34" charset="-120"/>
               </a:rPr>
-              <a:t>unthankful</a:t>
+              <a:t>thankfully</a:t>
             </a:r>
             <a:endParaRPr lang="en-US" sz="1400" dirty="0"/>
           </a:p>
@@ -17941,7 +17012,7 @@
                 <a:ea typeface="Trebuchet MS" pitchFamily="34" charset="-122"/>
                 <a:cs typeface="Trebuchet MS" pitchFamily="34" charset="-120"/>
               </a:rPr>
-              <a:t>thankless</a:t>
+              <a:t>thankfulness</a:t>
             </a:r>
             <a:endParaRPr lang="en-US" sz="1400" dirty="0"/>
           </a:p>
@@ -18069,7 +17140,7 @@
                 <a:ea typeface="Trebuchet MS" pitchFamily="34" charset="-122"/>
                 <a:cs typeface="Trebuchet MS" pitchFamily="34" charset="-120"/>
               </a:rPr>
-              <a:t>thankfully</a:t>
+              <a:t>thanks</a:t>
             </a:r>
             <a:endParaRPr lang="en-US" sz="1400" dirty="0"/>
           </a:p>
@@ -18400,7 +17471,7 @@
                 <a:ea typeface="Calibri" pitchFamily="34" charset="-122"/>
                 <a:cs typeface="Calibri" pitchFamily="34" charset="-120"/>
               </a:rPr>
-              <a:t>Word Labs  •  wordlabs.app  •  Root: 'thank' = express gratitude or appreciation</a:t>
+              <a:t>Word Labs  •  wordlabs.app  •  Root: 'thank' = express gratitude or praise</a:t>
             </a:r>
             <a:endParaRPr lang="en-US" sz="800" dirty="0"/>
           </a:p>
@@ -18539,7 +17610,7 @@
                 <a:ea typeface="Trebuchet MS" pitchFamily="34" charset="-122"/>
                 <a:cs typeface="Trebuchet MS" pitchFamily="34" charset="-120"/>
               </a:rPr>
-              <a:t>unthankful</a:t>
+              <a:t>thankfully</a:t>
             </a:r>
             <a:endParaRPr lang="en-US" sz="2800" dirty="0"/>
           </a:p>
@@ -19227,7 +18298,7 @@
                 <a:ea typeface="Calibri" pitchFamily="34" charset="-122"/>
                 <a:cs typeface="Calibri" pitchFamily="34" charset="-120"/>
               </a:rPr>
-              <a:t>Word Labs  •  wordlabs.app  •  Root: 'thank' = express gratitude or appreciation</a:t>
+              <a:t>Word Labs  •  wordlabs.app  •  Root: 'thank' = express gratitude or praise</a:t>
             </a:r>
             <a:endParaRPr lang="en-US" sz="800" dirty="0"/>
           </a:p>
@@ -19366,7 +18437,7 @@
                 <a:ea typeface="Trebuchet MS" pitchFamily="34" charset="-122"/>
                 <a:cs typeface="Trebuchet MS" pitchFamily="34" charset="-120"/>
               </a:rPr>
-              <a:t>unthankful</a:t>
+              <a:t>thankfully</a:t>
             </a:r>
             <a:endParaRPr lang="en-US" sz="2800" dirty="0"/>
           </a:p>
@@ -19455,11 +18526,11 @@
             </a:avLst>
           </a:prstGeom>
           <a:solidFill>
-            <a:srgbClr val="DDD6FE"/>
+            <a:srgbClr val="CCFBF1"/>
           </a:solidFill>
           <a:ln w="19050">
             <a:solidFill>
-              <a:srgbClr val="7C3AED"/>
+              <a:srgbClr val="0D9488"/>
             </a:solidFill>
             <a:prstDash val="solid"/>
           </a:ln>
@@ -19499,13 +18570,13 @@
             <a:r>
               <a:rPr lang="en-US" sz="1300" b="1" dirty="0">
                 <a:solidFill>
-                  <a:srgbClr val="4C1D95"/>
+                  <a:srgbClr val="0F766E"/>
                 </a:solidFill>
                 <a:latin typeface="Trebuchet MS" pitchFamily="34" charset="0"/>
                 <a:ea typeface="Trebuchet MS" pitchFamily="34" charset="-122"/>
                 <a:cs typeface="Trebuchet MS" pitchFamily="34" charset="-120"/>
               </a:rPr>
-              <a:t>un</a:t>
+              <a:t>thank</a:t>
             </a:r>
             <a:endParaRPr lang="en-US" sz="1300" dirty="0"/>
           </a:p>
@@ -19544,7 +18615,7 @@
                 <a:ea typeface="Calibri" pitchFamily="34" charset="-122"/>
                 <a:cs typeface="Calibri" pitchFamily="34" charset="-120"/>
               </a:rPr>
-              <a:t>not</a:t>
+              <a:t>to express gratitude</a:t>
             </a:r>
             <a:endParaRPr lang="en-US" sz="850" dirty="0"/>
           </a:p>
@@ -19567,11 +18638,11 @@
             </a:avLst>
           </a:prstGeom>
           <a:solidFill>
-            <a:srgbClr val="CCFBF1"/>
+            <a:srgbClr val="FCE7F3"/>
           </a:solidFill>
           <a:ln w="19050">
             <a:solidFill>
-              <a:srgbClr val="0D9488"/>
+              <a:srgbClr val="DB2777"/>
             </a:solidFill>
             <a:prstDash val="solid"/>
           </a:ln>
@@ -19611,13 +18682,13 @@
             <a:r>
               <a:rPr lang="en-US" sz="1300" b="1" dirty="0">
                 <a:solidFill>
-                  <a:srgbClr val="0F766E"/>
+                  <a:srgbClr val="9D174D"/>
                 </a:solidFill>
                 <a:latin typeface="Trebuchet MS" pitchFamily="34" charset="0"/>
                 <a:ea typeface="Trebuchet MS" pitchFamily="34" charset="-122"/>
                 <a:cs typeface="Trebuchet MS" pitchFamily="34" charset="-120"/>
               </a:rPr>
-              <a:t>thank</a:t>
+              <a:t>ful</a:t>
             </a:r>
             <a:endParaRPr lang="en-US" sz="1300" dirty="0"/>
           </a:p>
@@ -19656,7 +18727,7 @@
                 <a:ea typeface="Calibri" pitchFamily="34" charset="-122"/>
                 <a:cs typeface="Calibri" pitchFamily="34" charset="-120"/>
               </a:rPr>
-              <a:t>to express gratitude</a:t>
+              <a:t>full of; having the quality of</a:t>
             </a:r>
             <a:endParaRPr lang="en-US" sz="850" dirty="0"/>
           </a:p>
@@ -19729,7 +18800,7 @@
                 <a:ea typeface="Trebuchet MS" pitchFamily="34" charset="-122"/>
                 <a:cs typeface="Trebuchet MS" pitchFamily="34" charset="-120"/>
               </a:rPr>
-              <a:t>ful</a:t>
+              <a:t>ly</a:t>
             </a:r>
             <a:endParaRPr lang="en-US" sz="1300" dirty="0"/>
           </a:p>
@@ -19768,7 +18839,7 @@
                 <a:ea typeface="Calibri" pitchFamily="34" charset="-122"/>
                 <a:cs typeface="Calibri" pitchFamily="34" charset="-120"/>
               </a:rPr>
-              <a:t>full of</a:t>
+              <a:t>in a certain way; forms an adverb</a:t>
             </a:r>
             <a:endParaRPr lang="en-US" sz="850" dirty="0"/>
           </a:p>
@@ -20324,7 +19395,7 @@
                 <a:ea typeface="Calibri" pitchFamily="34" charset="-122"/>
                 <a:cs typeface="Calibri" pitchFamily="34" charset="-120"/>
               </a:rPr>
-              <a:t>Word Labs  •  wordlabs.app  •  Root: 'thank' = express gratitude or appreciation</a:t>
+              <a:t>Word Labs  •  wordlabs.app  •  Root: 'thank' = express gratitude or praise</a:t>
             </a:r>
             <a:endParaRPr lang="en-US" sz="800" dirty="0"/>
           </a:p>
@@ -20463,7 +19534,7 @@
                 <a:ea typeface="Trebuchet MS" pitchFamily="34" charset="-122"/>
                 <a:cs typeface="Trebuchet MS" pitchFamily="34" charset="-120"/>
               </a:rPr>
-              <a:t>unthankful</a:t>
+              <a:t>thankfully</a:t>
             </a:r>
             <a:endParaRPr lang="en-US" sz="2800" dirty="0"/>
           </a:p>
@@ -20552,11 +19623,11 @@
             </a:avLst>
           </a:prstGeom>
           <a:solidFill>
-            <a:srgbClr val="DDD6FE"/>
+            <a:srgbClr val="CCFBF1"/>
           </a:solidFill>
           <a:ln w="19050">
             <a:solidFill>
-              <a:srgbClr val="7C3AED"/>
+              <a:srgbClr val="0D9488"/>
             </a:solidFill>
             <a:prstDash val="solid"/>
           </a:ln>
@@ -20596,13 +19667,13 @@
             <a:r>
               <a:rPr lang="en-US" sz="1300" b="1" dirty="0">
                 <a:solidFill>
-                  <a:srgbClr val="4C1D95"/>
+                  <a:srgbClr val="0F766E"/>
                 </a:solidFill>
                 <a:latin typeface="Trebuchet MS" pitchFamily="34" charset="0"/>
                 <a:ea typeface="Trebuchet MS" pitchFamily="34" charset="-122"/>
                 <a:cs typeface="Trebuchet MS" pitchFamily="34" charset="-120"/>
               </a:rPr>
-              <a:t>un</a:t>
+              <a:t>thank</a:t>
             </a:r>
             <a:endParaRPr lang="en-US" sz="1300" dirty="0"/>
           </a:p>
@@ -20641,7 +19712,7 @@
                 <a:ea typeface="Calibri" pitchFamily="34" charset="-122"/>
                 <a:cs typeface="Calibri" pitchFamily="34" charset="-120"/>
               </a:rPr>
-              <a:t>not</a:t>
+              <a:t>to express gratitude</a:t>
             </a:r>
             <a:endParaRPr lang="en-US" sz="850" dirty="0"/>
           </a:p>
@@ -20664,11 +19735,11 @@
             </a:avLst>
           </a:prstGeom>
           <a:solidFill>
-            <a:srgbClr val="CCFBF1"/>
+            <a:srgbClr val="FCE7F3"/>
           </a:solidFill>
           <a:ln w="19050">
             <a:solidFill>
-              <a:srgbClr val="0D9488"/>
+              <a:srgbClr val="DB2777"/>
             </a:solidFill>
             <a:prstDash val="solid"/>
           </a:ln>
@@ -20708,13 +19779,13 @@
             <a:r>
               <a:rPr lang="en-US" sz="1300" b="1" dirty="0">
                 <a:solidFill>
-                  <a:srgbClr val="0F766E"/>
+                  <a:srgbClr val="9D174D"/>
                 </a:solidFill>
                 <a:latin typeface="Trebuchet MS" pitchFamily="34" charset="0"/>
                 <a:ea typeface="Trebuchet MS" pitchFamily="34" charset="-122"/>
                 <a:cs typeface="Trebuchet MS" pitchFamily="34" charset="-120"/>
               </a:rPr>
-              <a:t>thank</a:t>
+              <a:t>ful</a:t>
             </a:r>
             <a:endParaRPr lang="en-US" sz="1300" dirty="0"/>
           </a:p>
@@ -20753,7 +19824,7 @@
                 <a:ea typeface="Calibri" pitchFamily="34" charset="-122"/>
                 <a:cs typeface="Calibri" pitchFamily="34" charset="-120"/>
               </a:rPr>
-              <a:t>to express gratitude</a:t>
+              <a:t>full of; having the quality of</a:t>
             </a:r>
             <a:endParaRPr lang="en-US" sz="850" dirty="0"/>
           </a:p>
@@ -20826,7 +19897,7 @@
                 <a:ea typeface="Trebuchet MS" pitchFamily="34" charset="-122"/>
                 <a:cs typeface="Trebuchet MS" pitchFamily="34" charset="-120"/>
               </a:rPr>
-              <a:t>ful</a:t>
+              <a:t>ly</a:t>
             </a:r>
             <a:endParaRPr lang="en-US" sz="1300" dirty="0"/>
           </a:p>
@@ -20865,7 +19936,7 @@
                 <a:ea typeface="Calibri" pitchFamily="34" charset="-122"/>
                 <a:cs typeface="Calibri" pitchFamily="34" charset="-120"/>
               </a:rPr>
-              <a:t>full of</a:t>
+              <a:t>in a certain way; forms an adverb</a:t>
             </a:r>
             <a:endParaRPr lang="en-US" sz="850" dirty="0"/>
           </a:p>
@@ -21024,7 +20095,7 @@
                 <a:ea typeface="Trebuchet MS" pitchFamily="34" charset="-122"/>
                 <a:cs typeface="Trebuchet MS" pitchFamily="34" charset="-120"/>
               </a:rPr>
-              <a:t>un</a:t>
+              <a:t>thank</a:t>
             </a:r>
             <a:endParaRPr lang="en-US" sz="1400" dirty="0"/>
           </a:p>
@@ -21129,7 +20200,7 @@
                 <a:ea typeface="Trebuchet MS" pitchFamily="34" charset="-122"/>
                 <a:cs typeface="Trebuchet MS" pitchFamily="34" charset="-120"/>
               </a:rPr>
-              <a:t>thank</a:t>
+              <a:t>ful</a:t>
             </a:r>
             <a:endParaRPr lang="en-US" sz="1400" dirty="0"/>
           </a:p>
@@ -21234,7 +20305,7 @@
                 <a:ea typeface="Trebuchet MS" pitchFamily="34" charset="-122"/>
                 <a:cs typeface="Trebuchet MS" pitchFamily="34" charset="-120"/>
               </a:rPr>
-              <a:t>ful</a:t>
+              <a:t>ly</a:t>
             </a:r>
             <a:endParaRPr lang="en-US" sz="1400" dirty="0"/>
           </a:p>
@@ -21658,7 +20729,7 @@
                 <a:ea typeface="Calibri" pitchFamily="34" charset="-122"/>
                 <a:cs typeface="Calibri" pitchFamily="34" charset="-120"/>
               </a:rPr>
-              <a:t>Word Labs  •  wordlabs.app  •  Root: 'thank' = express gratitude or appreciation</a:t>
+              <a:t>Word Labs  •  wordlabs.app  •  Root: 'thank' = express gratitude or praise</a:t>
             </a:r>
             <a:endParaRPr lang="en-US" sz="800" dirty="0"/>
           </a:p>
@@ -21797,7 +20868,7 @@
                 <a:ea typeface="Trebuchet MS" pitchFamily="34" charset="-122"/>
                 <a:cs typeface="Trebuchet MS" pitchFamily="34" charset="-120"/>
               </a:rPr>
-              <a:t>unthankful</a:t>
+              <a:t>thankfully</a:t>
             </a:r>
             <a:endParaRPr lang="en-US" sz="2800" dirty="0"/>
           </a:p>
@@ -21886,11 +20957,11 @@
             </a:avLst>
           </a:prstGeom>
           <a:solidFill>
-            <a:srgbClr val="DDD6FE"/>
+            <a:srgbClr val="CCFBF1"/>
           </a:solidFill>
           <a:ln w="19050">
             <a:solidFill>
-              <a:srgbClr val="7C3AED"/>
+              <a:srgbClr val="0D9488"/>
             </a:solidFill>
             <a:prstDash val="solid"/>
           </a:ln>
@@ -21930,13 +21001,13 @@
             <a:r>
               <a:rPr lang="en-US" sz="1300" b="1" dirty="0">
                 <a:solidFill>
-                  <a:srgbClr val="4C1D95"/>
+                  <a:srgbClr val="0F766E"/>
                 </a:solidFill>
                 <a:latin typeface="Trebuchet MS" pitchFamily="34" charset="0"/>
                 <a:ea typeface="Trebuchet MS" pitchFamily="34" charset="-122"/>
                 <a:cs typeface="Trebuchet MS" pitchFamily="34" charset="-120"/>
               </a:rPr>
-              <a:t>un</a:t>
+              <a:t>thank</a:t>
             </a:r>
             <a:endParaRPr lang="en-US" sz="1300" dirty="0"/>
           </a:p>
@@ -21975,7 +21046,7 @@
                 <a:ea typeface="Calibri" pitchFamily="34" charset="-122"/>
                 <a:cs typeface="Calibri" pitchFamily="34" charset="-120"/>
               </a:rPr>
-              <a:t>not</a:t>
+              <a:t>to express gratitude</a:t>
             </a:r>
             <a:endParaRPr lang="en-US" sz="850" dirty="0"/>
           </a:p>
@@ -21998,11 +21069,11 @@
             </a:avLst>
           </a:prstGeom>
           <a:solidFill>
-            <a:srgbClr val="CCFBF1"/>
+            <a:srgbClr val="FCE7F3"/>
           </a:solidFill>
           <a:ln w="19050">
             <a:solidFill>
-              <a:srgbClr val="0D9488"/>
+              <a:srgbClr val="DB2777"/>
             </a:solidFill>
             <a:prstDash val="solid"/>
           </a:ln>
@@ -22042,13 +21113,13 @@
             <a:r>
               <a:rPr lang="en-US" sz="1300" b="1" dirty="0">
                 <a:solidFill>
-                  <a:srgbClr val="0F766E"/>
+                  <a:srgbClr val="9D174D"/>
                 </a:solidFill>
                 <a:latin typeface="Trebuchet MS" pitchFamily="34" charset="0"/>
                 <a:ea typeface="Trebuchet MS" pitchFamily="34" charset="-122"/>
                 <a:cs typeface="Trebuchet MS" pitchFamily="34" charset="-120"/>
               </a:rPr>
-              <a:t>thank</a:t>
+              <a:t>ful</a:t>
             </a:r>
             <a:endParaRPr lang="en-US" sz="1300" dirty="0"/>
           </a:p>
@@ -22087,7 +21158,7 @@
                 <a:ea typeface="Calibri" pitchFamily="34" charset="-122"/>
                 <a:cs typeface="Calibri" pitchFamily="34" charset="-120"/>
               </a:rPr>
-              <a:t>to express gratitude</a:t>
+              <a:t>full of; having the quality of</a:t>
             </a:r>
             <a:endParaRPr lang="en-US" sz="850" dirty="0"/>
           </a:p>
@@ -22160,7 +21231,7 @@
                 <a:ea typeface="Trebuchet MS" pitchFamily="34" charset="-122"/>
                 <a:cs typeface="Trebuchet MS" pitchFamily="34" charset="-120"/>
               </a:rPr>
-              <a:t>ful</a:t>
+              <a:t>ly</a:t>
             </a:r>
             <a:endParaRPr lang="en-US" sz="1300" dirty="0"/>
           </a:p>
@@ -22199,7 +21270,7 @@
                 <a:ea typeface="Calibri" pitchFamily="34" charset="-122"/>
                 <a:cs typeface="Calibri" pitchFamily="34" charset="-120"/>
               </a:rPr>
-              <a:t>full of</a:t>
+              <a:t>in a certain way; forms an adverb</a:t>
             </a:r>
             <a:endParaRPr lang="en-US" sz="850" dirty="0"/>
           </a:p>
@@ -22358,7 +21429,7 @@
                 <a:ea typeface="Trebuchet MS" pitchFamily="34" charset="-122"/>
                 <a:cs typeface="Trebuchet MS" pitchFamily="34" charset="-120"/>
               </a:rPr>
-              <a:t>un</a:t>
+              <a:t>thank</a:t>
             </a:r>
             <a:endParaRPr lang="en-US" sz="1400" dirty="0"/>
           </a:p>
@@ -22463,7 +21534,7 @@
                 <a:ea typeface="Trebuchet MS" pitchFamily="34" charset="-122"/>
                 <a:cs typeface="Trebuchet MS" pitchFamily="34" charset="-120"/>
               </a:rPr>
-              <a:t>thank</a:t>
+              <a:t>ful</a:t>
             </a:r>
             <a:endParaRPr lang="en-US" sz="1400" dirty="0"/>
           </a:p>
@@ -22568,7 +21639,7 @@
                 <a:ea typeface="Trebuchet MS" pitchFamily="34" charset="-122"/>
                 <a:cs typeface="Trebuchet MS" pitchFamily="34" charset="-120"/>
               </a:rPr>
-              <a:t>ful</a:t>
+              <a:t>ly</a:t>
             </a:r>
             <a:endParaRPr lang="en-US" sz="1400" dirty="0"/>
           </a:p>
@@ -22727,7 +21798,7 @@
                 <a:ea typeface="Trebuchet MS" pitchFamily="34" charset="-122"/>
                 <a:cs typeface="Trebuchet MS" pitchFamily="34" charset="-120"/>
               </a:rPr>
-              <a:t>u</a:t>
+              <a:t>th</a:t>
             </a:r>
             <a:endParaRPr lang="en-US" sz="900" dirty="0"/>
           </a:p>
@@ -22793,7 +21864,7 @@
                 <a:ea typeface="Trebuchet MS" pitchFamily="34" charset="-122"/>
                 <a:cs typeface="Trebuchet MS" pitchFamily="34" charset="-120"/>
               </a:rPr>
-              <a:t>n</a:t>
+              <a:t>a</a:t>
             </a:r>
             <a:endParaRPr lang="en-US" sz="900" dirty="0"/>
           </a:p>
@@ -22859,7 +21930,7 @@
                 <a:ea typeface="Trebuchet MS" pitchFamily="34" charset="-122"/>
                 <a:cs typeface="Trebuchet MS" pitchFamily="34" charset="-120"/>
               </a:rPr>
-              <a:t>th</a:t>
+              <a:t>n</a:t>
             </a:r>
             <a:endParaRPr lang="en-US" sz="900" dirty="0"/>
           </a:p>
@@ -22925,7 +21996,7 @@
                 <a:ea typeface="Trebuchet MS" pitchFamily="34" charset="-122"/>
                 <a:cs typeface="Trebuchet MS" pitchFamily="34" charset="-120"/>
               </a:rPr>
-              <a:t>a</a:t>
+              <a:t>k</a:t>
             </a:r>
             <a:endParaRPr lang="en-US" sz="900" dirty="0"/>
           </a:p>
@@ -22991,7 +22062,7 @@
                 <a:ea typeface="Trebuchet MS" pitchFamily="34" charset="-122"/>
                 <a:cs typeface="Trebuchet MS" pitchFamily="34" charset="-120"/>
               </a:rPr>
-              <a:t>n</a:t>
+              <a:t>f</a:t>
             </a:r>
             <a:endParaRPr lang="en-US" sz="900" dirty="0"/>
           </a:p>
@@ -23057,7 +22128,7 @@
                 <a:ea typeface="Trebuchet MS" pitchFamily="34" charset="-122"/>
                 <a:cs typeface="Trebuchet MS" pitchFamily="34" charset="-120"/>
               </a:rPr>
-              <a:t>k</a:t>
+              <a:t>u</a:t>
             </a:r>
             <a:endParaRPr lang="en-US" sz="900" dirty="0"/>
           </a:p>
@@ -23123,7 +22194,7 @@
                 <a:ea typeface="Trebuchet MS" pitchFamily="34" charset="-122"/>
                 <a:cs typeface="Trebuchet MS" pitchFamily="34" charset="-120"/>
               </a:rPr>
-              <a:t>f</a:t>
+              <a:t>l</a:t>
             </a:r>
             <a:endParaRPr lang="en-US" sz="900" dirty="0"/>
           </a:p>
@@ -23189,7 +22260,7 @@
                 <a:ea typeface="Trebuchet MS" pitchFamily="34" charset="-122"/>
                 <a:cs typeface="Trebuchet MS" pitchFamily="34" charset="-120"/>
               </a:rPr>
-              <a:t>u</a:t>
+              <a:t>l</a:t>
             </a:r>
             <a:endParaRPr lang="en-US" sz="900" dirty="0"/>
           </a:p>
@@ -23255,7 +22326,7 @@
                 <a:ea typeface="Trebuchet MS" pitchFamily="34" charset="-122"/>
                 <a:cs typeface="Trebuchet MS" pitchFamily="34" charset="-120"/>
               </a:rPr>
-              <a:t>l</a:t>
+              <a:t>y</a:t>
             </a:r>
             <a:endParaRPr lang="en-US" sz="900" dirty="0"/>
           </a:p>
@@ -23547,7 +22618,7 @@
                 <a:ea typeface="Calibri" pitchFamily="34" charset="-122"/>
                 <a:cs typeface="Calibri" pitchFamily="34" charset="-120"/>
               </a:rPr>
-              <a:t>Word Labs  •  wordlabs.app  •  Root: 'thank' = express gratitude or appreciation</a:t>
+              <a:t>Word Labs  •  wordlabs.app  •  Root: 'thank' = express gratitude or praise</a:t>
             </a:r>
             <a:endParaRPr lang="en-US" sz="800" dirty="0"/>
           </a:p>
@@ -23686,7 +22757,7 @@
                 <a:ea typeface="Trebuchet MS" pitchFamily="34" charset="-122"/>
                 <a:cs typeface="Trebuchet MS" pitchFamily="34" charset="-120"/>
               </a:rPr>
-              <a:t>thankless</a:t>
+              <a:t>thankfulness</a:t>
             </a:r>
             <a:endParaRPr lang="en-US" sz="2800" dirty="0"/>
           </a:p>
@@ -24374,7 +23445,7 @@
                 <a:ea typeface="Calibri" pitchFamily="34" charset="-122"/>
                 <a:cs typeface="Calibri" pitchFamily="34" charset="-120"/>
               </a:rPr>
-              <a:t>Word Labs  •  wordlabs.app  •  Root: 'thank' = express gratitude or appreciation</a:t>
+              <a:t>Word Labs  •  wordlabs.app  •  Root: 'thank' = express gratitude or praise</a:t>
             </a:r>
             <a:endParaRPr lang="en-US" sz="800" dirty="0"/>
           </a:p>
@@ -24513,7 +23584,7 @@
                 <a:ea typeface="Trebuchet MS" pitchFamily="34" charset="-122"/>
                 <a:cs typeface="Trebuchet MS" pitchFamily="34" charset="-120"/>
               </a:rPr>
-              <a:t>thankless</a:t>
+              <a:t>thankfulness</a:t>
             </a:r>
             <a:endParaRPr lang="en-US" sz="2800" dirty="0"/>
           </a:p>
@@ -24593,7 +23664,7 @@
         </p:nvSpPr>
         <p:spPr>
           <a:xfrm>
-            <a:off x="2938272" y="2258568"/>
+            <a:off x="2221992" y="2258568"/>
             <a:ext cx="1828800" cy="292608"/>
           </a:xfrm>
           <a:prstGeom prst="rect">
@@ -24627,7 +23698,7 @@
         </p:nvSpPr>
         <p:spPr>
           <a:xfrm>
-            <a:off x="2938272" y="2258568"/>
+            <a:off x="2221992" y="2258568"/>
             <a:ext cx="1828800" cy="292608"/>
           </a:xfrm>
           <a:prstGeom prst="rect">
@@ -24666,7 +23737,7 @@
         </p:nvSpPr>
         <p:spPr>
           <a:xfrm>
-            <a:off x="2938272" y="2569464"/>
+            <a:off x="2221992" y="2569464"/>
             <a:ext cx="1828800" cy="201168"/>
           </a:xfrm>
           <a:prstGeom prst="rect">
@@ -24705,7 +23776,7 @@
         </p:nvSpPr>
         <p:spPr>
           <a:xfrm>
-            <a:off x="5803392" y="2258568"/>
+            <a:off x="4370832" y="2258568"/>
             <a:ext cx="1828800" cy="292608"/>
           </a:xfrm>
           <a:prstGeom prst="rect">
@@ -24714,11 +23785,11 @@
             </a:avLst>
           </a:prstGeom>
           <a:solidFill>
-            <a:srgbClr val="DDD6FE"/>
+            <a:srgbClr val="FCE7F3"/>
           </a:solidFill>
           <a:ln w="19050">
             <a:solidFill>
-              <a:srgbClr val="7C3AED"/>
+              <a:srgbClr val="DB2777"/>
             </a:solidFill>
             <a:prstDash val="solid"/>
           </a:ln>
@@ -24739,7 +23810,7 @@
         </p:nvSpPr>
         <p:spPr>
           <a:xfrm>
-            <a:off x="5803392" y="2258568"/>
+            <a:off x="4370832" y="2258568"/>
             <a:ext cx="1828800" cy="292608"/>
           </a:xfrm>
           <a:prstGeom prst="rect">
@@ -24758,13 +23829,13 @@
             <a:r>
               <a:rPr lang="en-US" sz="1300" b="1" dirty="0">
                 <a:solidFill>
-                  <a:srgbClr val="4C1D95"/>
+                  <a:srgbClr val="9D174D"/>
                 </a:solidFill>
                 <a:latin typeface="Trebuchet MS" pitchFamily="34" charset="0"/>
                 <a:ea typeface="Trebuchet MS" pitchFamily="34" charset="-122"/>
                 <a:cs typeface="Trebuchet MS" pitchFamily="34" charset="-120"/>
               </a:rPr>
-              <a:t>less</a:t>
+              <a:t>ful</a:t>
             </a:r>
             <a:endParaRPr lang="en-US" sz="1300" dirty="0"/>
           </a:p>
@@ -24778,7 +23849,7 @@
         </p:nvSpPr>
         <p:spPr>
           <a:xfrm>
-            <a:off x="5803392" y="2569464"/>
+            <a:off x="4370832" y="2569464"/>
             <a:ext cx="1828800" cy="201168"/>
           </a:xfrm>
           <a:prstGeom prst="rect">
@@ -24803,7 +23874,7 @@
                 <a:ea typeface="Calibri" pitchFamily="34" charset="-122"/>
                 <a:cs typeface="Calibri" pitchFamily="34" charset="-120"/>
               </a:rPr>
-              <a:t>without</a:t>
+              <a:t>full of; having the quality of</a:t>
             </a:r>
             <a:endParaRPr lang="en-US" sz="850" dirty="0"/>
           </a:p>
@@ -24812,6 +23883,118 @@
       <p:sp>
         <p:nvSpPr>
           <p:cNvPr id="22" name="Shape 20"/>
+          <p:cNvSpPr/>
+          <p:nvPr/>
+        </p:nvSpPr>
+        <p:spPr>
+          <a:xfrm>
+            <a:off x="6519672" y="2258568"/>
+            <a:ext cx="1828800" cy="292608"/>
+          </a:xfrm>
+          <a:prstGeom prst="rect">
+            <a:avLst>
+              <a:gd name="adj" fmla="val 25000"/>
+            </a:avLst>
+          </a:prstGeom>
+          <a:solidFill>
+            <a:srgbClr val="FCE7F3"/>
+          </a:solidFill>
+          <a:ln w="19050">
+            <a:solidFill>
+              <a:srgbClr val="DB2777"/>
+            </a:solidFill>
+            <a:prstDash val="solid"/>
+          </a:ln>
+          <a:effectLst>
+            <a:outerShdw sx="100000" sy="100000" kx="0" ky="0" algn="bl" rotWithShape="0" blurRad="101600" dist="38100" dir="8100000">
+              <a:srgbClr val="000000">
+                <a:alpha val="12000"/>
+              </a:srgbClr>
+            </a:outerShdw>
+          </a:effectLst>
+        </p:spPr>
+      </p:sp>
+      <p:sp>
+        <p:nvSpPr>
+          <p:cNvPr id="23" name="Text 21"/>
+          <p:cNvSpPr/>
+          <p:nvPr/>
+        </p:nvSpPr>
+        <p:spPr>
+          <a:xfrm>
+            <a:off x="6519672" y="2258568"/>
+            <a:ext cx="1828800" cy="292608"/>
+          </a:xfrm>
+          <a:prstGeom prst="rect">
+            <a:avLst/>
+          </a:prstGeom>
+          <a:noFill/>
+          <a:ln/>
+        </p:spPr>
+        <p:txBody>
+          <a:bodyPr wrap="square" lIns="0" tIns="0" rIns="0" bIns="0" rtlCol="0" anchor="ctr"/>
+          <a:lstStyle/>
+          <a:p>
+            <a:pPr algn="ctr" indent="0" marL="0">
+              <a:buNone/>
+            </a:pPr>
+            <a:r>
+              <a:rPr lang="en-US" sz="1300" b="1" dirty="0">
+                <a:solidFill>
+                  <a:srgbClr val="9D174D"/>
+                </a:solidFill>
+                <a:latin typeface="Trebuchet MS" pitchFamily="34" charset="0"/>
+                <a:ea typeface="Trebuchet MS" pitchFamily="34" charset="-122"/>
+                <a:cs typeface="Trebuchet MS" pitchFamily="34" charset="-120"/>
+              </a:rPr>
+              <a:t>ness</a:t>
+            </a:r>
+            <a:endParaRPr lang="en-US" sz="1300" dirty="0"/>
+          </a:p>
+        </p:txBody>
+      </p:sp>
+      <p:sp>
+        <p:nvSpPr>
+          <p:cNvPr id="24" name="Text 22"/>
+          <p:cNvSpPr/>
+          <p:nvPr/>
+        </p:nvSpPr>
+        <p:spPr>
+          <a:xfrm>
+            <a:off x="6519672" y="2569464"/>
+            <a:ext cx="1828800" cy="201168"/>
+          </a:xfrm>
+          <a:prstGeom prst="rect">
+            <a:avLst/>
+          </a:prstGeom>
+          <a:noFill/>
+          <a:ln/>
+        </p:spPr>
+        <p:txBody>
+          <a:bodyPr wrap="square" lIns="0" tIns="0" rIns="0" bIns="0" rtlCol="0" anchor="t"/>
+          <a:lstStyle/>
+          <a:p>
+            <a:pPr algn="ctr" indent="0" marL="0">
+              <a:buNone/>
+            </a:pPr>
+            <a:r>
+              <a:rPr lang="en-US" sz="850" dirty="0">
+                <a:solidFill>
+                  <a:srgbClr val="475569"/>
+                </a:solidFill>
+                <a:latin typeface="Calibri" pitchFamily="34" charset="0"/>
+                <a:ea typeface="Calibri" pitchFamily="34" charset="-122"/>
+                <a:cs typeface="Calibri" pitchFamily="34" charset="-120"/>
+              </a:rPr>
+              <a:t>the state or quality of being</a:t>
+            </a:r>
+            <a:endParaRPr lang="en-US" sz="850" dirty="0"/>
+          </a:p>
+        </p:txBody>
+      </p:sp>
+      <p:sp>
+        <p:nvSpPr>
+          <p:cNvPr id="25" name="Shape 23"/>
           <p:cNvSpPr/>
           <p:nvPr/>
         </p:nvSpPr>
@@ -24838,7 +24021,7 @@
       </p:sp>
       <p:sp>
         <p:nvSpPr>
-          <p:cNvPr id="23" name="Text 21"/>
+          <p:cNvPr id="26" name="Text 24"/>
           <p:cNvSpPr/>
           <p:nvPr/>
         </p:nvSpPr>
@@ -24877,7 +24060,7 @@
       </p:sp>
       <p:sp>
         <p:nvSpPr>
-          <p:cNvPr id="24" name="Shape 22"/>
+          <p:cNvPr id="27" name="Shape 25"/>
           <p:cNvSpPr/>
           <p:nvPr/>
         </p:nvSpPr>
@@ -24904,7 +24087,7 @@
       </p:sp>
       <p:sp>
         <p:nvSpPr>
-          <p:cNvPr id="25" name="Text 23"/>
+          <p:cNvPr id="28" name="Text 26"/>
           <p:cNvSpPr/>
           <p:nvPr/>
         </p:nvSpPr>
@@ -24943,7 +24126,7 @@
       </p:sp>
       <p:sp>
         <p:nvSpPr>
-          <p:cNvPr id="26" name="Shape 24"/>
+          <p:cNvPr id="29" name="Shape 27"/>
           <p:cNvSpPr/>
           <p:nvPr/>
         </p:nvSpPr>
@@ -24970,7 +24153,7 @@
       </p:sp>
       <p:sp>
         <p:nvSpPr>
-          <p:cNvPr id="27" name="Text 25"/>
+          <p:cNvPr id="30" name="Text 28"/>
           <p:cNvSpPr/>
           <p:nvPr/>
         </p:nvSpPr>
@@ -25009,7 +24192,7 @@
       </p:sp>
       <p:sp>
         <p:nvSpPr>
-          <p:cNvPr id="28" name="Shape 26"/>
+          <p:cNvPr id="31" name="Shape 29"/>
           <p:cNvSpPr/>
           <p:nvPr/>
         </p:nvSpPr>
@@ -25036,7 +24219,7 @@
       </p:sp>
       <p:sp>
         <p:nvSpPr>
-          <p:cNvPr id="29" name="Text 27"/>
+          <p:cNvPr id="32" name="Text 30"/>
           <p:cNvSpPr/>
           <p:nvPr/>
         </p:nvSpPr>
@@ -25359,7 +24542,7 @@
                 <a:ea typeface="Calibri" pitchFamily="34" charset="-122"/>
                 <a:cs typeface="Calibri" pitchFamily="34" charset="-120"/>
               </a:rPr>
-              <a:t>Word Labs  •  wordlabs.app  •  Root: 'thank' = express gratitude or appreciation</a:t>
+              <a:t>Word Labs  •  wordlabs.app  •  Root: 'thank' = express gratitude or praise</a:t>
             </a:r>
             <a:endParaRPr lang="en-US" sz="800" dirty="0"/>
           </a:p>
@@ -25432,7 +24615,7 @@
                 <a:ea typeface="Trebuchet MS" pitchFamily="34" charset="-122"/>
                 <a:cs typeface="Trebuchet MS" pitchFamily="34" charset="-120"/>
               </a:rPr>
-              <a:t>We are learning that the root 'thank' means 'express gratitude or appreciation'.</a:t>
+              <a:t>We are learning that the root 'thank' means 'express gratitude or praise'.</a:t>
             </a:r>
             <a:endParaRPr lang="en-US" sz="2000" dirty="0"/>
           </a:p>
@@ -26078,7 +25261,7 @@
                 <a:ea typeface="Calibri" pitchFamily="34" charset="-122"/>
                 <a:cs typeface="Calibri" pitchFamily="34" charset="-120"/>
               </a:rPr>
-              <a:t>Word Labs  •  wordlabs.app  •  Root: 'thank' = express gratitude or appreciation</a:t>
+              <a:t>Word Labs  •  wordlabs.app  •  Root: 'thank' = express gratitude or praise</a:t>
             </a:r>
             <a:endParaRPr lang="en-US" sz="800" dirty="0"/>
           </a:p>
@@ -26217,7 +25400,7 @@
                 <a:ea typeface="Trebuchet MS" pitchFamily="34" charset="-122"/>
                 <a:cs typeface="Trebuchet MS" pitchFamily="34" charset="-120"/>
               </a:rPr>
-              <a:t>thankless</a:t>
+              <a:t>thankfulness</a:t>
             </a:r>
             <a:endParaRPr lang="en-US" sz="2800" dirty="0"/>
           </a:p>
@@ -26297,7 +25480,7 @@
         </p:nvSpPr>
         <p:spPr>
           <a:xfrm>
-            <a:off x="2938272" y="2258568"/>
+            <a:off x="2221992" y="2258568"/>
             <a:ext cx="1828800" cy="292608"/>
           </a:xfrm>
           <a:prstGeom prst="rect">
@@ -26331,7 +25514,7 @@
         </p:nvSpPr>
         <p:spPr>
           <a:xfrm>
-            <a:off x="2938272" y="2258568"/>
+            <a:off x="2221992" y="2258568"/>
             <a:ext cx="1828800" cy="292608"/>
           </a:xfrm>
           <a:prstGeom prst="rect">
@@ -26370,7 +25553,7 @@
         </p:nvSpPr>
         <p:spPr>
           <a:xfrm>
-            <a:off x="2938272" y="2569464"/>
+            <a:off x="2221992" y="2569464"/>
             <a:ext cx="1828800" cy="201168"/>
           </a:xfrm>
           <a:prstGeom prst="rect">
@@ -26409,7 +25592,7 @@
         </p:nvSpPr>
         <p:spPr>
           <a:xfrm>
-            <a:off x="5803392" y="2258568"/>
+            <a:off x="4370832" y="2258568"/>
             <a:ext cx="1828800" cy="292608"/>
           </a:xfrm>
           <a:prstGeom prst="rect">
@@ -26418,11 +25601,11 @@
             </a:avLst>
           </a:prstGeom>
           <a:solidFill>
-            <a:srgbClr val="DDD6FE"/>
+            <a:srgbClr val="FCE7F3"/>
           </a:solidFill>
           <a:ln w="19050">
             <a:solidFill>
-              <a:srgbClr val="7C3AED"/>
+              <a:srgbClr val="DB2777"/>
             </a:solidFill>
             <a:prstDash val="solid"/>
           </a:ln>
@@ -26443,7 +25626,7 @@
         </p:nvSpPr>
         <p:spPr>
           <a:xfrm>
-            <a:off x="5803392" y="2258568"/>
+            <a:off x="4370832" y="2258568"/>
             <a:ext cx="1828800" cy="292608"/>
           </a:xfrm>
           <a:prstGeom prst="rect">
@@ -26462,13 +25645,13 @@
             <a:r>
               <a:rPr lang="en-US" sz="1300" b="1" dirty="0">
                 <a:solidFill>
-                  <a:srgbClr val="4C1D95"/>
+                  <a:srgbClr val="9D174D"/>
                 </a:solidFill>
                 <a:latin typeface="Trebuchet MS" pitchFamily="34" charset="0"/>
                 <a:ea typeface="Trebuchet MS" pitchFamily="34" charset="-122"/>
                 <a:cs typeface="Trebuchet MS" pitchFamily="34" charset="-120"/>
               </a:rPr>
-              <a:t>less</a:t>
+              <a:t>ful</a:t>
             </a:r>
             <a:endParaRPr lang="en-US" sz="1300" dirty="0"/>
           </a:p>
@@ -26482,7 +25665,7 @@
         </p:nvSpPr>
         <p:spPr>
           <a:xfrm>
-            <a:off x="5803392" y="2569464"/>
+            <a:off x="4370832" y="2569464"/>
             <a:ext cx="1828800" cy="201168"/>
           </a:xfrm>
           <a:prstGeom prst="rect">
@@ -26507,7 +25690,7 @@
                 <a:ea typeface="Calibri" pitchFamily="34" charset="-122"/>
                 <a:cs typeface="Calibri" pitchFamily="34" charset="-120"/>
               </a:rPr>
-              <a:t>without</a:t>
+              <a:t>full of; having the quality of</a:t>
             </a:r>
             <a:endParaRPr lang="en-US" sz="850" dirty="0"/>
           </a:p>
@@ -26516,6 +25699,118 @@
       <p:sp>
         <p:nvSpPr>
           <p:cNvPr id="22" name="Shape 20"/>
+          <p:cNvSpPr/>
+          <p:nvPr/>
+        </p:nvSpPr>
+        <p:spPr>
+          <a:xfrm>
+            <a:off x="6519672" y="2258568"/>
+            <a:ext cx="1828800" cy="292608"/>
+          </a:xfrm>
+          <a:prstGeom prst="rect">
+            <a:avLst>
+              <a:gd name="adj" fmla="val 25000"/>
+            </a:avLst>
+          </a:prstGeom>
+          <a:solidFill>
+            <a:srgbClr val="FCE7F3"/>
+          </a:solidFill>
+          <a:ln w="19050">
+            <a:solidFill>
+              <a:srgbClr val="DB2777"/>
+            </a:solidFill>
+            <a:prstDash val="solid"/>
+          </a:ln>
+          <a:effectLst>
+            <a:outerShdw sx="100000" sy="100000" kx="0" ky="0" algn="bl" rotWithShape="0" blurRad="101600" dist="38100" dir="8100000">
+              <a:srgbClr val="000000">
+                <a:alpha val="12000"/>
+              </a:srgbClr>
+            </a:outerShdw>
+          </a:effectLst>
+        </p:spPr>
+      </p:sp>
+      <p:sp>
+        <p:nvSpPr>
+          <p:cNvPr id="23" name="Text 21"/>
+          <p:cNvSpPr/>
+          <p:nvPr/>
+        </p:nvSpPr>
+        <p:spPr>
+          <a:xfrm>
+            <a:off x="6519672" y="2258568"/>
+            <a:ext cx="1828800" cy="292608"/>
+          </a:xfrm>
+          <a:prstGeom prst="rect">
+            <a:avLst/>
+          </a:prstGeom>
+          <a:noFill/>
+          <a:ln/>
+        </p:spPr>
+        <p:txBody>
+          <a:bodyPr wrap="square" lIns="0" tIns="0" rIns="0" bIns="0" rtlCol="0" anchor="ctr"/>
+          <a:lstStyle/>
+          <a:p>
+            <a:pPr algn="ctr" indent="0" marL="0">
+              <a:buNone/>
+            </a:pPr>
+            <a:r>
+              <a:rPr lang="en-US" sz="1300" b="1" dirty="0">
+                <a:solidFill>
+                  <a:srgbClr val="9D174D"/>
+                </a:solidFill>
+                <a:latin typeface="Trebuchet MS" pitchFamily="34" charset="0"/>
+                <a:ea typeface="Trebuchet MS" pitchFamily="34" charset="-122"/>
+                <a:cs typeface="Trebuchet MS" pitchFamily="34" charset="-120"/>
+              </a:rPr>
+              <a:t>ness</a:t>
+            </a:r>
+            <a:endParaRPr lang="en-US" sz="1300" dirty="0"/>
+          </a:p>
+        </p:txBody>
+      </p:sp>
+      <p:sp>
+        <p:nvSpPr>
+          <p:cNvPr id="24" name="Text 22"/>
+          <p:cNvSpPr/>
+          <p:nvPr/>
+        </p:nvSpPr>
+        <p:spPr>
+          <a:xfrm>
+            <a:off x="6519672" y="2569464"/>
+            <a:ext cx="1828800" cy="201168"/>
+          </a:xfrm>
+          <a:prstGeom prst="rect">
+            <a:avLst/>
+          </a:prstGeom>
+          <a:noFill/>
+          <a:ln/>
+        </p:spPr>
+        <p:txBody>
+          <a:bodyPr wrap="square" lIns="0" tIns="0" rIns="0" bIns="0" rtlCol="0" anchor="t"/>
+          <a:lstStyle/>
+          <a:p>
+            <a:pPr algn="ctr" indent="0" marL="0">
+              <a:buNone/>
+            </a:pPr>
+            <a:r>
+              <a:rPr lang="en-US" sz="850" dirty="0">
+                <a:solidFill>
+                  <a:srgbClr val="475569"/>
+                </a:solidFill>
+                <a:latin typeface="Calibri" pitchFamily="34" charset="0"/>
+                <a:ea typeface="Calibri" pitchFamily="34" charset="-122"/>
+                <a:cs typeface="Calibri" pitchFamily="34" charset="-120"/>
+              </a:rPr>
+              <a:t>the state or quality of being</a:t>
+            </a:r>
+            <a:endParaRPr lang="en-US" sz="850" dirty="0"/>
+          </a:p>
+        </p:txBody>
+      </p:sp>
+      <p:sp>
+        <p:nvSpPr>
+          <p:cNvPr id="25" name="Shape 23"/>
           <p:cNvSpPr/>
           <p:nvPr/>
         </p:nvSpPr>
@@ -26542,7 +25837,7 @@
       </p:sp>
       <p:sp>
         <p:nvSpPr>
-          <p:cNvPr id="23" name="Text 21"/>
+          <p:cNvPr id="26" name="Text 24"/>
           <p:cNvSpPr/>
           <p:nvPr/>
         </p:nvSpPr>
@@ -26581,7 +25876,7 @@
       </p:sp>
       <p:sp>
         <p:nvSpPr>
-          <p:cNvPr id="24" name="Shape 22"/>
+          <p:cNvPr id="27" name="Shape 25"/>
           <p:cNvSpPr/>
           <p:nvPr/>
         </p:nvSpPr>
@@ -26608,13 +25903,13 @@
       </p:sp>
       <p:sp>
         <p:nvSpPr>
-          <p:cNvPr id="25" name="Shape 23"/>
-          <p:cNvSpPr/>
-          <p:nvPr/>
-        </p:nvSpPr>
-        <p:spPr>
-          <a:xfrm>
-            <a:off x="2999232" y="3364992"/>
+          <p:cNvPr id="28" name="Shape 26"/>
+          <p:cNvSpPr/>
+          <p:nvPr/>
+        </p:nvSpPr>
+        <p:spPr>
+          <a:xfrm>
+            <a:off x="2313432" y="3364992"/>
             <a:ext cx="1645920" cy="475488"/>
           </a:xfrm>
           <a:prstGeom prst="rect">
@@ -26635,13 +25930,13 @@
       </p:sp>
       <p:sp>
         <p:nvSpPr>
-          <p:cNvPr id="26" name="Text 24"/>
-          <p:cNvSpPr/>
-          <p:nvPr/>
-        </p:nvSpPr>
-        <p:spPr>
-          <a:xfrm>
-            <a:off x="2999232" y="3364992"/>
+          <p:cNvPr id="29" name="Text 27"/>
+          <p:cNvSpPr/>
+          <p:nvPr/>
+        </p:nvSpPr>
+        <p:spPr>
+          <a:xfrm>
+            <a:off x="2313432" y="3364992"/>
             <a:ext cx="1645920" cy="475488"/>
           </a:xfrm>
           <a:prstGeom prst="rect">
@@ -26674,14 +25969,14 @@
       </p:sp>
       <p:sp>
         <p:nvSpPr>
-          <p:cNvPr id="27" name="Text 25"/>
-          <p:cNvSpPr/>
-          <p:nvPr/>
-        </p:nvSpPr>
-        <p:spPr>
-          <a:xfrm>
-            <a:off x="4645152" y="3364992"/>
-            <a:ext cx="1097280" cy="475488"/>
+          <p:cNvPr id="30" name="Text 28"/>
+          <p:cNvSpPr/>
+          <p:nvPr/>
+        </p:nvSpPr>
+        <p:spPr>
+          <a:xfrm>
+            <a:off x="3959352" y="3364992"/>
+            <a:ext cx="411480" cy="475488"/>
           </a:xfrm>
           <a:prstGeom prst="rect">
             <a:avLst/>
@@ -26713,13 +26008,13 @@
       </p:sp>
       <p:sp>
         <p:nvSpPr>
-          <p:cNvPr id="28" name="Shape 26"/>
-          <p:cNvSpPr/>
-          <p:nvPr/>
-        </p:nvSpPr>
-        <p:spPr>
-          <a:xfrm>
-            <a:off x="5742432" y="3364992"/>
+          <p:cNvPr id="31" name="Shape 29"/>
+          <p:cNvSpPr/>
+          <p:nvPr/>
+        </p:nvSpPr>
+        <p:spPr>
+          <a:xfrm>
+            <a:off x="4370832" y="3364992"/>
             <a:ext cx="1645920" cy="475488"/>
           </a:xfrm>
           <a:prstGeom prst="rect">
@@ -26740,13 +26035,13 @@
       </p:sp>
       <p:sp>
         <p:nvSpPr>
-          <p:cNvPr id="29" name="Text 27"/>
-          <p:cNvSpPr/>
-          <p:nvPr/>
-        </p:nvSpPr>
-        <p:spPr>
-          <a:xfrm>
-            <a:off x="5742432" y="3364992"/>
+          <p:cNvPr id="32" name="Text 30"/>
+          <p:cNvSpPr/>
+          <p:nvPr/>
+        </p:nvSpPr>
+        <p:spPr>
+          <a:xfrm>
+            <a:off x="4370832" y="3364992"/>
             <a:ext cx="1645920" cy="475488"/>
           </a:xfrm>
           <a:prstGeom prst="rect">
@@ -26771,7 +26066,7 @@
                 <a:ea typeface="Trebuchet MS" pitchFamily="34" charset="-122"/>
                 <a:cs typeface="Trebuchet MS" pitchFamily="34" charset="-120"/>
               </a:rPr>
-              <a:t>less</a:t>
+              <a:t>ful</a:t>
             </a:r>
             <a:endParaRPr lang="en-US" sz="1400" dirty="0"/>
           </a:p>
@@ -26779,7 +26074,112 @@
       </p:sp>
       <p:sp>
         <p:nvSpPr>
-          <p:cNvPr id="30" name="Shape 28"/>
+          <p:cNvPr id="33" name="Text 31"/>
+          <p:cNvSpPr/>
+          <p:nvPr/>
+        </p:nvSpPr>
+        <p:spPr>
+          <a:xfrm>
+            <a:off x="6016752" y="3364992"/>
+            <a:ext cx="411480" cy="475488"/>
+          </a:xfrm>
+          <a:prstGeom prst="rect">
+            <a:avLst/>
+          </a:prstGeom>
+          <a:noFill/>
+          <a:ln/>
+        </p:spPr>
+        <p:txBody>
+          <a:bodyPr wrap="square" lIns="0" tIns="0" rIns="0" bIns="0" rtlCol="0" anchor="ctr"/>
+          <a:lstStyle/>
+          <a:p>
+            <a:pPr algn="ctr" indent="0" marL="0">
+              <a:buNone/>
+            </a:pPr>
+            <a:r>
+              <a:rPr lang="en-US" sz="1600" b="1" dirty="0">
+                <a:solidFill>
+                  <a:srgbClr val="0D9488"/>
+                </a:solidFill>
+                <a:latin typeface="Trebuchet MS" pitchFamily="34" charset="0"/>
+                <a:ea typeface="Trebuchet MS" pitchFamily="34" charset="-122"/>
+                <a:cs typeface="Trebuchet MS" pitchFamily="34" charset="-120"/>
+              </a:rPr>
+              <a:t>·</a:t>
+            </a:r>
+            <a:endParaRPr lang="en-US" sz="1600" dirty="0"/>
+          </a:p>
+        </p:txBody>
+      </p:sp>
+      <p:sp>
+        <p:nvSpPr>
+          <p:cNvPr id="34" name="Shape 32"/>
+          <p:cNvSpPr/>
+          <p:nvPr/>
+        </p:nvSpPr>
+        <p:spPr>
+          <a:xfrm>
+            <a:off x="6428232" y="3364992"/>
+            <a:ext cx="1645920" cy="475488"/>
+          </a:xfrm>
+          <a:prstGeom prst="rect">
+            <a:avLst>
+              <a:gd name="adj" fmla="val 9615"/>
+            </a:avLst>
+          </a:prstGeom>
+          <a:solidFill>
+            <a:srgbClr val="FFFFFF"/>
+          </a:solidFill>
+          <a:ln w="12700">
+            <a:solidFill>
+              <a:srgbClr val="0D9488"/>
+            </a:solidFill>
+            <a:prstDash val="solid"/>
+          </a:ln>
+        </p:spPr>
+      </p:sp>
+      <p:sp>
+        <p:nvSpPr>
+          <p:cNvPr id="35" name="Text 33"/>
+          <p:cNvSpPr/>
+          <p:nvPr/>
+        </p:nvSpPr>
+        <p:spPr>
+          <a:xfrm>
+            <a:off x="6428232" y="3364992"/>
+            <a:ext cx="1645920" cy="475488"/>
+          </a:xfrm>
+          <a:prstGeom prst="rect">
+            <a:avLst/>
+          </a:prstGeom>
+          <a:noFill/>
+          <a:ln/>
+        </p:spPr>
+        <p:txBody>
+          <a:bodyPr wrap="square" lIns="0" tIns="0" rIns="0" bIns="0" rtlCol="0" anchor="ctr"/>
+          <a:lstStyle/>
+          <a:p>
+            <a:pPr algn="ctr" indent="0" marL="0">
+              <a:buNone/>
+            </a:pPr>
+            <a:r>
+              <a:rPr lang="en-US" sz="1400" b="1" dirty="0">
+                <a:solidFill>
+                  <a:srgbClr val="0D9488"/>
+                </a:solidFill>
+                <a:latin typeface="Trebuchet MS" pitchFamily="34" charset="0"/>
+                <a:ea typeface="Trebuchet MS" pitchFamily="34" charset="-122"/>
+                <a:cs typeface="Trebuchet MS" pitchFamily="34" charset="-120"/>
+              </a:rPr>
+              <a:t>ness</a:t>
+            </a:r>
+            <a:endParaRPr lang="en-US" sz="1400" dirty="0"/>
+          </a:p>
+        </p:txBody>
+      </p:sp>
+      <p:sp>
+        <p:nvSpPr>
+          <p:cNvPr id="36" name="Shape 34"/>
           <p:cNvSpPr/>
           <p:nvPr/>
         </p:nvSpPr>
@@ -26806,7 +26206,7 @@
       </p:sp>
       <p:sp>
         <p:nvSpPr>
-          <p:cNvPr id="31" name="Text 29"/>
+          <p:cNvPr id="37" name="Text 35"/>
           <p:cNvSpPr/>
           <p:nvPr/>
         </p:nvSpPr>
@@ -26845,7 +26245,7 @@
       </p:sp>
       <p:sp>
         <p:nvSpPr>
-          <p:cNvPr id="32" name="Shape 30"/>
+          <p:cNvPr id="38" name="Shape 36"/>
           <p:cNvSpPr/>
           <p:nvPr/>
         </p:nvSpPr>
@@ -26872,7 +26272,7 @@
       </p:sp>
       <p:sp>
         <p:nvSpPr>
-          <p:cNvPr id="33" name="Text 31"/>
+          <p:cNvPr id="39" name="Text 37"/>
           <p:cNvSpPr/>
           <p:nvPr/>
         </p:nvSpPr>
@@ -27195,7 +26595,7 @@
                 <a:ea typeface="Calibri" pitchFamily="34" charset="-122"/>
                 <a:cs typeface="Calibri" pitchFamily="34" charset="-120"/>
               </a:rPr>
-              <a:t>Word Labs  •  wordlabs.app  •  Root: 'thank' = express gratitude or appreciation</a:t>
+              <a:t>Word Labs  •  wordlabs.app  •  Root: 'thank' = express gratitude or praise</a:t>
             </a:r>
             <a:endParaRPr lang="en-US" sz="800" dirty="0"/>
           </a:p>
@@ -27334,7 +26734,7 @@
                 <a:ea typeface="Trebuchet MS" pitchFamily="34" charset="-122"/>
                 <a:cs typeface="Trebuchet MS" pitchFamily="34" charset="-120"/>
               </a:rPr>
-              <a:t>thankless</a:t>
+              <a:t>thankfulness</a:t>
             </a:r>
             <a:endParaRPr lang="en-US" sz="2800" dirty="0"/>
           </a:p>
@@ -27414,7 +26814,7 @@
         </p:nvSpPr>
         <p:spPr>
           <a:xfrm>
-            <a:off x="2938272" y="2258568"/>
+            <a:off x="2221992" y="2258568"/>
             <a:ext cx="1828800" cy="292608"/>
           </a:xfrm>
           <a:prstGeom prst="rect">
@@ -27448,7 +26848,7 @@
         </p:nvSpPr>
         <p:spPr>
           <a:xfrm>
-            <a:off x="2938272" y="2258568"/>
+            <a:off x="2221992" y="2258568"/>
             <a:ext cx="1828800" cy="292608"/>
           </a:xfrm>
           <a:prstGeom prst="rect">
@@ -27487,7 +26887,7 @@
         </p:nvSpPr>
         <p:spPr>
           <a:xfrm>
-            <a:off x="2938272" y="2569464"/>
+            <a:off x="2221992" y="2569464"/>
             <a:ext cx="1828800" cy="201168"/>
           </a:xfrm>
           <a:prstGeom prst="rect">
@@ -27526,7 +26926,7 @@
         </p:nvSpPr>
         <p:spPr>
           <a:xfrm>
-            <a:off x="5803392" y="2258568"/>
+            <a:off x="4370832" y="2258568"/>
             <a:ext cx="1828800" cy="292608"/>
           </a:xfrm>
           <a:prstGeom prst="rect">
@@ -27535,11 +26935,11 @@
             </a:avLst>
           </a:prstGeom>
           <a:solidFill>
-            <a:srgbClr val="DDD6FE"/>
+            <a:srgbClr val="FCE7F3"/>
           </a:solidFill>
           <a:ln w="19050">
             <a:solidFill>
-              <a:srgbClr val="7C3AED"/>
+              <a:srgbClr val="DB2777"/>
             </a:solidFill>
             <a:prstDash val="solid"/>
           </a:ln>
@@ -27560,7 +26960,7 @@
         </p:nvSpPr>
         <p:spPr>
           <a:xfrm>
-            <a:off x="5803392" y="2258568"/>
+            <a:off x="4370832" y="2258568"/>
             <a:ext cx="1828800" cy="292608"/>
           </a:xfrm>
           <a:prstGeom prst="rect">
@@ -27579,13 +26979,13 @@
             <a:r>
               <a:rPr lang="en-US" sz="1300" b="1" dirty="0">
                 <a:solidFill>
-                  <a:srgbClr val="4C1D95"/>
+                  <a:srgbClr val="9D174D"/>
                 </a:solidFill>
                 <a:latin typeface="Trebuchet MS" pitchFamily="34" charset="0"/>
                 <a:ea typeface="Trebuchet MS" pitchFamily="34" charset="-122"/>
                 <a:cs typeface="Trebuchet MS" pitchFamily="34" charset="-120"/>
               </a:rPr>
-              <a:t>less</a:t>
+              <a:t>ful</a:t>
             </a:r>
             <a:endParaRPr lang="en-US" sz="1300" dirty="0"/>
           </a:p>
@@ -27599,7 +26999,7 @@
         </p:nvSpPr>
         <p:spPr>
           <a:xfrm>
-            <a:off x="5803392" y="2569464"/>
+            <a:off x="4370832" y="2569464"/>
             <a:ext cx="1828800" cy="201168"/>
           </a:xfrm>
           <a:prstGeom prst="rect">
@@ -27624,7 +27024,7 @@
                 <a:ea typeface="Calibri" pitchFamily="34" charset="-122"/>
                 <a:cs typeface="Calibri" pitchFamily="34" charset="-120"/>
               </a:rPr>
-              <a:t>without</a:t>
+              <a:t>full of; having the quality of</a:t>
             </a:r>
             <a:endParaRPr lang="en-US" sz="850" dirty="0"/>
           </a:p>
@@ -27633,6 +27033,118 @@
       <p:sp>
         <p:nvSpPr>
           <p:cNvPr id="22" name="Shape 20"/>
+          <p:cNvSpPr/>
+          <p:nvPr/>
+        </p:nvSpPr>
+        <p:spPr>
+          <a:xfrm>
+            <a:off x="6519672" y="2258568"/>
+            <a:ext cx="1828800" cy="292608"/>
+          </a:xfrm>
+          <a:prstGeom prst="rect">
+            <a:avLst>
+              <a:gd name="adj" fmla="val 25000"/>
+            </a:avLst>
+          </a:prstGeom>
+          <a:solidFill>
+            <a:srgbClr val="FCE7F3"/>
+          </a:solidFill>
+          <a:ln w="19050">
+            <a:solidFill>
+              <a:srgbClr val="DB2777"/>
+            </a:solidFill>
+            <a:prstDash val="solid"/>
+          </a:ln>
+          <a:effectLst>
+            <a:outerShdw sx="100000" sy="100000" kx="0" ky="0" algn="bl" rotWithShape="0" blurRad="101600" dist="38100" dir="8100000">
+              <a:srgbClr val="000000">
+                <a:alpha val="12000"/>
+              </a:srgbClr>
+            </a:outerShdw>
+          </a:effectLst>
+        </p:spPr>
+      </p:sp>
+      <p:sp>
+        <p:nvSpPr>
+          <p:cNvPr id="23" name="Text 21"/>
+          <p:cNvSpPr/>
+          <p:nvPr/>
+        </p:nvSpPr>
+        <p:spPr>
+          <a:xfrm>
+            <a:off x="6519672" y="2258568"/>
+            <a:ext cx="1828800" cy="292608"/>
+          </a:xfrm>
+          <a:prstGeom prst="rect">
+            <a:avLst/>
+          </a:prstGeom>
+          <a:noFill/>
+          <a:ln/>
+        </p:spPr>
+        <p:txBody>
+          <a:bodyPr wrap="square" lIns="0" tIns="0" rIns="0" bIns="0" rtlCol="0" anchor="ctr"/>
+          <a:lstStyle/>
+          <a:p>
+            <a:pPr algn="ctr" indent="0" marL="0">
+              <a:buNone/>
+            </a:pPr>
+            <a:r>
+              <a:rPr lang="en-US" sz="1300" b="1" dirty="0">
+                <a:solidFill>
+                  <a:srgbClr val="9D174D"/>
+                </a:solidFill>
+                <a:latin typeface="Trebuchet MS" pitchFamily="34" charset="0"/>
+                <a:ea typeface="Trebuchet MS" pitchFamily="34" charset="-122"/>
+                <a:cs typeface="Trebuchet MS" pitchFamily="34" charset="-120"/>
+              </a:rPr>
+              <a:t>ness</a:t>
+            </a:r>
+            <a:endParaRPr lang="en-US" sz="1300" dirty="0"/>
+          </a:p>
+        </p:txBody>
+      </p:sp>
+      <p:sp>
+        <p:nvSpPr>
+          <p:cNvPr id="24" name="Text 22"/>
+          <p:cNvSpPr/>
+          <p:nvPr/>
+        </p:nvSpPr>
+        <p:spPr>
+          <a:xfrm>
+            <a:off x="6519672" y="2569464"/>
+            <a:ext cx="1828800" cy="201168"/>
+          </a:xfrm>
+          <a:prstGeom prst="rect">
+            <a:avLst/>
+          </a:prstGeom>
+          <a:noFill/>
+          <a:ln/>
+        </p:spPr>
+        <p:txBody>
+          <a:bodyPr wrap="square" lIns="0" tIns="0" rIns="0" bIns="0" rtlCol="0" anchor="t"/>
+          <a:lstStyle/>
+          <a:p>
+            <a:pPr algn="ctr" indent="0" marL="0">
+              <a:buNone/>
+            </a:pPr>
+            <a:r>
+              <a:rPr lang="en-US" sz="850" dirty="0">
+                <a:solidFill>
+                  <a:srgbClr val="475569"/>
+                </a:solidFill>
+                <a:latin typeface="Calibri" pitchFamily="34" charset="0"/>
+                <a:ea typeface="Calibri" pitchFamily="34" charset="-122"/>
+                <a:cs typeface="Calibri" pitchFamily="34" charset="-120"/>
+              </a:rPr>
+              <a:t>the state or quality of being</a:t>
+            </a:r>
+            <a:endParaRPr lang="en-US" sz="850" dirty="0"/>
+          </a:p>
+        </p:txBody>
+      </p:sp>
+      <p:sp>
+        <p:nvSpPr>
+          <p:cNvPr id="25" name="Shape 23"/>
           <p:cNvSpPr/>
           <p:nvPr/>
         </p:nvSpPr>
@@ -27659,7 +27171,7 @@
       </p:sp>
       <p:sp>
         <p:nvSpPr>
-          <p:cNvPr id="23" name="Text 21"/>
+          <p:cNvPr id="26" name="Text 24"/>
           <p:cNvSpPr/>
           <p:nvPr/>
         </p:nvSpPr>
@@ -27698,7 +27210,7 @@
       </p:sp>
       <p:sp>
         <p:nvSpPr>
-          <p:cNvPr id="24" name="Shape 22"/>
+          <p:cNvPr id="27" name="Shape 25"/>
           <p:cNvSpPr/>
           <p:nvPr/>
         </p:nvSpPr>
@@ -27725,13 +27237,13 @@
       </p:sp>
       <p:sp>
         <p:nvSpPr>
-          <p:cNvPr id="25" name="Shape 23"/>
-          <p:cNvSpPr/>
-          <p:nvPr/>
-        </p:nvSpPr>
-        <p:spPr>
-          <a:xfrm>
-            <a:off x="2999232" y="3364992"/>
+          <p:cNvPr id="28" name="Shape 26"/>
+          <p:cNvSpPr/>
+          <p:nvPr/>
+        </p:nvSpPr>
+        <p:spPr>
+          <a:xfrm>
+            <a:off x="2313432" y="3364992"/>
             <a:ext cx="1645920" cy="475488"/>
           </a:xfrm>
           <a:prstGeom prst="rect">
@@ -27752,13 +27264,13 @@
       </p:sp>
       <p:sp>
         <p:nvSpPr>
-          <p:cNvPr id="26" name="Text 24"/>
-          <p:cNvSpPr/>
-          <p:nvPr/>
-        </p:nvSpPr>
-        <p:spPr>
-          <a:xfrm>
-            <a:off x="2999232" y="3364992"/>
+          <p:cNvPr id="29" name="Text 27"/>
+          <p:cNvSpPr/>
+          <p:nvPr/>
+        </p:nvSpPr>
+        <p:spPr>
+          <a:xfrm>
+            <a:off x="2313432" y="3364992"/>
             <a:ext cx="1645920" cy="475488"/>
           </a:xfrm>
           <a:prstGeom prst="rect">
@@ -27791,14 +27303,14 @@
       </p:sp>
       <p:sp>
         <p:nvSpPr>
-          <p:cNvPr id="27" name="Text 25"/>
-          <p:cNvSpPr/>
-          <p:nvPr/>
-        </p:nvSpPr>
-        <p:spPr>
-          <a:xfrm>
-            <a:off x="4645152" y="3364992"/>
-            <a:ext cx="1097280" cy="475488"/>
+          <p:cNvPr id="30" name="Text 28"/>
+          <p:cNvSpPr/>
+          <p:nvPr/>
+        </p:nvSpPr>
+        <p:spPr>
+          <a:xfrm>
+            <a:off x="3959352" y="3364992"/>
+            <a:ext cx="411480" cy="475488"/>
           </a:xfrm>
           <a:prstGeom prst="rect">
             <a:avLst/>
@@ -27830,13 +27342,13 @@
       </p:sp>
       <p:sp>
         <p:nvSpPr>
-          <p:cNvPr id="28" name="Shape 26"/>
-          <p:cNvSpPr/>
-          <p:nvPr/>
-        </p:nvSpPr>
-        <p:spPr>
-          <a:xfrm>
-            <a:off x="5742432" y="3364992"/>
+          <p:cNvPr id="31" name="Shape 29"/>
+          <p:cNvSpPr/>
+          <p:nvPr/>
+        </p:nvSpPr>
+        <p:spPr>
+          <a:xfrm>
+            <a:off x="4370832" y="3364992"/>
             <a:ext cx="1645920" cy="475488"/>
           </a:xfrm>
           <a:prstGeom prst="rect">
@@ -27857,13 +27369,13 @@
       </p:sp>
       <p:sp>
         <p:nvSpPr>
-          <p:cNvPr id="29" name="Text 27"/>
-          <p:cNvSpPr/>
-          <p:nvPr/>
-        </p:nvSpPr>
-        <p:spPr>
-          <a:xfrm>
-            <a:off x="5742432" y="3364992"/>
+          <p:cNvPr id="32" name="Text 30"/>
+          <p:cNvSpPr/>
+          <p:nvPr/>
+        </p:nvSpPr>
+        <p:spPr>
+          <a:xfrm>
+            <a:off x="4370832" y="3364992"/>
             <a:ext cx="1645920" cy="475488"/>
           </a:xfrm>
           <a:prstGeom prst="rect">
@@ -27888,7 +27400,7 @@
                 <a:ea typeface="Trebuchet MS" pitchFamily="34" charset="-122"/>
                 <a:cs typeface="Trebuchet MS" pitchFamily="34" charset="-120"/>
               </a:rPr>
-              <a:t>less</a:t>
+              <a:t>ful</a:t>
             </a:r>
             <a:endParaRPr lang="en-US" sz="1400" dirty="0"/>
           </a:p>
@@ -27896,7 +27408,112 @@
       </p:sp>
       <p:sp>
         <p:nvSpPr>
-          <p:cNvPr id="30" name="Shape 28"/>
+          <p:cNvPr id="33" name="Text 31"/>
+          <p:cNvSpPr/>
+          <p:nvPr/>
+        </p:nvSpPr>
+        <p:spPr>
+          <a:xfrm>
+            <a:off x="6016752" y="3364992"/>
+            <a:ext cx="411480" cy="475488"/>
+          </a:xfrm>
+          <a:prstGeom prst="rect">
+            <a:avLst/>
+          </a:prstGeom>
+          <a:noFill/>
+          <a:ln/>
+        </p:spPr>
+        <p:txBody>
+          <a:bodyPr wrap="square" lIns="0" tIns="0" rIns="0" bIns="0" rtlCol="0" anchor="ctr"/>
+          <a:lstStyle/>
+          <a:p>
+            <a:pPr algn="ctr" indent="0" marL="0">
+              <a:buNone/>
+            </a:pPr>
+            <a:r>
+              <a:rPr lang="en-US" sz="1600" b="1" dirty="0">
+                <a:solidFill>
+                  <a:srgbClr val="0D9488"/>
+                </a:solidFill>
+                <a:latin typeface="Trebuchet MS" pitchFamily="34" charset="0"/>
+                <a:ea typeface="Trebuchet MS" pitchFamily="34" charset="-122"/>
+                <a:cs typeface="Trebuchet MS" pitchFamily="34" charset="-120"/>
+              </a:rPr>
+              <a:t>·</a:t>
+            </a:r>
+            <a:endParaRPr lang="en-US" sz="1600" dirty="0"/>
+          </a:p>
+        </p:txBody>
+      </p:sp>
+      <p:sp>
+        <p:nvSpPr>
+          <p:cNvPr id="34" name="Shape 32"/>
+          <p:cNvSpPr/>
+          <p:nvPr/>
+        </p:nvSpPr>
+        <p:spPr>
+          <a:xfrm>
+            <a:off x="6428232" y="3364992"/>
+            <a:ext cx="1645920" cy="475488"/>
+          </a:xfrm>
+          <a:prstGeom prst="rect">
+            <a:avLst>
+              <a:gd name="adj" fmla="val 9615"/>
+            </a:avLst>
+          </a:prstGeom>
+          <a:solidFill>
+            <a:srgbClr val="FFFFFF"/>
+          </a:solidFill>
+          <a:ln w="12700">
+            <a:solidFill>
+              <a:srgbClr val="0D9488"/>
+            </a:solidFill>
+            <a:prstDash val="solid"/>
+          </a:ln>
+        </p:spPr>
+      </p:sp>
+      <p:sp>
+        <p:nvSpPr>
+          <p:cNvPr id="35" name="Text 33"/>
+          <p:cNvSpPr/>
+          <p:nvPr/>
+        </p:nvSpPr>
+        <p:spPr>
+          <a:xfrm>
+            <a:off x="6428232" y="3364992"/>
+            <a:ext cx="1645920" cy="475488"/>
+          </a:xfrm>
+          <a:prstGeom prst="rect">
+            <a:avLst/>
+          </a:prstGeom>
+          <a:noFill/>
+          <a:ln/>
+        </p:spPr>
+        <p:txBody>
+          <a:bodyPr wrap="square" lIns="0" tIns="0" rIns="0" bIns="0" rtlCol="0" anchor="ctr"/>
+          <a:lstStyle/>
+          <a:p>
+            <a:pPr algn="ctr" indent="0" marL="0">
+              <a:buNone/>
+            </a:pPr>
+            <a:r>
+              <a:rPr lang="en-US" sz="1400" b="1" dirty="0">
+                <a:solidFill>
+                  <a:srgbClr val="0D9488"/>
+                </a:solidFill>
+                <a:latin typeface="Trebuchet MS" pitchFamily="34" charset="0"/>
+                <a:ea typeface="Trebuchet MS" pitchFamily="34" charset="-122"/>
+                <a:cs typeface="Trebuchet MS" pitchFamily="34" charset="-120"/>
+              </a:rPr>
+              <a:t>ness</a:t>
+            </a:r>
+            <a:endParaRPr lang="en-US" sz="1400" dirty="0"/>
+          </a:p>
+        </p:txBody>
+      </p:sp>
+      <p:sp>
+        <p:nvSpPr>
+          <p:cNvPr id="36" name="Shape 34"/>
           <p:cNvSpPr/>
           <p:nvPr/>
         </p:nvSpPr>
@@ -27923,7 +27540,7 @@
       </p:sp>
       <p:sp>
         <p:nvSpPr>
-          <p:cNvPr id="31" name="Text 29"/>
+          <p:cNvPr id="37" name="Text 35"/>
           <p:cNvSpPr/>
           <p:nvPr/>
         </p:nvSpPr>
@@ -27962,7 +27579,7 @@
       </p:sp>
       <p:sp>
         <p:nvSpPr>
-          <p:cNvPr id="32" name="Shape 30"/>
+          <p:cNvPr id="38" name="Shape 36"/>
           <p:cNvSpPr/>
           <p:nvPr/>
         </p:nvSpPr>
@@ -27989,14 +27606,14 @@
       </p:sp>
       <p:sp>
         <p:nvSpPr>
-          <p:cNvPr id="33" name="Shape 31"/>
-          <p:cNvSpPr/>
-          <p:nvPr/>
-        </p:nvSpPr>
-        <p:spPr>
-          <a:xfrm>
-            <a:off x="2124837" y="4169664"/>
-            <a:ext cx="685800" cy="475488"/>
+          <p:cNvPr id="39" name="Shape 37"/>
+          <p:cNvSpPr/>
+          <p:nvPr/>
+        </p:nvSpPr>
+        <p:spPr>
+          <a:xfrm>
+            <a:off x="1951828" y="4169664"/>
+            <a:ext cx="603504" cy="475488"/>
           </a:xfrm>
           <a:prstGeom prst="rect">
             <a:avLst>
@@ -28016,14 +27633,14 @@
       </p:sp>
       <p:sp>
         <p:nvSpPr>
-          <p:cNvPr id="34" name="Text 32"/>
-          <p:cNvSpPr/>
-          <p:nvPr/>
-        </p:nvSpPr>
-        <p:spPr>
-          <a:xfrm>
-            <a:off x="2124837" y="4169664"/>
-            <a:ext cx="685800" cy="475488"/>
+          <p:cNvPr id="40" name="Text 38"/>
+          <p:cNvSpPr/>
+          <p:nvPr/>
+        </p:nvSpPr>
+        <p:spPr>
+          <a:xfrm>
+            <a:off x="1951828" y="4169664"/>
+            <a:ext cx="603504" cy="475488"/>
           </a:xfrm>
           <a:prstGeom prst="rect">
             <a:avLst/>
@@ -28055,14 +27672,14 @@
       </p:sp>
       <p:sp>
         <p:nvSpPr>
-          <p:cNvPr id="35" name="Shape 33"/>
-          <p:cNvSpPr/>
-          <p:nvPr/>
-        </p:nvSpPr>
-        <p:spPr>
-          <a:xfrm>
-            <a:off x="3033522" y="4169664"/>
-            <a:ext cx="685800" cy="475488"/>
+          <p:cNvPr id="41" name="Shape 39"/>
+          <p:cNvSpPr/>
+          <p:nvPr/>
+        </p:nvSpPr>
+        <p:spPr>
+          <a:xfrm>
+            <a:off x="2605209" y="4169664"/>
+            <a:ext cx="603504" cy="475488"/>
           </a:xfrm>
           <a:prstGeom prst="rect">
             <a:avLst>
@@ -28082,14 +27699,14 @@
       </p:sp>
       <p:sp>
         <p:nvSpPr>
-          <p:cNvPr id="36" name="Text 34"/>
-          <p:cNvSpPr/>
-          <p:nvPr/>
-        </p:nvSpPr>
-        <p:spPr>
-          <a:xfrm>
-            <a:off x="3033522" y="4169664"/>
-            <a:ext cx="685800" cy="475488"/>
+          <p:cNvPr id="42" name="Text 40"/>
+          <p:cNvSpPr/>
+          <p:nvPr/>
+        </p:nvSpPr>
+        <p:spPr>
+          <a:xfrm>
+            <a:off x="2605209" y="4169664"/>
+            <a:ext cx="603504" cy="475488"/>
           </a:xfrm>
           <a:prstGeom prst="rect">
             <a:avLst/>
@@ -28121,14 +27738,14 @@
       </p:sp>
       <p:sp>
         <p:nvSpPr>
-          <p:cNvPr id="37" name="Shape 35"/>
-          <p:cNvSpPr/>
-          <p:nvPr/>
-        </p:nvSpPr>
-        <p:spPr>
-          <a:xfrm>
-            <a:off x="3942207" y="4169664"/>
-            <a:ext cx="685800" cy="475488"/>
+          <p:cNvPr id="43" name="Shape 41"/>
+          <p:cNvSpPr/>
+          <p:nvPr/>
+        </p:nvSpPr>
+        <p:spPr>
+          <a:xfrm>
+            <a:off x="3258589" y="4169664"/>
+            <a:ext cx="603504" cy="475488"/>
           </a:xfrm>
           <a:prstGeom prst="rect">
             <a:avLst>
@@ -28148,14 +27765,14 @@
       </p:sp>
       <p:sp>
         <p:nvSpPr>
-          <p:cNvPr id="38" name="Text 36"/>
-          <p:cNvSpPr/>
-          <p:nvPr/>
-        </p:nvSpPr>
-        <p:spPr>
-          <a:xfrm>
-            <a:off x="3942207" y="4169664"/>
-            <a:ext cx="685800" cy="475488"/>
+          <p:cNvPr id="44" name="Text 42"/>
+          <p:cNvSpPr/>
+          <p:nvPr/>
+        </p:nvSpPr>
+        <p:spPr>
+          <a:xfrm>
+            <a:off x="3258589" y="4169664"/>
+            <a:ext cx="603504" cy="475488"/>
           </a:xfrm>
           <a:prstGeom prst="rect">
             <a:avLst/>
@@ -28187,14 +27804,14 @@
       </p:sp>
       <p:sp>
         <p:nvSpPr>
-          <p:cNvPr id="39" name="Shape 37"/>
-          <p:cNvSpPr/>
-          <p:nvPr/>
-        </p:nvSpPr>
-        <p:spPr>
-          <a:xfrm>
-            <a:off x="4850892" y="4169664"/>
-            <a:ext cx="685800" cy="475488"/>
+          <p:cNvPr id="45" name="Shape 43"/>
+          <p:cNvSpPr/>
+          <p:nvPr/>
+        </p:nvSpPr>
+        <p:spPr>
+          <a:xfrm>
+            <a:off x="3911969" y="4169664"/>
+            <a:ext cx="603504" cy="475488"/>
           </a:xfrm>
           <a:prstGeom prst="rect">
             <a:avLst>
@@ -28214,14 +27831,14 @@
       </p:sp>
       <p:sp>
         <p:nvSpPr>
-          <p:cNvPr id="40" name="Text 38"/>
-          <p:cNvSpPr/>
-          <p:nvPr/>
-        </p:nvSpPr>
-        <p:spPr>
-          <a:xfrm>
-            <a:off x="4850892" y="4169664"/>
-            <a:ext cx="685800" cy="475488"/>
+          <p:cNvPr id="46" name="Text 44"/>
+          <p:cNvSpPr/>
+          <p:nvPr/>
+        </p:nvSpPr>
+        <p:spPr>
+          <a:xfrm>
+            <a:off x="3911969" y="4169664"/>
+            <a:ext cx="603504" cy="475488"/>
           </a:xfrm>
           <a:prstGeom prst="rect">
             <a:avLst/>
@@ -28253,14 +27870,14 @@
       </p:sp>
       <p:sp>
         <p:nvSpPr>
-          <p:cNvPr id="41" name="Shape 39"/>
-          <p:cNvSpPr/>
-          <p:nvPr/>
-        </p:nvSpPr>
-        <p:spPr>
-          <a:xfrm>
-            <a:off x="5759577" y="4169664"/>
-            <a:ext cx="685800" cy="475488"/>
+          <p:cNvPr id="47" name="Shape 45"/>
+          <p:cNvSpPr/>
+          <p:nvPr/>
+        </p:nvSpPr>
+        <p:spPr>
+          <a:xfrm>
+            <a:off x="4565350" y="4169664"/>
+            <a:ext cx="603504" cy="475488"/>
           </a:xfrm>
           <a:prstGeom prst="rect">
             <a:avLst>
@@ -28280,14 +27897,14 @@
       </p:sp>
       <p:sp>
         <p:nvSpPr>
-          <p:cNvPr id="42" name="Text 40"/>
-          <p:cNvSpPr/>
-          <p:nvPr/>
-        </p:nvSpPr>
-        <p:spPr>
-          <a:xfrm>
-            <a:off x="5759577" y="4169664"/>
-            <a:ext cx="685800" cy="475488"/>
+          <p:cNvPr id="48" name="Text 46"/>
+          <p:cNvSpPr/>
+          <p:nvPr/>
+        </p:nvSpPr>
+        <p:spPr>
+          <a:xfrm>
+            <a:off x="4565350" y="4169664"/>
+            <a:ext cx="603504" cy="475488"/>
           </a:xfrm>
           <a:prstGeom prst="rect">
             <a:avLst/>
@@ -28311,7 +27928,7 @@
                 <a:ea typeface="Trebuchet MS" pitchFamily="34" charset="-122"/>
                 <a:cs typeface="Trebuchet MS" pitchFamily="34" charset="-120"/>
               </a:rPr>
-              <a:t>l</a:t>
+              <a:t>f</a:t>
             </a:r>
             <a:endParaRPr lang="en-US" sz="900" dirty="0"/>
           </a:p>
@@ -28319,14 +27936,14 @@
       </p:sp>
       <p:sp>
         <p:nvSpPr>
-          <p:cNvPr id="43" name="Shape 41"/>
-          <p:cNvSpPr/>
-          <p:nvPr/>
-        </p:nvSpPr>
-        <p:spPr>
-          <a:xfrm>
-            <a:off x="6668262" y="4169664"/>
-            <a:ext cx="685800" cy="475488"/>
+          <p:cNvPr id="49" name="Shape 47"/>
+          <p:cNvSpPr/>
+          <p:nvPr/>
+        </p:nvSpPr>
+        <p:spPr>
+          <a:xfrm>
+            <a:off x="5218730" y="4169664"/>
+            <a:ext cx="603504" cy="475488"/>
           </a:xfrm>
           <a:prstGeom prst="rect">
             <a:avLst>
@@ -28346,14 +27963,14 @@
       </p:sp>
       <p:sp>
         <p:nvSpPr>
-          <p:cNvPr id="44" name="Text 42"/>
-          <p:cNvSpPr/>
-          <p:nvPr/>
-        </p:nvSpPr>
-        <p:spPr>
-          <a:xfrm>
-            <a:off x="6668262" y="4169664"/>
-            <a:ext cx="685800" cy="475488"/>
+          <p:cNvPr id="50" name="Text 48"/>
+          <p:cNvSpPr/>
+          <p:nvPr/>
+        </p:nvSpPr>
+        <p:spPr>
+          <a:xfrm>
+            <a:off x="5218730" y="4169664"/>
+            <a:ext cx="603504" cy="475488"/>
           </a:xfrm>
           <a:prstGeom prst="rect">
             <a:avLst/>
@@ -28377,7 +27994,7 @@
                 <a:ea typeface="Trebuchet MS" pitchFamily="34" charset="-122"/>
                 <a:cs typeface="Trebuchet MS" pitchFamily="34" charset="-120"/>
               </a:rPr>
-              <a:t>e</a:t>
+              <a:t>u</a:t>
             </a:r>
             <a:endParaRPr lang="en-US" sz="900" dirty="0"/>
           </a:p>
@@ -28385,14 +28002,14 @@
       </p:sp>
       <p:sp>
         <p:nvSpPr>
-          <p:cNvPr id="45" name="Shape 43"/>
-          <p:cNvSpPr/>
-          <p:nvPr/>
-        </p:nvSpPr>
-        <p:spPr>
-          <a:xfrm>
-            <a:off x="7576947" y="4169664"/>
-            <a:ext cx="685800" cy="475488"/>
+          <p:cNvPr id="51" name="Shape 49"/>
+          <p:cNvSpPr/>
+          <p:nvPr/>
+        </p:nvSpPr>
+        <p:spPr>
+          <a:xfrm>
+            <a:off x="5872111" y="4169664"/>
+            <a:ext cx="603504" cy="475488"/>
           </a:xfrm>
           <a:prstGeom prst="rect">
             <a:avLst>
@@ -28412,14 +28029,212 @@
       </p:sp>
       <p:sp>
         <p:nvSpPr>
-          <p:cNvPr id="46" name="Text 44"/>
-          <p:cNvSpPr/>
-          <p:nvPr/>
-        </p:nvSpPr>
-        <p:spPr>
-          <a:xfrm>
-            <a:off x="7576947" y="4169664"/>
-            <a:ext cx="685800" cy="475488"/>
+          <p:cNvPr id="52" name="Text 50"/>
+          <p:cNvSpPr/>
+          <p:nvPr/>
+        </p:nvSpPr>
+        <p:spPr>
+          <a:xfrm>
+            <a:off x="5872111" y="4169664"/>
+            <a:ext cx="603504" cy="475488"/>
+          </a:xfrm>
+          <a:prstGeom prst="rect">
+            <a:avLst/>
+          </a:prstGeom>
+          <a:noFill/>
+          <a:ln/>
+        </p:spPr>
+        <p:txBody>
+          <a:bodyPr wrap="square" lIns="0" tIns="0" rIns="0" bIns="0" rtlCol="0" anchor="ctr"/>
+          <a:lstStyle/>
+          <a:p>
+            <a:pPr algn="ctr" indent="0" marL="0">
+              <a:buNone/>
+            </a:pPr>
+            <a:r>
+              <a:rPr lang="en-US" sz="900" b="1" dirty="0">
+                <a:solidFill>
+                  <a:srgbClr val="9D174D"/>
+                </a:solidFill>
+                <a:latin typeface="Trebuchet MS" pitchFamily="34" charset="0"/>
+                <a:ea typeface="Trebuchet MS" pitchFamily="34" charset="-122"/>
+                <a:cs typeface="Trebuchet MS" pitchFamily="34" charset="-120"/>
+              </a:rPr>
+              <a:t>l</a:t>
+            </a:r>
+            <a:endParaRPr lang="en-US" sz="900" dirty="0"/>
+          </a:p>
+        </p:txBody>
+      </p:sp>
+      <p:sp>
+        <p:nvSpPr>
+          <p:cNvPr id="53" name="Shape 51"/>
+          <p:cNvSpPr/>
+          <p:nvPr/>
+        </p:nvSpPr>
+        <p:spPr>
+          <a:xfrm>
+            <a:off x="6525491" y="4169664"/>
+            <a:ext cx="603504" cy="475488"/>
+          </a:xfrm>
+          <a:prstGeom prst="rect">
+            <a:avLst>
+              <a:gd name="adj" fmla="val 7692"/>
+            </a:avLst>
+          </a:prstGeom>
+          <a:solidFill>
+            <a:srgbClr val="FFFFFF"/>
+          </a:solidFill>
+          <a:ln w="12700">
+            <a:solidFill>
+              <a:srgbClr val="DB2777"/>
+            </a:solidFill>
+            <a:prstDash val="solid"/>
+          </a:ln>
+        </p:spPr>
+      </p:sp>
+      <p:sp>
+        <p:nvSpPr>
+          <p:cNvPr id="54" name="Text 52"/>
+          <p:cNvSpPr/>
+          <p:nvPr/>
+        </p:nvSpPr>
+        <p:spPr>
+          <a:xfrm>
+            <a:off x="6525491" y="4169664"/>
+            <a:ext cx="603504" cy="475488"/>
+          </a:xfrm>
+          <a:prstGeom prst="rect">
+            <a:avLst/>
+          </a:prstGeom>
+          <a:noFill/>
+          <a:ln/>
+        </p:spPr>
+        <p:txBody>
+          <a:bodyPr wrap="square" lIns="0" tIns="0" rIns="0" bIns="0" rtlCol="0" anchor="ctr"/>
+          <a:lstStyle/>
+          <a:p>
+            <a:pPr algn="ctr" indent="0" marL="0">
+              <a:buNone/>
+            </a:pPr>
+            <a:r>
+              <a:rPr lang="en-US" sz="900" b="1" dirty="0">
+                <a:solidFill>
+                  <a:srgbClr val="9D174D"/>
+                </a:solidFill>
+                <a:latin typeface="Trebuchet MS" pitchFamily="34" charset="0"/>
+                <a:ea typeface="Trebuchet MS" pitchFamily="34" charset="-122"/>
+                <a:cs typeface="Trebuchet MS" pitchFamily="34" charset="-120"/>
+              </a:rPr>
+              <a:t>n</a:t>
+            </a:r>
+            <a:endParaRPr lang="en-US" sz="900" dirty="0"/>
+          </a:p>
+        </p:txBody>
+      </p:sp>
+      <p:sp>
+        <p:nvSpPr>
+          <p:cNvPr id="55" name="Shape 53"/>
+          <p:cNvSpPr/>
+          <p:nvPr/>
+        </p:nvSpPr>
+        <p:spPr>
+          <a:xfrm>
+            <a:off x="7178871" y="4169664"/>
+            <a:ext cx="603504" cy="475488"/>
+          </a:xfrm>
+          <a:prstGeom prst="rect">
+            <a:avLst>
+              <a:gd name="adj" fmla="val 7692"/>
+            </a:avLst>
+          </a:prstGeom>
+          <a:solidFill>
+            <a:srgbClr val="FFFFFF"/>
+          </a:solidFill>
+          <a:ln w="12700">
+            <a:solidFill>
+              <a:srgbClr val="DB2777"/>
+            </a:solidFill>
+            <a:prstDash val="solid"/>
+          </a:ln>
+        </p:spPr>
+      </p:sp>
+      <p:sp>
+        <p:nvSpPr>
+          <p:cNvPr id="56" name="Text 54"/>
+          <p:cNvSpPr/>
+          <p:nvPr/>
+        </p:nvSpPr>
+        <p:spPr>
+          <a:xfrm>
+            <a:off x="7178871" y="4169664"/>
+            <a:ext cx="603504" cy="475488"/>
+          </a:xfrm>
+          <a:prstGeom prst="rect">
+            <a:avLst/>
+          </a:prstGeom>
+          <a:noFill/>
+          <a:ln/>
+        </p:spPr>
+        <p:txBody>
+          <a:bodyPr wrap="square" lIns="0" tIns="0" rIns="0" bIns="0" rtlCol="0" anchor="ctr"/>
+          <a:lstStyle/>
+          <a:p>
+            <a:pPr algn="ctr" indent="0" marL="0">
+              <a:buNone/>
+            </a:pPr>
+            <a:r>
+              <a:rPr lang="en-US" sz="900" b="1" dirty="0">
+                <a:solidFill>
+                  <a:srgbClr val="9D174D"/>
+                </a:solidFill>
+                <a:latin typeface="Trebuchet MS" pitchFamily="34" charset="0"/>
+                <a:ea typeface="Trebuchet MS" pitchFamily="34" charset="-122"/>
+                <a:cs typeface="Trebuchet MS" pitchFamily="34" charset="-120"/>
+              </a:rPr>
+              <a:t>e</a:t>
+            </a:r>
+            <a:endParaRPr lang="en-US" sz="900" dirty="0"/>
+          </a:p>
+        </p:txBody>
+      </p:sp>
+      <p:sp>
+        <p:nvSpPr>
+          <p:cNvPr id="57" name="Shape 55"/>
+          <p:cNvSpPr/>
+          <p:nvPr/>
+        </p:nvSpPr>
+        <p:spPr>
+          <a:xfrm>
+            <a:off x="7832252" y="4169664"/>
+            <a:ext cx="603504" cy="475488"/>
+          </a:xfrm>
+          <a:prstGeom prst="rect">
+            <a:avLst>
+              <a:gd name="adj" fmla="val 7692"/>
+            </a:avLst>
+          </a:prstGeom>
+          <a:solidFill>
+            <a:srgbClr val="FFFFFF"/>
+          </a:solidFill>
+          <a:ln w="12700">
+            <a:solidFill>
+              <a:srgbClr val="DB2777"/>
+            </a:solidFill>
+            <a:prstDash val="solid"/>
+          </a:ln>
+        </p:spPr>
+      </p:sp>
+      <p:sp>
+        <p:nvSpPr>
+          <p:cNvPr id="58" name="Text 56"/>
+          <p:cNvSpPr/>
+          <p:nvPr/>
+        </p:nvSpPr>
+        <p:spPr>
+          <a:xfrm>
+            <a:off x="7832252" y="4169664"/>
+            <a:ext cx="603504" cy="475488"/>
           </a:xfrm>
           <a:prstGeom prst="rect">
             <a:avLst/>
@@ -28735,7 +28550,7 @@
                 <a:ea typeface="Calibri" pitchFamily="34" charset="-122"/>
                 <a:cs typeface="Calibri" pitchFamily="34" charset="-120"/>
               </a:rPr>
-              <a:t>Word Labs  •  wordlabs.app  •  Root: 'thank' = express gratitude or appreciation</a:t>
+              <a:t>Word Labs  •  wordlabs.app  •  Root: 'thank' = express gratitude or praise</a:t>
             </a:r>
             <a:endParaRPr lang="en-US" sz="800" dirty="0"/>
           </a:p>
@@ -28874,7 +28689,7 @@
                 <a:ea typeface="Trebuchet MS" pitchFamily="34" charset="-122"/>
                 <a:cs typeface="Trebuchet MS" pitchFamily="34" charset="-120"/>
               </a:rPr>
-              <a:t>thankfully</a:t>
+              <a:t>thanks</a:t>
             </a:r>
             <a:endParaRPr lang="en-US" sz="2800" dirty="0"/>
           </a:p>
@@ -29562,7 +29377,7 @@
                 <a:ea typeface="Calibri" pitchFamily="34" charset="-122"/>
                 <a:cs typeface="Calibri" pitchFamily="34" charset="-120"/>
               </a:rPr>
-              <a:t>Word Labs  •  wordlabs.app  •  Root: 'thank' = express gratitude or appreciation</a:t>
+              <a:t>Word Labs  •  wordlabs.app  •  Root: 'thank' = express gratitude or praise</a:t>
             </a:r>
             <a:endParaRPr lang="en-US" sz="800" dirty="0"/>
           </a:p>
@@ -29701,7 +29516,7 @@
                 <a:ea typeface="Trebuchet MS" pitchFamily="34" charset="-122"/>
                 <a:cs typeface="Trebuchet MS" pitchFamily="34" charset="-120"/>
               </a:rPr>
-              <a:t>thankfully</a:t>
+              <a:t>thanks</a:t>
             </a:r>
             <a:endParaRPr lang="en-US" sz="2800" dirty="0"/>
           </a:p>
@@ -29781,7 +29596,7 @@
         </p:nvSpPr>
         <p:spPr>
           <a:xfrm>
-            <a:off x="2221992" y="2258568"/>
+            <a:off x="2938272" y="2258568"/>
             <a:ext cx="1828800" cy="292608"/>
           </a:xfrm>
           <a:prstGeom prst="rect">
@@ -29815,7 +29630,7 @@
         </p:nvSpPr>
         <p:spPr>
           <a:xfrm>
-            <a:off x="2221992" y="2258568"/>
+            <a:off x="2938272" y="2258568"/>
             <a:ext cx="1828800" cy="292608"/>
           </a:xfrm>
           <a:prstGeom prst="rect">
@@ -29854,7 +29669,7 @@
         </p:nvSpPr>
         <p:spPr>
           <a:xfrm>
-            <a:off x="2221992" y="2569464"/>
+            <a:off x="2938272" y="2569464"/>
             <a:ext cx="1828800" cy="201168"/>
           </a:xfrm>
           <a:prstGeom prst="rect">
@@ -29893,7 +29708,7 @@
         </p:nvSpPr>
         <p:spPr>
           <a:xfrm>
-            <a:off x="4370832" y="2258568"/>
+            <a:off x="5803392" y="2258568"/>
             <a:ext cx="1828800" cy="292608"/>
           </a:xfrm>
           <a:prstGeom prst="rect">
@@ -29927,7 +29742,7 @@
         </p:nvSpPr>
         <p:spPr>
           <a:xfrm>
-            <a:off x="4370832" y="2258568"/>
+            <a:off x="5803392" y="2258568"/>
             <a:ext cx="1828800" cy="292608"/>
           </a:xfrm>
           <a:prstGeom prst="rect">
@@ -29952,7 +29767,7 @@
                 <a:ea typeface="Trebuchet MS" pitchFamily="34" charset="-122"/>
                 <a:cs typeface="Trebuchet MS" pitchFamily="34" charset="-120"/>
               </a:rPr>
-              <a:t>ful</a:t>
+              <a:t>s</a:t>
             </a:r>
             <a:endParaRPr lang="en-US" sz="1300" dirty="0"/>
           </a:p>
@@ -29966,7 +29781,7 @@
         </p:nvSpPr>
         <p:spPr>
           <a:xfrm>
-            <a:off x="4370832" y="2569464"/>
+            <a:off x="5803392" y="2569464"/>
             <a:ext cx="1828800" cy="201168"/>
           </a:xfrm>
           <a:prstGeom prst="rect">
@@ -29991,7 +29806,7 @@
                 <a:ea typeface="Calibri" pitchFamily="34" charset="-122"/>
                 <a:cs typeface="Calibri" pitchFamily="34" charset="-120"/>
               </a:rPr>
-              <a:t>full of</a:t>
+              <a:t>plural; more than one</a:t>
             </a:r>
             <a:endParaRPr lang="en-US" sz="850" dirty="0"/>
           </a:p>
@@ -30005,30 +29820,23 @@
         </p:nvSpPr>
         <p:spPr>
           <a:xfrm>
-            <a:off x="6519672" y="2258568"/>
-            <a:ext cx="1828800" cy="292608"/>
+            <a:off x="365760" y="3273552"/>
+            <a:ext cx="1371600" cy="658368"/>
           </a:xfrm>
           <a:prstGeom prst="rect">
             <a:avLst>
-              <a:gd name="adj" fmla="val 25000"/>
+              <a:gd name="adj" fmla="val 8333"/>
             </a:avLst>
           </a:prstGeom>
           <a:solidFill>
-            <a:srgbClr val="FCE7F3"/>
-          </a:solidFill>
-          <a:ln w="19050">
-            <a:solidFill>
-              <a:srgbClr val="DB2777"/>
-            </a:solidFill>
-            <a:prstDash val="solid"/>
-          </a:ln>
-          <a:effectLst>
-            <a:outerShdw sx="100000" sy="100000" kx="0" ky="0" algn="bl" rotWithShape="0" blurRad="101600" dist="38100" dir="8100000">
-              <a:srgbClr val="000000">
-                <a:alpha val="12000"/>
-              </a:srgbClr>
-            </a:outerShdw>
-          </a:effectLst>
+            <a:srgbClr val="E2E8F0"/>
+          </a:solidFill>
+          <a:ln w="12700">
+            <a:solidFill>
+              <a:srgbClr val="E2E8F0"/>
+            </a:solidFill>
+            <a:prstDash val="solid"/>
+          </a:ln>
         </p:spPr>
       </p:sp>
       <p:sp>
@@ -30039,8 +29847,8 @@
         </p:nvSpPr>
         <p:spPr>
           <a:xfrm>
-            <a:off x="6519672" y="2258568"/>
-            <a:ext cx="1828800" cy="292608"/>
+            <a:off x="365760" y="3273552"/>
+            <a:ext cx="1371600" cy="658368"/>
           </a:xfrm>
           <a:prstGeom prst="rect">
             <a:avLst/>
@@ -30056,73 +29864,100 @@
               <a:buNone/>
             </a:pPr>
             <a:r>
-              <a:rPr lang="en-US" sz="1300" b="1" dirty="0">
-                <a:solidFill>
-                  <a:srgbClr val="9D174D"/>
+              <a:rPr lang="en-US" sz="1100" b="1" dirty="0">
+                <a:solidFill>
+                  <a:srgbClr val="475569"/>
                 </a:solidFill>
                 <a:latin typeface="Trebuchet MS" pitchFamily="34" charset="0"/>
                 <a:ea typeface="Trebuchet MS" pitchFamily="34" charset="-122"/>
                 <a:cs typeface="Trebuchet MS" pitchFamily="34" charset="-120"/>
               </a:rPr>
-              <a:t>ly</a:t>
-            </a:r>
-            <a:endParaRPr lang="en-US" sz="1300" dirty="0"/>
-          </a:p>
-        </p:txBody>
-      </p:sp>
-      <p:sp>
-        <p:nvSpPr>
-          <p:cNvPr id="24" name="Text 22"/>
-          <p:cNvSpPr/>
-          <p:nvPr/>
-        </p:nvSpPr>
-        <p:spPr>
-          <a:xfrm>
-            <a:off x="6519672" y="2569464"/>
-            <a:ext cx="1828800" cy="201168"/>
-          </a:xfrm>
-          <a:prstGeom prst="rect">
-            <a:avLst/>
-          </a:prstGeom>
-          <a:noFill/>
-          <a:ln/>
-        </p:spPr>
-        <p:txBody>
-          <a:bodyPr wrap="square" lIns="0" tIns="0" rIns="0" bIns="0" rtlCol="0" anchor="t"/>
-          <a:lstStyle/>
-          <a:p>
-            <a:pPr algn="ctr" indent="0" marL="0">
-              <a:buNone/>
-            </a:pPr>
-            <a:r>
-              <a:rPr lang="en-US" sz="850" dirty="0">
-                <a:solidFill>
-                  <a:srgbClr val="475569"/>
+              <a:t>Syllables</a:t>
+            </a:r>
+            <a:endParaRPr lang="en-US" sz="1100" dirty="0"/>
+          </a:p>
+        </p:txBody>
+      </p:sp>
+      <p:sp>
+        <p:nvSpPr>
+          <p:cNvPr id="24" name="Shape 22"/>
+          <p:cNvSpPr/>
+          <p:nvPr/>
+        </p:nvSpPr>
+        <p:spPr>
+          <a:xfrm>
+            <a:off x="1874520" y="3273552"/>
+            <a:ext cx="6903720" cy="658368"/>
+          </a:xfrm>
+          <a:prstGeom prst="rect">
+            <a:avLst>
+              <a:gd name="adj" fmla="val 8333"/>
+            </a:avLst>
+          </a:prstGeom>
+          <a:solidFill>
+            <a:srgbClr val="F8FAFC"/>
+          </a:solidFill>
+          <a:ln w="12700">
+            <a:solidFill>
+              <a:srgbClr val="E2E8F0"/>
+            </a:solidFill>
+            <a:prstDash val="dash"/>
+          </a:ln>
+        </p:spPr>
+      </p:sp>
+      <p:sp>
+        <p:nvSpPr>
+          <p:cNvPr id="25" name="Text 23"/>
+          <p:cNvSpPr/>
+          <p:nvPr/>
+        </p:nvSpPr>
+        <p:spPr>
+          <a:xfrm>
+            <a:off x="1874520" y="3273552"/>
+            <a:ext cx="6903720" cy="658368"/>
+          </a:xfrm>
+          <a:prstGeom prst="rect">
+            <a:avLst/>
+          </a:prstGeom>
+          <a:noFill/>
+          <a:ln/>
+        </p:spPr>
+        <p:txBody>
+          <a:bodyPr wrap="square" rtlCol="0" anchor="ctr"/>
+          <a:lstStyle/>
+          <a:p>
+            <a:pPr algn="ctr" indent="0" marL="0">
+              <a:buNone/>
+            </a:pPr>
+            <a:r>
+              <a:rPr lang="en-US" sz="1100" i="1" dirty="0">
+                <a:solidFill>
+                  <a:srgbClr val="CBD5E1"/>
                 </a:solidFill>
                 <a:latin typeface="Calibri" pitchFamily="34" charset="0"/>
                 <a:ea typeface="Calibri" pitchFamily="34" charset="-122"/>
                 <a:cs typeface="Calibri" pitchFamily="34" charset="-120"/>
               </a:rPr>
-              <a:t>in a way that is</a:t>
-            </a:r>
-            <a:endParaRPr lang="en-US" sz="850" dirty="0"/>
-          </a:p>
-        </p:txBody>
-      </p:sp>
-      <p:sp>
-        <p:nvSpPr>
-          <p:cNvPr id="25" name="Shape 23"/>
-          <p:cNvSpPr/>
-          <p:nvPr/>
-        </p:nvSpPr>
-        <p:spPr>
-          <a:xfrm>
-            <a:off x="365760" y="3273552"/>
-            <a:ext cx="1371600" cy="658368"/>
+              <a:t>Write here...</a:t>
+            </a:r>
+            <a:endParaRPr lang="en-US" sz="1100" dirty="0"/>
+          </a:p>
+        </p:txBody>
+      </p:sp>
+      <p:sp>
+        <p:nvSpPr>
+          <p:cNvPr id="26" name="Shape 24"/>
+          <p:cNvSpPr/>
+          <p:nvPr/>
+        </p:nvSpPr>
+        <p:spPr>
+          <a:xfrm>
+            <a:off x="365760" y="4096512"/>
+            <a:ext cx="1371600" cy="804672"/>
           </a:xfrm>
           <a:prstGeom prst="rect">
             <a:avLst>
-              <a:gd name="adj" fmla="val 8333"/>
+              <a:gd name="adj" fmla="val 6818"/>
             </a:avLst>
           </a:prstGeom>
           <a:solidFill>
@@ -30138,14 +29973,14 @@
       </p:sp>
       <p:sp>
         <p:nvSpPr>
-          <p:cNvPr id="26" name="Text 24"/>
-          <p:cNvSpPr/>
-          <p:nvPr/>
-        </p:nvSpPr>
-        <p:spPr>
-          <a:xfrm>
-            <a:off x="365760" y="3273552"/>
-            <a:ext cx="1371600" cy="658368"/>
+          <p:cNvPr id="27" name="Text 25"/>
+          <p:cNvSpPr/>
+          <p:nvPr/>
+        </p:nvSpPr>
+        <p:spPr>
+          <a:xfrm>
+            <a:off x="365760" y="4096512"/>
+            <a:ext cx="1371600" cy="804672"/>
           </a:xfrm>
           <a:prstGeom prst="rect">
             <a:avLst/>
@@ -30169,7 +30004,7 @@
                 <a:ea typeface="Trebuchet MS" pitchFamily="34" charset="-122"/>
                 <a:cs typeface="Trebuchet MS" pitchFamily="34" charset="-120"/>
               </a:rPr>
-              <a:t>Syllables</a:t>
+              <a:t>Phonemes</a:t>
             </a:r>
             <a:endParaRPr lang="en-US" sz="1100" dirty="0"/>
           </a:p>
@@ -30177,80 +30012,14 @@
       </p:sp>
       <p:sp>
         <p:nvSpPr>
-          <p:cNvPr id="27" name="Shape 25"/>
-          <p:cNvSpPr/>
-          <p:nvPr/>
-        </p:nvSpPr>
-        <p:spPr>
-          <a:xfrm>
-            <a:off x="1874520" y="3273552"/>
-            <a:ext cx="6903720" cy="658368"/>
-          </a:xfrm>
-          <a:prstGeom prst="rect">
-            <a:avLst>
-              <a:gd name="adj" fmla="val 8333"/>
-            </a:avLst>
-          </a:prstGeom>
-          <a:solidFill>
-            <a:srgbClr val="F8FAFC"/>
-          </a:solidFill>
-          <a:ln w="12700">
-            <a:solidFill>
-              <a:srgbClr val="E2E8F0"/>
-            </a:solidFill>
-            <a:prstDash val="dash"/>
-          </a:ln>
-        </p:spPr>
-      </p:sp>
-      <p:sp>
-        <p:nvSpPr>
-          <p:cNvPr id="28" name="Text 26"/>
-          <p:cNvSpPr/>
-          <p:nvPr/>
-        </p:nvSpPr>
-        <p:spPr>
-          <a:xfrm>
-            <a:off x="1874520" y="3273552"/>
-            <a:ext cx="6903720" cy="658368"/>
-          </a:xfrm>
-          <a:prstGeom prst="rect">
-            <a:avLst/>
-          </a:prstGeom>
-          <a:noFill/>
-          <a:ln/>
-        </p:spPr>
-        <p:txBody>
-          <a:bodyPr wrap="square" rtlCol="0" anchor="ctr"/>
-          <a:lstStyle/>
-          <a:p>
-            <a:pPr algn="ctr" indent="0" marL="0">
-              <a:buNone/>
-            </a:pPr>
-            <a:r>
-              <a:rPr lang="en-US" sz="1100" i="1" dirty="0">
-                <a:solidFill>
-                  <a:srgbClr val="CBD5E1"/>
-                </a:solidFill>
-                <a:latin typeface="Calibri" pitchFamily="34" charset="0"/>
-                <a:ea typeface="Calibri" pitchFamily="34" charset="-122"/>
-                <a:cs typeface="Calibri" pitchFamily="34" charset="-120"/>
-              </a:rPr>
-              <a:t>Write here...</a:t>
-            </a:r>
-            <a:endParaRPr lang="en-US" sz="1100" dirty="0"/>
-          </a:p>
-        </p:txBody>
-      </p:sp>
-      <p:sp>
-        <p:nvSpPr>
-          <p:cNvPr id="29" name="Shape 27"/>
-          <p:cNvSpPr/>
-          <p:nvPr/>
-        </p:nvSpPr>
-        <p:spPr>
-          <a:xfrm>
-            <a:off x="365760" y="4096512"/>
-            <a:ext cx="1371600" cy="804672"/>
+          <p:cNvPr id="28" name="Shape 26"/>
+          <p:cNvSpPr/>
+          <p:nvPr/>
+        </p:nvSpPr>
+        <p:spPr>
+          <a:xfrm>
+            <a:off x="1874520" y="4096512"/>
+            <a:ext cx="6903720" cy="804672"/>
           </a:xfrm>
           <a:prstGeom prst="rect">
             <a:avLst>
@@ -30258,85 +30027,19 @@
             </a:avLst>
           </a:prstGeom>
           <a:solidFill>
-            <a:srgbClr val="E2E8F0"/>
+            <a:srgbClr val="F8FAFC"/>
           </a:solidFill>
           <a:ln w="12700">
             <a:solidFill>
               <a:srgbClr val="E2E8F0"/>
             </a:solidFill>
-            <a:prstDash val="solid"/>
-          </a:ln>
-        </p:spPr>
-      </p:sp>
-      <p:sp>
-        <p:nvSpPr>
-          <p:cNvPr id="30" name="Text 28"/>
-          <p:cNvSpPr/>
-          <p:nvPr/>
-        </p:nvSpPr>
-        <p:spPr>
-          <a:xfrm>
-            <a:off x="365760" y="4096512"/>
-            <a:ext cx="1371600" cy="804672"/>
-          </a:xfrm>
-          <a:prstGeom prst="rect">
-            <a:avLst/>
-          </a:prstGeom>
-          <a:noFill/>
-          <a:ln/>
-        </p:spPr>
-        <p:txBody>
-          <a:bodyPr wrap="square" lIns="0" tIns="0" rIns="0" bIns="0" rtlCol="0" anchor="ctr"/>
-          <a:lstStyle/>
-          <a:p>
-            <a:pPr algn="ctr" indent="0" marL="0">
-              <a:buNone/>
-            </a:pPr>
-            <a:r>
-              <a:rPr lang="en-US" sz="1100" b="1" dirty="0">
-                <a:solidFill>
-                  <a:srgbClr val="475569"/>
-                </a:solidFill>
-                <a:latin typeface="Trebuchet MS" pitchFamily="34" charset="0"/>
-                <a:ea typeface="Trebuchet MS" pitchFamily="34" charset="-122"/>
-                <a:cs typeface="Trebuchet MS" pitchFamily="34" charset="-120"/>
-              </a:rPr>
-              <a:t>Phonemes</a:t>
-            </a:r>
-            <a:endParaRPr lang="en-US" sz="1100" dirty="0"/>
-          </a:p>
-        </p:txBody>
-      </p:sp>
-      <p:sp>
-        <p:nvSpPr>
-          <p:cNvPr id="31" name="Shape 29"/>
-          <p:cNvSpPr/>
-          <p:nvPr/>
-        </p:nvSpPr>
-        <p:spPr>
-          <a:xfrm>
-            <a:off x="1874520" y="4096512"/>
-            <a:ext cx="6903720" cy="804672"/>
-          </a:xfrm>
-          <a:prstGeom prst="rect">
-            <a:avLst>
-              <a:gd name="adj" fmla="val 6818"/>
-            </a:avLst>
-          </a:prstGeom>
-          <a:solidFill>
-            <a:srgbClr val="F8FAFC"/>
-          </a:solidFill>
-          <a:ln w="12700">
-            <a:solidFill>
-              <a:srgbClr val="E2E8F0"/>
-            </a:solidFill>
             <a:prstDash val="dash"/>
           </a:ln>
         </p:spPr>
       </p:sp>
       <p:sp>
         <p:nvSpPr>
-          <p:cNvPr id="32" name="Text 30"/>
+          <p:cNvPr id="29" name="Text 27"/>
           <p:cNvSpPr/>
           <p:nvPr/>
         </p:nvSpPr>
@@ -30659,7 +30362,7 @@
                 <a:ea typeface="Calibri" pitchFamily="34" charset="-122"/>
                 <a:cs typeface="Calibri" pitchFamily="34" charset="-120"/>
               </a:rPr>
-              <a:t>Word Labs  •  wordlabs.app  •  Root: 'thank' = express gratitude or appreciation</a:t>
+              <a:t>Word Labs  •  wordlabs.app  •  Root: 'thank' = express gratitude or praise</a:t>
             </a:r>
             <a:endParaRPr lang="en-US" sz="800" dirty="0"/>
           </a:p>
@@ -30798,7 +30501,7 @@
                 <a:ea typeface="Trebuchet MS" pitchFamily="34" charset="-122"/>
                 <a:cs typeface="Trebuchet MS" pitchFamily="34" charset="-120"/>
               </a:rPr>
-              <a:t>thankfully</a:t>
+              <a:t>thanks</a:t>
             </a:r>
             <a:endParaRPr lang="en-US" sz="2800" dirty="0"/>
           </a:p>
@@ -30878,7 +30581,7 @@
         </p:nvSpPr>
         <p:spPr>
           <a:xfrm>
-            <a:off x="2221992" y="2258568"/>
+            <a:off x="2938272" y="2258568"/>
             <a:ext cx="1828800" cy="292608"/>
           </a:xfrm>
           <a:prstGeom prst="rect">
@@ -30912,7 +30615,7 @@
         </p:nvSpPr>
         <p:spPr>
           <a:xfrm>
-            <a:off x="2221992" y="2258568"/>
+            <a:off x="2938272" y="2258568"/>
             <a:ext cx="1828800" cy="292608"/>
           </a:xfrm>
           <a:prstGeom prst="rect">
@@ -30951,7 +30654,7 @@
         </p:nvSpPr>
         <p:spPr>
           <a:xfrm>
-            <a:off x="2221992" y="2569464"/>
+            <a:off x="2938272" y="2569464"/>
             <a:ext cx="1828800" cy="201168"/>
           </a:xfrm>
           <a:prstGeom prst="rect">
@@ -30990,7 +30693,7 @@
         </p:nvSpPr>
         <p:spPr>
           <a:xfrm>
-            <a:off x="4370832" y="2258568"/>
+            <a:off x="5803392" y="2258568"/>
             <a:ext cx="1828800" cy="292608"/>
           </a:xfrm>
           <a:prstGeom prst="rect">
@@ -31024,7 +30727,7 @@
         </p:nvSpPr>
         <p:spPr>
           <a:xfrm>
-            <a:off x="4370832" y="2258568"/>
+            <a:off x="5803392" y="2258568"/>
             <a:ext cx="1828800" cy="292608"/>
           </a:xfrm>
           <a:prstGeom prst="rect">
@@ -31049,7 +30752,7 @@
                 <a:ea typeface="Trebuchet MS" pitchFamily="34" charset="-122"/>
                 <a:cs typeface="Trebuchet MS" pitchFamily="34" charset="-120"/>
               </a:rPr>
-              <a:t>ful</a:t>
+              <a:t>s</a:t>
             </a:r>
             <a:endParaRPr lang="en-US" sz="1300" dirty="0"/>
           </a:p>
@@ -31063,7 +30766,7 @@
         </p:nvSpPr>
         <p:spPr>
           <a:xfrm>
-            <a:off x="4370832" y="2569464"/>
+            <a:off x="5803392" y="2569464"/>
             <a:ext cx="1828800" cy="201168"/>
           </a:xfrm>
           <a:prstGeom prst="rect">
@@ -31088,7 +30791,7 @@
                 <a:ea typeface="Calibri" pitchFamily="34" charset="-122"/>
                 <a:cs typeface="Calibri" pitchFamily="34" charset="-120"/>
               </a:rPr>
-              <a:t>full of</a:t>
+              <a:t>plural; more than one</a:t>
             </a:r>
             <a:endParaRPr lang="en-US" sz="850" dirty="0"/>
           </a:p>
@@ -31102,30 +30805,23 @@
         </p:nvSpPr>
         <p:spPr>
           <a:xfrm>
-            <a:off x="6519672" y="2258568"/>
-            <a:ext cx="1828800" cy="292608"/>
+            <a:off x="365760" y="3273552"/>
+            <a:ext cx="1371600" cy="658368"/>
           </a:xfrm>
           <a:prstGeom prst="rect">
             <a:avLst>
-              <a:gd name="adj" fmla="val 25000"/>
+              <a:gd name="adj" fmla="val 8333"/>
             </a:avLst>
           </a:prstGeom>
           <a:solidFill>
-            <a:srgbClr val="FCE7F3"/>
-          </a:solidFill>
-          <a:ln w="19050">
-            <a:solidFill>
-              <a:srgbClr val="DB2777"/>
-            </a:solidFill>
-            <a:prstDash val="solid"/>
-          </a:ln>
-          <a:effectLst>
-            <a:outerShdw sx="100000" sy="100000" kx="0" ky="0" algn="bl" rotWithShape="0" blurRad="101600" dist="38100" dir="8100000">
-              <a:srgbClr val="000000">
-                <a:alpha val="12000"/>
-              </a:srgbClr>
-            </a:outerShdw>
-          </a:effectLst>
+            <a:srgbClr val="E2E8F0"/>
+          </a:solidFill>
+          <a:ln w="12700">
+            <a:solidFill>
+              <a:srgbClr val="E2E8F0"/>
+            </a:solidFill>
+            <a:prstDash val="solid"/>
+          </a:ln>
         </p:spPr>
       </p:sp>
       <p:sp>
@@ -31136,8 +30832,8 @@
         </p:nvSpPr>
         <p:spPr>
           <a:xfrm>
-            <a:off x="6519672" y="2258568"/>
-            <a:ext cx="1828800" cy="292608"/>
+            <a:off x="365760" y="3273552"/>
+            <a:ext cx="1371600" cy="658368"/>
           </a:xfrm>
           <a:prstGeom prst="rect">
             <a:avLst/>
@@ -31153,69 +30849,30 @@
               <a:buNone/>
             </a:pPr>
             <a:r>
-              <a:rPr lang="en-US" sz="1300" b="1" dirty="0">
-                <a:solidFill>
-                  <a:srgbClr val="9D174D"/>
+              <a:rPr lang="en-US" sz="1100" b="1" dirty="0">
+                <a:solidFill>
+                  <a:srgbClr val="475569"/>
                 </a:solidFill>
                 <a:latin typeface="Trebuchet MS" pitchFamily="34" charset="0"/>
                 <a:ea typeface="Trebuchet MS" pitchFamily="34" charset="-122"/>
                 <a:cs typeface="Trebuchet MS" pitchFamily="34" charset="-120"/>
               </a:rPr>
-              <a:t>ly</a:t>
-            </a:r>
-            <a:endParaRPr lang="en-US" sz="1300" dirty="0"/>
-          </a:p>
-        </p:txBody>
-      </p:sp>
-      <p:sp>
-        <p:nvSpPr>
-          <p:cNvPr id="24" name="Text 22"/>
-          <p:cNvSpPr/>
-          <p:nvPr/>
-        </p:nvSpPr>
-        <p:spPr>
-          <a:xfrm>
-            <a:off x="6519672" y="2569464"/>
-            <a:ext cx="1828800" cy="201168"/>
-          </a:xfrm>
-          <a:prstGeom prst="rect">
-            <a:avLst/>
-          </a:prstGeom>
-          <a:noFill/>
-          <a:ln/>
-        </p:spPr>
-        <p:txBody>
-          <a:bodyPr wrap="square" lIns="0" tIns="0" rIns="0" bIns="0" rtlCol="0" anchor="t"/>
-          <a:lstStyle/>
-          <a:p>
-            <a:pPr algn="ctr" indent="0" marL="0">
-              <a:buNone/>
-            </a:pPr>
-            <a:r>
-              <a:rPr lang="en-US" sz="850" dirty="0">
-                <a:solidFill>
-                  <a:srgbClr val="475569"/>
-                </a:solidFill>
-                <a:latin typeface="Calibri" pitchFamily="34" charset="0"/>
-                <a:ea typeface="Calibri" pitchFamily="34" charset="-122"/>
-                <a:cs typeface="Calibri" pitchFamily="34" charset="-120"/>
-              </a:rPr>
-              <a:t>in a way that is</a:t>
-            </a:r>
-            <a:endParaRPr lang="en-US" sz="850" dirty="0"/>
-          </a:p>
-        </p:txBody>
-      </p:sp>
-      <p:sp>
-        <p:nvSpPr>
-          <p:cNvPr id="25" name="Shape 23"/>
-          <p:cNvSpPr/>
-          <p:nvPr/>
-        </p:nvSpPr>
-        <p:spPr>
-          <a:xfrm>
-            <a:off x="365760" y="3273552"/>
-            <a:ext cx="1371600" cy="658368"/>
+              <a:t>Syllables</a:t>
+            </a:r>
+            <a:endParaRPr lang="en-US" sz="1100" dirty="0"/>
+          </a:p>
+        </p:txBody>
+      </p:sp>
+      <p:sp>
+        <p:nvSpPr>
+          <p:cNvPr id="24" name="Shape 22"/>
+          <p:cNvSpPr/>
+          <p:nvPr/>
+        </p:nvSpPr>
+        <p:spPr>
+          <a:xfrm>
+            <a:off x="1874520" y="3273552"/>
+            <a:ext cx="6903720" cy="658368"/>
           </a:xfrm>
           <a:prstGeom prst="rect">
             <a:avLst>
@@ -31223,11 +30880,38 @@
             </a:avLst>
           </a:prstGeom>
           <a:solidFill>
-            <a:srgbClr val="E2E8F0"/>
-          </a:solidFill>
-          <a:ln w="12700">
-            <a:solidFill>
-              <a:srgbClr val="E2E8F0"/>
+            <a:srgbClr val="CCFBF1"/>
+          </a:solidFill>
+          <a:ln w="12700">
+            <a:solidFill>
+              <a:srgbClr val="0D9488"/>
+            </a:solidFill>
+            <a:prstDash val="solid"/>
+          </a:ln>
+        </p:spPr>
+      </p:sp>
+      <p:sp>
+        <p:nvSpPr>
+          <p:cNvPr id="25" name="Shape 23"/>
+          <p:cNvSpPr/>
+          <p:nvPr/>
+        </p:nvSpPr>
+        <p:spPr>
+          <a:xfrm>
+            <a:off x="4370832" y="3364992"/>
+            <a:ext cx="1645920" cy="475488"/>
+          </a:xfrm>
+          <a:prstGeom prst="rect">
+            <a:avLst>
+              <a:gd name="adj" fmla="val 9615"/>
+            </a:avLst>
+          </a:prstGeom>
+          <a:solidFill>
+            <a:srgbClr val="FFFFFF"/>
+          </a:solidFill>
+          <a:ln w="12700">
+            <a:solidFill>
+              <a:srgbClr val="0D9488"/>
             </a:solidFill>
             <a:prstDash val="solid"/>
           </a:ln>
@@ -31241,8 +30925,8 @@
         </p:nvSpPr>
         <p:spPr>
           <a:xfrm>
-            <a:off x="365760" y="3273552"/>
-            <a:ext cx="1371600" cy="658368"/>
+            <a:off x="4370832" y="3364992"/>
+            <a:ext cx="1645920" cy="475488"/>
           </a:xfrm>
           <a:prstGeom prst="rect">
             <a:avLst/>
@@ -31258,17 +30942,17 @@
               <a:buNone/>
             </a:pPr>
             <a:r>
-              <a:rPr lang="en-US" sz="1100" b="1" dirty="0">
-                <a:solidFill>
-                  <a:srgbClr val="475569"/>
+              <a:rPr lang="en-US" sz="1400" b="1" dirty="0">
+                <a:solidFill>
+                  <a:srgbClr val="0D9488"/>
                 </a:solidFill>
                 <a:latin typeface="Trebuchet MS" pitchFamily="34" charset="0"/>
                 <a:ea typeface="Trebuchet MS" pitchFamily="34" charset="-122"/>
                 <a:cs typeface="Trebuchet MS" pitchFamily="34" charset="-120"/>
               </a:rPr>
-              <a:t>Syllables</a:t>
-            </a:r>
-            <a:endParaRPr lang="en-US" sz="1100" dirty="0"/>
+              <a:t>thanks</a:t>
+            </a:r>
+            <a:endParaRPr lang="en-US" sz="1400" dirty="0"/>
           </a:p>
         </p:txBody>
       </p:sp>
@@ -31280,62 +30964,35 @@
         </p:nvSpPr>
         <p:spPr>
           <a:xfrm>
-            <a:off x="1874520" y="3273552"/>
-            <a:ext cx="6903720" cy="658368"/>
+            <a:off x="365760" y="4096512"/>
+            <a:ext cx="1371600" cy="804672"/>
           </a:xfrm>
           <a:prstGeom prst="rect">
             <a:avLst>
-              <a:gd name="adj" fmla="val 8333"/>
+              <a:gd name="adj" fmla="val 6818"/>
             </a:avLst>
           </a:prstGeom>
           <a:solidFill>
-            <a:srgbClr val="CCFBF1"/>
-          </a:solidFill>
-          <a:ln w="12700">
-            <a:solidFill>
-              <a:srgbClr val="0D9488"/>
-            </a:solidFill>
-            <a:prstDash val="solid"/>
-          </a:ln>
-        </p:spPr>
-      </p:sp>
-      <p:sp>
-        <p:nvSpPr>
-          <p:cNvPr id="28" name="Shape 26"/>
-          <p:cNvSpPr/>
-          <p:nvPr/>
-        </p:nvSpPr>
-        <p:spPr>
-          <a:xfrm>
-            <a:off x="2313432" y="3364992"/>
-            <a:ext cx="1645920" cy="475488"/>
-          </a:xfrm>
-          <a:prstGeom prst="rect">
-            <a:avLst>
-              <a:gd name="adj" fmla="val 9615"/>
-            </a:avLst>
-          </a:prstGeom>
-          <a:solidFill>
-            <a:srgbClr val="FFFFFF"/>
-          </a:solidFill>
-          <a:ln w="12700">
-            <a:solidFill>
-              <a:srgbClr val="0D9488"/>
-            </a:solidFill>
-            <a:prstDash val="solid"/>
-          </a:ln>
-        </p:spPr>
-      </p:sp>
-      <p:sp>
-        <p:nvSpPr>
-          <p:cNvPr id="29" name="Text 27"/>
-          <p:cNvSpPr/>
-          <p:nvPr/>
-        </p:nvSpPr>
-        <p:spPr>
-          <a:xfrm>
-            <a:off x="2313432" y="3364992"/>
-            <a:ext cx="1645920" cy="475488"/>
+            <a:srgbClr val="E2E8F0"/>
+          </a:solidFill>
+          <a:ln w="12700">
+            <a:solidFill>
+              <a:srgbClr val="E2E8F0"/>
+            </a:solidFill>
+            <a:prstDash val="solid"/>
+          </a:ln>
+        </p:spPr>
+      </p:sp>
+      <p:sp>
+        <p:nvSpPr>
+          <p:cNvPr id="28" name="Text 26"/>
+          <p:cNvSpPr/>
+          <p:nvPr/>
+        </p:nvSpPr>
+        <p:spPr>
+          <a:xfrm>
+            <a:off x="365760" y="4096512"/>
+            <a:ext cx="1371600" cy="804672"/>
           </a:xfrm>
           <a:prstGeom prst="rect">
             <a:avLst/>
@@ -31351,240 +31008,30 @@
               <a:buNone/>
             </a:pPr>
             <a:r>
-              <a:rPr lang="en-US" sz="1400" b="1" dirty="0">
-                <a:solidFill>
-                  <a:srgbClr val="0D9488"/>
+              <a:rPr lang="en-US" sz="1100" b="1" dirty="0">
+                <a:solidFill>
+                  <a:srgbClr val="475569"/>
                 </a:solidFill>
                 <a:latin typeface="Trebuchet MS" pitchFamily="34" charset="0"/>
                 <a:ea typeface="Trebuchet MS" pitchFamily="34" charset="-122"/>
                 <a:cs typeface="Trebuchet MS" pitchFamily="34" charset="-120"/>
               </a:rPr>
-              <a:t>thank</a:t>
-            </a:r>
-            <a:endParaRPr lang="en-US" sz="1400" dirty="0"/>
-          </a:p>
-        </p:txBody>
-      </p:sp>
-      <p:sp>
-        <p:nvSpPr>
-          <p:cNvPr id="30" name="Text 28"/>
-          <p:cNvSpPr/>
-          <p:nvPr/>
-        </p:nvSpPr>
-        <p:spPr>
-          <a:xfrm>
-            <a:off x="3959352" y="3364992"/>
-            <a:ext cx="411480" cy="475488"/>
-          </a:xfrm>
-          <a:prstGeom prst="rect">
-            <a:avLst/>
-          </a:prstGeom>
-          <a:noFill/>
-          <a:ln/>
-        </p:spPr>
-        <p:txBody>
-          <a:bodyPr wrap="square" lIns="0" tIns="0" rIns="0" bIns="0" rtlCol="0" anchor="ctr"/>
-          <a:lstStyle/>
-          <a:p>
-            <a:pPr algn="ctr" indent="0" marL="0">
-              <a:buNone/>
-            </a:pPr>
-            <a:r>
-              <a:rPr lang="en-US" sz="1600" b="1" dirty="0">
-                <a:solidFill>
-                  <a:srgbClr val="0D9488"/>
-                </a:solidFill>
-                <a:latin typeface="Trebuchet MS" pitchFamily="34" charset="0"/>
-                <a:ea typeface="Trebuchet MS" pitchFamily="34" charset="-122"/>
-                <a:cs typeface="Trebuchet MS" pitchFamily="34" charset="-120"/>
-              </a:rPr>
-              <a:t>·</a:t>
-            </a:r>
-            <a:endParaRPr lang="en-US" sz="1600" dirty="0"/>
-          </a:p>
-        </p:txBody>
-      </p:sp>
-      <p:sp>
-        <p:nvSpPr>
-          <p:cNvPr id="31" name="Shape 29"/>
-          <p:cNvSpPr/>
-          <p:nvPr/>
-        </p:nvSpPr>
-        <p:spPr>
-          <a:xfrm>
-            <a:off x="4370832" y="3364992"/>
-            <a:ext cx="1645920" cy="475488"/>
-          </a:xfrm>
-          <a:prstGeom prst="rect">
-            <a:avLst>
-              <a:gd name="adj" fmla="val 9615"/>
-            </a:avLst>
-          </a:prstGeom>
-          <a:solidFill>
-            <a:srgbClr val="FFFFFF"/>
-          </a:solidFill>
-          <a:ln w="12700">
-            <a:solidFill>
-              <a:srgbClr val="0D9488"/>
-            </a:solidFill>
-            <a:prstDash val="solid"/>
-          </a:ln>
-        </p:spPr>
-      </p:sp>
-      <p:sp>
-        <p:nvSpPr>
-          <p:cNvPr id="32" name="Text 30"/>
-          <p:cNvSpPr/>
-          <p:nvPr/>
-        </p:nvSpPr>
-        <p:spPr>
-          <a:xfrm>
-            <a:off x="4370832" y="3364992"/>
-            <a:ext cx="1645920" cy="475488"/>
-          </a:xfrm>
-          <a:prstGeom prst="rect">
-            <a:avLst/>
-          </a:prstGeom>
-          <a:noFill/>
-          <a:ln/>
-        </p:spPr>
-        <p:txBody>
-          <a:bodyPr wrap="square" lIns="0" tIns="0" rIns="0" bIns="0" rtlCol="0" anchor="ctr"/>
-          <a:lstStyle/>
-          <a:p>
-            <a:pPr algn="ctr" indent="0" marL="0">
-              <a:buNone/>
-            </a:pPr>
-            <a:r>
-              <a:rPr lang="en-US" sz="1400" b="1" dirty="0">
-                <a:solidFill>
-                  <a:srgbClr val="0D9488"/>
-                </a:solidFill>
-                <a:latin typeface="Trebuchet MS" pitchFamily="34" charset="0"/>
-                <a:ea typeface="Trebuchet MS" pitchFamily="34" charset="-122"/>
-                <a:cs typeface="Trebuchet MS" pitchFamily="34" charset="-120"/>
-              </a:rPr>
-              <a:t>ful</a:t>
-            </a:r>
-            <a:endParaRPr lang="en-US" sz="1400" dirty="0"/>
-          </a:p>
-        </p:txBody>
-      </p:sp>
-      <p:sp>
-        <p:nvSpPr>
-          <p:cNvPr id="33" name="Text 31"/>
-          <p:cNvSpPr/>
-          <p:nvPr/>
-        </p:nvSpPr>
-        <p:spPr>
-          <a:xfrm>
-            <a:off x="6016752" y="3364992"/>
-            <a:ext cx="411480" cy="475488"/>
-          </a:xfrm>
-          <a:prstGeom prst="rect">
-            <a:avLst/>
-          </a:prstGeom>
-          <a:noFill/>
-          <a:ln/>
-        </p:spPr>
-        <p:txBody>
-          <a:bodyPr wrap="square" lIns="0" tIns="0" rIns="0" bIns="0" rtlCol="0" anchor="ctr"/>
-          <a:lstStyle/>
-          <a:p>
-            <a:pPr algn="ctr" indent="0" marL="0">
-              <a:buNone/>
-            </a:pPr>
-            <a:r>
-              <a:rPr lang="en-US" sz="1600" b="1" dirty="0">
-                <a:solidFill>
-                  <a:srgbClr val="0D9488"/>
-                </a:solidFill>
-                <a:latin typeface="Trebuchet MS" pitchFamily="34" charset="0"/>
-                <a:ea typeface="Trebuchet MS" pitchFamily="34" charset="-122"/>
-                <a:cs typeface="Trebuchet MS" pitchFamily="34" charset="-120"/>
-              </a:rPr>
-              <a:t>·</a:t>
-            </a:r>
-            <a:endParaRPr lang="en-US" sz="1600" dirty="0"/>
-          </a:p>
-        </p:txBody>
-      </p:sp>
-      <p:sp>
-        <p:nvSpPr>
-          <p:cNvPr id="34" name="Shape 32"/>
-          <p:cNvSpPr/>
-          <p:nvPr/>
-        </p:nvSpPr>
-        <p:spPr>
-          <a:xfrm>
-            <a:off x="6428232" y="3364992"/>
-            <a:ext cx="1645920" cy="475488"/>
-          </a:xfrm>
-          <a:prstGeom prst="rect">
-            <a:avLst>
-              <a:gd name="adj" fmla="val 9615"/>
-            </a:avLst>
-          </a:prstGeom>
-          <a:solidFill>
-            <a:srgbClr val="FFFFFF"/>
-          </a:solidFill>
-          <a:ln w="12700">
-            <a:solidFill>
-              <a:srgbClr val="0D9488"/>
-            </a:solidFill>
-            <a:prstDash val="solid"/>
-          </a:ln>
-        </p:spPr>
-      </p:sp>
-      <p:sp>
-        <p:nvSpPr>
-          <p:cNvPr id="35" name="Text 33"/>
-          <p:cNvSpPr/>
-          <p:nvPr/>
-        </p:nvSpPr>
-        <p:spPr>
-          <a:xfrm>
-            <a:off x="6428232" y="3364992"/>
-            <a:ext cx="1645920" cy="475488"/>
-          </a:xfrm>
-          <a:prstGeom prst="rect">
-            <a:avLst/>
-          </a:prstGeom>
-          <a:noFill/>
-          <a:ln/>
-        </p:spPr>
-        <p:txBody>
-          <a:bodyPr wrap="square" lIns="0" tIns="0" rIns="0" bIns="0" rtlCol="0" anchor="ctr"/>
-          <a:lstStyle/>
-          <a:p>
-            <a:pPr algn="ctr" indent="0" marL="0">
-              <a:buNone/>
-            </a:pPr>
-            <a:r>
-              <a:rPr lang="en-US" sz="1400" b="1" dirty="0">
-                <a:solidFill>
-                  <a:srgbClr val="0D9488"/>
-                </a:solidFill>
-                <a:latin typeface="Trebuchet MS" pitchFamily="34" charset="0"/>
-                <a:ea typeface="Trebuchet MS" pitchFamily="34" charset="-122"/>
-                <a:cs typeface="Trebuchet MS" pitchFamily="34" charset="-120"/>
-              </a:rPr>
-              <a:t>ly</a:t>
-            </a:r>
-            <a:endParaRPr lang="en-US" sz="1400" dirty="0"/>
-          </a:p>
-        </p:txBody>
-      </p:sp>
-      <p:sp>
-        <p:nvSpPr>
-          <p:cNvPr id="36" name="Shape 34"/>
-          <p:cNvSpPr/>
-          <p:nvPr/>
-        </p:nvSpPr>
-        <p:spPr>
-          <a:xfrm>
-            <a:off x="365760" y="4096512"/>
-            <a:ext cx="1371600" cy="804672"/>
+              <a:t>Phonemes</a:t>
+            </a:r>
+            <a:endParaRPr lang="en-US" sz="1100" dirty="0"/>
+          </a:p>
+        </p:txBody>
+      </p:sp>
+      <p:sp>
+        <p:nvSpPr>
+          <p:cNvPr id="29" name="Shape 27"/>
+          <p:cNvSpPr/>
+          <p:nvPr/>
+        </p:nvSpPr>
+        <p:spPr>
+          <a:xfrm>
+            <a:off x="1874520" y="4096512"/>
+            <a:ext cx="6903720" cy="804672"/>
           </a:xfrm>
           <a:prstGeom prst="rect">
             <a:avLst>
@@ -31592,85 +31039,19 @@
             </a:avLst>
           </a:prstGeom>
           <a:solidFill>
-            <a:srgbClr val="E2E8F0"/>
+            <a:srgbClr val="F8FAFC"/>
           </a:solidFill>
           <a:ln w="12700">
             <a:solidFill>
               <a:srgbClr val="E2E8F0"/>
             </a:solidFill>
-            <a:prstDash val="solid"/>
-          </a:ln>
-        </p:spPr>
-      </p:sp>
-      <p:sp>
-        <p:nvSpPr>
-          <p:cNvPr id="37" name="Text 35"/>
-          <p:cNvSpPr/>
-          <p:nvPr/>
-        </p:nvSpPr>
-        <p:spPr>
-          <a:xfrm>
-            <a:off x="365760" y="4096512"/>
-            <a:ext cx="1371600" cy="804672"/>
-          </a:xfrm>
-          <a:prstGeom prst="rect">
-            <a:avLst/>
-          </a:prstGeom>
-          <a:noFill/>
-          <a:ln/>
-        </p:spPr>
-        <p:txBody>
-          <a:bodyPr wrap="square" lIns="0" tIns="0" rIns="0" bIns="0" rtlCol="0" anchor="ctr"/>
-          <a:lstStyle/>
-          <a:p>
-            <a:pPr algn="ctr" indent="0" marL="0">
-              <a:buNone/>
-            </a:pPr>
-            <a:r>
-              <a:rPr lang="en-US" sz="1100" b="1" dirty="0">
-                <a:solidFill>
-                  <a:srgbClr val="475569"/>
-                </a:solidFill>
-                <a:latin typeface="Trebuchet MS" pitchFamily="34" charset="0"/>
-                <a:ea typeface="Trebuchet MS" pitchFamily="34" charset="-122"/>
-                <a:cs typeface="Trebuchet MS" pitchFamily="34" charset="-120"/>
-              </a:rPr>
-              <a:t>Phonemes</a:t>
-            </a:r>
-            <a:endParaRPr lang="en-US" sz="1100" dirty="0"/>
-          </a:p>
-        </p:txBody>
-      </p:sp>
-      <p:sp>
-        <p:nvSpPr>
-          <p:cNvPr id="38" name="Shape 36"/>
-          <p:cNvSpPr/>
-          <p:nvPr/>
-        </p:nvSpPr>
-        <p:spPr>
-          <a:xfrm>
-            <a:off x="1874520" y="4096512"/>
-            <a:ext cx="6903720" cy="804672"/>
-          </a:xfrm>
-          <a:prstGeom prst="rect">
-            <a:avLst>
-              <a:gd name="adj" fmla="val 6818"/>
-            </a:avLst>
-          </a:prstGeom>
-          <a:solidFill>
-            <a:srgbClr val="F8FAFC"/>
-          </a:solidFill>
-          <a:ln w="12700">
-            <a:solidFill>
-              <a:srgbClr val="E2E8F0"/>
-            </a:solidFill>
             <a:prstDash val="dash"/>
           </a:ln>
         </p:spPr>
       </p:sp>
       <p:sp>
         <p:nvSpPr>
-          <p:cNvPr id="39" name="Text 37"/>
+          <p:cNvPr id="30" name="Text 28"/>
           <p:cNvSpPr/>
           <p:nvPr/>
         </p:nvSpPr>
@@ -31993,7 +31374,7 @@
                 <a:ea typeface="Calibri" pitchFamily="34" charset="-122"/>
                 <a:cs typeface="Calibri" pitchFamily="34" charset="-120"/>
               </a:rPr>
-              <a:t>Word Labs  •  wordlabs.app  •  Root: 'thank' = express gratitude or appreciation</a:t>
+              <a:t>Word Labs  •  wordlabs.app  •  Root: 'thank' = express gratitude or praise</a:t>
             </a:r>
             <a:endParaRPr lang="en-US" sz="800" dirty="0"/>
           </a:p>
@@ -32132,7 +31513,7 @@
                 <a:ea typeface="Trebuchet MS" pitchFamily="34" charset="-122"/>
                 <a:cs typeface="Trebuchet MS" pitchFamily="34" charset="-120"/>
               </a:rPr>
-              <a:t>thankfully</a:t>
+              <a:t>thanks</a:t>
             </a:r>
             <a:endParaRPr lang="en-US" sz="2800" dirty="0"/>
           </a:p>
@@ -32212,7 +31593,7 @@
         </p:nvSpPr>
         <p:spPr>
           <a:xfrm>
-            <a:off x="2221992" y="2258568"/>
+            <a:off x="2938272" y="2258568"/>
             <a:ext cx="1828800" cy="292608"/>
           </a:xfrm>
           <a:prstGeom prst="rect">
@@ -32246,7 +31627,7 @@
         </p:nvSpPr>
         <p:spPr>
           <a:xfrm>
-            <a:off x="2221992" y="2258568"/>
+            <a:off x="2938272" y="2258568"/>
             <a:ext cx="1828800" cy="292608"/>
           </a:xfrm>
           <a:prstGeom prst="rect">
@@ -32285,7 +31666,7 @@
         </p:nvSpPr>
         <p:spPr>
           <a:xfrm>
-            <a:off x="2221992" y="2569464"/>
+            <a:off x="2938272" y="2569464"/>
             <a:ext cx="1828800" cy="201168"/>
           </a:xfrm>
           <a:prstGeom prst="rect">
@@ -32324,7 +31705,7 @@
         </p:nvSpPr>
         <p:spPr>
           <a:xfrm>
-            <a:off x="4370832" y="2258568"/>
+            <a:off x="5803392" y="2258568"/>
             <a:ext cx="1828800" cy="292608"/>
           </a:xfrm>
           <a:prstGeom prst="rect">
@@ -32358,7 +31739,7 @@
         </p:nvSpPr>
         <p:spPr>
           <a:xfrm>
-            <a:off x="4370832" y="2258568"/>
+            <a:off x="5803392" y="2258568"/>
             <a:ext cx="1828800" cy="292608"/>
           </a:xfrm>
           <a:prstGeom prst="rect">
@@ -32383,7 +31764,7 @@
                 <a:ea typeface="Trebuchet MS" pitchFamily="34" charset="-122"/>
                 <a:cs typeface="Trebuchet MS" pitchFamily="34" charset="-120"/>
               </a:rPr>
-              <a:t>ful</a:t>
+              <a:t>s</a:t>
             </a:r>
             <a:endParaRPr lang="en-US" sz="1300" dirty="0"/>
           </a:p>
@@ -32397,7 +31778,7 @@
         </p:nvSpPr>
         <p:spPr>
           <a:xfrm>
-            <a:off x="4370832" y="2569464"/>
+            <a:off x="5803392" y="2569464"/>
             <a:ext cx="1828800" cy="201168"/>
           </a:xfrm>
           <a:prstGeom prst="rect">
@@ -32422,7 +31803,7 @@
                 <a:ea typeface="Calibri" pitchFamily="34" charset="-122"/>
                 <a:cs typeface="Calibri" pitchFamily="34" charset="-120"/>
               </a:rPr>
-              <a:t>full of</a:t>
+              <a:t>plural; more than one</a:t>
             </a:r>
             <a:endParaRPr lang="en-US" sz="850" dirty="0"/>
           </a:p>
@@ -32436,30 +31817,23 @@
         </p:nvSpPr>
         <p:spPr>
           <a:xfrm>
-            <a:off x="6519672" y="2258568"/>
-            <a:ext cx="1828800" cy="292608"/>
+            <a:off x="365760" y="3273552"/>
+            <a:ext cx="1371600" cy="658368"/>
           </a:xfrm>
           <a:prstGeom prst="rect">
             <a:avLst>
-              <a:gd name="adj" fmla="val 25000"/>
+              <a:gd name="adj" fmla="val 8333"/>
             </a:avLst>
           </a:prstGeom>
           <a:solidFill>
-            <a:srgbClr val="FCE7F3"/>
-          </a:solidFill>
-          <a:ln w="19050">
-            <a:solidFill>
-              <a:srgbClr val="DB2777"/>
-            </a:solidFill>
-            <a:prstDash val="solid"/>
-          </a:ln>
-          <a:effectLst>
-            <a:outerShdw sx="100000" sy="100000" kx="0" ky="0" algn="bl" rotWithShape="0" blurRad="101600" dist="38100" dir="8100000">
-              <a:srgbClr val="000000">
-                <a:alpha val="12000"/>
-              </a:srgbClr>
-            </a:outerShdw>
-          </a:effectLst>
+            <a:srgbClr val="E2E8F0"/>
+          </a:solidFill>
+          <a:ln w="12700">
+            <a:solidFill>
+              <a:srgbClr val="E2E8F0"/>
+            </a:solidFill>
+            <a:prstDash val="solid"/>
+          </a:ln>
         </p:spPr>
       </p:sp>
       <p:sp>
@@ -32470,8 +31844,8 @@
         </p:nvSpPr>
         <p:spPr>
           <a:xfrm>
-            <a:off x="6519672" y="2258568"/>
-            <a:ext cx="1828800" cy="292608"/>
+            <a:off x="365760" y="3273552"/>
+            <a:ext cx="1371600" cy="658368"/>
           </a:xfrm>
           <a:prstGeom prst="rect">
             <a:avLst/>
@@ -32487,69 +31861,30 @@
               <a:buNone/>
             </a:pPr>
             <a:r>
-              <a:rPr lang="en-US" sz="1300" b="1" dirty="0">
-                <a:solidFill>
-                  <a:srgbClr val="9D174D"/>
+              <a:rPr lang="en-US" sz="1100" b="1" dirty="0">
+                <a:solidFill>
+                  <a:srgbClr val="475569"/>
                 </a:solidFill>
                 <a:latin typeface="Trebuchet MS" pitchFamily="34" charset="0"/>
                 <a:ea typeface="Trebuchet MS" pitchFamily="34" charset="-122"/>
                 <a:cs typeface="Trebuchet MS" pitchFamily="34" charset="-120"/>
               </a:rPr>
-              <a:t>ly</a:t>
-            </a:r>
-            <a:endParaRPr lang="en-US" sz="1300" dirty="0"/>
-          </a:p>
-        </p:txBody>
-      </p:sp>
-      <p:sp>
-        <p:nvSpPr>
-          <p:cNvPr id="24" name="Text 22"/>
-          <p:cNvSpPr/>
-          <p:nvPr/>
-        </p:nvSpPr>
-        <p:spPr>
-          <a:xfrm>
-            <a:off x="6519672" y="2569464"/>
-            <a:ext cx="1828800" cy="201168"/>
-          </a:xfrm>
-          <a:prstGeom prst="rect">
-            <a:avLst/>
-          </a:prstGeom>
-          <a:noFill/>
-          <a:ln/>
-        </p:spPr>
-        <p:txBody>
-          <a:bodyPr wrap="square" lIns="0" tIns="0" rIns="0" bIns="0" rtlCol="0" anchor="t"/>
-          <a:lstStyle/>
-          <a:p>
-            <a:pPr algn="ctr" indent="0" marL="0">
-              <a:buNone/>
-            </a:pPr>
-            <a:r>
-              <a:rPr lang="en-US" sz="850" dirty="0">
-                <a:solidFill>
-                  <a:srgbClr val="475569"/>
-                </a:solidFill>
-                <a:latin typeface="Calibri" pitchFamily="34" charset="0"/>
-                <a:ea typeface="Calibri" pitchFamily="34" charset="-122"/>
-                <a:cs typeface="Calibri" pitchFamily="34" charset="-120"/>
-              </a:rPr>
-              <a:t>in a way that is</a:t>
-            </a:r>
-            <a:endParaRPr lang="en-US" sz="850" dirty="0"/>
-          </a:p>
-        </p:txBody>
-      </p:sp>
-      <p:sp>
-        <p:nvSpPr>
-          <p:cNvPr id="25" name="Shape 23"/>
-          <p:cNvSpPr/>
-          <p:nvPr/>
-        </p:nvSpPr>
-        <p:spPr>
-          <a:xfrm>
-            <a:off x="365760" y="3273552"/>
-            <a:ext cx="1371600" cy="658368"/>
+              <a:t>Syllables</a:t>
+            </a:r>
+            <a:endParaRPr lang="en-US" sz="1100" dirty="0"/>
+          </a:p>
+        </p:txBody>
+      </p:sp>
+      <p:sp>
+        <p:nvSpPr>
+          <p:cNvPr id="24" name="Shape 22"/>
+          <p:cNvSpPr/>
+          <p:nvPr/>
+        </p:nvSpPr>
+        <p:spPr>
+          <a:xfrm>
+            <a:off x="1874520" y="3273552"/>
+            <a:ext cx="6903720" cy="658368"/>
           </a:xfrm>
           <a:prstGeom prst="rect">
             <a:avLst>
@@ -32557,11 +31892,38 @@
             </a:avLst>
           </a:prstGeom>
           <a:solidFill>
-            <a:srgbClr val="E2E8F0"/>
-          </a:solidFill>
-          <a:ln w="12700">
-            <a:solidFill>
-              <a:srgbClr val="E2E8F0"/>
+            <a:srgbClr val="CCFBF1"/>
+          </a:solidFill>
+          <a:ln w="12700">
+            <a:solidFill>
+              <a:srgbClr val="0D9488"/>
+            </a:solidFill>
+            <a:prstDash val="solid"/>
+          </a:ln>
+        </p:spPr>
+      </p:sp>
+      <p:sp>
+        <p:nvSpPr>
+          <p:cNvPr id="25" name="Shape 23"/>
+          <p:cNvSpPr/>
+          <p:nvPr/>
+        </p:nvSpPr>
+        <p:spPr>
+          <a:xfrm>
+            <a:off x="4370832" y="3364992"/>
+            <a:ext cx="1645920" cy="475488"/>
+          </a:xfrm>
+          <a:prstGeom prst="rect">
+            <a:avLst>
+              <a:gd name="adj" fmla="val 9615"/>
+            </a:avLst>
+          </a:prstGeom>
+          <a:solidFill>
+            <a:srgbClr val="FFFFFF"/>
+          </a:solidFill>
+          <a:ln w="12700">
+            <a:solidFill>
+              <a:srgbClr val="0D9488"/>
             </a:solidFill>
             <a:prstDash val="solid"/>
           </a:ln>
@@ -32575,8 +31937,8 @@
         </p:nvSpPr>
         <p:spPr>
           <a:xfrm>
-            <a:off x="365760" y="3273552"/>
-            <a:ext cx="1371600" cy="658368"/>
+            <a:off x="4370832" y="3364992"/>
+            <a:ext cx="1645920" cy="475488"/>
           </a:xfrm>
           <a:prstGeom prst="rect">
             <a:avLst/>
@@ -32592,15 +31954,81 @@
               <a:buNone/>
             </a:pPr>
             <a:r>
-              <a:rPr lang="en-US" sz="1100" b="1" dirty="0">
-                <a:solidFill>
-                  <a:srgbClr val="475569"/>
+              <a:rPr lang="en-US" sz="1400" b="1" dirty="0">
+                <a:solidFill>
+                  <a:srgbClr val="0D9488"/>
                 </a:solidFill>
                 <a:latin typeface="Trebuchet MS" pitchFamily="34" charset="0"/>
                 <a:ea typeface="Trebuchet MS" pitchFamily="34" charset="-122"/>
                 <a:cs typeface="Trebuchet MS" pitchFamily="34" charset="-120"/>
               </a:rPr>
-              <a:t>Syllables</a:t>
+              <a:t>thanks</a:t>
+            </a:r>
+            <a:endParaRPr lang="en-US" sz="1400" dirty="0"/>
+          </a:p>
+        </p:txBody>
+      </p:sp>
+      <p:sp>
+        <p:nvSpPr>
+          <p:cNvPr id="27" name="Shape 25"/>
+          <p:cNvSpPr/>
+          <p:nvPr/>
+        </p:nvSpPr>
+        <p:spPr>
+          <a:xfrm>
+            <a:off x="365760" y="4096512"/>
+            <a:ext cx="1371600" cy="804672"/>
+          </a:xfrm>
+          <a:prstGeom prst="rect">
+            <a:avLst>
+              <a:gd name="adj" fmla="val 6818"/>
+            </a:avLst>
+          </a:prstGeom>
+          <a:solidFill>
+            <a:srgbClr val="E2E8F0"/>
+          </a:solidFill>
+          <a:ln w="12700">
+            <a:solidFill>
+              <a:srgbClr val="E2E8F0"/>
+            </a:solidFill>
+            <a:prstDash val="solid"/>
+          </a:ln>
+        </p:spPr>
+      </p:sp>
+      <p:sp>
+        <p:nvSpPr>
+          <p:cNvPr id="28" name="Text 26"/>
+          <p:cNvSpPr/>
+          <p:nvPr/>
+        </p:nvSpPr>
+        <p:spPr>
+          <a:xfrm>
+            <a:off x="365760" y="4096512"/>
+            <a:ext cx="1371600" cy="804672"/>
+          </a:xfrm>
+          <a:prstGeom prst="rect">
+            <a:avLst/>
+          </a:prstGeom>
+          <a:noFill/>
+          <a:ln/>
+        </p:spPr>
+        <p:txBody>
+          <a:bodyPr wrap="square" lIns="0" tIns="0" rIns="0" bIns="0" rtlCol="0" anchor="ctr"/>
+          <a:lstStyle/>
+          <a:p>
+            <a:pPr algn="ctr" indent="0" marL="0">
+              <a:buNone/>
+            </a:pPr>
+            <a:r>
+              <a:rPr lang="en-US" sz="1100" b="1" dirty="0">
+                <a:solidFill>
+                  <a:srgbClr val="475569"/>
+                </a:solidFill>
+                <a:latin typeface="Trebuchet MS" pitchFamily="34" charset="0"/>
+                <a:ea typeface="Trebuchet MS" pitchFamily="34" charset="-122"/>
+                <a:cs typeface="Trebuchet MS" pitchFamily="34" charset="-120"/>
+              </a:rPr>
+              <a:t>Phonemes</a:t>
             </a:r>
             <a:endParaRPr lang="en-US" sz="1100" dirty="0"/>
           </a:p>
@@ -32608,13 +32036,13 @@
       </p:sp>
       <p:sp>
         <p:nvSpPr>
-          <p:cNvPr id="27" name="Shape 25"/>
-          <p:cNvSpPr/>
-          <p:nvPr/>
-        </p:nvSpPr>
-        <p:spPr>
-          <a:xfrm>
-            <a:off x="1874520" y="3273552"/>
+          <p:cNvPr id="29" name="Shape 27"/>
+          <p:cNvSpPr/>
+          <p:nvPr/>
+        </p:nvSpPr>
+        <p:spPr>
+          <a:xfrm>
+            <a:off x="1874520" y="4096512"/>
             <a:ext cx="6903720" cy="658368"/>
           </a:xfrm>
           <a:prstGeom prst="rect">
@@ -32623,30 +32051,30 @@
             </a:avLst>
           </a:prstGeom>
           <a:solidFill>
-            <a:srgbClr val="CCFBF1"/>
-          </a:solidFill>
-          <a:ln w="12700">
-            <a:solidFill>
-              <a:srgbClr val="0D9488"/>
-            </a:solidFill>
-            <a:prstDash val="solid"/>
-          </a:ln>
-        </p:spPr>
-      </p:sp>
-      <p:sp>
-        <p:nvSpPr>
-          <p:cNvPr id="28" name="Shape 26"/>
-          <p:cNvSpPr/>
-          <p:nvPr/>
-        </p:nvSpPr>
-        <p:spPr>
-          <a:xfrm>
-            <a:off x="2313432" y="3364992"/>
-            <a:ext cx="1645920" cy="475488"/>
+            <a:srgbClr val="FCE7F3"/>
+          </a:solidFill>
+          <a:ln w="12700">
+            <a:solidFill>
+              <a:srgbClr val="DB2777"/>
+            </a:solidFill>
+            <a:prstDash val="solid"/>
+          </a:ln>
+        </p:spPr>
+      </p:sp>
+      <p:sp>
+        <p:nvSpPr>
+          <p:cNvPr id="30" name="Shape 28"/>
+          <p:cNvSpPr/>
+          <p:nvPr/>
+        </p:nvSpPr>
+        <p:spPr>
+          <a:xfrm>
+            <a:off x="2427732" y="4169664"/>
+            <a:ext cx="685800" cy="475488"/>
           </a:xfrm>
           <a:prstGeom prst="rect">
             <a:avLst>
-              <a:gd name="adj" fmla="val 9615"/>
+              <a:gd name="adj" fmla="val 7692"/>
             </a:avLst>
           </a:prstGeom>
           <a:solidFill>
@@ -32654,22 +32082,22 @@
           </a:solidFill>
           <a:ln w="12700">
             <a:solidFill>
-              <a:srgbClr val="0D9488"/>
-            </a:solidFill>
-            <a:prstDash val="solid"/>
-          </a:ln>
-        </p:spPr>
-      </p:sp>
-      <p:sp>
-        <p:nvSpPr>
-          <p:cNvPr id="29" name="Text 27"/>
-          <p:cNvSpPr/>
-          <p:nvPr/>
-        </p:nvSpPr>
-        <p:spPr>
-          <a:xfrm>
-            <a:off x="2313432" y="3364992"/>
-            <a:ext cx="1645920" cy="475488"/>
+              <a:srgbClr val="DB2777"/>
+            </a:solidFill>
+            <a:prstDash val="solid"/>
+          </a:ln>
+        </p:spPr>
+      </p:sp>
+      <p:sp>
+        <p:nvSpPr>
+          <p:cNvPr id="31" name="Text 29"/>
+          <p:cNvSpPr/>
+          <p:nvPr/>
+        </p:nvSpPr>
+        <p:spPr>
+          <a:xfrm>
+            <a:off x="2427732" y="4169664"/>
+            <a:ext cx="685800" cy="475488"/>
           </a:xfrm>
           <a:prstGeom prst="rect">
             <a:avLst/>
@@ -32685,30 +32113,57 @@
               <a:buNone/>
             </a:pPr>
             <a:r>
-              <a:rPr lang="en-US" sz="1400" b="1" dirty="0">
-                <a:solidFill>
-                  <a:srgbClr val="0D9488"/>
+              <a:rPr lang="en-US" sz="900" b="1" dirty="0">
+                <a:solidFill>
+                  <a:srgbClr val="9D174D"/>
                 </a:solidFill>
                 <a:latin typeface="Trebuchet MS" pitchFamily="34" charset="0"/>
                 <a:ea typeface="Trebuchet MS" pitchFamily="34" charset="-122"/>
                 <a:cs typeface="Trebuchet MS" pitchFamily="34" charset="-120"/>
               </a:rPr>
-              <a:t>thank</a:t>
-            </a:r>
-            <a:endParaRPr lang="en-US" sz="1400" dirty="0"/>
-          </a:p>
-        </p:txBody>
-      </p:sp>
-      <p:sp>
-        <p:nvSpPr>
-          <p:cNvPr id="30" name="Text 28"/>
-          <p:cNvSpPr/>
-          <p:nvPr/>
-        </p:nvSpPr>
-        <p:spPr>
-          <a:xfrm>
-            <a:off x="3959352" y="3364992"/>
-            <a:ext cx="411480" cy="475488"/>
+              <a:t>th</a:t>
+            </a:r>
+            <a:endParaRPr lang="en-US" sz="900" dirty="0"/>
+          </a:p>
+        </p:txBody>
+      </p:sp>
+      <p:sp>
+        <p:nvSpPr>
+          <p:cNvPr id="32" name="Shape 30"/>
+          <p:cNvSpPr/>
+          <p:nvPr/>
+        </p:nvSpPr>
+        <p:spPr>
+          <a:xfrm>
+            <a:off x="3639312" y="4169664"/>
+            <a:ext cx="685800" cy="475488"/>
+          </a:xfrm>
+          <a:prstGeom prst="rect">
+            <a:avLst>
+              <a:gd name="adj" fmla="val 7692"/>
+            </a:avLst>
+          </a:prstGeom>
+          <a:solidFill>
+            <a:srgbClr val="FFFFFF"/>
+          </a:solidFill>
+          <a:ln w="12700">
+            <a:solidFill>
+              <a:srgbClr val="DB2777"/>
+            </a:solidFill>
+            <a:prstDash val="solid"/>
+          </a:ln>
+        </p:spPr>
+      </p:sp>
+      <p:sp>
+        <p:nvSpPr>
+          <p:cNvPr id="33" name="Text 31"/>
+          <p:cNvSpPr/>
+          <p:nvPr/>
+        </p:nvSpPr>
+        <p:spPr>
+          <a:xfrm>
+            <a:off x="3639312" y="4169664"/>
+            <a:ext cx="685800" cy="475488"/>
           </a:xfrm>
           <a:prstGeom prst="rect">
             <a:avLst/>
@@ -32724,34 +32179,34 @@
               <a:buNone/>
             </a:pPr>
             <a:r>
-              <a:rPr lang="en-US" sz="1600" b="1" dirty="0">
-                <a:solidFill>
-                  <a:srgbClr val="0D9488"/>
+              <a:rPr lang="en-US" sz="900" b="1" dirty="0">
+                <a:solidFill>
+                  <a:srgbClr val="9D174D"/>
                 </a:solidFill>
                 <a:latin typeface="Trebuchet MS" pitchFamily="34" charset="0"/>
                 <a:ea typeface="Trebuchet MS" pitchFamily="34" charset="-122"/>
                 <a:cs typeface="Trebuchet MS" pitchFamily="34" charset="-120"/>
               </a:rPr>
-              <a:t>·</a:t>
-            </a:r>
-            <a:endParaRPr lang="en-US" sz="1600" dirty="0"/>
-          </a:p>
-        </p:txBody>
-      </p:sp>
-      <p:sp>
-        <p:nvSpPr>
-          <p:cNvPr id="31" name="Shape 29"/>
-          <p:cNvSpPr/>
-          <p:nvPr/>
-        </p:nvSpPr>
-        <p:spPr>
-          <a:xfrm>
-            <a:off x="4370832" y="3364992"/>
-            <a:ext cx="1645920" cy="475488"/>
+              <a:t>a</a:t>
+            </a:r>
+            <a:endParaRPr lang="en-US" sz="900" dirty="0"/>
+          </a:p>
+        </p:txBody>
+      </p:sp>
+      <p:sp>
+        <p:nvSpPr>
+          <p:cNvPr id="34" name="Shape 32"/>
+          <p:cNvSpPr/>
+          <p:nvPr/>
+        </p:nvSpPr>
+        <p:spPr>
+          <a:xfrm>
+            <a:off x="4850892" y="4169664"/>
+            <a:ext cx="685800" cy="475488"/>
           </a:xfrm>
           <a:prstGeom prst="rect">
             <a:avLst>
-              <a:gd name="adj" fmla="val 9615"/>
+              <a:gd name="adj" fmla="val 7692"/>
             </a:avLst>
           </a:prstGeom>
           <a:solidFill>
@@ -32759,22 +32214,22 @@
           </a:solidFill>
           <a:ln w="12700">
             <a:solidFill>
-              <a:srgbClr val="0D9488"/>
-            </a:solidFill>
-            <a:prstDash val="solid"/>
-          </a:ln>
-        </p:spPr>
-      </p:sp>
-      <p:sp>
-        <p:nvSpPr>
-          <p:cNvPr id="32" name="Text 30"/>
-          <p:cNvSpPr/>
-          <p:nvPr/>
-        </p:nvSpPr>
-        <p:spPr>
-          <a:xfrm>
-            <a:off x="4370832" y="3364992"/>
-            <a:ext cx="1645920" cy="475488"/>
+              <a:srgbClr val="DB2777"/>
+            </a:solidFill>
+            <a:prstDash val="solid"/>
+          </a:ln>
+        </p:spPr>
+      </p:sp>
+      <p:sp>
+        <p:nvSpPr>
+          <p:cNvPr id="35" name="Text 33"/>
+          <p:cNvSpPr/>
+          <p:nvPr/>
+        </p:nvSpPr>
+        <p:spPr>
+          <a:xfrm>
+            <a:off x="4850892" y="4169664"/>
+            <a:ext cx="685800" cy="475488"/>
           </a:xfrm>
           <a:prstGeom prst="rect">
             <a:avLst/>
@@ -32790,30 +32245,57 @@
               <a:buNone/>
             </a:pPr>
             <a:r>
-              <a:rPr lang="en-US" sz="1400" b="1" dirty="0">
-                <a:solidFill>
-                  <a:srgbClr val="0D9488"/>
+              <a:rPr lang="en-US" sz="900" b="1" dirty="0">
+                <a:solidFill>
+                  <a:srgbClr val="9D174D"/>
                 </a:solidFill>
                 <a:latin typeface="Trebuchet MS" pitchFamily="34" charset="0"/>
                 <a:ea typeface="Trebuchet MS" pitchFamily="34" charset="-122"/>
                 <a:cs typeface="Trebuchet MS" pitchFamily="34" charset="-120"/>
               </a:rPr>
-              <a:t>ful</a:t>
-            </a:r>
-            <a:endParaRPr lang="en-US" sz="1400" dirty="0"/>
-          </a:p>
-        </p:txBody>
-      </p:sp>
-      <p:sp>
-        <p:nvSpPr>
-          <p:cNvPr id="33" name="Text 31"/>
-          <p:cNvSpPr/>
-          <p:nvPr/>
-        </p:nvSpPr>
-        <p:spPr>
-          <a:xfrm>
-            <a:off x="6016752" y="3364992"/>
-            <a:ext cx="411480" cy="475488"/>
+              <a:t>n</a:t>
+            </a:r>
+            <a:endParaRPr lang="en-US" sz="900" dirty="0"/>
+          </a:p>
+        </p:txBody>
+      </p:sp>
+      <p:sp>
+        <p:nvSpPr>
+          <p:cNvPr id="36" name="Shape 34"/>
+          <p:cNvSpPr/>
+          <p:nvPr/>
+        </p:nvSpPr>
+        <p:spPr>
+          <a:xfrm>
+            <a:off x="6062472" y="4169664"/>
+            <a:ext cx="685800" cy="475488"/>
+          </a:xfrm>
+          <a:prstGeom prst="rect">
+            <a:avLst>
+              <a:gd name="adj" fmla="val 7692"/>
+            </a:avLst>
+          </a:prstGeom>
+          <a:solidFill>
+            <a:srgbClr val="FFFFFF"/>
+          </a:solidFill>
+          <a:ln w="12700">
+            <a:solidFill>
+              <a:srgbClr val="DB2777"/>
+            </a:solidFill>
+            <a:prstDash val="solid"/>
+          </a:ln>
+        </p:spPr>
+      </p:sp>
+      <p:sp>
+        <p:nvSpPr>
+          <p:cNvPr id="37" name="Text 35"/>
+          <p:cNvSpPr/>
+          <p:nvPr/>
+        </p:nvSpPr>
+        <p:spPr>
+          <a:xfrm>
+            <a:off x="6062472" y="4169664"/>
+            <a:ext cx="685800" cy="475488"/>
           </a:xfrm>
           <a:prstGeom prst="rect">
             <a:avLst/>
@@ -32829,34 +32311,34 @@
               <a:buNone/>
             </a:pPr>
             <a:r>
-              <a:rPr lang="en-US" sz="1600" b="1" dirty="0">
-                <a:solidFill>
-                  <a:srgbClr val="0D9488"/>
+              <a:rPr lang="en-US" sz="900" b="1" dirty="0">
+                <a:solidFill>
+                  <a:srgbClr val="9D174D"/>
                 </a:solidFill>
                 <a:latin typeface="Trebuchet MS" pitchFamily="34" charset="0"/>
                 <a:ea typeface="Trebuchet MS" pitchFamily="34" charset="-122"/>
                 <a:cs typeface="Trebuchet MS" pitchFamily="34" charset="-120"/>
               </a:rPr>
-              <a:t>·</a:t>
-            </a:r>
-            <a:endParaRPr lang="en-US" sz="1600" dirty="0"/>
-          </a:p>
-        </p:txBody>
-      </p:sp>
-      <p:sp>
-        <p:nvSpPr>
-          <p:cNvPr id="34" name="Shape 32"/>
-          <p:cNvSpPr/>
-          <p:nvPr/>
-        </p:nvSpPr>
-        <p:spPr>
-          <a:xfrm>
-            <a:off x="6428232" y="3364992"/>
-            <a:ext cx="1645920" cy="475488"/>
+              <a:t>k</a:t>
+            </a:r>
+            <a:endParaRPr lang="en-US" sz="900" dirty="0"/>
+          </a:p>
+        </p:txBody>
+      </p:sp>
+      <p:sp>
+        <p:nvSpPr>
+          <p:cNvPr id="38" name="Shape 36"/>
+          <p:cNvSpPr/>
+          <p:nvPr/>
+        </p:nvSpPr>
+        <p:spPr>
+          <a:xfrm>
+            <a:off x="7274052" y="4169664"/>
+            <a:ext cx="685800" cy="475488"/>
           </a:xfrm>
           <a:prstGeom prst="rect">
             <a:avLst>
-              <a:gd name="adj" fmla="val 9615"/>
+              <a:gd name="adj" fmla="val 7692"/>
             </a:avLst>
           </a:prstGeom>
           <a:solidFill>
@@ -32864,22 +32346,22 @@
           </a:solidFill>
           <a:ln w="12700">
             <a:solidFill>
-              <a:srgbClr val="0D9488"/>
-            </a:solidFill>
-            <a:prstDash val="solid"/>
-          </a:ln>
-        </p:spPr>
-      </p:sp>
-      <p:sp>
-        <p:nvSpPr>
-          <p:cNvPr id="35" name="Text 33"/>
-          <p:cNvSpPr/>
-          <p:nvPr/>
-        </p:nvSpPr>
-        <p:spPr>
-          <a:xfrm>
-            <a:off x="6428232" y="3364992"/>
-            <a:ext cx="1645920" cy="475488"/>
+              <a:srgbClr val="DB2777"/>
+            </a:solidFill>
+            <a:prstDash val="solid"/>
+          </a:ln>
+        </p:spPr>
+      </p:sp>
+      <p:sp>
+        <p:nvSpPr>
+          <p:cNvPr id="39" name="Text 37"/>
+          <p:cNvSpPr/>
+          <p:nvPr/>
+        </p:nvSpPr>
+        <p:spPr>
+          <a:xfrm>
+            <a:off x="7274052" y="4169664"/>
+            <a:ext cx="685800" cy="475488"/>
           </a:xfrm>
           <a:prstGeom prst="rect">
             <a:avLst/>
@@ -32895,636 +32377,15 @@
               <a:buNone/>
             </a:pPr>
             <a:r>
-              <a:rPr lang="en-US" sz="1400" b="1" dirty="0">
-                <a:solidFill>
-                  <a:srgbClr val="0D9488"/>
+              <a:rPr lang="en-US" sz="900" b="1" dirty="0">
+                <a:solidFill>
+                  <a:srgbClr val="9D174D"/>
                 </a:solidFill>
                 <a:latin typeface="Trebuchet MS" pitchFamily="34" charset="0"/>
                 <a:ea typeface="Trebuchet MS" pitchFamily="34" charset="-122"/>
                 <a:cs typeface="Trebuchet MS" pitchFamily="34" charset="-120"/>
               </a:rPr>
-              <a:t>ly</a:t>
-            </a:r>
-            <a:endParaRPr lang="en-US" sz="1400" dirty="0"/>
-          </a:p>
-        </p:txBody>
-      </p:sp>
-      <p:sp>
-        <p:nvSpPr>
-          <p:cNvPr id="36" name="Shape 34"/>
-          <p:cNvSpPr/>
-          <p:nvPr/>
-        </p:nvSpPr>
-        <p:spPr>
-          <a:xfrm>
-            <a:off x="365760" y="4096512"/>
-            <a:ext cx="1371600" cy="804672"/>
-          </a:xfrm>
-          <a:prstGeom prst="rect">
-            <a:avLst>
-              <a:gd name="adj" fmla="val 6818"/>
-            </a:avLst>
-          </a:prstGeom>
-          <a:solidFill>
-            <a:srgbClr val="E2E8F0"/>
-          </a:solidFill>
-          <a:ln w="12700">
-            <a:solidFill>
-              <a:srgbClr val="E2E8F0"/>
-            </a:solidFill>
-            <a:prstDash val="solid"/>
-          </a:ln>
-        </p:spPr>
-      </p:sp>
-      <p:sp>
-        <p:nvSpPr>
-          <p:cNvPr id="37" name="Text 35"/>
-          <p:cNvSpPr/>
-          <p:nvPr/>
-        </p:nvSpPr>
-        <p:spPr>
-          <a:xfrm>
-            <a:off x="365760" y="4096512"/>
-            <a:ext cx="1371600" cy="804672"/>
-          </a:xfrm>
-          <a:prstGeom prst="rect">
-            <a:avLst/>
-          </a:prstGeom>
-          <a:noFill/>
-          <a:ln/>
-        </p:spPr>
-        <p:txBody>
-          <a:bodyPr wrap="square" lIns="0" tIns="0" rIns="0" bIns="0" rtlCol="0" anchor="ctr"/>
-          <a:lstStyle/>
-          <a:p>
-            <a:pPr algn="ctr" indent="0" marL="0">
-              <a:buNone/>
-            </a:pPr>
-            <a:r>
-              <a:rPr lang="en-US" sz="1100" b="1" dirty="0">
-                <a:solidFill>
-                  <a:srgbClr val="475569"/>
-                </a:solidFill>
-                <a:latin typeface="Trebuchet MS" pitchFamily="34" charset="0"/>
-                <a:ea typeface="Trebuchet MS" pitchFamily="34" charset="-122"/>
-                <a:cs typeface="Trebuchet MS" pitchFamily="34" charset="-120"/>
-              </a:rPr>
-              <a:t>Phonemes</a:t>
-            </a:r>
-            <a:endParaRPr lang="en-US" sz="1100" dirty="0"/>
-          </a:p>
-        </p:txBody>
-      </p:sp>
-      <p:sp>
-        <p:nvSpPr>
-          <p:cNvPr id="38" name="Shape 36"/>
-          <p:cNvSpPr/>
-          <p:nvPr/>
-        </p:nvSpPr>
-        <p:spPr>
-          <a:xfrm>
-            <a:off x="1874520" y="4096512"/>
-            <a:ext cx="6903720" cy="658368"/>
-          </a:xfrm>
-          <a:prstGeom prst="rect">
-            <a:avLst>
-              <a:gd name="adj" fmla="val 8333"/>
-            </a:avLst>
-          </a:prstGeom>
-          <a:solidFill>
-            <a:srgbClr val="FCE7F3"/>
-          </a:solidFill>
-          <a:ln w="12700">
-            <a:solidFill>
-              <a:srgbClr val="DB2777"/>
-            </a:solidFill>
-            <a:prstDash val="solid"/>
-          </a:ln>
-        </p:spPr>
-      </p:sp>
-      <p:sp>
-        <p:nvSpPr>
-          <p:cNvPr id="39" name="Shape 37"/>
-          <p:cNvSpPr/>
-          <p:nvPr/>
-        </p:nvSpPr>
-        <p:spPr>
-          <a:xfrm>
-            <a:off x="2023872" y="4169664"/>
-            <a:ext cx="685800" cy="475488"/>
-          </a:xfrm>
-          <a:prstGeom prst="rect">
-            <a:avLst>
-              <a:gd name="adj" fmla="val 7692"/>
-            </a:avLst>
-          </a:prstGeom>
-          <a:solidFill>
-            <a:srgbClr val="FFFFFF"/>
-          </a:solidFill>
-          <a:ln w="12700">
-            <a:solidFill>
-              <a:srgbClr val="DB2777"/>
-            </a:solidFill>
-            <a:prstDash val="solid"/>
-          </a:ln>
-        </p:spPr>
-      </p:sp>
-      <p:sp>
-        <p:nvSpPr>
-          <p:cNvPr id="40" name="Text 38"/>
-          <p:cNvSpPr/>
-          <p:nvPr/>
-        </p:nvSpPr>
-        <p:spPr>
-          <a:xfrm>
-            <a:off x="2023872" y="4169664"/>
-            <a:ext cx="685800" cy="475488"/>
-          </a:xfrm>
-          <a:prstGeom prst="rect">
-            <a:avLst/>
-          </a:prstGeom>
-          <a:noFill/>
-          <a:ln/>
-        </p:spPr>
-        <p:txBody>
-          <a:bodyPr wrap="square" lIns="0" tIns="0" rIns="0" bIns="0" rtlCol="0" anchor="ctr"/>
-          <a:lstStyle/>
-          <a:p>
-            <a:pPr algn="ctr" indent="0" marL="0">
-              <a:buNone/>
-            </a:pPr>
-            <a:r>
-              <a:rPr lang="en-US" sz="900" b="1" dirty="0">
-                <a:solidFill>
-                  <a:srgbClr val="9D174D"/>
-                </a:solidFill>
-                <a:latin typeface="Trebuchet MS" pitchFamily="34" charset="0"/>
-                <a:ea typeface="Trebuchet MS" pitchFamily="34" charset="-122"/>
-                <a:cs typeface="Trebuchet MS" pitchFamily="34" charset="-120"/>
-              </a:rPr>
-              <a:t>th</a:t>
-            </a:r>
-            <a:endParaRPr lang="en-US" sz="900" dirty="0"/>
-          </a:p>
-        </p:txBody>
-      </p:sp>
-      <p:sp>
-        <p:nvSpPr>
-          <p:cNvPr id="41" name="Shape 39"/>
-          <p:cNvSpPr/>
-          <p:nvPr/>
-        </p:nvSpPr>
-        <p:spPr>
-          <a:xfrm>
-            <a:off x="2831592" y="4169664"/>
-            <a:ext cx="685800" cy="475488"/>
-          </a:xfrm>
-          <a:prstGeom prst="rect">
-            <a:avLst>
-              <a:gd name="adj" fmla="val 7692"/>
-            </a:avLst>
-          </a:prstGeom>
-          <a:solidFill>
-            <a:srgbClr val="FFFFFF"/>
-          </a:solidFill>
-          <a:ln w="12700">
-            <a:solidFill>
-              <a:srgbClr val="DB2777"/>
-            </a:solidFill>
-            <a:prstDash val="solid"/>
-          </a:ln>
-        </p:spPr>
-      </p:sp>
-      <p:sp>
-        <p:nvSpPr>
-          <p:cNvPr id="42" name="Text 40"/>
-          <p:cNvSpPr/>
-          <p:nvPr/>
-        </p:nvSpPr>
-        <p:spPr>
-          <a:xfrm>
-            <a:off x="2831592" y="4169664"/>
-            <a:ext cx="685800" cy="475488"/>
-          </a:xfrm>
-          <a:prstGeom prst="rect">
-            <a:avLst/>
-          </a:prstGeom>
-          <a:noFill/>
-          <a:ln/>
-        </p:spPr>
-        <p:txBody>
-          <a:bodyPr wrap="square" lIns="0" tIns="0" rIns="0" bIns="0" rtlCol="0" anchor="ctr"/>
-          <a:lstStyle/>
-          <a:p>
-            <a:pPr algn="ctr" indent="0" marL="0">
-              <a:buNone/>
-            </a:pPr>
-            <a:r>
-              <a:rPr lang="en-US" sz="900" b="1" dirty="0">
-                <a:solidFill>
-                  <a:srgbClr val="9D174D"/>
-                </a:solidFill>
-                <a:latin typeface="Trebuchet MS" pitchFamily="34" charset="0"/>
-                <a:ea typeface="Trebuchet MS" pitchFamily="34" charset="-122"/>
-                <a:cs typeface="Trebuchet MS" pitchFamily="34" charset="-120"/>
-              </a:rPr>
-              <a:t>a</a:t>
-            </a:r>
-            <a:endParaRPr lang="en-US" sz="900" dirty="0"/>
-          </a:p>
-        </p:txBody>
-      </p:sp>
-      <p:sp>
-        <p:nvSpPr>
-          <p:cNvPr id="43" name="Shape 41"/>
-          <p:cNvSpPr/>
-          <p:nvPr/>
-        </p:nvSpPr>
-        <p:spPr>
-          <a:xfrm>
-            <a:off x="3639312" y="4169664"/>
-            <a:ext cx="685800" cy="475488"/>
-          </a:xfrm>
-          <a:prstGeom prst="rect">
-            <a:avLst>
-              <a:gd name="adj" fmla="val 7692"/>
-            </a:avLst>
-          </a:prstGeom>
-          <a:solidFill>
-            <a:srgbClr val="FFFFFF"/>
-          </a:solidFill>
-          <a:ln w="12700">
-            <a:solidFill>
-              <a:srgbClr val="DB2777"/>
-            </a:solidFill>
-            <a:prstDash val="solid"/>
-          </a:ln>
-        </p:spPr>
-      </p:sp>
-      <p:sp>
-        <p:nvSpPr>
-          <p:cNvPr id="44" name="Text 42"/>
-          <p:cNvSpPr/>
-          <p:nvPr/>
-        </p:nvSpPr>
-        <p:spPr>
-          <a:xfrm>
-            <a:off x="3639312" y="4169664"/>
-            <a:ext cx="685800" cy="475488"/>
-          </a:xfrm>
-          <a:prstGeom prst="rect">
-            <a:avLst/>
-          </a:prstGeom>
-          <a:noFill/>
-          <a:ln/>
-        </p:spPr>
-        <p:txBody>
-          <a:bodyPr wrap="square" lIns="0" tIns="0" rIns="0" bIns="0" rtlCol="0" anchor="ctr"/>
-          <a:lstStyle/>
-          <a:p>
-            <a:pPr algn="ctr" indent="0" marL="0">
-              <a:buNone/>
-            </a:pPr>
-            <a:r>
-              <a:rPr lang="en-US" sz="900" b="1" dirty="0">
-                <a:solidFill>
-                  <a:srgbClr val="9D174D"/>
-                </a:solidFill>
-                <a:latin typeface="Trebuchet MS" pitchFamily="34" charset="0"/>
-                <a:ea typeface="Trebuchet MS" pitchFamily="34" charset="-122"/>
-                <a:cs typeface="Trebuchet MS" pitchFamily="34" charset="-120"/>
-              </a:rPr>
-              <a:t>n</a:t>
-            </a:r>
-            <a:endParaRPr lang="en-US" sz="900" dirty="0"/>
-          </a:p>
-        </p:txBody>
-      </p:sp>
-      <p:sp>
-        <p:nvSpPr>
-          <p:cNvPr id="45" name="Shape 43"/>
-          <p:cNvSpPr/>
-          <p:nvPr/>
-        </p:nvSpPr>
-        <p:spPr>
-          <a:xfrm>
-            <a:off x="4447032" y="4169664"/>
-            <a:ext cx="685800" cy="475488"/>
-          </a:xfrm>
-          <a:prstGeom prst="rect">
-            <a:avLst>
-              <a:gd name="adj" fmla="val 7692"/>
-            </a:avLst>
-          </a:prstGeom>
-          <a:solidFill>
-            <a:srgbClr val="FFFFFF"/>
-          </a:solidFill>
-          <a:ln w="12700">
-            <a:solidFill>
-              <a:srgbClr val="DB2777"/>
-            </a:solidFill>
-            <a:prstDash val="solid"/>
-          </a:ln>
-        </p:spPr>
-      </p:sp>
-      <p:sp>
-        <p:nvSpPr>
-          <p:cNvPr id="46" name="Text 44"/>
-          <p:cNvSpPr/>
-          <p:nvPr/>
-        </p:nvSpPr>
-        <p:spPr>
-          <a:xfrm>
-            <a:off x="4447032" y="4169664"/>
-            <a:ext cx="685800" cy="475488"/>
-          </a:xfrm>
-          <a:prstGeom prst="rect">
-            <a:avLst/>
-          </a:prstGeom>
-          <a:noFill/>
-          <a:ln/>
-        </p:spPr>
-        <p:txBody>
-          <a:bodyPr wrap="square" lIns="0" tIns="0" rIns="0" bIns="0" rtlCol="0" anchor="ctr"/>
-          <a:lstStyle/>
-          <a:p>
-            <a:pPr algn="ctr" indent="0" marL="0">
-              <a:buNone/>
-            </a:pPr>
-            <a:r>
-              <a:rPr lang="en-US" sz="900" b="1" dirty="0">
-                <a:solidFill>
-                  <a:srgbClr val="9D174D"/>
-                </a:solidFill>
-                <a:latin typeface="Trebuchet MS" pitchFamily="34" charset="0"/>
-                <a:ea typeface="Trebuchet MS" pitchFamily="34" charset="-122"/>
-                <a:cs typeface="Trebuchet MS" pitchFamily="34" charset="-120"/>
-              </a:rPr>
-              <a:t>k</a:t>
-            </a:r>
-            <a:endParaRPr lang="en-US" sz="900" dirty="0"/>
-          </a:p>
-        </p:txBody>
-      </p:sp>
-      <p:sp>
-        <p:nvSpPr>
-          <p:cNvPr id="47" name="Shape 45"/>
-          <p:cNvSpPr/>
-          <p:nvPr/>
-        </p:nvSpPr>
-        <p:spPr>
-          <a:xfrm>
-            <a:off x="5254752" y="4169664"/>
-            <a:ext cx="685800" cy="475488"/>
-          </a:xfrm>
-          <a:prstGeom prst="rect">
-            <a:avLst>
-              <a:gd name="adj" fmla="val 7692"/>
-            </a:avLst>
-          </a:prstGeom>
-          <a:solidFill>
-            <a:srgbClr val="FFFFFF"/>
-          </a:solidFill>
-          <a:ln w="12700">
-            <a:solidFill>
-              <a:srgbClr val="DB2777"/>
-            </a:solidFill>
-            <a:prstDash val="solid"/>
-          </a:ln>
-        </p:spPr>
-      </p:sp>
-      <p:sp>
-        <p:nvSpPr>
-          <p:cNvPr id="48" name="Text 46"/>
-          <p:cNvSpPr/>
-          <p:nvPr/>
-        </p:nvSpPr>
-        <p:spPr>
-          <a:xfrm>
-            <a:off x="5254752" y="4169664"/>
-            <a:ext cx="685800" cy="475488"/>
-          </a:xfrm>
-          <a:prstGeom prst="rect">
-            <a:avLst/>
-          </a:prstGeom>
-          <a:noFill/>
-          <a:ln/>
-        </p:spPr>
-        <p:txBody>
-          <a:bodyPr wrap="square" lIns="0" tIns="0" rIns="0" bIns="0" rtlCol="0" anchor="ctr"/>
-          <a:lstStyle/>
-          <a:p>
-            <a:pPr algn="ctr" indent="0" marL="0">
-              <a:buNone/>
-            </a:pPr>
-            <a:r>
-              <a:rPr lang="en-US" sz="900" b="1" dirty="0">
-                <a:solidFill>
-                  <a:srgbClr val="9D174D"/>
-                </a:solidFill>
-                <a:latin typeface="Trebuchet MS" pitchFamily="34" charset="0"/>
-                <a:ea typeface="Trebuchet MS" pitchFamily="34" charset="-122"/>
-                <a:cs typeface="Trebuchet MS" pitchFamily="34" charset="-120"/>
-              </a:rPr>
-              <a:t>f</a:t>
-            </a:r>
-            <a:endParaRPr lang="en-US" sz="900" dirty="0"/>
-          </a:p>
-        </p:txBody>
-      </p:sp>
-      <p:sp>
-        <p:nvSpPr>
-          <p:cNvPr id="49" name="Shape 47"/>
-          <p:cNvSpPr/>
-          <p:nvPr/>
-        </p:nvSpPr>
-        <p:spPr>
-          <a:xfrm>
-            <a:off x="6062472" y="4169664"/>
-            <a:ext cx="685800" cy="475488"/>
-          </a:xfrm>
-          <a:prstGeom prst="rect">
-            <a:avLst>
-              <a:gd name="adj" fmla="val 7692"/>
-            </a:avLst>
-          </a:prstGeom>
-          <a:solidFill>
-            <a:srgbClr val="FFFFFF"/>
-          </a:solidFill>
-          <a:ln w="12700">
-            <a:solidFill>
-              <a:srgbClr val="DB2777"/>
-            </a:solidFill>
-            <a:prstDash val="solid"/>
-          </a:ln>
-        </p:spPr>
-      </p:sp>
-      <p:sp>
-        <p:nvSpPr>
-          <p:cNvPr id="50" name="Text 48"/>
-          <p:cNvSpPr/>
-          <p:nvPr/>
-        </p:nvSpPr>
-        <p:spPr>
-          <a:xfrm>
-            <a:off x="6062472" y="4169664"/>
-            <a:ext cx="685800" cy="475488"/>
-          </a:xfrm>
-          <a:prstGeom prst="rect">
-            <a:avLst/>
-          </a:prstGeom>
-          <a:noFill/>
-          <a:ln/>
-        </p:spPr>
-        <p:txBody>
-          <a:bodyPr wrap="square" lIns="0" tIns="0" rIns="0" bIns="0" rtlCol="0" anchor="ctr"/>
-          <a:lstStyle/>
-          <a:p>
-            <a:pPr algn="ctr" indent="0" marL="0">
-              <a:buNone/>
-            </a:pPr>
-            <a:r>
-              <a:rPr lang="en-US" sz="900" b="1" dirty="0">
-                <a:solidFill>
-                  <a:srgbClr val="9D174D"/>
-                </a:solidFill>
-                <a:latin typeface="Trebuchet MS" pitchFamily="34" charset="0"/>
-                <a:ea typeface="Trebuchet MS" pitchFamily="34" charset="-122"/>
-                <a:cs typeface="Trebuchet MS" pitchFamily="34" charset="-120"/>
-              </a:rPr>
-              <a:t>u</a:t>
-            </a:r>
-            <a:endParaRPr lang="en-US" sz="900" dirty="0"/>
-          </a:p>
-        </p:txBody>
-      </p:sp>
-      <p:sp>
-        <p:nvSpPr>
-          <p:cNvPr id="51" name="Shape 49"/>
-          <p:cNvSpPr/>
-          <p:nvPr/>
-        </p:nvSpPr>
-        <p:spPr>
-          <a:xfrm>
-            <a:off x="6870192" y="4169664"/>
-            <a:ext cx="685800" cy="475488"/>
-          </a:xfrm>
-          <a:prstGeom prst="rect">
-            <a:avLst>
-              <a:gd name="adj" fmla="val 7692"/>
-            </a:avLst>
-          </a:prstGeom>
-          <a:solidFill>
-            <a:srgbClr val="FFFFFF"/>
-          </a:solidFill>
-          <a:ln w="12700">
-            <a:solidFill>
-              <a:srgbClr val="DB2777"/>
-            </a:solidFill>
-            <a:prstDash val="solid"/>
-          </a:ln>
-        </p:spPr>
-      </p:sp>
-      <p:sp>
-        <p:nvSpPr>
-          <p:cNvPr id="52" name="Text 50"/>
-          <p:cNvSpPr/>
-          <p:nvPr/>
-        </p:nvSpPr>
-        <p:spPr>
-          <a:xfrm>
-            <a:off x="6870192" y="4169664"/>
-            <a:ext cx="685800" cy="475488"/>
-          </a:xfrm>
-          <a:prstGeom prst="rect">
-            <a:avLst/>
-          </a:prstGeom>
-          <a:noFill/>
-          <a:ln/>
-        </p:spPr>
-        <p:txBody>
-          <a:bodyPr wrap="square" lIns="0" tIns="0" rIns="0" bIns="0" rtlCol="0" anchor="ctr"/>
-          <a:lstStyle/>
-          <a:p>
-            <a:pPr algn="ctr" indent="0" marL="0">
-              <a:buNone/>
-            </a:pPr>
-            <a:r>
-              <a:rPr lang="en-US" sz="900" b="1" dirty="0">
-                <a:solidFill>
-                  <a:srgbClr val="9D174D"/>
-                </a:solidFill>
-                <a:latin typeface="Trebuchet MS" pitchFamily="34" charset="0"/>
-                <a:ea typeface="Trebuchet MS" pitchFamily="34" charset="-122"/>
-                <a:cs typeface="Trebuchet MS" pitchFamily="34" charset="-120"/>
-              </a:rPr>
-              <a:t>ll</a:t>
-            </a:r>
-            <a:endParaRPr lang="en-US" sz="900" dirty="0"/>
-          </a:p>
-        </p:txBody>
-      </p:sp>
-      <p:sp>
-        <p:nvSpPr>
-          <p:cNvPr id="53" name="Shape 51"/>
-          <p:cNvSpPr/>
-          <p:nvPr/>
-        </p:nvSpPr>
-        <p:spPr>
-          <a:xfrm>
-            <a:off x="7677912" y="4169664"/>
-            <a:ext cx="685800" cy="475488"/>
-          </a:xfrm>
-          <a:prstGeom prst="rect">
-            <a:avLst>
-              <a:gd name="adj" fmla="val 7692"/>
-            </a:avLst>
-          </a:prstGeom>
-          <a:solidFill>
-            <a:srgbClr val="FFFFFF"/>
-          </a:solidFill>
-          <a:ln w="12700">
-            <a:solidFill>
-              <a:srgbClr val="DB2777"/>
-            </a:solidFill>
-            <a:prstDash val="solid"/>
-          </a:ln>
-        </p:spPr>
-      </p:sp>
-      <p:sp>
-        <p:nvSpPr>
-          <p:cNvPr id="54" name="Text 52"/>
-          <p:cNvSpPr/>
-          <p:nvPr/>
-        </p:nvSpPr>
-        <p:spPr>
-          <a:xfrm>
-            <a:off x="7677912" y="4169664"/>
-            <a:ext cx="685800" cy="475488"/>
-          </a:xfrm>
-          <a:prstGeom prst="rect">
-            <a:avLst/>
-          </a:prstGeom>
-          <a:noFill/>
-          <a:ln/>
-        </p:spPr>
-        <p:txBody>
-          <a:bodyPr wrap="square" lIns="0" tIns="0" rIns="0" bIns="0" rtlCol="0" anchor="ctr"/>
-          <a:lstStyle/>
-          <a:p>
-            <a:pPr algn="ctr" indent="0" marL="0">
-              <a:buNone/>
-            </a:pPr>
-            <a:r>
-              <a:rPr lang="en-US" sz="900" b="1" dirty="0">
-                <a:solidFill>
-                  <a:srgbClr val="9D174D"/>
-                </a:solidFill>
-                <a:latin typeface="Trebuchet MS" pitchFamily="34" charset="0"/>
-                <a:ea typeface="Trebuchet MS" pitchFamily="34" charset="-122"/>
-                <a:cs typeface="Trebuchet MS" pitchFamily="34" charset="-120"/>
-              </a:rPr>
-              <a:t>y</a:t>
+              <a:t>s</a:t>
             </a:r>
             <a:endParaRPr lang="en-US" sz="900" dirty="0"/>
           </a:p>
@@ -33816,7 +32677,7 @@
                 <a:ea typeface="Calibri" pitchFamily="34" charset="-122"/>
                 <a:cs typeface="Calibri" pitchFamily="34" charset="-120"/>
               </a:rPr>
-              <a:t>Word Labs  •  wordlabs.app  •  Root: 'thank' = express gratitude or appreciation</a:t>
+              <a:t>Word Labs  •  wordlabs.app  •  Root: 'thank' = express gratitude or praise</a:t>
             </a:r>
             <a:endParaRPr lang="en-US" sz="800" dirty="0"/>
           </a:p>
@@ -34985,7 +33846,7 @@
                 <a:ea typeface="Calibri" pitchFamily="34" charset="-122"/>
                 <a:cs typeface="Calibri" pitchFamily="34" charset="-120"/>
               </a:rPr>
-              <a:t>Word Labs  •  wordlabs.app  •  Root: 'thank' = express gratitude or appreciation</a:t>
+              <a:t>Word Labs  •  wordlabs.app  •  Root: 'thank' = express gratitude or praise</a:t>
             </a:r>
             <a:endParaRPr lang="en-US" sz="800" dirty="0"/>
           </a:p>
@@ -35478,7 +34339,7 @@
                 <a:ea typeface="Trebuchet MS" pitchFamily="34" charset="-122"/>
                 <a:cs typeface="Trebuchet MS" pitchFamily="34" charset="-120"/>
               </a:rPr>
-              <a:t>half-</a:t>
+              <a:t>dis-</a:t>
             </a:r>
             <a:endParaRPr lang="en-US" sz="1300" dirty="0"/>
           </a:p>
@@ -36527,7 +35388,7 @@
                 <a:ea typeface="Trebuchet MS" pitchFamily="34" charset="-122"/>
                 <a:cs typeface="Trebuchet MS" pitchFamily="34" charset="-120"/>
               </a:rPr>
-              <a:t>unthankful</a:t>
+              <a:t>thankfulness</a:t>
             </a:r>
             <a:endParaRPr lang="en-US" sz="1200" dirty="0"/>
           </a:p>
@@ -36593,7 +35454,7 @@
                 <a:ea typeface="Trebuchet MS" pitchFamily="34" charset="-122"/>
                 <a:cs typeface="Trebuchet MS" pitchFamily="34" charset="-120"/>
               </a:rPr>
-              <a:t>thanksgiving</a:t>
+              <a:t>unthankful</a:t>
             </a:r>
             <a:endParaRPr lang="en-US" sz="1200" dirty="0"/>
           </a:p>
@@ -36885,7 +35746,7 @@
                 <a:ea typeface="Calibri" pitchFamily="34" charset="-122"/>
                 <a:cs typeface="Calibri" pitchFamily="34" charset="-120"/>
               </a:rPr>
-              <a:t>Word Labs  •  wordlabs.app  •  Root: 'thank' = express gratitude or appreciation</a:t>
+              <a:t>Word Labs  •  wordlabs.app  •  Root: 'thank' = express gratitude or praise</a:t>
             </a:r>
             <a:endParaRPr lang="en-US" sz="800" dirty="0"/>
           </a:p>
@@ -37049,7 +35910,7 @@
                 <a:ea typeface="Calibri" pitchFamily="34" charset="-122"/>
                 <a:cs typeface="Calibri" pitchFamily="34" charset="-120"/>
               </a:rPr>
-              <a:t>The core part of a word carrying its basic meaning. For example, 'thank' means 'express gratitude or appreciation'.</a:t>
+              <a:t>The core part of a word carrying its basic meaning. For example, 'thank' means 'express gratitude or praise'.</a:t>
             </a:r>
             <a:endParaRPr lang="en-US" sz="1350" dirty="0"/>
           </a:p>
@@ -37669,7 +36530,7 @@
                 <a:ea typeface="Calibri" pitchFamily="34" charset="-122"/>
                 <a:cs typeface="Calibri" pitchFamily="34" charset="-120"/>
               </a:rPr>
-              <a:t>Word Labs  •  wordlabs.app  •  Root: 'thank' = express gratitude or appreciation</a:t>
+              <a:t>Word Labs  •  wordlabs.app  •  Root: 'thank' = express gratitude or praise</a:t>
             </a:r>
             <a:endParaRPr lang="en-US" sz="800" dirty="0"/>
           </a:p>
@@ -37781,7 +36642,7 @@
                 <a:ea typeface="Calibri" pitchFamily="34" charset="-122"/>
                 <a:cs typeface="Calibri" pitchFamily="34" charset="-120"/>
               </a:rPr>
-              <a:t>1.  The word 'thankful' uses the suffix '-ful' to mean full of gratitude.</a:t>
+              <a:t>1.  The word 'thankful' contains the root 'thank' plus a suffix.</a:t>
             </a:r>
             <a:endParaRPr lang="en-US" sz="1300" dirty="0"/>
           </a:p>
@@ -37920,7 +36781,7 @@
                 <a:ea typeface="Calibri" pitchFamily="34" charset="-122"/>
                 <a:cs typeface="Calibri" pitchFamily="34" charset="-120"/>
               </a:rPr>
-              <a:t>2.  The word 'thankless' means you are very grateful for everything.</a:t>
+              <a:t>2.  The word 'thankfully' has only two morphemes.</a:t>
             </a:r>
             <a:endParaRPr lang="en-US" sz="1300" dirty="0"/>
           </a:p>
@@ -38059,7 +36920,7 @@
                 <a:ea typeface="Calibri" pitchFamily="34" charset="-122"/>
                 <a:cs typeface="Calibri" pitchFamily="34" charset="-120"/>
               </a:rPr>
-              <a:t>3.  The prefix 'un-' in 'unthankful' means 'not', so unthankful means not grateful.</a:t>
+              <a:t>3.  The root 'thank' comes from the Latin language.</a:t>
             </a:r>
             <a:endParaRPr lang="en-US" sz="1300" dirty="0"/>
           </a:p>
@@ -38082,11 +36943,11 @@
             </a:avLst>
           </a:prstGeom>
           <a:solidFill>
-            <a:srgbClr val="DCFCE7"/>
-          </a:solidFill>
-          <a:ln w="12700">
-            <a:solidFill>
-              <a:srgbClr val="16A34A"/>
+            <a:srgbClr val="FEE2E2"/>
+          </a:solidFill>
+          <a:ln w="12700">
+            <a:solidFill>
+              <a:srgbClr val="DC2626"/>
             </a:solidFill>
             <a:prstDash val="solid"/>
           </a:ln>
@@ -38119,13 +36980,13 @@
             <a:r>
               <a:rPr lang="en-US" sz="1100" b="1" dirty="0">
                 <a:solidFill>
-                  <a:srgbClr val="16A34A"/>
+                  <a:srgbClr val="DC2626"/>
                 </a:solidFill>
                 <a:latin typeface="Trebuchet MS" pitchFamily="34" charset="0"/>
                 <a:ea typeface="Trebuchet MS" pitchFamily="34" charset="-122"/>
                 <a:cs typeface="Trebuchet MS" pitchFamily="34" charset="-120"/>
               </a:rPr>
-              <a:t>TRUE</a:t>
+              <a:t>FALSE</a:t>
             </a:r>
             <a:endParaRPr lang="en-US" sz="1100" dirty="0"/>
           </a:p>
@@ -38198,7 +37059,7 @@
                 <a:ea typeface="Calibri" pitchFamily="34" charset="-122"/>
                 <a:cs typeface="Calibri" pitchFamily="34" charset="-120"/>
               </a:rPr>
-              <a:t>4.  The root 'thank' comes from an Old English word meaning to express gratitude.</a:t>
+              <a:t>4.  'Thankless' means a task that nobody appreciates or notices.</a:t>
             </a:r>
             <a:endParaRPr lang="en-US" sz="1300" dirty="0"/>
           </a:p>
@@ -38337,7 +37198,7 @@
                 <a:ea typeface="Calibri" pitchFamily="34" charset="-122"/>
                 <a:cs typeface="Calibri" pitchFamily="34" charset="-120"/>
               </a:rPr>
-              <a:t>5.  The word 'thankfully' contains only one morpheme.</a:t>
+              <a:t>5.  Adding '-ful' to 'thank' changes the word into an adjective.</a:t>
             </a:r>
             <a:endParaRPr lang="en-US" sz="1300" dirty="0"/>
           </a:p>
@@ -38360,11 +37221,11 @@
             </a:avLst>
           </a:prstGeom>
           <a:solidFill>
-            <a:srgbClr val="FEE2E2"/>
-          </a:solidFill>
-          <a:ln w="12700">
-            <a:solidFill>
-              <a:srgbClr val="DC2626"/>
+            <a:srgbClr val="DCFCE7"/>
+          </a:solidFill>
+          <a:ln w="12700">
+            <a:solidFill>
+              <a:srgbClr val="16A34A"/>
             </a:solidFill>
             <a:prstDash val="solid"/>
           </a:ln>
@@ -38397,13 +37258,13 @@
             <a:r>
               <a:rPr lang="en-US" sz="1100" b="1" dirty="0">
                 <a:solidFill>
-                  <a:srgbClr val="DC2626"/>
+                  <a:srgbClr val="16A34A"/>
                 </a:solidFill>
                 <a:latin typeface="Trebuchet MS" pitchFamily="34" charset="0"/>
                 <a:ea typeface="Trebuchet MS" pitchFamily="34" charset="-122"/>
                 <a:cs typeface="Trebuchet MS" pitchFamily="34" charset="-120"/>
               </a:rPr>
-              <a:t>FALSE</a:t>
+              <a:t>TRUE</a:t>
             </a:r>
             <a:endParaRPr lang="en-US" sz="1100" dirty="0"/>
           </a:p>
@@ -38695,7 +37556,7 @@
                 <a:ea typeface="Calibri" pitchFamily="34" charset="-122"/>
                 <a:cs typeface="Calibri" pitchFamily="34" charset="-120"/>
               </a:rPr>
-              <a:t>Word Labs  •  wordlabs.app  •  Root: 'thank' = express gratitude or appreciation</a:t>
+              <a:t>Word Labs  •  wordlabs.app  •  Root: 'thank' = express gratitude or praise</a:t>
             </a:r>
             <a:endParaRPr lang="en-US" sz="800" dirty="0"/>
           </a:p>
@@ -38832,7 +37693,7 @@
                 <a:ea typeface="Trebuchet MS" pitchFamily="34" charset="-122"/>
                 <a:cs typeface="Trebuchet MS" pitchFamily="34" charset="-120"/>
               </a:rPr>
-              <a:t>express gratitude or appreciation</a:t>
+              <a:t>express gratitude or praise</a:t>
             </a:r>
             <a:endParaRPr lang="en-US" sz="2000" dirty="0"/>
           </a:p>
@@ -39372,7 +38233,7 @@
                 <a:ea typeface="Trebuchet MS" pitchFamily="34" charset="-122"/>
                 <a:cs typeface="Trebuchet MS" pitchFamily="34" charset="-120"/>
               </a:rPr>
-              <a:t>unthankful</a:t>
+              <a:t>thankfulness</a:t>
             </a:r>
             <a:endParaRPr lang="en-US" sz="1300" dirty="0"/>
           </a:p>
@@ -39664,7 +38525,7 @@
                 <a:ea typeface="Calibri" pitchFamily="34" charset="-122"/>
                 <a:cs typeface="Calibri" pitchFamily="34" charset="-120"/>
               </a:rPr>
-              <a:t>Word Labs  •  wordlabs.app  •  Root: 'thank' = express gratitude or appreciation</a:t>
+              <a:t>Word Labs  •  wordlabs.app  •  Root: 'thank' = express gratitude or praise</a:t>
             </a:r>
             <a:endParaRPr lang="en-US" sz="800" dirty="0"/>
           </a:p>
@@ -40157,7 +39018,7 @@
                 <a:ea typeface="Trebuchet MS" pitchFamily="34" charset="-122"/>
                 <a:cs typeface="Trebuchet MS" pitchFamily="34" charset="-120"/>
               </a:rPr>
-              <a:t>half-</a:t>
+              <a:t>dis-</a:t>
             </a:r>
             <a:endParaRPr lang="en-US" sz="1300" dirty="0"/>
           </a:p>
@@ -41438,7 +40299,7 @@
                 <a:ea typeface="Calibri" pitchFamily="34" charset="-122"/>
                 <a:cs typeface="Calibri" pitchFamily="34" charset="-120"/>
               </a:rPr>
-              <a:t>Word Labs  •  wordlabs.app  •  Root: 'thank' = express gratitude or appreciation</a:t>
+              <a:t>Word Labs  •  wordlabs.app  •  Root: 'thank' = express gratitude or praise</a:t>
             </a:r>
             <a:endParaRPr lang="en-US" sz="800" dirty="0"/>
           </a:p>
@@ -41755,7 +40616,7 @@
                 <a:ea typeface="Calibri" pitchFamily="34" charset="-122"/>
                 <a:cs typeface="Calibri" pitchFamily="34" charset="-120"/>
               </a:rPr>
-              <a:t>The action of telling someone right now that you are grateful.</a:t>
+              <a:t>The act of telling someone you appreciate what they have done right now.</a:t>
             </a:r>
             <a:endParaRPr lang="en-US" sz="1200" dirty="0"/>
           </a:p>
@@ -41894,7 +40755,7 @@
                 <a:ea typeface="Calibri" pitchFamily="34" charset="-122"/>
                 <a:cs typeface="Calibri" pitchFamily="34" charset="-120"/>
               </a:rPr>
-              <a:t>Used to say you are relieved or happy that something turned out well.</a:t>
+              <a:t>Used to say that something good happened and you are relieved about it.</a:t>
             </a:r>
             <a:endParaRPr lang="en-US" sz="1200" dirty="0"/>
           </a:p>
@@ -42033,7 +40894,7 @@
                 <a:ea typeface="Calibri" pitchFamily="34" charset="-122"/>
                 <a:cs typeface="Calibri" pitchFamily="34" charset="-120"/>
               </a:rPr>
-              <a:t>Feeling happy and grateful because something good happened.</a:t>
+              <a:t>Feeling happy and glad about something good that happened to you.</a:t>
             </a:r>
             <a:endParaRPr lang="en-US" sz="1200" dirty="0"/>
           </a:p>
@@ -42172,7 +41033,7 @@
                 <a:ea typeface="Calibri" pitchFamily="34" charset="-122"/>
                 <a:cs typeface="Calibri" pitchFamily="34" charset="-120"/>
               </a:rPr>
-              <a:t>A job or task that no one notices or appreciates, even when done well.</a:t>
+              <a:t>A job or task that nobody notices or appreciates, even when it is done well.</a:t>
             </a:r>
             <a:endParaRPr lang="en-US" sz="1200" dirty="0"/>
           </a:p>
@@ -42311,7 +41172,7 @@
                 <a:ea typeface="Calibri" pitchFamily="34" charset="-122"/>
                 <a:cs typeface="Calibri" pitchFamily="34" charset="-120"/>
               </a:rPr>
-              <a:t>Not showing gratitude or appreciation for something kind that was done.</a:t>
+              <a:t>The feeling of being deeply grateful and appreciating what you have.</a:t>
             </a:r>
             <a:endParaRPr lang="en-US" sz="1200" dirty="0"/>
           </a:p>
@@ -42384,7 +41245,7 @@
                 <a:ea typeface="Trebuchet MS" pitchFamily="34" charset="-122"/>
                 <a:cs typeface="Trebuchet MS" pitchFamily="34" charset="-120"/>
               </a:rPr>
-              <a:t>unthankful</a:t>
+              <a:t>thankfulness</a:t>
             </a:r>
             <a:endParaRPr lang="en-US" sz="1200" dirty="0"/>
           </a:p>
@@ -42450,7 +41311,7 @@
                 <a:ea typeface="Calibri" pitchFamily="34" charset="-122"/>
                 <a:cs typeface="Calibri" pitchFamily="34" charset="-120"/>
               </a:rPr>
-              <a:t>When you already told someone you were grateful, it happened in the past.</a:t>
+              <a:t>When someone already told another person they were grateful for something.</a:t>
             </a:r>
             <a:endParaRPr lang="en-US" sz="1200" dirty="0"/>
           </a:p>
@@ -42742,7 +41603,7 @@
                 <a:ea typeface="Calibri" pitchFamily="34" charset="-122"/>
                 <a:cs typeface="Calibri" pitchFamily="34" charset="-120"/>
               </a:rPr>
-              <a:t>Word Labs  •  wordlabs.app  •  Root: 'thank' = express gratitude or appreciation</a:t>
+              <a:t>Word Labs  •  wordlabs.app  •  Root: 'thank' = express gratitude or praise</a:t>
             </a:r>
             <a:endParaRPr lang="en-US" sz="800" dirty="0"/>
           </a:p>
@@ -42945,7 +41806,7 @@
                 <a:ea typeface="Calibri" pitchFamily="34" charset="-122"/>
                 <a:cs typeface="Calibri" pitchFamily="34" charset="-120"/>
               </a:rPr>
-              <a:t>She felt thankful that her friend had helped her finish the science project on time.</a:t>
+              <a:t>She was thankful that her friend helped her carry the heavy bags home from school.</a:t>
             </a:r>
             <a:endParaRPr lang="en-US" sz="1500" dirty="0"/>
           </a:p>
@@ -43109,7 +41970,7 @@
                 <a:ea typeface="Calibri" pitchFamily="34" charset="-122"/>
                 <a:cs typeface="Calibri" pitchFamily="34" charset="-120"/>
               </a:rPr>
-              <a:t>The teacher said it was a thankless task to tidy the art room, but someone had to do it.</a:t>
+              <a:t>It can feel thankless to clean up after others when no one notices the effort you put in.</a:t>
             </a:r>
             <a:endParaRPr lang="en-US" sz="1500" dirty="0"/>
           </a:p>
@@ -43273,7 +42134,7 @@
                 <a:ea typeface="Calibri" pitchFamily="34" charset="-122"/>
                 <a:cs typeface="Calibri" pitchFamily="34" charset="-120"/>
               </a:rPr>
-              <a:t>He wrote a card thankfully accepting the award on behalf of his whole class.</a:t>
+              <a:t>He thanked his teacher for staying after class to explain the maths problem again.</a:t>
             </a:r>
             <a:endParaRPr lang="en-US" sz="1500" dirty="0"/>
           </a:p>

--- a/output/wordlabs-thank-3day.pptx
+++ b/output/wordlabs-thank-3day.pptx
@@ -14943,11 +14943,11 @@
         <p:spPr>
           <a:xfrm>
             <a:off x="1874520" y="4096512"/>
-            <a:ext cx="6903720" cy="804672"/>
+            <a:ext cx="6903720" cy="658368"/>
           </a:xfrm>
           <a:prstGeom prst="rect">
             <a:avLst>
-              <a:gd name="adj" fmla="val 6818"/>
+              <a:gd name="adj" fmla="val 8333"/>
             </a:avLst>
           </a:prstGeom>
           <a:solidFill>
@@ -14969,12 +14969,12 @@
         </p:nvSpPr>
         <p:spPr>
           <a:xfrm>
-            <a:off x="2427732" y="4169664"/>
-            <a:ext cx="685800" cy="384048"/>
+            <a:off x="2254649" y="4169664"/>
+            <a:ext cx="685800" cy="475488"/>
           </a:xfrm>
           <a:prstGeom prst="rect">
             <a:avLst>
-              <a:gd name="adj" fmla="val 9524"/>
+              <a:gd name="adj" fmla="val 7692"/>
             </a:avLst>
           </a:prstGeom>
           <a:solidFill>
@@ -14996,8 +14996,8 @@
         </p:nvSpPr>
         <p:spPr>
           <a:xfrm>
-            <a:off x="2427732" y="4169664"/>
-            <a:ext cx="685800" cy="384048"/>
+            <a:off x="2254649" y="4169664"/>
+            <a:ext cx="685800" cy="475488"/>
           </a:xfrm>
           <a:prstGeom prst="rect">
             <a:avLst/>
@@ -15035,12 +15035,12 @@
         </p:nvSpPr>
         <p:spPr>
           <a:xfrm>
-            <a:off x="3639312" y="4169664"/>
-            <a:ext cx="685800" cy="384048"/>
+            <a:off x="3293146" y="4169664"/>
+            <a:ext cx="685800" cy="475488"/>
           </a:xfrm>
           <a:prstGeom prst="rect">
             <a:avLst>
-              <a:gd name="adj" fmla="val 9524"/>
+              <a:gd name="adj" fmla="val 7692"/>
             </a:avLst>
           </a:prstGeom>
           <a:solidFill>
@@ -15062,8 +15062,8 @@
         </p:nvSpPr>
         <p:spPr>
           <a:xfrm>
-            <a:off x="3639312" y="4169664"/>
-            <a:ext cx="685800" cy="384048"/>
+            <a:off x="3293146" y="4169664"/>
+            <a:ext cx="685800" cy="475488"/>
           </a:xfrm>
           <a:prstGeom prst="rect">
             <a:avLst/>
@@ -15101,12 +15101,12 @@
         </p:nvSpPr>
         <p:spPr>
           <a:xfrm>
-            <a:off x="4850892" y="4169664"/>
-            <a:ext cx="685800" cy="384048"/>
+            <a:off x="4331643" y="4169664"/>
+            <a:ext cx="685800" cy="475488"/>
           </a:xfrm>
           <a:prstGeom prst="rect">
             <a:avLst>
-              <a:gd name="adj" fmla="val 9524"/>
+              <a:gd name="adj" fmla="val 7692"/>
             </a:avLst>
           </a:prstGeom>
           <a:solidFill>
@@ -15128,8 +15128,8 @@
         </p:nvSpPr>
         <p:spPr>
           <a:xfrm>
-            <a:off x="4850892" y="4169664"/>
-            <a:ext cx="685800" cy="384048"/>
+            <a:off x="4331643" y="4169664"/>
+            <a:ext cx="685800" cy="475488"/>
           </a:xfrm>
           <a:prstGeom prst="rect">
             <a:avLst/>
@@ -15167,12 +15167,12 @@
         </p:nvSpPr>
         <p:spPr>
           <a:xfrm>
-            <a:off x="6062472" y="4169664"/>
-            <a:ext cx="685800" cy="384048"/>
+            <a:off x="5370141" y="4169664"/>
+            <a:ext cx="685800" cy="475488"/>
           </a:xfrm>
           <a:prstGeom prst="rect">
             <a:avLst>
-              <a:gd name="adj" fmla="val 9524"/>
+              <a:gd name="adj" fmla="val 7692"/>
             </a:avLst>
           </a:prstGeom>
           <a:solidFill>
@@ -15194,8 +15194,8 @@
         </p:nvSpPr>
         <p:spPr>
           <a:xfrm>
-            <a:off x="6062472" y="4169664"/>
-            <a:ext cx="685800" cy="384048"/>
+            <a:off x="5370141" y="4169664"/>
+            <a:ext cx="685800" cy="475488"/>
           </a:xfrm>
           <a:prstGeom prst="rect">
             <a:avLst/>
@@ -15233,12 +15233,12 @@
         </p:nvSpPr>
         <p:spPr>
           <a:xfrm>
-            <a:off x="7274052" y="4169664"/>
-            <a:ext cx="685800" cy="384048"/>
+            <a:off x="6408638" y="4169664"/>
+            <a:ext cx="685800" cy="475488"/>
           </a:xfrm>
           <a:prstGeom prst="rect">
             <a:avLst>
-              <a:gd name="adj" fmla="val 9524"/>
+              <a:gd name="adj" fmla="val 7692"/>
             </a:avLst>
           </a:prstGeom>
           <a:solidFill>
@@ -15260,8 +15260,8 @@
         </p:nvSpPr>
         <p:spPr>
           <a:xfrm>
-            <a:off x="7274052" y="4169664"/>
-            <a:ext cx="685800" cy="384048"/>
+            <a:off x="6408638" y="4169664"/>
+            <a:ext cx="685800" cy="475488"/>
           </a:xfrm>
           <a:prstGeom prst="rect">
             <a:avLst/>
@@ -15285,7 +15285,7 @@
                 <a:ea typeface="Trebuchet MS" pitchFamily="34" charset="-122"/>
                 <a:cs typeface="Trebuchet MS" pitchFamily="34" charset="-120"/>
               </a:rPr>
-              <a:t>t</a:t>
+              <a:t>e</a:t>
             </a:r>
             <a:endParaRPr lang="en-US" sz="900" dirty="0"/>
           </a:p>
@@ -15293,40 +15293,67 @@
       </p:sp>
       <p:sp>
         <p:nvSpPr>
-          <p:cNvPr id="40" name="Text 38"/>
-          <p:cNvSpPr/>
-          <p:nvPr/>
-        </p:nvSpPr>
-        <p:spPr>
-          <a:xfrm>
-            <a:off x="7274052" y="4572000"/>
-            <a:ext cx="685800" cy="219456"/>
-          </a:xfrm>
-          <a:prstGeom prst="rect">
-            <a:avLst/>
-          </a:prstGeom>
-          <a:noFill/>
-          <a:ln/>
-        </p:spPr>
-        <p:txBody>
-          <a:bodyPr wrap="square" lIns="0" tIns="0" rIns="0" bIns="0" rtlCol="0" anchor="t"/>
-          <a:lstStyle/>
-          <a:p>
-            <a:pPr algn="ctr" indent="0" marL="0">
-              <a:buNone/>
-            </a:pPr>
-            <a:r>
-              <a:rPr lang="en-US" sz="750" i="1" dirty="0">
-                <a:solidFill>
-                  <a:srgbClr val="94A3B8"/>
-                </a:solidFill>
-                <a:latin typeface="Calibri" pitchFamily="34" charset="0"/>
-                <a:ea typeface="Calibri" pitchFamily="34" charset="-122"/>
-                <a:cs typeface="Calibri" pitchFamily="34" charset="-120"/>
-              </a:rPr>
-              <a:t>/t/</a:t>
-            </a:r>
-            <a:endParaRPr lang="en-US" sz="750" dirty="0"/>
+          <p:cNvPr id="40" name="Shape 38"/>
+          <p:cNvSpPr/>
+          <p:nvPr/>
+        </p:nvSpPr>
+        <p:spPr>
+          <a:xfrm>
+            <a:off x="7447135" y="4169664"/>
+            <a:ext cx="685800" cy="475488"/>
+          </a:xfrm>
+          <a:prstGeom prst="rect">
+            <a:avLst>
+              <a:gd name="adj" fmla="val 7692"/>
+            </a:avLst>
+          </a:prstGeom>
+          <a:solidFill>
+            <a:srgbClr val="FFFFFF"/>
+          </a:solidFill>
+          <a:ln w="12700">
+            <a:solidFill>
+              <a:srgbClr val="DB2777"/>
+            </a:solidFill>
+            <a:prstDash val="solid"/>
+          </a:ln>
+        </p:spPr>
+      </p:sp>
+      <p:sp>
+        <p:nvSpPr>
+          <p:cNvPr id="41" name="Text 39"/>
+          <p:cNvSpPr/>
+          <p:nvPr/>
+        </p:nvSpPr>
+        <p:spPr>
+          <a:xfrm>
+            <a:off x="7447135" y="4169664"/>
+            <a:ext cx="685800" cy="475488"/>
+          </a:xfrm>
+          <a:prstGeom prst="rect">
+            <a:avLst/>
+          </a:prstGeom>
+          <a:noFill/>
+          <a:ln/>
+        </p:spPr>
+        <p:txBody>
+          <a:bodyPr wrap="square" lIns="0" tIns="0" rIns="0" bIns="0" rtlCol="0" anchor="ctr"/>
+          <a:lstStyle/>
+          <a:p>
+            <a:pPr algn="ctr" indent="0" marL="0">
+              <a:buNone/>
+            </a:pPr>
+            <a:r>
+              <a:rPr lang="en-US" sz="900" b="1" dirty="0">
+                <a:solidFill>
+                  <a:srgbClr val="9D174D"/>
+                </a:solidFill>
+                <a:latin typeface="Trebuchet MS" pitchFamily="34" charset="0"/>
+                <a:ea typeface="Trebuchet MS" pitchFamily="34" charset="-122"/>
+                <a:cs typeface="Trebuchet MS" pitchFamily="34" charset="-120"/>
+              </a:rPr>
+              <a:t>d</a:t>
+            </a:r>
+            <a:endParaRPr lang="en-US" sz="900" dirty="0"/>
           </a:p>
         </p:txBody>
       </p:sp>
@@ -36642,7 +36669,7 @@
                 <a:ea typeface="Calibri" pitchFamily="34" charset="-122"/>
                 <a:cs typeface="Calibri" pitchFamily="34" charset="-120"/>
               </a:rPr>
-              <a:t>1.  The word 'thankful' contains the root 'thank' plus a suffix.</a:t>
+              <a:t>1.  'Thankless' means a task that nobody appreciates or notices.</a:t>
             </a:r>
             <a:endParaRPr lang="en-US" sz="1300" dirty="0"/>
           </a:p>
@@ -36781,7 +36808,7 @@
                 <a:ea typeface="Calibri" pitchFamily="34" charset="-122"/>
                 <a:cs typeface="Calibri" pitchFamily="34" charset="-120"/>
               </a:rPr>
-              <a:t>2.  The word 'thankfully' has only two morphemes.</a:t>
+              <a:t>2.  Adding '-ful' to 'thank' changes the word into an adjective.</a:t>
             </a:r>
             <a:endParaRPr lang="en-US" sz="1300" dirty="0"/>
           </a:p>
@@ -36804,11 +36831,11 @@
             </a:avLst>
           </a:prstGeom>
           <a:solidFill>
-            <a:srgbClr val="FEE2E2"/>
-          </a:solidFill>
-          <a:ln w="12700">
-            <a:solidFill>
-              <a:srgbClr val="DC2626"/>
+            <a:srgbClr val="DCFCE7"/>
+          </a:solidFill>
+          <a:ln w="12700">
+            <a:solidFill>
+              <a:srgbClr val="16A34A"/>
             </a:solidFill>
             <a:prstDash val="solid"/>
           </a:ln>
@@ -36841,13 +36868,13 @@
             <a:r>
               <a:rPr lang="en-US" sz="1100" b="1" dirty="0">
                 <a:solidFill>
-                  <a:srgbClr val="DC2626"/>
+                  <a:srgbClr val="16A34A"/>
                 </a:solidFill>
                 <a:latin typeface="Trebuchet MS" pitchFamily="34" charset="0"/>
                 <a:ea typeface="Trebuchet MS" pitchFamily="34" charset="-122"/>
                 <a:cs typeface="Trebuchet MS" pitchFamily="34" charset="-120"/>
               </a:rPr>
-              <a:t>FALSE</a:t>
+              <a:t>TRUE</a:t>
             </a:r>
             <a:endParaRPr lang="en-US" sz="1100" dirty="0"/>
           </a:p>
@@ -37059,7 +37086,7 @@
                 <a:ea typeface="Calibri" pitchFamily="34" charset="-122"/>
                 <a:cs typeface="Calibri" pitchFamily="34" charset="-120"/>
               </a:rPr>
-              <a:t>4.  'Thankless' means a task that nobody appreciates or notices.</a:t>
+              <a:t>4.  The word 'thankfully' has only two morphemes.</a:t>
             </a:r>
             <a:endParaRPr lang="en-US" sz="1300" dirty="0"/>
           </a:p>
@@ -37082,11 +37109,11 @@
             </a:avLst>
           </a:prstGeom>
           <a:solidFill>
-            <a:srgbClr val="DCFCE7"/>
-          </a:solidFill>
-          <a:ln w="12700">
-            <a:solidFill>
-              <a:srgbClr val="16A34A"/>
+            <a:srgbClr val="FEE2E2"/>
+          </a:solidFill>
+          <a:ln w="12700">
+            <a:solidFill>
+              <a:srgbClr val="DC2626"/>
             </a:solidFill>
             <a:prstDash val="solid"/>
           </a:ln>
@@ -37119,13 +37146,13 @@
             <a:r>
               <a:rPr lang="en-US" sz="1100" b="1" dirty="0">
                 <a:solidFill>
-                  <a:srgbClr val="16A34A"/>
+                  <a:srgbClr val="DC2626"/>
                 </a:solidFill>
                 <a:latin typeface="Trebuchet MS" pitchFamily="34" charset="0"/>
                 <a:ea typeface="Trebuchet MS" pitchFamily="34" charset="-122"/>
                 <a:cs typeface="Trebuchet MS" pitchFamily="34" charset="-120"/>
               </a:rPr>
-              <a:t>TRUE</a:t>
+              <a:t>FALSE</a:t>
             </a:r>
             <a:endParaRPr lang="en-US" sz="1100" dirty="0"/>
           </a:p>
@@ -37198,7 +37225,7 @@
                 <a:ea typeface="Calibri" pitchFamily="34" charset="-122"/>
                 <a:cs typeface="Calibri" pitchFamily="34" charset="-120"/>
               </a:rPr>
-              <a:t>5.  Adding '-ful' to 'thank' changes the word into an adjective.</a:t>
+              <a:t>5.  The word 'thankful' contains the root 'thank' plus a suffix.</a:t>
             </a:r>
             <a:endParaRPr lang="en-US" sz="1300" dirty="0"/>
           </a:p>

--- a/output/wordlabs-thank-3day.pptx
+++ b/output/wordlabs-thank-3day.pptx
@@ -4240,7 +4240,7 @@
                 <a:ea typeface="Calibri" pitchFamily="34" charset="-122"/>
                 <a:cs typeface="Calibri" pitchFamily="34" charset="-120"/>
               </a:rPr>
-              <a:t>"express gratitude or praise"</a:t>
+              <a:t>"to show you are grateful"</a:t>
             </a:r>
             <a:endParaRPr lang="en-US" sz="2200" dirty="0"/>
           </a:p>
@@ -4279,7 +4279,7 @@
                 <a:ea typeface="Calibri" pitchFamily="34" charset="-122"/>
                 <a:cs typeface="Calibri" pitchFamily="34" charset="-120"/>
               </a:rPr>
-              <a:t>Origin: Old English: þancian</a:t>
+              <a:t>Origin: Anglo-Saxon (Old English) root</a:t>
             </a:r>
             <a:endParaRPr lang="en-US" sz="1300" dirty="0"/>
           </a:p>
@@ -5288,7 +5288,7 @@
                 <a:ea typeface="Calibri" pitchFamily="34" charset="-122"/>
                 <a:cs typeface="Calibri" pitchFamily="34" charset="-120"/>
               </a:rPr>
-              <a:t>Word Labs  •  wordlabs.app  •  Root: 'thank' = express gratitude or praise</a:t>
+              <a:t>Word Labs  •  wordlabs.app  •  Root: 'thank' = to show you are grateful</a:t>
             </a:r>
             <a:endParaRPr lang="en-US" sz="800" dirty="0"/>
           </a:p>
@@ -5622,7 +5622,7 @@
                 <a:ea typeface="Trebuchet MS" pitchFamily="34" charset="-122"/>
                 <a:cs typeface="Trebuchet MS" pitchFamily="34" charset="-120"/>
               </a:rPr>
-              <a:t>1</a:t>
+              <a:t>0</a:t>
             </a:r>
             <a:pPr algn="ctr" indent="0" marL="0">
               <a:buNone/>
@@ -5928,7 +5928,7 @@
                 <a:ea typeface="Calibri" pitchFamily="34" charset="-122"/>
                 <a:cs typeface="Calibri" pitchFamily="34" charset="-120"/>
               </a:rPr>
-              <a:t>Word Labs  •  wordlabs.app  •  Root: 'thank' = express gratitude or praise</a:t>
+              <a:t>Word Labs  •  wordlabs.app  •  Root: 'thank' = to show you are grateful</a:t>
             </a:r>
             <a:endParaRPr lang="en-US" sz="800" dirty="0"/>
           </a:p>
@@ -6040,7 +6040,7 @@
                 <a:ea typeface="Calibri" pitchFamily="34" charset="-122"/>
                 <a:cs typeface="Calibri" pitchFamily="34" charset="-120"/>
               </a:rPr>
-              <a:t>She was truly </a:t>
+              <a:t>The captain spent the evening </a:t>
             </a:r>
             <a:pPr algn="l" indent="0" marL="0">
               <a:buNone/>
@@ -6057,7 +6057,7 @@
                 <a:ea typeface="Calibri" pitchFamily="34" charset="-122"/>
                 <a:cs typeface="Calibri" pitchFamily="34" charset="-120"/>
               </a:rPr>
-              <a:t>thankful</a:t>
+              <a:t>thanking</a:t>
             </a:r>
             <a:pPr algn="l" indent="0" marL="0">
               <a:buNone/>
@@ -6071,7 +6071,7 @@
                 <a:ea typeface="Calibri" pitchFamily="34" charset="-122"/>
                 <a:cs typeface="Calibri" pitchFamily="34" charset="-120"/>
               </a:rPr>
-              <a:t> for the help, and she </a:t>
+              <a:t> every player for their effort. Cleaning up after the whole school felt like a </a:t>
             </a:r>
             <a:pPr algn="l" indent="0" marL="0">
               <a:buNone/>
@@ -6088,7 +6088,7 @@
                 <a:ea typeface="Calibri" pitchFamily="34" charset="-122"/>
                 <a:cs typeface="Calibri" pitchFamily="34" charset="-120"/>
               </a:rPr>
-              <a:t>thanked</a:t>
+              <a:t>thankless</a:t>
             </a:r>
             <a:pPr algn="l" indent="0" marL="0">
               <a:buNone/>
@@ -6102,7 +6102,7 @@
                 <a:ea typeface="Calibri" pitchFamily="34" charset="-122"/>
                 <a:cs typeface="Calibri" pitchFamily="34" charset="-120"/>
               </a:rPr>
-              <a:t> her friend warmly.</a:t>
+              <a:t> job.</a:t>
             </a:r>
             <a:endParaRPr lang="en-US" sz="1800" dirty="0"/>
           </a:p>
@@ -6257,7 +6257,7 @@
                 <a:ea typeface="Trebuchet MS" pitchFamily="34" charset="-122"/>
                 <a:cs typeface="Trebuchet MS" pitchFamily="34" charset="-120"/>
               </a:rPr>
-              <a:t>thankful</a:t>
+              <a:t>thanking</a:t>
             </a:r>
             <a:endParaRPr lang="en-US" sz="1400" dirty="0"/>
           </a:p>
@@ -6385,7 +6385,7 @@
                 <a:ea typeface="Trebuchet MS" pitchFamily="34" charset="-122"/>
                 <a:cs typeface="Trebuchet MS" pitchFamily="34" charset="-120"/>
               </a:rPr>
-              <a:t>thanked</a:t>
+              <a:t>thankless</a:t>
             </a:r>
             <a:endParaRPr lang="en-US" sz="1400" dirty="0"/>
           </a:p>
@@ -6716,7 +6716,7 @@
                 <a:ea typeface="Calibri" pitchFamily="34" charset="-122"/>
                 <a:cs typeface="Calibri" pitchFamily="34" charset="-120"/>
               </a:rPr>
-              <a:t>Word Labs  •  wordlabs.app  •  Root: 'thank' = express gratitude or praise</a:t>
+              <a:t>Word Labs  •  wordlabs.app  •  Root: 'thank' = to show you are grateful</a:t>
             </a:r>
             <a:endParaRPr lang="en-US" sz="800" dirty="0"/>
           </a:p>
@@ -6855,7 +6855,7 @@
                 <a:ea typeface="Trebuchet MS" pitchFamily="34" charset="-122"/>
                 <a:cs typeface="Trebuchet MS" pitchFamily="34" charset="-120"/>
               </a:rPr>
-              <a:t>thankful</a:t>
+              <a:t>thanking</a:t>
             </a:r>
             <a:endParaRPr lang="en-US" sz="2800" dirty="0"/>
           </a:p>
@@ -7543,7 +7543,7 @@
                 <a:ea typeface="Calibri" pitchFamily="34" charset="-122"/>
                 <a:cs typeface="Calibri" pitchFamily="34" charset="-120"/>
               </a:rPr>
-              <a:t>Word Labs  •  wordlabs.app  •  Root: 'thank' = express gratitude or praise</a:t>
+              <a:t>Word Labs  •  wordlabs.app  •  Root: 'thank' = to show you are grateful</a:t>
             </a:r>
             <a:endParaRPr lang="en-US" sz="800" dirty="0"/>
           </a:p>
@@ -7682,7 +7682,7 @@
                 <a:ea typeface="Trebuchet MS" pitchFamily="34" charset="-122"/>
                 <a:cs typeface="Trebuchet MS" pitchFamily="34" charset="-120"/>
               </a:rPr>
-              <a:t>thankful</a:t>
+              <a:t>thanking</a:t>
             </a:r>
             <a:endParaRPr lang="en-US" sz="2800" dirty="0"/>
           </a:p>
@@ -7860,7 +7860,7 @@
                 <a:ea typeface="Calibri" pitchFamily="34" charset="-122"/>
                 <a:cs typeface="Calibri" pitchFamily="34" charset="-120"/>
               </a:rPr>
-              <a:t>to express gratitude</a:t>
+              <a:t>to show you are grateful</a:t>
             </a:r>
             <a:endParaRPr lang="en-US" sz="850" dirty="0"/>
           </a:p>
@@ -7933,7 +7933,7 @@
                 <a:ea typeface="Trebuchet MS" pitchFamily="34" charset="-122"/>
                 <a:cs typeface="Trebuchet MS" pitchFamily="34" charset="-120"/>
               </a:rPr>
-              <a:t>ful</a:t>
+              <a:t>ing</a:t>
             </a:r>
             <a:endParaRPr lang="en-US" sz="1300" dirty="0"/>
           </a:p>
@@ -7972,7 +7972,7 @@
                 <a:ea typeface="Calibri" pitchFamily="34" charset="-122"/>
                 <a:cs typeface="Calibri" pitchFamily="34" charset="-120"/>
               </a:rPr>
-              <a:t>full of; having the quality of</a:t>
+              <a:t>happening now</a:t>
             </a:r>
             <a:endParaRPr lang="en-US" sz="850" dirty="0"/>
           </a:p>
@@ -8528,7 +8528,7 @@
                 <a:ea typeface="Calibri" pitchFamily="34" charset="-122"/>
                 <a:cs typeface="Calibri" pitchFamily="34" charset="-120"/>
               </a:rPr>
-              <a:t>Word Labs  •  wordlabs.app  •  Root: 'thank' = express gratitude or praise</a:t>
+              <a:t>Word Labs  •  wordlabs.app  •  Root: 'thank' = to show you are grateful</a:t>
             </a:r>
             <a:endParaRPr lang="en-US" sz="800" dirty="0"/>
           </a:p>
@@ -8667,7 +8667,7 @@
                 <a:ea typeface="Trebuchet MS" pitchFamily="34" charset="-122"/>
                 <a:cs typeface="Trebuchet MS" pitchFamily="34" charset="-120"/>
               </a:rPr>
-              <a:t>thankful</a:t>
+              <a:t>thanking</a:t>
             </a:r>
             <a:endParaRPr lang="en-US" sz="2800" dirty="0"/>
           </a:p>
@@ -8845,7 +8845,7 @@
                 <a:ea typeface="Calibri" pitchFamily="34" charset="-122"/>
                 <a:cs typeface="Calibri" pitchFamily="34" charset="-120"/>
               </a:rPr>
-              <a:t>to express gratitude</a:t>
+              <a:t>to show you are grateful</a:t>
             </a:r>
             <a:endParaRPr lang="en-US" sz="850" dirty="0"/>
           </a:p>
@@ -8918,7 +8918,7 @@
                 <a:ea typeface="Trebuchet MS" pitchFamily="34" charset="-122"/>
                 <a:cs typeface="Trebuchet MS" pitchFamily="34" charset="-120"/>
               </a:rPr>
-              <a:t>ful</a:t>
+              <a:t>ing</a:t>
             </a:r>
             <a:endParaRPr lang="en-US" sz="1300" dirty="0"/>
           </a:p>
@@ -8957,7 +8957,7 @@
                 <a:ea typeface="Calibri" pitchFamily="34" charset="-122"/>
                 <a:cs typeface="Calibri" pitchFamily="34" charset="-120"/>
               </a:rPr>
-              <a:t>full of; having the quality of</a:t>
+              <a:t>happening now</a:t>
             </a:r>
             <a:endParaRPr lang="en-US" sz="850" dirty="0"/>
           </a:p>
@@ -9221,7 +9221,7 @@
                 <a:ea typeface="Trebuchet MS" pitchFamily="34" charset="-122"/>
                 <a:cs typeface="Trebuchet MS" pitchFamily="34" charset="-120"/>
               </a:rPr>
-              <a:t>ful</a:t>
+              <a:t>ing</a:t>
             </a:r>
             <a:endParaRPr lang="en-US" sz="1400" dirty="0"/>
           </a:p>
@@ -9645,7 +9645,7 @@
                 <a:ea typeface="Calibri" pitchFamily="34" charset="-122"/>
                 <a:cs typeface="Calibri" pitchFamily="34" charset="-120"/>
               </a:rPr>
-              <a:t>Word Labs  •  wordlabs.app  •  Root: 'thank' = express gratitude or praise</a:t>
+              <a:t>Word Labs  •  wordlabs.app  •  Root: 'thank' = to show you are grateful</a:t>
             </a:r>
             <a:endParaRPr lang="en-US" sz="800" dirty="0"/>
           </a:p>
@@ -9784,7 +9784,7 @@
                 <a:ea typeface="Trebuchet MS" pitchFamily="34" charset="-122"/>
                 <a:cs typeface="Trebuchet MS" pitchFamily="34" charset="-120"/>
               </a:rPr>
-              <a:t>thankful</a:t>
+              <a:t>thanking</a:t>
             </a:r>
             <a:endParaRPr lang="en-US" sz="2800" dirty="0"/>
           </a:p>
@@ -9962,7 +9962,7 @@
                 <a:ea typeface="Calibri" pitchFamily="34" charset="-122"/>
                 <a:cs typeface="Calibri" pitchFamily="34" charset="-120"/>
               </a:rPr>
-              <a:t>to express gratitude</a:t>
+              <a:t>to show you are grateful</a:t>
             </a:r>
             <a:endParaRPr lang="en-US" sz="850" dirty="0"/>
           </a:p>
@@ -10035,7 +10035,7 @@
                 <a:ea typeface="Trebuchet MS" pitchFamily="34" charset="-122"/>
                 <a:cs typeface="Trebuchet MS" pitchFamily="34" charset="-120"/>
               </a:rPr>
-              <a:t>ful</a:t>
+              <a:t>ing</a:t>
             </a:r>
             <a:endParaRPr lang="en-US" sz="1300" dirty="0"/>
           </a:p>
@@ -10074,7 +10074,7 @@
                 <a:ea typeface="Calibri" pitchFamily="34" charset="-122"/>
                 <a:cs typeface="Calibri" pitchFamily="34" charset="-120"/>
               </a:rPr>
-              <a:t>full of; having the quality of</a:t>
+              <a:t>happening now</a:t>
             </a:r>
             <a:endParaRPr lang="en-US" sz="850" dirty="0"/>
           </a:p>
@@ -10338,7 +10338,7 @@
                 <a:ea typeface="Trebuchet MS" pitchFamily="34" charset="-122"/>
                 <a:cs typeface="Trebuchet MS" pitchFamily="34" charset="-120"/>
               </a:rPr>
-              <a:t>ful</a:t>
+              <a:t>ing</a:t>
             </a:r>
             <a:endParaRPr lang="en-US" sz="1400" dirty="0"/>
           </a:p>
@@ -10445,7 +10445,7 @@
         </p:nvSpPr>
         <p:spPr>
           <a:xfrm>
-            <a:off x="2124837" y="4169664"/>
+            <a:off x="2254649" y="4169664"/>
             <a:ext cx="685800" cy="475488"/>
           </a:xfrm>
           <a:prstGeom prst="rect">
@@ -10472,7 +10472,7 @@
         </p:nvSpPr>
         <p:spPr>
           <a:xfrm>
-            <a:off x="2124837" y="4169664"/>
+            <a:off x="2254649" y="4169664"/>
             <a:ext cx="685800" cy="475488"/>
           </a:xfrm>
           <a:prstGeom prst="rect">
@@ -10511,7 +10511,7 @@
         </p:nvSpPr>
         <p:spPr>
           <a:xfrm>
-            <a:off x="3033522" y="4169664"/>
+            <a:off x="3293146" y="4169664"/>
             <a:ext cx="685800" cy="475488"/>
           </a:xfrm>
           <a:prstGeom prst="rect">
@@ -10538,7 +10538,7 @@
         </p:nvSpPr>
         <p:spPr>
           <a:xfrm>
-            <a:off x="3033522" y="4169664"/>
+            <a:off x="3293146" y="4169664"/>
             <a:ext cx="685800" cy="475488"/>
           </a:xfrm>
           <a:prstGeom prst="rect">
@@ -10577,7 +10577,7 @@
         </p:nvSpPr>
         <p:spPr>
           <a:xfrm>
-            <a:off x="3942207" y="4169664"/>
+            <a:off x="4331643" y="4169664"/>
             <a:ext cx="685800" cy="475488"/>
           </a:xfrm>
           <a:prstGeom prst="rect">
@@ -10604,7 +10604,7 @@
         </p:nvSpPr>
         <p:spPr>
           <a:xfrm>
-            <a:off x="3942207" y="4169664"/>
+            <a:off x="4331643" y="4169664"/>
             <a:ext cx="685800" cy="475488"/>
           </a:xfrm>
           <a:prstGeom prst="rect">
@@ -10643,7 +10643,7 @@
         </p:nvSpPr>
         <p:spPr>
           <a:xfrm>
-            <a:off x="4850892" y="4169664"/>
+            <a:off x="5370141" y="4169664"/>
             <a:ext cx="685800" cy="475488"/>
           </a:xfrm>
           <a:prstGeom prst="rect">
@@ -10670,7 +10670,7 @@
         </p:nvSpPr>
         <p:spPr>
           <a:xfrm>
-            <a:off x="4850892" y="4169664"/>
+            <a:off x="5370141" y="4169664"/>
             <a:ext cx="685800" cy="475488"/>
           </a:xfrm>
           <a:prstGeom prst="rect">
@@ -10709,7 +10709,7 @@
         </p:nvSpPr>
         <p:spPr>
           <a:xfrm>
-            <a:off x="5759577" y="4169664"/>
+            <a:off x="6408638" y="4169664"/>
             <a:ext cx="685800" cy="475488"/>
           </a:xfrm>
           <a:prstGeom prst="rect">
@@ -10736,7 +10736,7 @@
         </p:nvSpPr>
         <p:spPr>
           <a:xfrm>
-            <a:off x="5759577" y="4169664"/>
+            <a:off x="6408638" y="4169664"/>
             <a:ext cx="685800" cy="475488"/>
           </a:xfrm>
           <a:prstGeom prst="rect">
@@ -10761,7 +10761,7 @@
                 <a:ea typeface="Trebuchet MS" pitchFamily="34" charset="-122"/>
                 <a:cs typeface="Trebuchet MS" pitchFamily="34" charset="-120"/>
               </a:rPr>
-              <a:t>f</a:t>
+              <a:t>i</a:t>
             </a:r>
             <a:endParaRPr lang="en-US" sz="900" dirty="0"/>
           </a:p>
@@ -10775,7 +10775,7 @@
         </p:nvSpPr>
         <p:spPr>
           <a:xfrm>
-            <a:off x="6668262" y="4169664"/>
+            <a:off x="7447135" y="4169664"/>
             <a:ext cx="685800" cy="475488"/>
           </a:xfrm>
           <a:prstGeom prst="rect">
@@ -10802,7 +10802,7 @@
         </p:nvSpPr>
         <p:spPr>
           <a:xfrm>
-            <a:off x="6668262" y="4169664"/>
+            <a:off x="7447135" y="4169664"/>
             <a:ext cx="685800" cy="475488"/>
           </a:xfrm>
           <a:prstGeom prst="rect">
@@ -10827,73 +10827,7 @@
                 <a:ea typeface="Trebuchet MS" pitchFamily="34" charset="-122"/>
                 <a:cs typeface="Trebuchet MS" pitchFamily="34" charset="-120"/>
               </a:rPr>
-              <a:t>u</a:t>
-            </a:r>
-            <a:endParaRPr lang="en-US" sz="900" dirty="0"/>
-          </a:p>
-        </p:txBody>
-      </p:sp>
-      <p:sp>
-        <p:nvSpPr>
-          <p:cNvPr id="45" name="Shape 43"/>
-          <p:cNvSpPr/>
-          <p:nvPr/>
-        </p:nvSpPr>
-        <p:spPr>
-          <a:xfrm>
-            <a:off x="7576947" y="4169664"/>
-            <a:ext cx="685800" cy="475488"/>
-          </a:xfrm>
-          <a:prstGeom prst="rect">
-            <a:avLst>
-              <a:gd name="adj" fmla="val 7692"/>
-            </a:avLst>
-          </a:prstGeom>
-          <a:solidFill>
-            <a:srgbClr val="FFFFFF"/>
-          </a:solidFill>
-          <a:ln w="12700">
-            <a:solidFill>
-              <a:srgbClr val="DB2777"/>
-            </a:solidFill>
-            <a:prstDash val="solid"/>
-          </a:ln>
-        </p:spPr>
-      </p:sp>
-      <p:sp>
-        <p:nvSpPr>
-          <p:cNvPr id="46" name="Text 44"/>
-          <p:cNvSpPr/>
-          <p:nvPr/>
-        </p:nvSpPr>
-        <p:spPr>
-          <a:xfrm>
-            <a:off x="7576947" y="4169664"/>
-            <a:ext cx="685800" cy="475488"/>
-          </a:xfrm>
-          <a:prstGeom prst="rect">
-            <a:avLst/>
-          </a:prstGeom>
-          <a:noFill/>
-          <a:ln/>
-        </p:spPr>
-        <p:txBody>
-          <a:bodyPr wrap="square" lIns="0" tIns="0" rIns="0" bIns="0" rtlCol="0" anchor="ctr"/>
-          <a:lstStyle/>
-          <a:p>
-            <a:pPr algn="ctr" indent="0" marL="0">
-              <a:buNone/>
-            </a:pPr>
-            <a:r>
-              <a:rPr lang="en-US" sz="900" b="1" dirty="0">
-                <a:solidFill>
-                  <a:srgbClr val="9D174D"/>
-                </a:solidFill>
-                <a:latin typeface="Trebuchet MS" pitchFamily="34" charset="0"/>
-                <a:ea typeface="Trebuchet MS" pitchFamily="34" charset="-122"/>
-                <a:cs typeface="Trebuchet MS" pitchFamily="34" charset="-120"/>
-              </a:rPr>
-              <a:t>l</a:t>
+              <a:t>ng</a:t>
             </a:r>
             <a:endParaRPr lang="en-US" sz="900" dirty="0"/>
           </a:p>
@@ -11185,7 +11119,7 @@
                 <a:ea typeface="Calibri" pitchFamily="34" charset="-122"/>
                 <a:cs typeface="Calibri" pitchFamily="34" charset="-120"/>
               </a:rPr>
-              <a:t>Word Labs  •  wordlabs.app  •  Root: 'thank' = express gratitude or praise</a:t>
+              <a:t>Word Labs  •  wordlabs.app  •  Root: 'thank' = to show you are grateful</a:t>
             </a:r>
             <a:endParaRPr lang="en-US" sz="800" dirty="0"/>
           </a:p>
@@ -11324,7 +11258,7 @@
                 <a:ea typeface="Trebuchet MS" pitchFamily="34" charset="-122"/>
                 <a:cs typeface="Trebuchet MS" pitchFamily="34" charset="-120"/>
               </a:rPr>
-              <a:t>thanked</a:t>
+              <a:t>thankless</a:t>
             </a:r>
             <a:endParaRPr lang="en-US" sz="2800" dirty="0"/>
           </a:p>
@@ -12012,7 +11946,7 @@
                 <a:ea typeface="Calibri" pitchFamily="34" charset="-122"/>
                 <a:cs typeface="Calibri" pitchFamily="34" charset="-120"/>
               </a:rPr>
-              <a:t>Word Labs  •  wordlabs.app  •  Root: 'thank' = express gratitude or praise</a:t>
+              <a:t>Word Labs  •  wordlabs.app  •  Root: 'thank' = to show you are grateful</a:t>
             </a:r>
             <a:endParaRPr lang="en-US" sz="800" dirty="0"/>
           </a:p>
@@ -12151,7 +12085,7 @@
                 <a:ea typeface="Trebuchet MS" pitchFamily="34" charset="-122"/>
                 <a:cs typeface="Trebuchet MS" pitchFamily="34" charset="-120"/>
               </a:rPr>
-              <a:t>thanked</a:t>
+              <a:t>thankless</a:t>
             </a:r>
             <a:endParaRPr lang="en-US" sz="2800" dirty="0"/>
           </a:p>
@@ -12329,7 +12263,7 @@
                 <a:ea typeface="Calibri" pitchFamily="34" charset="-122"/>
                 <a:cs typeface="Calibri" pitchFamily="34" charset="-120"/>
               </a:rPr>
-              <a:t>to express gratitude</a:t>
+              <a:t>to show you are grateful</a:t>
             </a:r>
             <a:endParaRPr lang="en-US" sz="850" dirty="0"/>
           </a:p>
@@ -12352,11 +12286,11 @@
             </a:avLst>
           </a:prstGeom>
           <a:solidFill>
-            <a:srgbClr val="FCE7F3"/>
+            <a:srgbClr val="DDD6FE"/>
           </a:solidFill>
           <a:ln w="19050">
             <a:solidFill>
-              <a:srgbClr val="DB2777"/>
+              <a:srgbClr val="7C3AED"/>
             </a:solidFill>
             <a:prstDash val="solid"/>
           </a:ln>
@@ -12396,13 +12330,13 @@
             <a:r>
               <a:rPr lang="en-US" sz="1300" b="1" dirty="0">
                 <a:solidFill>
-                  <a:srgbClr val="9D174D"/>
+                  <a:srgbClr val="4C1D95"/>
                 </a:solidFill>
                 <a:latin typeface="Trebuchet MS" pitchFamily="34" charset="0"/>
                 <a:ea typeface="Trebuchet MS" pitchFamily="34" charset="-122"/>
                 <a:cs typeface="Trebuchet MS" pitchFamily="34" charset="-120"/>
               </a:rPr>
-              <a:t>ed</a:t>
+              <a:t>less</a:t>
             </a:r>
             <a:endParaRPr lang="en-US" sz="1300" dirty="0"/>
           </a:p>
@@ -12441,7 +12375,7 @@
                 <a:ea typeface="Calibri" pitchFamily="34" charset="-122"/>
                 <a:cs typeface="Calibri" pitchFamily="34" charset="-120"/>
               </a:rPr>
-              <a:t>past tense</a:t>
+              <a:t>without</a:t>
             </a:r>
             <a:endParaRPr lang="en-US" sz="850" dirty="0"/>
           </a:p>
@@ -12997,7 +12931,7 @@
                 <a:ea typeface="Calibri" pitchFamily="34" charset="-122"/>
                 <a:cs typeface="Calibri" pitchFamily="34" charset="-120"/>
               </a:rPr>
-              <a:t>Word Labs  •  wordlabs.app  •  Root: 'thank' = express gratitude or praise</a:t>
+              <a:t>Word Labs  •  wordlabs.app  •  Root: 'thank' = to show you are grateful</a:t>
             </a:r>
             <a:endParaRPr lang="en-US" sz="800" dirty="0"/>
           </a:p>
@@ -13136,7 +13070,7 @@
                 <a:ea typeface="Trebuchet MS" pitchFamily="34" charset="-122"/>
                 <a:cs typeface="Trebuchet MS" pitchFamily="34" charset="-120"/>
               </a:rPr>
-              <a:t>thanked</a:t>
+              <a:t>thankless</a:t>
             </a:r>
             <a:endParaRPr lang="en-US" sz="2800" dirty="0"/>
           </a:p>
@@ -13314,7 +13248,7 @@
                 <a:ea typeface="Calibri" pitchFamily="34" charset="-122"/>
                 <a:cs typeface="Calibri" pitchFamily="34" charset="-120"/>
               </a:rPr>
-              <a:t>to express gratitude</a:t>
+              <a:t>to show you are grateful</a:t>
             </a:r>
             <a:endParaRPr lang="en-US" sz="850" dirty="0"/>
           </a:p>
@@ -13337,11 +13271,11 @@
             </a:avLst>
           </a:prstGeom>
           <a:solidFill>
-            <a:srgbClr val="FCE7F3"/>
+            <a:srgbClr val="DDD6FE"/>
           </a:solidFill>
           <a:ln w="19050">
             <a:solidFill>
-              <a:srgbClr val="DB2777"/>
+              <a:srgbClr val="7C3AED"/>
             </a:solidFill>
             <a:prstDash val="solid"/>
           </a:ln>
@@ -13381,13 +13315,13 @@
             <a:r>
               <a:rPr lang="en-US" sz="1300" b="1" dirty="0">
                 <a:solidFill>
-                  <a:srgbClr val="9D174D"/>
+                  <a:srgbClr val="4C1D95"/>
                 </a:solidFill>
                 <a:latin typeface="Trebuchet MS" pitchFamily="34" charset="0"/>
                 <a:ea typeface="Trebuchet MS" pitchFamily="34" charset="-122"/>
                 <a:cs typeface="Trebuchet MS" pitchFamily="34" charset="-120"/>
               </a:rPr>
-              <a:t>ed</a:t>
+              <a:t>less</a:t>
             </a:r>
             <a:endParaRPr lang="en-US" sz="1300" dirty="0"/>
           </a:p>
@@ -13426,7 +13360,7 @@
                 <a:ea typeface="Calibri" pitchFamily="34" charset="-122"/>
                 <a:cs typeface="Calibri" pitchFamily="34" charset="-120"/>
               </a:rPr>
-              <a:t>past tense</a:t>
+              <a:t>without</a:t>
             </a:r>
             <a:endParaRPr lang="en-US" sz="850" dirty="0"/>
           </a:p>
@@ -13533,7 +13467,7 @@
         </p:nvSpPr>
         <p:spPr>
           <a:xfrm>
-            <a:off x="4370832" y="3364992"/>
+            <a:off x="2999232" y="3364992"/>
             <a:ext cx="1645920" cy="475488"/>
           </a:xfrm>
           <a:prstGeom prst="rect">
@@ -13560,7 +13494,7 @@
         </p:nvSpPr>
         <p:spPr>
           <a:xfrm>
-            <a:off x="4370832" y="3364992"/>
+            <a:off x="2999232" y="3364992"/>
             <a:ext cx="1645920" cy="475488"/>
           </a:xfrm>
           <a:prstGeom prst="rect">
@@ -13585,7 +13519,7 @@
                 <a:ea typeface="Trebuchet MS" pitchFamily="34" charset="-122"/>
                 <a:cs typeface="Trebuchet MS" pitchFamily="34" charset="-120"/>
               </a:rPr>
-              <a:t>thanked</a:t>
+              <a:t>thank</a:t>
             </a:r>
             <a:endParaRPr lang="en-US" sz="1400" dirty="0"/>
           </a:p>
@@ -13593,7 +13527,112 @@
       </p:sp>
       <p:sp>
         <p:nvSpPr>
-          <p:cNvPr id="27" name="Shape 25"/>
+          <p:cNvPr id="27" name="Text 25"/>
+          <p:cNvSpPr/>
+          <p:nvPr/>
+        </p:nvSpPr>
+        <p:spPr>
+          <a:xfrm>
+            <a:off x="4645152" y="3364992"/>
+            <a:ext cx="1097280" cy="475488"/>
+          </a:xfrm>
+          <a:prstGeom prst="rect">
+            <a:avLst/>
+          </a:prstGeom>
+          <a:noFill/>
+          <a:ln/>
+        </p:spPr>
+        <p:txBody>
+          <a:bodyPr wrap="square" lIns="0" tIns="0" rIns="0" bIns="0" rtlCol="0" anchor="ctr"/>
+          <a:lstStyle/>
+          <a:p>
+            <a:pPr algn="ctr" indent="0" marL="0">
+              <a:buNone/>
+            </a:pPr>
+            <a:r>
+              <a:rPr lang="en-US" sz="1600" b="1" dirty="0">
+                <a:solidFill>
+                  <a:srgbClr val="0D9488"/>
+                </a:solidFill>
+                <a:latin typeface="Trebuchet MS" pitchFamily="34" charset="0"/>
+                <a:ea typeface="Trebuchet MS" pitchFamily="34" charset="-122"/>
+                <a:cs typeface="Trebuchet MS" pitchFamily="34" charset="-120"/>
+              </a:rPr>
+              <a:t>·</a:t>
+            </a:r>
+            <a:endParaRPr lang="en-US" sz="1600" dirty="0"/>
+          </a:p>
+        </p:txBody>
+      </p:sp>
+      <p:sp>
+        <p:nvSpPr>
+          <p:cNvPr id="28" name="Shape 26"/>
+          <p:cNvSpPr/>
+          <p:nvPr/>
+        </p:nvSpPr>
+        <p:spPr>
+          <a:xfrm>
+            <a:off x="5742432" y="3364992"/>
+            <a:ext cx="1645920" cy="475488"/>
+          </a:xfrm>
+          <a:prstGeom prst="rect">
+            <a:avLst>
+              <a:gd name="adj" fmla="val 9615"/>
+            </a:avLst>
+          </a:prstGeom>
+          <a:solidFill>
+            <a:srgbClr val="FFFFFF"/>
+          </a:solidFill>
+          <a:ln w="12700">
+            <a:solidFill>
+              <a:srgbClr val="0D9488"/>
+            </a:solidFill>
+            <a:prstDash val="solid"/>
+          </a:ln>
+        </p:spPr>
+      </p:sp>
+      <p:sp>
+        <p:nvSpPr>
+          <p:cNvPr id="29" name="Text 27"/>
+          <p:cNvSpPr/>
+          <p:nvPr/>
+        </p:nvSpPr>
+        <p:spPr>
+          <a:xfrm>
+            <a:off x="5742432" y="3364992"/>
+            <a:ext cx="1645920" cy="475488"/>
+          </a:xfrm>
+          <a:prstGeom prst="rect">
+            <a:avLst/>
+          </a:prstGeom>
+          <a:noFill/>
+          <a:ln/>
+        </p:spPr>
+        <p:txBody>
+          <a:bodyPr wrap="square" lIns="0" tIns="0" rIns="0" bIns="0" rtlCol="0" anchor="ctr"/>
+          <a:lstStyle/>
+          <a:p>
+            <a:pPr algn="ctr" indent="0" marL="0">
+              <a:buNone/>
+            </a:pPr>
+            <a:r>
+              <a:rPr lang="en-US" sz="1400" b="1" dirty="0">
+                <a:solidFill>
+                  <a:srgbClr val="0D9488"/>
+                </a:solidFill>
+                <a:latin typeface="Trebuchet MS" pitchFamily="34" charset="0"/>
+                <a:ea typeface="Trebuchet MS" pitchFamily="34" charset="-122"/>
+                <a:cs typeface="Trebuchet MS" pitchFamily="34" charset="-120"/>
+              </a:rPr>
+              <a:t>less</a:t>
+            </a:r>
+            <a:endParaRPr lang="en-US" sz="1400" dirty="0"/>
+          </a:p>
+        </p:txBody>
+      </p:sp>
+      <p:sp>
+        <p:nvSpPr>
+          <p:cNvPr id="30" name="Shape 28"/>
           <p:cNvSpPr/>
           <p:nvPr/>
         </p:nvSpPr>
@@ -13620,7 +13659,7 @@
       </p:sp>
       <p:sp>
         <p:nvSpPr>
-          <p:cNvPr id="28" name="Text 26"/>
+          <p:cNvPr id="31" name="Text 29"/>
           <p:cNvSpPr/>
           <p:nvPr/>
         </p:nvSpPr>
@@ -13659,7 +13698,7 @@
       </p:sp>
       <p:sp>
         <p:nvSpPr>
-          <p:cNvPr id="29" name="Shape 27"/>
+          <p:cNvPr id="32" name="Shape 30"/>
           <p:cNvSpPr/>
           <p:nvPr/>
         </p:nvSpPr>
@@ -13686,7 +13725,7 @@
       </p:sp>
       <p:sp>
         <p:nvSpPr>
-          <p:cNvPr id="30" name="Text 28"/>
+          <p:cNvPr id="33" name="Text 31"/>
           <p:cNvSpPr/>
           <p:nvPr/>
         </p:nvSpPr>
@@ -13918,7 +13957,7 @@
                 <a:ea typeface="Calibri" pitchFamily="34" charset="-122"/>
                 <a:cs typeface="Calibri" pitchFamily="34" charset="-120"/>
               </a:rPr>
-              <a:t>Root 'thank' — express gratitude or praise</a:t>
+              <a:t>Root 'thank' — to show you are grateful</a:t>
             </a:r>
             <a:endParaRPr lang="en-US" sz="1600" dirty="0"/>
           </a:p>
@@ -14274,7 +14313,7 @@
                 <a:ea typeface="Calibri" pitchFamily="34" charset="-122"/>
                 <a:cs typeface="Calibri" pitchFamily="34" charset="-120"/>
               </a:rPr>
-              <a:t>Word Labs  •  wordlabs.app  •  Root: 'thank' = express gratitude or praise</a:t>
+              <a:t>Word Labs  •  wordlabs.app  •  Root: 'thank' = to show you are grateful</a:t>
             </a:r>
             <a:endParaRPr lang="en-US" sz="800" dirty="0"/>
           </a:p>
@@ -14413,7 +14452,7 @@
                 <a:ea typeface="Trebuchet MS" pitchFamily="34" charset="-122"/>
                 <a:cs typeface="Trebuchet MS" pitchFamily="34" charset="-120"/>
               </a:rPr>
-              <a:t>thanked</a:t>
+              <a:t>thankless</a:t>
             </a:r>
             <a:endParaRPr lang="en-US" sz="2800" dirty="0"/>
           </a:p>
@@ -14591,7 +14630,7 @@
                 <a:ea typeface="Calibri" pitchFamily="34" charset="-122"/>
                 <a:cs typeface="Calibri" pitchFamily="34" charset="-120"/>
               </a:rPr>
-              <a:t>to express gratitude</a:t>
+              <a:t>to show you are grateful</a:t>
             </a:r>
             <a:endParaRPr lang="en-US" sz="850" dirty="0"/>
           </a:p>
@@ -14614,11 +14653,11 @@
             </a:avLst>
           </a:prstGeom>
           <a:solidFill>
-            <a:srgbClr val="FCE7F3"/>
+            <a:srgbClr val="DDD6FE"/>
           </a:solidFill>
           <a:ln w="19050">
             <a:solidFill>
-              <a:srgbClr val="DB2777"/>
+              <a:srgbClr val="7C3AED"/>
             </a:solidFill>
             <a:prstDash val="solid"/>
           </a:ln>
@@ -14658,13 +14697,13 @@
             <a:r>
               <a:rPr lang="en-US" sz="1300" b="1" dirty="0">
                 <a:solidFill>
-                  <a:srgbClr val="9D174D"/>
+                  <a:srgbClr val="4C1D95"/>
                 </a:solidFill>
                 <a:latin typeface="Trebuchet MS" pitchFamily="34" charset="0"/>
                 <a:ea typeface="Trebuchet MS" pitchFamily="34" charset="-122"/>
                 <a:cs typeface="Trebuchet MS" pitchFamily="34" charset="-120"/>
               </a:rPr>
-              <a:t>ed</a:t>
+              <a:t>less</a:t>
             </a:r>
             <a:endParaRPr lang="en-US" sz="1300" dirty="0"/>
           </a:p>
@@ -14703,7 +14742,7 @@
                 <a:ea typeface="Calibri" pitchFamily="34" charset="-122"/>
                 <a:cs typeface="Calibri" pitchFamily="34" charset="-120"/>
               </a:rPr>
-              <a:t>past tense</a:t>
+              <a:t>without</a:t>
             </a:r>
             <a:endParaRPr lang="en-US" sz="850" dirty="0"/>
           </a:p>
@@ -14810,7 +14849,7 @@
         </p:nvSpPr>
         <p:spPr>
           <a:xfrm>
-            <a:off x="4370832" y="3364992"/>
+            <a:off x="2999232" y="3364992"/>
             <a:ext cx="1645920" cy="475488"/>
           </a:xfrm>
           <a:prstGeom prst="rect">
@@ -14837,7 +14876,7 @@
         </p:nvSpPr>
         <p:spPr>
           <a:xfrm>
-            <a:off x="4370832" y="3364992"/>
+            <a:off x="2999232" y="3364992"/>
             <a:ext cx="1645920" cy="475488"/>
           </a:xfrm>
           <a:prstGeom prst="rect">
@@ -14862,7 +14901,7 @@
                 <a:ea typeface="Trebuchet MS" pitchFamily="34" charset="-122"/>
                 <a:cs typeface="Trebuchet MS" pitchFamily="34" charset="-120"/>
               </a:rPr>
-              <a:t>thanked</a:t>
+              <a:t>thank</a:t>
             </a:r>
             <a:endParaRPr lang="en-US" sz="1400" dirty="0"/>
           </a:p>
@@ -14870,7 +14909,112 @@
       </p:sp>
       <p:sp>
         <p:nvSpPr>
-          <p:cNvPr id="27" name="Shape 25"/>
+          <p:cNvPr id="27" name="Text 25"/>
+          <p:cNvSpPr/>
+          <p:nvPr/>
+        </p:nvSpPr>
+        <p:spPr>
+          <a:xfrm>
+            <a:off x="4645152" y="3364992"/>
+            <a:ext cx="1097280" cy="475488"/>
+          </a:xfrm>
+          <a:prstGeom prst="rect">
+            <a:avLst/>
+          </a:prstGeom>
+          <a:noFill/>
+          <a:ln/>
+        </p:spPr>
+        <p:txBody>
+          <a:bodyPr wrap="square" lIns="0" tIns="0" rIns="0" bIns="0" rtlCol="0" anchor="ctr"/>
+          <a:lstStyle/>
+          <a:p>
+            <a:pPr algn="ctr" indent="0" marL="0">
+              <a:buNone/>
+            </a:pPr>
+            <a:r>
+              <a:rPr lang="en-US" sz="1600" b="1" dirty="0">
+                <a:solidFill>
+                  <a:srgbClr val="0D9488"/>
+                </a:solidFill>
+                <a:latin typeface="Trebuchet MS" pitchFamily="34" charset="0"/>
+                <a:ea typeface="Trebuchet MS" pitchFamily="34" charset="-122"/>
+                <a:cs typeface="Trebuchet MS" pitchFamily="34" charset="-120"/>
+              </a:rPr>
+              <a:t>·</a:t>
+            </a:r>
+            <a:endParaRPr lang="en-US" sz="1600" dirty="0"/>
+          </a:p>
+        </p:txBody>
+      </p:sp>
+      <p:sp>
+        <p:nvSpPr>
+          <p:cNvPr id="28" name="Shape 26"/>
+          <p:cNvSpPr/>
+          <p:nvPr/>
+        </p:nvSpPr>
+        <p:spPr>
+          <a:xfrm>
+            <a:off x="5742432" y="3364992"/>
+            <a:ext cx="1645920" cy="475488"/>
+          </a:xfrm>
+          <a:prstGeom prst="rect">
+            <a:avLst>
+              <a:gd name="adj" fmla="val 9615"/>
+            </a:avLst>
+          </a:prstGeom>
+          <a:solidFill>
+            <a:srgbClr val="FFFFFF"/>
+          </a:solidFill>
+          <a:ln w="12700">
+            <a:solidFill>
+              <a:srgbClr val="0D9488"/>
+            </a:solidFill>
+            <a:prstDash val="solid"/>
+          </a:ln>
+        </p:spPr>
+      </p:sp>
+      <p:sp>
+        <p:nvSpPr>
+          <p:cNvPr id="29" name="Text 27"/>
+          <p:cNvSpPr/>
+          <p:nvPr/>
+        </p:nvSpPr>
+        <p:spPr>
+          <a:xfrm>
+            <a:off x="5742432" y="3364992"/>
+            <a:ext cx="1645920" cy="475488"/>
+          </a:xfrm>
+          <a:prstGeom prst="rect">
+            <a:avLst/>
+          </a:prstGeom>
+          <a:noFill/>
+          <a:ln/>
+        </p:spPr>
+        <p:txBody>
+          <a:bodyPr wrap="square" lIns="0" tIns="0" rIns="0" bIns="0" rtlCol="0" anchor="ctr"/>
+          <a:lstStyle/>
+          <a:p>
+            <a:pPr algn="ctr" indent="0" marL="0">
+              <a:buNone/>
+            </a:pPr>
+            <a:r>
+              <a:rPr lang="en-US" sz="1400" b="1" dirty="0">
+                <a:solidFill>
+                  <a:srgbClr val="0D9488"/>
+                </a:solidFill>
+                <a:latin typeface="Trebuchet MS" pitchFamily="34" charset="0"/>
+                <a:ea typeface="Trebuchet MS" pitchFamily="34" charset="-122"/>
+                <a:cs typeface="Trebuchet MS" pitchFamily="34" charset="-120"/>
+              </a:rPr>
+              <a:t>less</a:t>
+            </a:r>
+            <a:endParaRPr lang="en-US" sz="1400" dirty="0"/>
+          </a:p>
+        </p:txBody>
+      </p:sp>
+      <p:sp>
+        <p:nvSpPr>
+          <p:cNvPr id="30" name="Shape 28"/>
           <p:cNvSpPr/>
           <p:nvPr/>
         </p:nvSpPr>
@@ -14897,7 +15041,7 @@
       </p:sp>
       <p:sp>
         <p:nvSpPr>
-          <p:cNvPr id="28" name="Text 26"/>
+          <p:cNvPr id="31" name="Text 29"/>
           <p:cNvSpPr/>
           <p:nvPr/>
         </p:nvSpPr>
@@ -14936,7 +15080,7 @@
       </p:sp>
       <p:sp>
         <p:nvSpPr>
-          <p:cNvPr id="29" name="Shape 27"/>
+          <p:cNvPr id="32" name="Shape 30"/>
           <p:cNvSpPr/>
           <p:nvPr/>
         </p:nvSpPr>
@@ -14963,13 +15107,13 @@
       </p:sp>
       <p:sp>
         <p:nvSpPr>
-          <p:cNvPr id="30" name="Shape 28"/>
-          <p:cNvSpPr/>
-          <p:nvPr/>
-        </p:nvSpPr>
-        <p:spPr>
-          <a:xfrm>
-            <a:off x="2254649" y="4169664"/>
+          <p:cNvPr id="33" name="Shape 31"/>
+          <p:cNvSpPr/>
+          <p:nvPr/>
+        </p:nvSpPr>
+        <p:spPr>
+          <a:xfrm>
+            <a:off x="2124837" y="4169664"/>
             <a:ext cx="685800" cy="475488"/>
           </a:xfrm>
           <a:prstGeom prst="rect">
@@ -14990,13 +15134,13 @@
       </p:sp>
       <p:sp>
         <p:nvSpPr>
-          <p:cNvPr id="31" name="Text 29"/>
-          <p:cNvSpPr/>
-          <p:nvPr/>
-        </p:nvSpPr>
-        <p:spPr>
-          <a:xfrm>
-            <a:off x="2254649" y="4169664"/>
+          <p:cNvPr id="34" name="Text 32"/>
+          <p:cNvSpPr/>
+          <p:nvPr/>
+        </p:nvSpPr>
+        <p:spPr>
+          <a:xfrm>
+            <a:off x="2124837" y="4169664"/>
             <a:ext cx="685800" cy="475488"/>
           </a:xfrm>
           <a:prstGeom prst="rect">
@@ -15029,13 +15173,13 @@
       </p:sp>
       <p:sp>
         <p:nvSpPr>
-          <p:cNvPr id="32" name="Shape 30"/>
-          <p:cNvSpPr/>
-          <p:nvPr/>
-        </p:nvSpPr>
-        <p:spPr>
-          <a:xfrm>
-            <a:off x="3293146" y="4169664"/>
+          <p:cNvPr id="35" name="Shape 33"/>
+          <p:cNvSpPr/>
+          <p:nvPr/>
+        </p:nvSpPr>
+        <p:spPr>
+          <a:xfrm>
+            <a:off x="3033522" y="4169664"/>
             <a:ext cx="685800" cy="475488"/>
           </a:xfrm>
           <a:prstGeom prst="rect">
@@ -15056,13 +15200,13 @@
       </p:sp>
       <p:sp>
         <p:nvSpPr>
-          <p:cNvPr id="33" name="Text 31"/>
-          <p:cNvSpPr/>
-          <p:nvPr/>
-        </p:nvSpPr>
-        <p:spPr>
-          <a:xfrm>
-            <a:off x="3293146" y="4169664"/>
+          <p:cNvPr id="36" name="Text 34"/>
+          <p:cNvSpPr/>
+          <p:nvPr/>
+        </p:nvSpPr>
+        <p:spPr>
+          <a:xfrm>
+            <a:off x="3033522" y="4169664"/>
             <a:ext cx="685800" cy="475488"/>
           </a:xfrm>
           <a:prstGeom prst="rect">
@@ -15095,13 +15239,13 @@
       </p:sp>
       <p:sp>
         <p:nvSpPr>
-          <p:cNvPr id="34" name="Shape 32"/>
-          <p:cNvSpPr/>
-          <p:nvPr/>
-        </p:nvSpPr>
-        <p:spPr>
-          <a:xfrm>
-            <a:off x="4331643" y="4169664"/>
+          <p:cNvPr id="37" name="Shape 35"/>
+          <p:cNvSpPr/>
+          <p:nvPr/>
+        </p:nvSpPr>
+        <p:spPr>
+          <a:xfrm>
+            <a:off x="3942207" y="4169664"/>
             <a:ext cx="685800" cy="475488"/>
           </a:xfrm>
           <a:prstGeom prst="rect">
@@ -15122,13 +15266,13 @@
       </p:sp>
       <p:sp>
         <p:nvSpPr>
-          <p:cNvPr id="35" name="Text 33"/>
-          <p:cNvSpPr/>
-          <p:nvPr/>
-        </p:nvSpPr>
-        <p:spPr>
-          <a:xfrm>
-            <a:off x="4331643" y="4169664"/>
+          <p:cNvPr id="38" name="Text 36"/>
+          <p:cNvSpPr/>
+          <p:nvPr/>
+        </p:nvSpPr>
+        <p:spPr>
+          <a:xfrm>
+            <a:off x="3942207" y="4169664"/>
             <a:ext cx="685800" cy="475488"/>
           </a:xfrm>
           <a:prstGeom prst="rect">
@@ -15161,13 +15305,13 @@
       </p:sp>
       <p:sp>
         <p:nvSpPr>
-          <p:cNvPr id="36" name="Shape 34"/>
-          <p:cNvSpPr/>
-          <p:nvPr/>
-        </p:nvSpPr>
-        <p:spPr>
-          <a:xfrm>
-            <a:off x="5370141" y="4169664"/>
+          <p:cNvPr id="39" name="Shape 37"/>
+          <p:cNvSpPr/>
+          <p:nvPr/>
+        </p:nvSpPr>
+        <p:spPr>
+          <a:xfrm>
+            <a:off x="4850892" y="4169664"/>
             <a:ext cx="685800" cy="475488"/>
           </a:xfrm>
           <a:prstGeom prst="rect">
@@ -15188,13 +15332,13 @@
       </p:sp>
       <p:sp>
         <p:nvSpPr>
-          <p:cNvPr id="37" name="Text 35"/>
-          <p:cNvSpPr/>
-          <p:nvPr/>
-        </p:nvSpPr>
-        <p:spPr>
-          <a:xfrm>
-            <a:off x="5370141" y="4169664"/>
+          <p:cNvPr id="40" name="Text 38"/>
+          <p:cNvSpPr/>
+          <p:nvPr/>
+        </p:nvSpPr>
+        <p:spPr>
+          <a:xfrm>
+            <a:off x="4850892" y="4169664"/>
             <a:ext cx="685800" cy="475488"/>
           </a:xfrm>
           <a:prstGeom prst="rect">
@@ -15227,13 +15371,13 @@
       </p:sp>
       <p:sp>
         <p:nvSpPr>
-          <p:cNvPr id="38" name="Shape 36"/>
-          <p:cNvSpPr/>
-          <p:nvPr/>
-        </p:nvSpPr>
-        <p:spPr>
-          <a:xfrm>
-            <a:off x="6408638" y="4169664"/>
+          <p:cNvPr id="41" name="Shape 39"/>
+          <p:cNvSpPr/>
+          <p:nvPr/>
+        </p:nvSpPr>
+        <p:spPr>
+          <a:xfrm>
+            <a:off x="5759577" y="4169664"/>
             <a:ext cx="685800" cy="475488"/>
           </a:xfrm>
           <a:prstGeom prst="rect">
@@ -15254,13 +15398,13 @@
       </p:sp>
       <p:sp>
         <p:nvSpPr>
-          <p:cNvPr id="39" name="Text 37"/>
-          <p:cNvSpPr/>
-          <p:nvPr/>
-        </p:nvSpPr>
-        <p:spPr>
-          <a:xfrm>
-            <a:off x="6408638" y="4169664"/>
+          <p:cNvPr id="42" name="Text 40"/>
+          <p:cNvSpPr/>
+          <p:nvPr/>
+        </p:nvSpPr>
+        <p:spPr>
+          <a:xfrm>
+            <a:off x="5759577" y="4169664"/>
             <a:ext cx="685800" cy="475488"/>
           </a:xfrm>
           <a:prstGeom prst="rect">
@@ -15285,7 +15429,7 @@
                 <a:ea typeface="Trebuchet MS" pitchFamily="34" charset="-122"/>
                 <a:cs typeface="Trebuchet MS" pitchFamily="34" charset="-120"/>
               </a:rPr>
-              <a:t>e</a:t>
+              <a:t>l</a:t>
             </a:r>
             <a:endParaRPr lang="en-US" sz="900" dirty="0"/>
           </a:p>
@@ -15293,13 +15437,13 @@
       </p:sp>
       <p:sp>
         <p:nvSpPr>
-          <p:cNvPr id="40" name="Shape 38"/>
-          <p:cNvSpPr/>
-          <p:nvPr/>
-        </p:nvSpPr>
-        <p:spPr>
-          <a:xfrm>
-            <a:off x="7447135" y="4169664"/>
+          <p:cNvPr id="43" name="Shape 41"/>
+          <p:cNvSpPr/>
+          <p:nvPr/>
+        </p:nvSpPr>
+        <p:spPr>
+          <a:xfrm>
+            <a:off x="6668262" y="4169664"/>
             <a:ext cx="685800" cy="475488"/>
           </a:xfrm>
           <a:prstGeom prst="rect">
@@ -15320,13 +15464,13 @@
       </p:sp>
       <p:sp>
         <p:nvSpPr>
-          <p:cNvPr id="41" name="Text 39"/>
-          <p:cNvSpPr/>
-          <p:nvPr/>
-        </p:nvSpPr>
-        <p:spPr>
-          <a:xfrm>
-            <a:off x="7447135" y="4169664"/>
+          <p:cNvPr id="44" name="Text 42"/>
+          <p:cNvSpPr/>
+          <p:nvPr/>
+        </p:nvSpPr>
+        <p:spPr>
+          <a:xfrm>
+            <a:off x="6668262" y="4169664"/>
             <a:ext cx="685800" cy="475488"/>
           </a:xfrm>
           <a:prstGeom prst="rect">
@@ -15351,7 +15495,73 @@
                 <a:ea typeface="Trebuchet MS" pitchFamily="34" charset="-122"/>
                 <a:cs typeface="Trebuchet MS" pitchFamily="34" charset="-120"/>
               </a:rPr>
-              <a:t>d</a:t>
+              <a:t>e</a:t>
+            </a:r>
+            <a:endParaRPr lang="en-US" sz="900" dirty="0"/>
+          </a:p>
+        </p:txBody>
+      </p:sp>
+      <p:sp>
+        <p:nvSpPr>
+          <p:cNvPr id="45" name="Shape 43"/>
+          <p:cNvSpPr/>
+          <p:nvPr/>
+        </p:nvSpPr>
+        <p:spPr>
+          <a:xfrm>
+            <a:off x="7576947" y="4169664"/>
+            <a:ext cx="685800" cy="475488"/>
+          </a:xfrm>
+          <a:prstGeom prst="rect">
+            <a:avLst>
+              <a:gd name="adj" fmla="val 7692"/>
+            </a:avLst>
+          </a:prstGeom>
+          <a:solidFill>
+            <a:srgbClr val="FFFFFF"/>
+          </a:solidFill>
+          <a:ln w="12700">
+            <a:solidFill>
+              <a:srgbClr val="DB2777"/>
+            </a:solidFill>
+            <a:prstDash val="solid"/>
+          </a:ln>
+        </p:spPr>
+      </p:sp>
+      <p:sp>
+        <p:nvSpPr>
+          <p:cNvPr id="46" name="Text 44"/>
+          <p:cNvSpPr/>
+          <p:nvPr/>
+        </p:nvSpPr>
+        <p:spPr>
+          <a:xfrm>
+            <a:off x="7576947" y="4169664"/>
+            <a:ext cx="685800" cy="475488"/>
+          </a:xfrm>
+          <a:prstGeom prst="rect">
+            <a:avLst/>
+          </a:prstGeom>
+          <a:noFill/>
+          <a:ln/>
+        </p:spPr>
+        <p:txBody>
+          <a:bodyPr wrap="square" lIns="0" tIns="0" rIns="0" bIns="0" rtlCol="0" anchor="ctr"/>
+          <a:lstStyle/>
+          <a:p>
+            <a:pPr algn="ctr" indent="0" marL="0">
+              <a:buNone/>
+            </a:pPr>
+            <a:r>
+              <a:rPr lang="en-US" sz="900" b="1" dirty="0">
+                <a:solidFill>
+                  <a:srgbClr val="9D174D"/>
+                </a:solidFill>
+                <a:latin typeface="Trebuchet MS" pitchFamily="34" charset="0"/>
+                <a:ea typeface="Trebuchet MS" pitchFamily="34" charset="-122"/>
+                <a:cs typeface="Trebuchet MS" pitchFamily="34" charset="-120"/>
+              </a:rPr>
+              <a:t>ss</a:t>
             </a:r>
             <a:endParaRPr lang="en-US" sz="900" dirty="0"/>
           </a:p>
@@ -15925,7 +16135,7 @@
                 <a:ea typeface="Calibri" pitchFamily="34" charset="-122"/>
                 <a:cs typeface="Calibri" pitchFamily="34" charset="-120"/>
               </a:rPr>
-              <a:t>Word Labs  •  wordlabs.app  •  Root: 'thank' = express gratitude or praise</a:t>
+              <a:t>Word Labs  •  wordlabs.app  •  Root: 'thank' = to show you are grateful</a:t>
             </a:r>
             <a:endParaRPr lang="en-US" sz="800" dirty="0"/>
           </a:p>
@@ -16259,7 +16469,7 @@
                 <a:ea typeface="Trebuchet MS" pitchFamily="34" charset="-122"/>
                 <a:cs typeface="Trebuchet MS" pitchFamily="34" charset="-120"/>
               </a:rPr>
-              <a:t>2</a:t>
+              <a:t>1</a:t>
             </a:r>
             <a:pPr algn="ctr" indent="0" marL="0">
               <a:buNone/>
@@ -16273,7 +16483,7 @@
                 <a:ea typeface="Trebuchet MS" pitchFamily="34" charset="-122"/>
                 <a:cs typeface="Trebuchet MS" pitchFamily="34" charset="-120"/>
               </a:rPr>
-              <a:t>  punctuation marks</a:t>
+              <a:t>  punctuation mark</a:t>
             </a:r>
             <a:endParaRPr lang="en-US" sz="2800" dirty="0"/>
           </a:p>
@@ -16565,7 +16775,7 @@
                 <a:ea typeface="Calibri" pitchFamily="34" charset="-122"/>
                 <a:cs typeface="Calibri" pitchFamily="34" charset="-120"/>
               </a:rPr>
-              <a:t>Word Labs  •  wordlabs.app  •  Root: 'thank' = express gratitude or praise</a:t>
+              <a:t>Word Labs  •  wordlabs.app  •  Root: 'thank' = to show you are grateful</a:t>
             </a:r>
             <a:endParaRPr lang="en-US" sz="800" dirty="0"/>
           </a:p>
@@ -16694,7 +16904,7 @@
                 <a:ea typeface="Calibri" pitchFamily="34" charset="-122"/>
                 <a:cs typeface="Calibri" pitchFamily="34" charset="-120"/>
               </a:rPr>
-              <a:t>, she showed great </a:t>
+              <a:t>, the rain stopped just before the match started. She </a:t>
             </a:r>
             <a:pPr algn="l" indent="0" marL="0">
               <a:buNone/>
@@ -16711,7 +16921,7 @@
                 <a:ea typeface="Calibri" pitchFamily="34" charset="-122"/>
                 <a:cs typeface="Calibri" pitchFamily="34" charset="-120"/>
               </a:rPr>
-              <a:t>thankfulness</a:t>
+              <a:t>thanklessly</a:t>
             </a:r>
             <a:pPr algn="l" indent="0" marL="0">
               <a:buNone/>
@@ -16725,7 +16935,7 @@
                 <a:ea typeface="Calibri" pitchFamily="34" charset="-122"/>
                 <a:cs typeface="Calibri" pitchFamily="34" charset="-120"/>
               </a:rPr>
-              <a:t>, and her </a:t>
+              <a:t> cleaned the entire classroom every day after school. She wrote a letter expressing her </a:t>
             </a:r>
             <a:pPr algn="l" indent="0" marL="0">
               <a:buNone/>
@@ -16742,7 +16952,7 @@
                 <a:ea typeface="Calibri" pitchFamily="34" charset="-122"/>
                 <a:cs typeface="Calibri" pitchFamily="34" charset="-120"/>
               </a:rPr>
-              <a:t>thanks</a:t>
+              <a:t>thankfulness</a:t>
             </a:r>
             <a:pPr algn="l" indent="0" marL="0">
               <a:buNone/>
@@ -16756,7 +16966,7 @@
                 <a:ea typeface="Calibri" pitchFamily="34" charset="-122"/>
                 <a:cs typeface="Calibri" pitchFamily="34" charset="-120"/>
               </a:rPr>
-              <a:t> made everyone smile.</a:t>
+              <a:t> for their support.</a:t>
             </a:r>
             <a:endParaRPr lang="en-US" sz="1800" dirty="0"/>
           </a:p>
@@ -17039,7 +17249,7 @@
                 <a:ea typeface="Trebuchet MS" pitchFamily="34" charset="-122"/>
                 <a:cs typeface="Trebuchet MS" pitchFamily="34" charset="-120"/>
               </a:rPr>
-              <a:t>thankfulness</a:t>
+              <a:t>thanklessly</a:t>
             </a:r>
             <a:endParaRPr lang="en-US" sz="1400" dirty="0"/>
           </a:p>
@@ -17167,7 +17377,7 @@
                 <a:ea typeface="Trebuchet MS" pitchFamily="34" charset="-122"/>
                 <a:cs typeface="Trebuchet MS" pitchFamily="34" charset="-120"/>
               </a:rPr>
-              <a:t>thanks</a:t>
+              <a:t>thankfulness</a:t>
             </a:r>
             <a:endParaRPr lang="en-US" sz="1400" dirty="0"/>
           </a:p>
@@ -17498,7 +17708,7 @@
                 <a:ea typeface="Calibri" pitchFamily="34" charset="-122"/>
                 <a:cs typeface="Calibri" pitchFamily="34" charset="-120"/>
               </a:rPr>
-              <a:t>Word Labs  •  wordlabs.app  •  Root: 'thank' = express gratitude or praise</a:t>
+              <a:t>Word Labs  •  wordlabs.app  •  Root: 'thank' = to show you are grateful</a:t>
             </a:r>
             <a:endParaRPr lang="en-US" sz="800" dirty="0"/>
           </a:p>
@@ -18325,7 +18535,7 @@
                 <a:ea typeface="Calibri" pitchFamily="34" charset="-122"/>
                 <a:cs typeface="Calibri" pitchFamily="34" charset="-120"/>
               </a:rPr>
-              <a:t>Word Labs  •  wordlabs.app  •  Root: 'thank' = express gratitude or praise</a:t>
+              <a:t>Word Labs  •  wordlabs.app  •  Root: 'thank' = to show you are grateful</a:t>
             </a:r>
             <a:endParaRPr lang="en-US" sz="800" dirty="0"/>
           </a:p>
@@ -18642,7 +18852,7 @@
                 <a:ea typeface="Calibri" pitchFamily="34" charset="-122"/>
                 <a:cs typeface="Calibri" pitchFamily="34" charset="-120"/>
               </a:rPr>
-              <a:t>to express gratitude</a:t>
+              <a:t>to show you are grateful</a:t>
             </a:r>
             <a:endParaRPr lang="en-US" sz="850" dirty="0"/>
           </a:p>
@@ -18754,7 +18964,7 @@
                 <a:ea typeface="Calibri" pitchFamily="34" charset="-122"/>
                 <a:cs typeface="Calibri" pitchFamily="34" charset="-120"/>
               </a:rPr>
-              <a:t>full of; having the quality of</a:t>
+              <a:t>full of</a:t>
             </a:r>
             <a:endParaRPr lang="en-US" sz="850" dirty="0"/>
           </a:p>
@@ -18866,7 +19076,7 @@
                 <a:ea typeface="Calibri" pitchFamily="34" charset="-122"/>
                 <a:cs typeface="Calibri" pitchFamily="34" charset="-120"/>
               </a:rPr>
-              <a:t>in a certain way; forms an adverb</a:t>
+              <a:t>in a way</a:t>
             </a:r>
             <a:endParaRPr lang="en-US" sz="850" dirty="0"/>
           </a:p>
@@ -19422,7 +19632,7 @@
                 <a:ea typeface="Calibri" pitchFamily="34" charset="-122"/>
                 <a:cs typeface="Calibri" pitchFamily="34" charset="-120"/>
               </a:rPr>
-              <a:t>Word Labs  •  wordlabs.app  •  Root: 'thank' = express gratitude or praise</a:t>
+              <a:t>Word Labs  •  wordlabs.app  •  Root: 'thank' = to show you are grateful</a:t>
             </a:r>
             <a:endParaRPr lang="en-US" sz="800" dirty="0"/>
           </a:p>
@@ -19739,7 +19949,7 @@
                 <a:ea typeface="Calibri" pitchFamily="34" charset="-122"/>
                 <a:cs typeface="Calibri" pitchFamily="34" charset="-120"/>
               </a:rPr>
-              <a:t>to express gratitude</a:t>
+              <a:t>to show you are grateful</a:t>
             </a:r>
             <a:endParaRPr lang="en-US" sz="850" dirty="0"/>
           </a:p>
@@ -19851,7 +20061,7 @@
                 <a:ea typeface="Calibri" pitchFamily="34" charset="-122"/>
                 <a:cs typeface="Calibri" pitchFamily="34" charset="-120"/>
               </a:rPr>
-              <a:t>full of; having the quality of</a:t>
+              <a:t>full of</a:t>
             </a:r>
             <a:endParaRPr lang="en-US" sz="850" dirty="0"/>
           </a:p>
@@ -19963,7 +20173,7 @@
                 <a:ea typeface="Calibri" pitchFamily="34" charset="-122"/>
                 <a:cs typeface="Calibri" pitchFamily="34" charset="-120"/>
               </a:rPr>
-              <a:t>in a certain way; forms an adverb</a:t>
+              <a:t>in a way</a:t>
             </a:r>
             <a:endParaRPr lang="en-US" sz="850" dirty="0"/>
           </a:p>
@@ -20756,7 +20966,7 @@
                 <a:ea typeface="Calibri" pitchFamily="34" charset="-122"/>
                 <a:cs typeface="Calibri" pitchFamily="34" charset="-120"/>
               </a:rPr>
-              <a:t>Word Labs  •  wordlabs.app  •  Root: 'thank' = express gratitude or praise</a:t>
+              <a:t>Word Labs  •  wordlabs.app  •  Root: 'thank' = to show you are grateful</a:t>
             </a:r>
             <a:endParaRPr lang="en-US" sz="800" dirty="0"/>
           </a:p>
@@ -21073,7 +21283,7 @@
                 <a:ea typeface="Calibri" pitchFamily="34" charset="-122"/>
                 <a:cs typeface="Calibri" pitchFamily="34" charset="-120"/>
               </a:rPr>
-              <a:t>to express gratitude</a:t>
+              <a:t>to show you are grateful</a:t>
             </a:r>
             <a:endParaRPr lang="en-US" sz="850" dirty="0"/>
           </a:p>
@@ -21185,7 +21395,7 @@
                 <a:ea typeface="Calibri" pitchFamily="34" charset="-122"/>
                 <a:cs typeface="Calibri" pitchFamily="34" charset="-120"/>
               </a:rPr>
-              <a:t>full of; having the quality of</a:t>
+              <a:t>full of</a:t>
             </a:r>
             <a:endParaRPr lang="en-US" sz="850" dirty="0"/>
           </a:p>
@@ -21297,7 +21507,7 @@
                 <a:ea typeface="Calibri" pitchFamily="34" charset="-122"/>
                 <a:cs typeface="Calibri" pitchFamily="34" charset="-120"/>
               </a:rPr>
-              <a:t>in a certain way; forms an adverb</a:t>
+              <a:t>in a way</a:t>
             </a:r>
             <a:endParaRPr lang="en-US" sz="850" dirty="0"/>
           </a:p>
@@ -21773,8 +21983,8 @@
         </p:nvSpPr>
         <p:spPr>
           <a:xfrm>
-            <a:off x="1951330" y="4169664"/>
-            <a:ext cx="676656" cy="475488"/>
+            <a:off x="2023872" y="4169664"/>
+            <a:ext cx="685800" cy="475488"/>
           </a:xfrm>
           <a:prstGeom prst="rect">
             <a:avLst>
@@ -21800,8 +22010,8 @@
         </p:nvSpPr>
         <p:spPr>
           <a:xfrm>
-            <a:off x="1951330" y="4169664"/>
-            <a:ext cx="676656" cy="475488"/>
+            <a:off x="2023872" y="4169664"/>
+            <a:ext cx="685800" cy="475488"/>
           </a:xfrm>
           <a:prstGeom prst="rect">
             <a:avLst/>
@@ -21839,8 +22049,8 @@
         </p:nvSpPr>
         <p:spPr>
           <a:xfrm>
-            <a:off x="2677363" y="4169664"/>
-            <a:ext cx="676656" cy="475488"/>
+            <a:off x="2831592" y="4169664"/>
+            <a:ext cx="685800" cy="475488"/>
           </a:xfrm>
           <a:prstGeom prst="rect">
             <a:avLst>
@@ -21866,8 +22076,8 @@
         </p:nvSpPr>
         <p:spPr>
           <a:xfrm>
-            <a:off x="2677363" y="4169664"/>
-            <a:ext cx="676656" cy="475488"/>
+            <a:off x="2831592" y="4169664"/>
+            <a:ext cx="685800" cy="475488"/>
           </a:xfrm>
           <a:prstGeom prst="rect">
             <a:avLst/>
@@ -21905,8 +22115,8 @@
         </p:nvSpPr>
         <p:spPr>
           <a:xfrm>
-            <a:off x="3403397" y="4169664"/>
-            <a:ext cx="676656" cy="475488"/>
+            <a:off x="3639312" y="4169664"/>
+            <a:ext cx="685800" cy="475488"/>
           </a:xfrm>
           <a:prstGeom prst="rect">
             <a:avLst>
@@ -21932,8 +22142,8 @@
         </p:nvSpPr>
         <p:spPr>
           <a:xfrm>
-            <a:off x="3403397" y="4169664"/>
-            <a:ext cx="676656" cy="475488"/>
+            <a:off x="3639312" y="4169664"/>
+            <a:ext cx="685800" cy="475488"/>
           </a:xfrm>
           <a:prstGeom prst="rect">
             <a:avLst/>
@@ -21971,8 +22181,8 @@
         </p:nvSpPr>
         <p:spPr>
           <a:xfrm>
-            <a:off x="4129430" y="4169664"/>
-            <a:ext cx="676656" cy="475488"/>
+            <a:off x="4447032" y="4169664"/>
+            <a:ext cx="685800" cy="475488"/>
           </a:xfrm>
           <a:prstGeom prst="rect">
             <a:avLst>
@@ -21998,8 +22208,8 @@
         </p:nvSpPr>
         <p:spPr>
           <a:xfrm>
-            <a:off x="4129430" y="4169664"/>
-            <a:ext cx="676656" cy="475488"/>
+            <a:off x="4447032" y="4169664"/>
+            <a:ext cx="685800" cy="475488"/>
           </a:xfrm>
           <a:prstGeom prst="rect">
             <a:avLst/>
@@ -22037,8 +22247,8 @@
         </p:nvSpPr>
         <p:spPr>
           <a:xfrm>
-            <a:off x="4855464" y="4169664"/>
-            <a:ext cx="676656" cy="475488"/>
+            <a:off x="5254752" y="4169664"/>
+            <a:ext cx="685800" cy="475488"/>
           </a:xfrm>
           <a:prstGeom prst="rect">
             <a:avLst>
@@ -22064,8 +22274,8 @@
         </p:nvSpPr>
         <p:spPr>
           <a:xfrm>
-            <a:off x="4855464" y="4169664"/>
-            <a:ext cx="676656" cy="475488"/>
+            <a:off x="5254752" y="4169664"/>
+            <a:ext cx="685800" cy="475488"/>
           </a:xfrm>
           <a:prstGeom prst="rect">
             <a:avLst/>
@@ -22103,8 +22313,8 @@
         </p:nvSpPr>
         <p:spPr>
           <a:xfrm>
-            <a:off x="5581498" y="4169664"/>
-            <a:ext cx="676656" cy="475488"/>
+            <a:off x="6062472" y="4169664"/>
+            <a:ext cx="685800" cy="475488"/>
           </a:xfrm>
           <a:prstGeom prst="rect">
             <a:avLst>
@@ -22130,8 +22340,8 @@
         </p:nvSpPr>
         <p:spPr>
           <a:xfrm>
-            <a:off x="5581498" y="4169664"/>
-            <a:ext cx="676656" cy="475488"/>
+            <a:off x="6062472" y="4169664"/>
+            <a:ext cx="685800" cy="475488"/>
           </a:xfrm>
           <a:prstGeom prst="rect">
             <a:avLst/>
@@ -22169,8 +22379,8 @@
         </p:nvSpPr>
         <p:spPr>
           <a:xfrm>
-            <a:off x="6307531" y="4169664"/>
-            <a:ext cx="676656" cy="475488"/>
+            <a:off x="6870192" y="4169664"/>
+            <a:ext cx="685800" cy="475488"/>
           </a:xfrm>
           <a:prstGeom prst="rect">
             <a:avLst>
@@ -22196,8 +22406,8 @@
         </p:nvSpPr>
         <p:spPr>
           <a:xfrm>
-            <a:off x="6307531" y="4169664"/>
-            <a:ext cx="676656" cy="475488"/>
+            <a:off x="6870192" y="4169664"/>
+            <a:ext cx="685800" cy="475488"/>
           </a:xfrm>
           <a:prstGeom prst="rect">
             <a:avLst/>
@@ -22221,7 +22431,7 @@
                 <a:ea typeface="Trebuchet MS" pitchFamily="34" charset="-122"/>
                 <a:cs typeface="Trebuchet MS" pitchFamily="34" charset="-120"/>
               </a:rPr>
-              <a:t>l</a:t>
+              <a:t>ll</a:t>
             </a:r>
             <a:endParaRPr lang="en-US" sz="900" dirty="0"/>
           </a:p>
@@ -22235,8 +22445,8 @@
         </p:nvSpPr>
         <p:spPr>
           <a:xfrm>
-            <a:off x="7033565" y="4169664"/>
-            <a:ext cx="676656" cy="475488"/>
+            <a:off x="7677912" y="4169664"/>
+            <a:ext cx="685800" cy="475488"/>
           </a:xfrm>
           <a:prstGeom prst="rect">
             <a:avLst>
@@ -22262,74 +22472,8 @@
         </p:nvSpPr>
         <p:spPr>
           <a:xfrm>
-            <a:off x="7033565" y="4169664"/>
-            <a:ext cx="676656" cy="475488"/>
-          </a:xfrm>
-          <a:prstGeom prst="rect">
-            <a:avLst/>
-          </a:prstGeom>
-          <a:noFill/>
-          <a:ln/>
-        </p:spPr>
-        <p:txBody>
-          <a:bodyPr wrap="square" lIns="0" tIns="0" rIns="0" bIns="0" rtlCol="0" anchor="ctr"/>
-          <a:lstStyle/>
-          <a:p>
-            <a:pPr algn="ctr" indent="0" marL="0">
-              <a:buNone/>
-            </a:pPr>
-            <a:r>
-              <a:rPr lang="en-US" sz="900" b="1" dirty="0">
-                <a:solidFill>
-                  <a:srgbClr val="9D174D"/>
-                </a:solidFill>
-                <a:latin typeface="Trebuchet MS" pitchFamily="34" charset="0"/>
-                <a:ea typeface="Trebuchet MS" pitchFamily="34" charset="-122"/>
-                <a:cs typeface="Trebuchet MS" pitchFamily="34" charset="-120"/>
-              </a:rPr>
-              <a:t>l</a:t>
-            </a:r>
-            <a:endParaRPr lang="en-US" sz="900" dirty="0"/>
-          </a:p>
-        </p:txBody>
-      </p:sp>
-      <p:sp>
-        <p:nvSpPr>
-          <p:cNvPr id="55" name="Shape 53"/>
-          <p:cNvSpPr/>
-          <p:nvPr/>
-        </p:nvSpPr>
-        <p:spPr>
-          <a:xfrm>
-            <a:off x="7759598" y="4169664"/>
-            <a:ext cx="676656" cy="475488"/>
-          </a:xfrm>
-          <a:prstGeom prst="rect">
-            <a:avLst>
-              <a:gd name="adj" fmla="val 7692"/>
-            </a:avLst>
-          </a:prstGeom>
-          <a:solidFill>
-            <a:srgbClr val="FFFFFF"/>
-          </a:solidFill>
-          <a:ln w="12700">
-            <a:solidFill>
-              <a:srgbClr val="DB2777"/>
-            </a:solidFill>
-            <a:prstDash val="solid"/>
-          </a:ln>
-        </p:spPr>
-      </p:sp>
-      <p:sp>
-        <p:nvSpPr>
-          <p:cNvPr id="56" name="Text 54"/>
-          <p:cNvSpPr/>
-          <p:nvPr/>
-        </p:nvSpPr>
-        <p:spPr>
-          <a:xfrm>
-            <a:off x="7759598" y="4169664"/>
-            <a:ext cx="676656" cy="475488"/>
+            <a:off x="7677912" y="4169664"/>
+            <a:ext cx="685800" cy="475488"/>
           </a:xfrm>
           <a:prstGeom prst="rect">
             <a:avLst/>
@@ -22645,7 +22789,7 @@
                 <a:ea typeface="Calibri" pitchFamily="34" charset="-122"/>
                 <a:cs typeface="Calibri" pitchFamily="34" charset="-120"/>
               </a:rPr>
-              <a:t>Word Labs  •  wordlabs.app  •  Root: 'thank' = express gratitude or praise</a:t>
+              <a:t>Word Labs  •  wordlabs.app  •  Root: 'thank' = to show you are grateful</a:t>
             </a:r>
             <a:endParaRPr lang="en-US" sz="800" dirty="0"/>
           </a:p>
@@ -22784,7 +22928,7 @@
                 <a:ea typeface="Trebuchet MS" pitchFamily="34" charset="-122"/>
                 <a:cs typeface="Trebuchet MS" pitchFamily="34" charset="-120"/>
               </a:rPr>
-              <a:t>thankfulness</a:t>
+              <a:t>thanklessly</a:t>
             </a:r>
             <a:endParaRPr lang="en-US" sz="2800" dirty="0"/>
           </a:p>
@@ -23472,7 +23616,7 @@
                 <a:ea typeface="Calibri" pitchFamily="34" charset="-122"/>
                 <a:cs typeface="Calibri" pitchFamily="34" charset="-120"/>
               </a:rPr>
-              <a:t>Word Labs  •  wordlabs.app  •  Root: 'thank' = express gratitude or praise</a:t>
+              <a:t>Word Labs  •  wordlabs.app  •  Root: 'thank' = to show you are grateful</a:t>
             </a:r>
             <a:endParaRPr lang="en-US" sz="800" dirty="0"/>
           </a:p>
@@ -23611,7 +23755,7 @@
                 <a:ea typeface="Trebuchet MS" pitchFamily="34" charset="-122"/>
                 <a:cs typeface="Trebuchet MS" pitchFamily="34" charset="-120"/>
               </a:rPr>
-              <a:t>thankfulness</a:t>
+              <a:t>thanklessly</a:t>
             </a:r>
             <a:endParaRPr lang="en-US" sz="2800" dirty="0"/>
           </a:p>
@@ -23789,7 +23933,7 @@
                 <a:ea typeface="Calibri" pitchFamily="34" charset="-122"/>
                 <a:cs typeface="Calibri" pitchFamily="34" charset="-120"/>
               </a:rPr>
-              <a:t>to express gratitude</a:t>
+              <a:t>to show you are grateful</a:t>
             </a:r>
             <a:endParaRPr lang="en-US" sz="850" dirty="0"/>
           </a:p>
@@ -23812,11 +23956,11 @@
             </a:avLst>
           </a:prstGeom>
           <a:solidFill>
-            <a:srgbClr val="FCE7F3"/>
+            <a:srgbClr val="DDD6FE"/>
           </a:solidFill>
           <a:ln w="19050">
             <a:solidFill>
-              <a:srgbClr val="DB2777"/>
+              <a:srgbClr val="7C3AED"/>
             </a:solidFill>
             <a:prstDash val="solid"/>
           </a:ln>
@@ -23856,13 +24000,13 @@
             <a:r>
               <a:rPr lang="en-US" sz="1300" b="1" dirty="0">
                 <a:solidFill>
-                  <a:srgbClr val="9D174D"/>
+                  <a:srgbClr val="4C1D95"/>
                 </a:solidFill>
                 <a:latin typeface="Trebuchet MS" pitchFamily="34" charset="0"/>
                 <a:ea typeface="Trebuchet MS" pitchFamily="34" charset="-122"/>
                 <a:cs typeface="Trebuchet MS" pitchFamily="34" charset="-120"/>
               </a:rPr>
-              <a:t>ful</a:t>
+              <a:t>less</a:t>
             </a:r>
             <a:endParaRPr lang="en-US" sz="1300" dirty="0"/>
           </a:p>
@@ -23901,7 +24045,7 @@
                 <a:ea typeface="Calibri" pitchFamily="34" charset="-122"/>
                 <a:cs typeface="Calibri" pitchFamily="34" charset="-120"/>
               </a:rPr>
-              <a:t>full of; having the quality of</a:t>
+              <a:t>without</a:t>
             </a:r>
             <a:endParaRPr lang="en-US" sz="850" dirty="0"/>
           </a:p>
@@ -23974,7 +24118,7 @@
                 <a:ea typeface="Trebuchet MS" pitchFamily="34" charset="-122"/>
                 <a:cs typeface="Trebuchet MS" pitchFamily="34" charset="-120"/>
               </a:rPr>
-              <a:t>ness</a:t>
+              <a:t>ly</a:t>
             </a:r>
             <a:endParaRPr lang="en-US" sz="1300" dirty="0"/>
           </a:p>
@@ -24013,7 +24157,7 @@
                 <a:ea typeface="Calibri" pitchFamily="34" charset="-122"/>
                 <a:cs typeface="Calibri" pitchFamily="34" charset="-120"/>
               </a:rPr>
-              <a:t>the state or quality of being</a:t>
+              <a:t>in a way</a:t>
             </a:r>
             <a:endParaRPr lang="en-US" sz="850" dirty="0"/>
           </a:p>
@@ -24569,7 +24713,7 @@
                 <a:ea typeface="Calibri" pitchFamily="34" charset="-122"/>
                 <a:cs typeface="Calibri" pitchFamily="34" charset="-120"/>
               </a:rPr>
-              <a:t>Word Labs  •  wordlabs.app  •  Root: 'thank' = express gratitude or praise</a:t>
+              <a:t>Word Labs  •  wordlabs.app  •  Root: 'thank' = to show you are grateful</a:t>
             </a:r>
             <a:endParaRPr lang="en-US" sz="800" dirty="0"/>
           </a:p>
@@ -24642,7 +24786,7 @@
                 <a:ea typeface="Trebuchet MS" pitchFamily="34" charset="-122"/>
                 <a:cs typeface="Trebuchet MS" pitchFamily="34" charset="-120"/>
               </a:rPr>
-              <a:t>We are learning that the root 'thank' means 'express gratitude or praise'.</a:t>
+              <a:t>We are learning that the root 'thank' means 'to show you are grateful'.</a:t>
             </a:r>
             <a:endParaRPr lang="en-US" sz="2000" dirty="0"/>
           </a:p>
@@ -25288,7 +25432,7 @@
                 <a:ea typeface="Calibri" pitchFamily="34" charset="-122"/>
                 <a:cs typeface="Calibri" pitchFamily="34" charset="-120"/>
               </a:rPr>
-              <a:t>Word Labs  •  wordlabs.app  •  Root: 'thank' = express gratitude or praise</a:t>
+              <a:t>Word Labs  •  wordlabs.app  •  Root: 'thank' = to show you are grateful</a:t>
             </a:r>
             <a:endParaRPr lang="en-US" sz="800" dirty="0"/>
           </a:p>
@@ -25427,7 +25571,7 @@
                 <a:ea typeface="Trebuchet MS" pitchFamily="34" charset="-122"/>
                 <a:cs typeface="Trebuchet MS" pitchFamily="34" charset="-120"/>
               </a:rPr>
-              <a:t>thankfulness</a:t>
+              <a:t>thanklessly</a:t>
             </a:r>
             <a:endParaRPr lang="en-US" sz="2800" dirty="0"/>
           </a:p>
@@ -25605,7 +25749,7 @@
                 <a:ea typeface="Calibri" pitchFamily="34" charset="-122"/>
                 <a:cs typeface="Calibri" pitchFamily="34" charset="-120"/>
               </a:rPr>
-              <a:t>to express gratitude</a:t>
+              <a:t>to show you are grateful</a:t>
             </a:r>
             <a:endParaRPr lang="en-US" sz="850" dirty="0"/>
           </a:p>
@@ -25628,11 +25772,11 @@
             </a:avLst>
           </a:prstGeom>
           <a:solidFill>
-            <a:srgbClr val="FCE7F3"/>
+            <a:srgbClr val="DDD6FE"/>
           </a:solidFill>
           <a:ln w="19050">
             <a:solidFill>
-              <a:srgbClr val="DB2777"/>
+              <a:srgbClr val="7C3AED"/>
             </a:solidFill>
             <a:prstDash val="solid"/>
           </a:ln>
@@ -25672,13 +25816,13 @@
             <a:r>
               <a:rPr lang="en-US" sz="1300" b="1" dirty="0">
                 <a:solidFill>
-                  <a:srgbClr val="9D174D"/>
+                  <a:srgbClr val="4C1D95"/>
                 </a:solidFill>
                 <a:latin typeface="Trebuchet MS" pitchFamily="34" charset="0"/>
                 <a:ea typeface="Trebuchet MS" pitchFamily="34" charset="-122"/>
                 <a:cs typeface="Trebuchet MS" pitchFamily="34" charset="-120"/>
               </a:rPr>
-              <a:t>ful</a:t>
+              <a:t>less</a:t>
             </a:r>
             <a:endParaRPr lang="en-US" sz="1300" dirty="0"/>
           </a:p>
@@ -25717,7 +25861,7 @@
                 <a:ea typeface="Calibri" pitchFamily="34" charset="-122"/>
                 <a:cs typeface="Calibri" pitchFamily="34" charset="-120"/>
               </a:rPr>
-              <a:t>full of; having the quality of</a:t>
+              <a:t>without</a:t>
             </a:r>
             <a:endParaRPr lang="en-US" sz="850" dirty="0"/>
           </a:p>
@@ -25790,7 +25934,7 @@
                 <a:ea typeface="Trebuchet MS" pitchFamily="34" charset="-122"/>
                 <a:cs typeface="Trebuchet MS" pitchFamily="34" charset="-120"/>
               </a:rPr>
-              <a:t>ness</a:t>
+              <a:t>ly</a:t>
             </a:r>
             <a:endParaRPr lang="en-US" sz="1300" dirty="0"/>
           </a:p>
@@ -25829,7 +25973,7 @@
                 <a:ea typeface="Calibri" pitchFamily="34" charset="-122"/>
                 <a:cs typeface="Calibri" pitchFamily="34" charset="-120"/>
               </a:rPr>
-              <a:t>the state or quality of being</a:t>
+              <a:t>in a way</a:t>
             </a:r>
             <a:endParaRPr lang="en-US" sz="850" dirty="0"/>
           </a:p>
@@ -26093,7 +26237,7 @@
                 <a:ea typeface="Trebuchet MS" pitchFamily="34" charset="-122"/>
                 <a:cs typeface="Trebuchet MS" pitchFamily="34" charset="-120"/>
               </a:rPr>
-              <a:t>ful</a:t>
+              <a:t>less</a:t>
             </a:r>
             <a:endParaRPr lang="en-US" sz="1400" dirty="0"/>
           </a:p>
@@ -26198,7 +26342,7 @@
                 <a:ea typeface="Trebuchet MS" pitchFamily="34" charset="-122"/>
                 <a:cs typeface="Trebuchet MS" pitchFamily="34" charset="-120"/>
               </a:rPr>
-              <a:t>ness</a:t>
+              <a:t>ly</a:t>
             </a:r>
             <a:endParaRPr lang="en-US" sz="1400" dirty="0"/>
           </a:p>
@@ -26622,7 +26766,7 @@
                 <a:ea typeface="Calibri" pitchFamily="34" charset="-122"/>
                 <a:cs typeface="Calibri" pitchFamily="34" charset="-120"/>
               </a:rPr>
-              <a:t>Word Labs  •  wordlabs.app  •  Root: 'thank' = express gratitude or praise</a:t>
+              <a:t>Word Labs  •  wordlabs.app  •  Root: 'thank' = to show you are grateful</a:t>
             </a:r>
             <a:endParaRPr lang="en-US" sz="800" dirty="0"/>
           </a:p>
@@ -26761,7 +26905,7 @@
                 <a:ea typeface="Trebuchet MS" pitchFamily="34" charset="-122"/>
                 <a:cs typeface="Trebuchet MS" pitchFamily="34" charset="-120"/>
               </a:rPr>
-              <a:t>thankfulness</a:t>
+              <a:t>thanklessly</a:t>
             </a:r>
             <a:endParaRPr lang="en-US" sz="2800" dirty="0"/>
           </a:p>
@@ -26939,7 +27083,7 @@
                 <a:ea typeface="Calibri" pitchFamily="34" charset="-122"/>
                 <a:cs typeface="Calibri" pitchFamily="34" charset="-120"/>
               </a:rPr>
-              <a:t>to express gratitude</a:t>
+              <a:t>to show you are grateful</a:t>
             </a:r>
             <a:endParaRPr lang="en-US" sz="850" dirty="0"/>
           </a:p>
@@ -26962,11 +27106,11 @@
             </a:avLst>
           </a:prstGeom>
           <a:solidFill>
-            <a:srgbClr val="FCE7F3"/>
+            <a:srgbClr val="DDD6FE"/>
           </a:solidFill>
           <a:ln w="19050">
             <a:solidFill>
-              <a:srgbClr val="DB2777"/>
+              <a:srgbClr val="7C3AED"/>
             </a:solidFill>
             <a:prstDash val="solid"/>
           </a:ln>
@@ -27006,13 +27150,13 @@
             <a:r>
               <a:rPr lang="en-US" sz="1300" b="1" dirty="0">
                 <a:solidFill>
-                  <a:srgbClr val="9D174D"/>
+                  <a:srgbClr val="4C1D95"/>
                 </a:solidFill>
                 <a:latin typeface="Trebuchet MS" pitchFamily="34" charset="0"/>
                 <a:ea typeface="Trebuchet MS" pitchFamily="34" charset="-122"/>
                 <a:cs typeface="Trebuchet MS" pitchFamily="34" charset="-120"/>
               </a:rPr>
-              <a:t>ful</a:t>
+              <a:t>less</a:t>
             </a:r>
             <a:endParaRPr lang="en-US" sz="1300" dirty="0"/>
           </a:p>
@@ -27051,7 +27195,7 @@
                 <a:ea typeface="Calibri" pitchFamily="34" charset="-122"/>
                 <a:cs typeface="Calibri" pitchFamily="34" charset="-120"/>
               </a:rPr>
-              <a:t>full of; having the quality of</a:t>
+              <a:t>without</a:t>
             </a:r>
             <a:endParaRPr lang="en-US" sz="850" dirty="0"/>
           </a:p>
@@ -27124,7 +27268,7 @@
                 <a:ea typeface="Trebuchet MS" pitchFamily="34" charset="-122"/>
                 <a:cs typeface="Trebuchet MS" pitchFamily="34" charset="-120"/>
               </a:rPr>
-              <a:t>ness</a:t>
+              <a:t>ly</a:t>
             </a:r>
             <a:endParaRPr lang="en-US" sz="1300" dirty="0"/>
           </a:p>
@@ -27163,7 +27307,7 @@
                 <a:ea typeface="Calibri" pitchFamily="34" charset="-122"/>
                 <a:cs typeface="Calibri" pitchFamily="34" charset="-120"/>
               </a:rPr>
-              <a:t>the state or quality of being</a:t>
+              <a:t>in a way</a:t>
             </a:r>
             <a:endParaRPr lang="en-US" sz="850" dirty="0"/>
           </a:p>
@@ -27427,7 +27571,7 @@
                 <a:ea typeface="Trebuchet MS" pitchFamily="34" charset="-122"/>
                 <a:cs typeface="Trebuchet MS" pitchFamily="34" charset="-120"/>
               </a:rPr>
-              <a:t>ful</a:t>
+              <a:t>less</a:t>
             </a:r>
             <a:endParaRPr lang="en-US" sz="1400" dirty="0"/>
           </a:p>
@@ -27532,7 +27676,7 @@
                 <a:ea typeface="Trebuchet MS" pitchFamily="34" charset="-122"/>
                 <a:cs typeface="Trebuchet MS" pitchFamily="34" charset="-120"/>
               </a:rPr>
-              <a:t>ness</a:t>
+              <a:t>ly</a:t>
             </a:r>
             <a:endParaRPr lang="en-US" sz="1400" dirty="0"/>
           </a:p>
@@ -27639,8 +27783,8 @@
         </p:nvSpPr>
         <p:spPr>
           <a:xfrm>
-            <a:off x="1951828" y="4169664"/>
-            <a:ext cx="603504" cy="475488"/>
+            <a:off x="1951330" y="4169664"/>
+            <a:ext cx="676656" cy="475488"/>
           </a:xfrm>
           <a:prstGeom prst="rect">
             <a:avLst>
@@ -27666,8 +27810,8 @@
         </p:nvSpPr>
         <p:spPr>
           <a:xfrm>
-            <a:off x="1951828" y="4169664"/>
-            <a:ext cx="603504" cy="475488"/>
+            <a:off x="1951330" y="4169664"/>
+            <a:ext cx="676656" cy="475488"/>
           </a:xfrm>
           <a:prstGeom prst="rect">
             <a:avLst/>
@@ -27705,8 +27849,8 @@
         </p:nvSpPr>
         <p:spPr>
           <a:xfrm>
-            <a:off x="2605209" y="4169664"/>
-            <a:ext cx="603504" cy="475488"/>
+            <a:off x="2677363" y="4169664"/>
+            <a:ext cx="676656" cy="475488"/>
           </a:xfrm>
           <a:prstGeom prst="rect">
             <a:avLst>
@@ -27732,8 +27876,8 @@
         </p:nvSpPr>
         <p:spPr>
           <a:xfrm>
-            <a:off x="2605209" y="4169664"/>
-            <a:ext cx="603504" cy="475488"/>
+            <a:off x="2677363" y="4169664"/>
+            <a:ext cx="676656" cy="475488"/>
           </a:xfrm>
           <a:prstGeom prst="rect">
             <a:avLst/>
@@ -27771,8 +27915,8 @@
         </p:nvSpPr>
         <p:spPr>
           <a:xfrm>
-            <a:off x="3258589" y="4169664"/>
-            <a:ext cx="603504" cy="475488"/>
+            <a:off x="3403397" y="4169664"/>
+            <a:ext cx="676656" cy="475488"/>
           </a:xfrm>
           <a:prstGeom prst="rect">
             <a:avLst>
@@ -27798,8 +27942,8 @@
         </p:nvSpPr>
         <p:spPr>
           <a:xfrm>
-            <a:off x="3258589" y="4169664"/>
-            <a:ext cx="603504" cy="475488"/>
+            <a:off x="3403397" y="4169664"/>
+            <a:ext cx="676656" cy="475488"/>
           </a:xfrm>
           <a:prstGeom prst="rect">
             <a:avLst/>
@@ -27837,8 +27981,8 @@
         </p:nvSpPr>
         <p:spPr>
           <a:xfrm>
-            <a:off x="3911969" y="4169664"/>
-            <a:ext cx="603504" cy="475488"/>
+            <a:off x="4129430" y="4169664"/>
+            <a:ext cx="676656" cy="475488"/>
           </a:xfrm>
           <a:prstGeom prst="rect">
             <a:avLst>
@@ -27864,8 +28008,8 @@
         </p:nvSpPr>
         <p:spPr>
           <a:xfrm>
-            <a:off x="3911969" y="4169664"/>
-            <a:ext cx="603504" cy="475488"/>
+            <a:off x="4129430" y="4169664"/>
+            <a:ext cx="676656" cy="475488"/>
           </a:xfrm>
           <a:prstGeom prst="rect">
             <a:avLst/>
@@ -27903,8 +28047,8 @@
         </p:nvSpPr>
         <p:spPr>
           <a:xfrm>
-            <a:off x="4565350" y="4169664"/>
-            <a:ext cx="603504" cy="475488"/>
+            <a:off x="4855464" y="4169664"/>
+            <a:ext cx="676656" cy="475488"/>
           </a:xfrm>
           <a:prstGeom prst="rect">
             <a:avLst>
@@ -27930,8 +28074,8 @@
         </p:nvSpPr>
         <p:spPr>
           <a:xfrm>
-            <a:off x="4565350" y="4169664"/>
-            <a:ext cx="603504" cy="475488"/>
+            <a:off x="4855464" y="4169664"/>
+            <a:ext cx="676656" cy="475488"/>
           </a:xfrm>
           <a:prstGeom prst="rect">
             <a:avLst/>
@@ -27955,7 +28099,7 @@
                 <a:ea typeface="Trebuchet MS" pitchFamily="34" charset="-122"/>
                 <a:cs typeface="Trebuchet MS" pitchFamily="34" charset="-120"/>
               </a:rPr>
-              <a:t>f</a:t>
+              <a:t>l</a:t>
             </a:r>
             <a:endParaRPr lang="en-US" sz="900" dirty="0"/>
           </a:p>
@@ -27969,8 +28113,8 @@
         </p:nvSpPr>
         <p:spPr>
           <a:xfrm>
-            <a:off x="5218730" y="4169664"/>
-            <a:ext cx="603504" cy="475488"/>
+            <a:off x="5581498" y="4169664"/>
+            <a:ext cx="676656" cy="475488"/>
           </a:xfrm>
           <a:prstGeom prst="rect">
             <a:avLst>
@@ -27996,8 +28140,8 @@
         </p:nvSpPr>
         <p:spPr>
           <a:xfrm>
-            <a:off x="5218730" y="4169664"/>
-            <a:ext cx="603504" cy="475488"/>
+            <a:off x="5581498" y="4169664"/>
+            <a:ext cx="676656" cy="475488"/>
           </a:xfrm>
           <a:prstGeom prst="rect">
             <a:avLst/>
@@ -28021,7 +28165,7 @@
                 <a:ea typeface="Trebuchet MS" pitchFamily="34" charset="-122"/>
                 <a:cs typeface="Trebuchet MS" pitchFamily="34" charset="-120"/>
               </a:rPr>
-              <a:t>u</a:t>
+              <a:t>e</a:t>
             </a:r>
             <a:endParaRPr lang="en-US" sz="900" dirty="0"/>
           </a:p>
@@ -28035,8 +28179,8 @@
         </p:nvSpPr>
         <p:spPr>
           <a:xfrm>
-            <a:off x="5872111" y="4169664"/>
-            <a:ext cx="603504" cy="475488"/>
+            <a:off x="6307531" y="4169664"/>
+            <a:ext cx="676656" cy="475488"/>
           </a:xfrm>
           <a:prstGeom prst="rect">
             <a:avLst>
@@ -28062,8 +28206,8 @@
         </p:nvSpPr>
         <p:spPr>
           <a:xfrm>
-            <a:off x="5872111" y="4169664"/>
-            <a:ext cx="603504" cy="475488"/>
+            <a:off x="6307531" y="4169664"/>
+            <a:ext cx="676656" cy="475488"/>
           </a:xfrm>
           <a:prstGeom prst="rect">
             <a:avLst/>
@@ -28087,7 +28231,7 @@
                 <a:ea typeface="Trebuchet MS" pitchFamily="34" charset="-122"/>
                 <a:cs typeface="Trebuchet MS" pitchFamily="34" charset="-120"/>
               </a:rPr>
-              <a:t>l</a:t>
+              <a:t>ss</a:t>
             </a:r>
             <a:endParaRPr lang="en-US" sz="900" dirty="0"/>
           </a:p>
@@ -28101,8 +28245,8 @@
         </p:nvSpPr>
         <p:spPr>
           <a:xfrm>
-            <a:off x="6525491" y="4169664"/>
-            <a:ext cx="603504" cy="475488"/>
+            <a:off x="7033565" y="4169664"/>
+            <a:ext cx="676656" cy="475488"/>
           </a:xfrm>
           <a:prstGeom prst="rect">
             <a:avLst>
@@ -28128,8 +28272,8 @@
         </p:nvSpPr>
         <p:spPr>
           <a:xfrm>
-            <a:off x="6525491" y="4169664"/>
-            <a:ext cx="603504" cy="475488"/>
+            <a:off x="7033565" y="4169664"/>
+            <a:ext cx="676656" cy="475488"/>
           </a:xfrm>
           <a:prstGeom prst="rect">
             <a:avLst/>
@@ -28153,7 +28297,7 @@
                 <a:ea typeface="Trebuchet MS" pitchFamily="34" charset="-122"/>
                 <a:cs typeface="Trebuchet MS" pitchFamily="34" charset="-120"/>
               </a:rPr>
-              <a:t>n</a:t>
+              <a:t>l</a:t>
             </a:r>
             <a:endParaRPr lang="en-US" sz="900" dirty="0"/>
           </a:p>
@@ -28167,8 +28311,8 @@
         </p:nvSpPr>
         <p:spPr>
           <a:xfrm>
-            <a:off x="7178871" y="4169664"/>
-            <a:ext cx="603504" cy="475488"/>
+            <a:off x="7759598" y="4169664"/>
+            <a:ext cx="676656" cy="475488"/>
           </a:xfrm>
           <a:prstGeom prst="rect">
             <a:avLst>
@@ -28194,8 +28338,8 @@
         </p:nvSpPr>
         <p:spPr>
           <a:xfrm>
-            <a:off x="7178871" y="4169664"/>
-            <a:ext cx="603504" cy="475488"/>
+            <a:off x="7759598" y="4169664"/>
+            <a:ext cx="676656" cy="475488"/>
           </a:xfrm>
           <a:prstGeom prst="rect">
             <a:avLst/>
@@ -28219,73 +28363,7 @@
                 <a:ea typeface="Trebuchet MS" pitchFamily="34" charset="-122"/>
                 <a:cs typeface="Trebuchet MS" pitchFamily="34" charset="-120"/>
               </a:rPr>
-              <a:t>e</a:t>
-            </a:r>
-            <a:endParaRPr lang="en-US" sz="900" dirty="0"/>
-          </a:p>
-        </p:txBody>
-      </p:sp>
-      <p:sp>
-        <p:nvSpPr>
-          <p:cNvPr id="57" name="Shape 55"/>
-          <p:cNvSpPr/>
-          <p:nvPr/>
-        </p:nvSpPr>
-        <p:spPr>
-          <a:xfrm>
-            <a:off x="7832252" y="4169664"/>
-            <a:ext cx="603504" cy="475488"/>
-          </a:xfrm>
-          <a:prstGeom prst="rect">
-            <a:avLst>
-              <a:gd name="adj" fmla="val 7692"/>
-            </a:avLst>
-          </a:prstGeom>
-          <a:solidFill>
-            <a:srgbClr val="FFFFFF"/>
-          </a:solidFill>
-          <a:ln w="12700">
-            <a:solidFill>
-              <a:srgbClr val="DB2777"/>
-            </a:solidFill>
-            <a:prstDash val="solid"/>
-          </a:ln>
-        </p:spPr>
-      </p:sp>
-      <p:sp>
-        <p:nvSpPr>
-          <p:cNvPr id="58" name="Text 56"/>
-          <p:cNvSpPr/>
-          <p:nvPr/>
-        </p:nvSpPr>
-        <p:spPr>
-          <a:xfrm>
-            <a:off x="7832252" y="4169664"/>
-            <a:ext cx="603504" cy="475488"/>
-          </a:xfrm>
-          <a:prstGeom prst="rect">
-            <a:avLst/>
-          </a:prstGeom>
-          <a:noFill/>
-          <a:ln/>
-        </p:spPr>
-        <p:txBody>
-          <a:bodyPr wrap="square" lIns="0" tIns="0" rIns="0" bIns="0" rtlCol="0" anchor="ctr"/>
-          <a:lstStyle/>
-          <a:p>
-            <a:pPr algn="ctr" indent="0" marL="0">
-              <a:buNone/>
-            </a:pPr>
-            <a:r>
-              <a:rPr lang="en-US" sz="900" b="1" dirty="0">
-                <a:solidFill>
-                  <a:srgbClr val="9D174D"/>
-                </a:solidFill>
-                <a:latin typeface="Trebuchet MS" pitchFamily="34" charset="0"/>
-                <a:ea typeface="Trebuchet MS" pitchFamily="34" charset="-122"/>
-                <a:cs typeface="Trebuchet MS" pitchFamily="34" charset="-120"/>
-              </a:rPr>
-              <a:t>ss</a:t>
+              <a:t>y</a:t>
             </a:r>
             <a:endParaRPr lang="en-US" sz="900" dirty="0"/>
           </a:p>
@@ -28577,7 +28655,7 @@
                 <a:ea typeface="Calibri" pitchFamily="34" charset="-122"/>
                 <a:cs typeface="Calibri" pitchFamily="34" charset="-120"/>
               </a:rPr>
-              <a:t>Word Labs  •  wordlabs.app  •  Root: 'thank' = express gratitude or praise</a:t>
+              <a:t>Word Labs  •  wordlabs.app  •  Root: 'thank' = to show you are grateful</a:t>
             </a:r>
             <a:endParaRPr lang="en-US" sz="800" dirty="0"/>
           </a:p>
@@ -28716,7 +28794,7 @@
                 <a:ea typeface="Trebuchet MS" pitchFamily="34" charset="-122"/>
                 <a:cs typeface="Trebuchet MS" pitchFamily="34" charset="-120"/>
               </a:rPr>
-              <a:t>thanks</a:t>
+              <a:t>thankfulness</a:t>
             </a:r>
             <a:endParaRPr lang="en-US" sz="2800" dirty="0"/>
           </a:p>
@@ -29404,7 +29482,7 @@
                 <a:ea typeface="Calibri" pitchFamily="34" charset="-122"/>
                 <a:cs typeface="Calibri" pitchFamily="34" charset="-120"/>
               </a:rPr>
-              <a:t>Word Labs  •  wordlabs.app  •  Root: 'thank' = express gratitude or praise</a:t>
+              <a:t>Word Labs  •  wordlabs.app  •  Root: 'thank' = to show you are grateful</a:t>
             </a:r>
             <a:endParaRPr lang="en-US" sz="800" dirty="0"/>
           </a:p>
@@ -29543,7 +29621,7 @@
                 <a:ea typeface="Trebuchet MS" pitchFamily="34" charset="-122"/>
                 <a:cs typeface="Trebuchet MS" pitchFamily="34" charset="-120"/>
               </a:rPr>
-              <a:t>thanks</a:t>
+              <a:t>thankfulness</a:t>
             </a:r>
             <a:endParaRPr lang="en-US" sz="2800" dirty="0"/>
           </a:p>
@@ -29623,7 +29701,7 @@
         </p:nvSpPr>
         <p:spPr>
           <a:xfrm>
-            <a:off x="2938272" y="2258568"/>
+            <a:off x="2221992" y="2258568"/>
             <a:ext cx="1828800" cy="292608"/>
           </a:xfrm>
           <a:prstGeom prst="rect">
@@ -29657,7 +29735,7 @@
         </p:nvSpPr>
         <p:spPr>
           <a:xfrm>
-            <a:off x="2938272" y="2258568"/>
+            <a:off x="2221992" y="2258568"/>
             <a:ext cx="1828800" cy="292608"/>
           </a:xfrm>
           <a:prstGeom prst="rect">
@@ -29696,7 +29774,7 @@
         </p:nvSpPr>
         <p:spPr>
           <a:xfrm>
-            <a:off x="2938272" y="2569464"/>
+            <a:off x="2221992" y="2569464"/>
             <a:ext cx="1828800" cy="201168"/>
           </a:xfrm>
           <a:prstGeom prst="rect">
@@ -29721,7 +29799,7 @@
                 <a:ea typeface="Calibri" pitchFamily="34" charset="-122"/>
                 <a:cs typeface="Calibri" pitchFamily="34" charset="-120"/>
               </a:rPr>
-              <a:t>to express gratitude</a:t>
+              <a:t>to show you are grateful</a:t>
             </a:r>
             <a:endParaRPr lang="en-US" sz="850" dirty="0"/>
           </a:p>
@@ -29735,7 +29813,7 @@
         </p:nvSpPr>
         <p:spPr>
           <a:xfrm>
-            <a:off x="5803392" y="2258568"/>
+            <a:off x="4370832" y="2258568"/>
             <a:ext cx="1828800" cy="292608"/>
           </a:xfrm>
           <a:prstGeom prst="rect">
@@ -29769,7 +29847,7 @@
         </p:nvSpPr>
         <p:spPr>
           <a:xfrm>
-            <a:off x="5803392" y="2258568"/>
+            <a:off x="4370832" y="2258568"/>
             <a:ext cx="1828800" cy="292608"/>
           </a:xfrm>
           <a:prstGeom prst="rect">
@@ -29794,7 +29872,7 @@
                 <a:ea typeface="Trebuchet MS" pitchFamily="34" charset="-122"/>
                 <a:cs typeface="Trebuchet MS" pitchFamily="34" charset="-120"/>
               </a:rPr>
-              <a:t>s</a:t>
+              <a:t>ful</a:t>
             </a:r>
             <a:endParaRPr lang="en-US" sz="1300" dirty="0"/>
           </a:p>
@@ -29808,7 +29886,7 @@
         </p:nvSpPr>
         <p:spPr>
           <a:xfrm>
-            <a:off x="5803392" y="2569464"/>
+            <a:off x="4370832" y="2569464"/>
             <a:ext cx="1828800" cy="201168"/>
           </a:xfrm>
           <a:prstGeom prst="rect">
@@ -29833,7 +29911,7 @@
                 <a:ea typeface="Calibri" pitchFamily="34" charset="-122"/>
                 <a:cs typeface="Calibri" pitchFamily="34" charset="-120"/>
               </a:rPr>
-              <a:t>plural; more than one</a:t>
+              <a:t>full of</a:t>
             </a:r>
             <a:endParaRPr lang="en-US" sz="850" dirty="0"/>
           </a:p>
@@ -29842,6 +29920,118 @@
       <p:sp>
         <p:nvSpPr>
           <p:cNvPr id="22" name="Shape 20"/>
+          <p:cNvSpPr/>
+          <p:nvPr/>
+        </p:nvSpPr>
+        <p:spPr>
+          <a:xfrm>
+            <a:off x="6519672" y="2258568"/>
+            <a:ext cx="1828800" cy="292608"/>
+          </a:xfrm>
+          <a:prstGeom prst="rect">
+            <a:avLst>
+              <a:gd name="adj" fmla="val 25000"/>
+            </a:avLst>
+          </a:prstGeom>
+          <a:solidFill>
+            <a:srgbClr val="FCE7F3"/>
+          </a:solidFill>
+          <a:ln w="19050">
+            <a:solidFill>
+              <a:srgbClr val="DB2777"/>
+            </a:solidFill>
+            <a:prstDash val="solid"/>
+          </a:ln>
+          <a:effectLst>
+            <a:outerShdw sx="100000" sy="100000" kx="0" ky="0" algn="bl" rotWithShape="0" blurRad="101600" dist="38100" dir="8100000">
+              <a:srgbClr val="000000">
+                <a:alpha val="12000"/>
+              </a:srgbClr>
+            </a:outerShdw>
+          </a:effectLst>
+        </p:spPr>
+      </p:sp>
+      <p:sp>
+        <p:nvSpPr>
+          <p:cNvPr id="23" name="Text 21"/>
+          <p:cNvSpPr/>
+          <p:nvPr/>
+        </p:nvSpPr>
+        <p:spPr>
+          <a:xfrm>
+            <a:off x="6519672" y="2258568"/>
+            <a:ext cx="1828800" cy="292608"/>
+          </a:xfrm>
+          <a:prstGeom prst="rect">
+            <a:avLst/>
+          </a:prstGeom>
+          <a:noFill/>
+          <a:ln/>
+        </p:spPr>
+        <p:txBody>
+          <a:bodyPr wrap="square" lIns="0" tIns="0" rIns="0" bIns="0" rtlCol="0" anchor="ctr"/>
+          <a:lstStyle/>
+          <a:p>
+            <a:pPr algn="ctr" indent="0" marL="0">
+              <a:buNone/>
+            </a:pPr>
+            <a:r>
+              <a:rPr lang="en-US" sz="1300" b="1" dirty="0">
+                <a:solidFill>
+                  <a:srgbClr val="9D174D"/>
+                </a:solidFill>
+                <a:latin typeface="Trebuchet MS" pitchFamily="34" charset="0"/>
+                <a:ea typeface="Trebuchet MS" pitchFamily="34" charset="-122"/>
+                <a:cs typeface="Trebuchet MS" pitchFamily="34" charset="-120"/>
+              </a:rPr>
+              <a:t>ness</a:t>
+            </a:r>
+            <a:endParaRPr lang="en-US" sz="1300" dirty="0"/>
+          </a:p>
+        </p:txBody>
+      </p:sp>
+      <p:sp>
+        <p:nvSpPr>
+          <p:cNvPr id="24" name="Text 22"/>
+          <p:cNvSpPr/>
+          <p:nvPr/>
+        </p:nvSpPr>
+        <p:spPr>
+          <a:xfrm>
+            <a:off x="6519672" y="2569464"/>
+            <a:ext cx="1828800" cy="201168"/>
+          </a:xfrm>
+          <a:prstGeom prst="rect">
+            <a:avLst/>
+          </a:prstGeom>
+          <a:noFill/>
+          <a:ln/>
+        </p:spPr>
+        <p:txBody>
+          <a:bodyPr wrap="square" lIns="0" tIns="0" rIns="0" bIns="0" rtlCol="0" anchor="t"/>
+          <a:lstStyle/>
+          <a:p>
+            <a:pPr algn="ctr" indent="0" marL="0">
+              <a:buNone/>
+            </a:pPr>
+            <a:r>
+              <a:rPr lang="en-US" sz="850" dirty="0">
+                <a:solidFill>
+                  <a:srgbClr val="475569"/>
+                </a:solidFill>
+                <a:latin typeface="Calibri" pitchFamily="34" charset="0"/>
+                <a:ea typeface="Calibri" pitchFamily="34" charset="-122"/>
+                <a:cs typeface="Calibri" pitchFamily="34" charset="-120"/>
+              </a:rPr>
+              <a:t>state of</a:t>
+            </a:r>
+            <a:endParaRPr lang="en-US" sz="850" dirty="0"/>
+          </a:p>
+        </p:txBody>
+      </p:sp>
+      <p:sp>
+        <p:nvSpPr>
+          <p:cNvPr id="25" name="Shape 23"/>
           <p:cNvSpPr/>
           <p:nvPr/>
         </p:nvSpPr>
@@ -29868,7 +30058,7 @@
       </p:sp>
       <p:sp>
         <p:nvSpPr>
-          <p:cNvPr id="23" name="Text 21"/>
+          <p:cNvPr id="26" name="Text 24"/>
           <p:cNvSpPr/>
           <p:nvPr/>
         </p:nvSpPr>
@@ -29907,7 +30097,7 @@
       </p:sp>
       <p:sp>
         <p:nvSpPr>
-          <p:cNvPr id="24" name="Shape 22"/>
+          <p:cNvPr id="27" name="Shape 25"/>
           <p:cNvSpPr/>
           <p:nvPr/>
         </p:nvSpPr>
@@ -29934,7 +30124,7 @@
       </p:sp>
       <p:sp>
         <p:nvSpPr>
-          <p:cNvPr id="25" name="Text 23"/>
+          <p:cNvPr id="28" name="Text 26"/>
           <p:cNvSpPr/>
           <p:nvPr/>
         </p:nvSpPr>
@@ -29973,7 +30163,7 @@
       </p:sp>
       <p:sp>
         <p:nvSpPr>
-          <p:cNvPr id="26" name="Shape 24"/>
+          <p:cNvPr id="29" name="Shape 27"/>
           <p:cNvSpPr/>
           <p:nvPr/>
         </p:nvSpPr>
@@ -30000,7 +30190,7 @@
       </p:sp>
       <p:sp>
         <p:nvSpPr>
-          <p:cNvPr id="27" name="Text 25"/>
+          <p:cNvPr id="30" name="Text 28"/>
           <p:cNvSpPr/>
           <p:nvPr/>
         </p:nvSpPr>
@@ -30039,7 +30229,7 @@
       </p:sp>
       <p:sp>
         <p:nvSpPr>
-          <p:cNvPr id="28" name="Shape 26"/>
+          <p:cNvPr id="31" name="Shape 29"/>
           <p:cNvSpPr/>
           <p:nvPr/>
         </p:nvSpPr>
@@ -30066,7 +30256,7 @@
       </p:sp>
       <p:sp>
         <p:nvSpPr>
-          <p:cNvPr id="29" name="Text 27"/>
+          <p:cNvPr id="32" name="Text 30"/>
           <p:cNvSpPr/>
           <p:nvPr/>
         </p:nvSpPr>
@@ -30389,7 +30579,7 @@
                 <a:ea typeface="Calibri" pitchFamily="34" charset="-122"/>
                 <a:cs typeface="Calibri" pitchFamily="34" charset="-120"/>
               </a:rPr>
-              <a:t>Word Labs  •  wordlabs.app  •  Root: 'thank' = express gratitude or praise</a:t>
+              <a:t>Word Labs  •  wordlabs.app  •  Root: 'thank' = to show you are grateful</a:t>
             </a:r>
             <a:endParaRPr lang="en-US" sz="800" dirty="0"/>
           </a:p>
@@ -30528,7 +30718,7 @@
                 <a:ea typeface="Trebuchet MS" pitchFamily="34" charset="-122"/>
                 <a:cs typeface="Trebuchet MS" pitchFamily="34" charset="-120"/>
               </a:rPr>
-              <a:t>thanks</a:t>
+              <a:t>thankfulness</a:t>
             </a:r>
             <a:endParaRPr lang="en-US" sz="2800" dirty="0"/>
           </a:p>
@@ -30608,7 +30798,7 @@
         </p:nvSpPr>
         <p:spPr>
           <a:xfrm>
-            <a:off x="2938272" y="2258568"/>
+            <a:off x="2221992" y="2258568"/>
             <a:ext cx="1828800" cy="292608"/>
           </a:xfrm>
           <a:prstGeom prst="rect">
@@ -30642,7 +30832,7 @@
         </p:nvSpPr>
         <p:spPr>
           <a:xfrm>
-            <a:off x="2938272" y="2258568"/>
+            <a:off x="2221992" y="2258568"/>
             <a:ext cx="1828800" cy="292608"/>
           </a:xfrm>
           <a:prstGeom prst="rect">
@@ -30681,7 +30871,7 @@
         </p:nvSpPr>
         <p:spPr>
           <a:xfrm>
-            <a:off x="2938272" y="2569464"/>
+            <a:off x="2221992" y="2569464"/>
             <a:ext cx="1828800" cy="201168"/>
           </a:xfrm>
           <a:prstGeom prst="rect">
@@ -30706,7 +30896,7 @@
                 <a:ea typeface="Calibri" pitchFamily="34" charset="-122"/>
                 <a:cs typeface="Calibri" pitchFamily="34" charset="-120"/>
               </a:rPr>
-              <a:t>to express gratitude</a:t>
+              <a:t>to show you are grateful</a:t>
             </a:r>
             <a:endParaRPr lang="en-US" sz="850" dirty="0"/>
           </a:p>
@@ -30720,7 +30910,7 @@
         </p:nvSpPr>
         <p:spPr>
           <a:xfrm>
-            <a:off x="5803392" y="2258568"/>
+            <a:off x="4370832" y="2258568"/>
             <a:ext cx="1828800" cy="292608"/>
           </a:xfrm>
           <a:prstGeom prst="rect">
@@ -30754,7 +30944,7 @@
         </p:nvSpPr>
         <p:spPr>
           <a:xfrm>
-            <a:off x="5803392" y="2258568"/>
+            <a:off x="4370832" y="2258568"/>
             <a:ext cx="1828800" cy="292608"/>
           </a:xfrm>
           <a:prstGeom prst="rect">
@@ -30779,7 +30969,7 @@
                 <a:ea typeface="Trebuchet MS" pitchFamily="34" charset="-122"/>
                 <a:cs typeface="Trebuchet MS" pitchFamily="34" charset="-120"/>
               </a:rPr>
-              <a:t>s</a:t>
+              <a:t>ful</a:t>
             </a:r>
             <a:endParaRPr lang="en-US" sz="1300" dirty="0"/>
           </a:p>
@@ -30793,7 +30983,7 @@
         </p:nvSpPr>
         <p:spPr>
           <a:xfrm>
-            <a:off x="5803392" y="2569464"/>
+            <a:off x="4370832" y="2569464"/>
             <a:ext cx="1828800" cy="201168"/>
           </a:xfrm>
           <a:prstGeom prst="rect">
@@ -30818,7 +31008,7 @@
                 <a:ea typeface="Calibri" pitchFamily="34" charset="-122"/>
                 <a:cs typeface="Calibri" pitchFamily="34" charset="-120"/>
               </a:rPr>
-              <a:t>plural; more than one</a:t>
+              <a:t>full of</a:t>
             </a:r>
             <a:endParaRPr lang="en-US" sz="850" dirty="0"/>
           </a:p>
@@ -30827,6 +31017,118 @@
       <p:sp>
         <p:nvSpPr>
           <p:cNvPr id="22" name="Shape 20"/>
+          <p:cNvSpPr/>
+          <p:nvPr/>
+        </p:nvSpPr>
+        <p:spPr>
+          <a:xfrm>
+            <a:off x="6519672" y="2258568"/>
+            <a:ext cx="1828800" cy="292608"/>
+          </a:xfrm>
+          <a:prstGeom prst="rect">
+            <a:avLst>
+              <a:gd name="adj" fmla="val 25000"/>
+            </a:avLst>
+          </a:prstGeom>
+          <a:solidFill>
+            <a:srgbClr val="FCE7F3"/>
+          </a:solidFill>
+          <a:ln w="19050">
+            <a:solidFill>
+              <a:srgbClr val="DB2777"/>
+            </a:solidFill>
+            <a:prstDash val="solid"/>
+          </a:ln>
+          <a:effectLst>
+            <a:outerShdw sx="100000" sy="100000" kx="0" ky="0" algn="bl" rotWithShape="0" blurRad="101600" dist="38100" dir="8100000">
+              <a:srgbClr val="000000">
+                <a:alpha val="12000"/>
+              </a:srgbClr>
+            </a:outerShdw>
+          </a:effectLst>
+        </p:spPr>
+      </p:sp>
+      <p:sp>
+        <p:nvSpPr>
+          <p:cNvPr id="23" name="Text 21"/>
+          <p:cNvSpPr/>
+          <p:nvPr/>
+        </p:nvSpPr>
+        <p:spPr>
+          <a:xfrm>
+            <a:off x="6519672" y="2258568"/>
+            <a:ext cx="1828800" cy="292608"/>
+          </a:xfrm>
+          <a:prstGeom prst="rect">
+            <a:avLst/>
+          </a:prstGeom>
+          <a:noFill/>
+          <a:ln/>
+        </p:spPr>
+        <p:txBody>
+          <a:bodyPr wrap="square" lIns="0" tIns="0" rIns="0" bIns="0" rtlCol="0" anchor="ctr"/>
+          <a:lstStyle/>
+          <a:p>
+            <a:pPr algn="ctr" indent="0" marL="0">
+              <a:buNone/>
+            </a:pPr>
+            <a:r>
+              <a:rPr lang="en-US" sz="1300" b="1" dirty="0">
+                <a:solidFill>
+                  <a:srgbClr val="9D174D"/>
+                </a:solidFill>
+                <a:latin typeface="Trebuchet MS" pitchFamily="34" charset="0"/>
+                <a:ea typeface="Trebuchet MS" pitchFamily="34" charset="-122"/>
+                <a:cs typeface="Trebuchet MS" pitchFamily="34" charset="-120"/>
+              </a:rPr>
+              <a:t>ness</a:t>
+            </a:r>
+            <a:endParaRPr lang="en-US" sz="1300" dirty="0"/>
+          </a:p>
+        </p:txBody>
+      </p:sp>
+      <p:sp>
+        <p:nvSpPr>
+          <p:cNvPr id="24" name="Text 22"/>
+          <p:cNvSpPr/>
+          <p:nvPr/>
+        </p:nvSpPr>
+        <p:spPr>
+          <a:xfrm>
+            <a:off x="6519672" y="2569464"/>
+            <a:ext cx="1828800" cy="201168"/>
+          </a:xfrm>
+          <a:prstGeom prst="rect">
+            <a:avLst/>
+          </a:prstGeom>
+          <a:noFill/>
+          <a:ln/>
+        </p:spPr>
+        <p:txBody>
+          <a:bodyPr wrap="square" lIns="0" tIns="0" rIns="0" bIns="0" rtlCol="0" anchor="t"/>
+          <a:lstStyle/>
+          <a:p>
+            <a:pPr algn="ctr" indent="0" marL="0">
+              <a:buNone/>
+            </a:pPr>
+            <a:r>
+              <a:rPr lang="en-US" sz="850" dirty="0">
+                <a:solidFill>
+                  <a:srgbClr val="475569"/>
+                </a:solidFill>
+                <a:latin typeface="Calibri" pitchFamily="34" charset="0"/>
+                <a:ea typeface="Calibri" pitchFamily="34" charset="-122"/>
+                <a:cs typeface="Calibri" pitchFamily="34" charset="-120"/>
+              </a:rPr>
+              <a:t>state of</a:t>
+            </a:r>
+            <a:endParaRPr lang="en-US" sz="850" dirty="0"/>
+          </a:p>
+        </p:txBody>
+      </p:sp>
+      <p:sp>
+        <p:nvSpPr>
+          <p:cNvPr id="25" name="Shape 23"/>
           <p:cNvSpPr/>
           <p:nvPr/>
         </p:nvSpPr>
@@ -30853,7 +31155,7 @@
       </p:sp>
       <p:sp>
         <p:nvSpPr>
-          <p:cNvPr id="23" name="Text 21"/>
+          <p:cNvPr id="26" name="Text 24"/>
           <p:cNvSpPr/>
           <p:nvPr/>
         </p:nvSpPr>
@@ -30892,7 +31194,7 @@
       </p:sp>
       <p:sp>
         <p:nvSpPr>
-          <p:cNvPr id="24" name="Shape 22"/>
+          <p:cNvPr id="27" name="Shape 25"/>
           <p:cNvSpPr/>
           <p:nvPr/>
         </p:nvSpPr>
@@ -30919,13 +31221,13 @@
       </p:sp>
       <p:sp>
         <p:nvSpPr>
-          <p:cNvPr id="25" name="Shape 23"/>
-          <p:cNvSpPr/>
-          <p:nvPr/>
-        </p:nvSpPr>
-        <p:spPr>
-          <a:xfrm>
-            <a:off x="4370832" y="3364992"/>
+          <p:cNvPr id="28" name="Shape 26"/>
+          <p:cNvSpPr/>
+          <p:nvPr/>
+        </p:nvSpPr>
+        <p:spPr>
+          <a:xfrm>
+            <a:off x="2313432" y="3364992"/>
             <a:ext cx="1645920" cy="475488"/>
           </a:xfrm>
           <a:prstGeom prst="rect">
@@ -30946,13 +31248,13 @@
       </p:sp>
       <p:sp>
         <p:nvSpPr>
-          <p:cNvPr id="26" name="Text 24"/>
-          <p:cNvSpPr/>
-          <p:nvPr/>
-        </p:nvSpPr>
-        <p:spPr>
-          <a:xfrm>
-            <a:off x="4370832" y="3364992"/>
+          <p:cNvPr id="29" name="Text 27"/>
+          <p:cNvSpPr/>
+          <p:nvPr/>
+        </p:nvSpPr>
+        <p:spPr>
+          <a:xfrm>
+            <a:off x="2313432" y="3364992"/>
             <a:ext cx="1645920" cy="475488"/>
           </a:xfrm>
           <a:prstGeom prst="rect">
@@ -30977,7 +31279,7 @@
                 <a:ea typeface="Trebuchet MS" pitchFamily="34" charset="-122"/>
                 <a:cs typeface="Trebuchet MS" pitchFamily="34" charset="-120"/>
               </a:rPr>
-              <a:t>thanks</a:t>
+              <a:t>thank</a:t>
             </a:r>
             <a:endParaRPr lang="en-US" sz="1400" dirty="0"/>
           </a:p>
@@ -30985,7 +31287,217 @@
       </p:sp>
       <p:sp>
         <p:nvSpPr>
-          <p:cNvPr id="27" name="Shape 25"/>
+          <p:cNvPr id="30" name="Text 28"/>
+          <p:cNvSpPr/>
+          <p:nvPr/>
+        </p:nvSpPr>
+        <p:spPr>
+          <a:xfrm>
+            <a:off x="3959352" y="3364992"/>
+            <a:ext cx="411480" cy="475488"/>
+          </a:xfrm>
+          <a:prstGeom prst="rect">
+            <a:avLst/>
+          </a:prstGeom>
+          <a:noFill/>
+          <a:ln/>
+        </p:spPr>
+        <p:txBody>
+          <a:bodyPr wrap="square" lIns="0" tIns="0" rIns="0" bIns="0" rtlCol="0" anchor="ctr"/>
+          <a:lstStyle/>
+          <a:p>
+            <a:pPr algn="ctr" indent="0" marL="0">
+              <a:buNone/>
+            </a:pPr>
+            <a:r>
+              <a:rPr lang="en-US" sz="1600" b="1" dirty="0">
+                <a:solidFill>
+                  <a:srgbClr val="0D9488"/>
+                </a:solidFill>
+                <a:latin typeface="Trebuchet MS" pitchFamily="34" charset="0"/>
+                <a:ea typeface="Trebuchet MS" pitchFamily="34" charset="-122"/>
+                <a:cs typeface="Trebuchet MS" pitchFamily="34" charset="-120"/>
+              </a:rPr>
+              <a:t>·</a:t>
+            </a:r>
+            <a:endParaRPr lang="en-US" sz="1600" dirty="0"/>
+          </a:p>
+        </p:txBody>
+      </p:sp>
+      <p:sp>
+        <p:nvSpPr>
+          <p:cNvPr id="31" name="Shape 29"/>
+          <p:cNvSpPr/>
+          <p:nvPr/>
+        </p:nvSpPr>
+        <p:spPr>
+          <a:xfrm>
+            <a:off x="4370832" y="3364992"/>
+            <a:ext cx="1645920" cy="475488"/>
+          </a:xfrm>
+          <a:prstGeom prst="rect">
+            <a:avLst>
+              <a:gd name="adj" fmla="val 9615"/>
+            </a:avLst>
+          </a:prstGeom>
+          <a:solidFill>
+            <a:srgbClr val="FFFFFF"/>
+          </a:solidFill>
+          <a:ln w="12700">
+            <a:solidFill>
+              <a:srgbClr val="0D9488"/>
+            </a:solidFill>
+            <a:prstDash val="solid"/>
+          </a:ln>
+        </p:spPr>
+      </p:sp>
+      <p:sp>
+        <p:nvSpPr>
+          <p:cNvPr id="32" name="Text 30"/>
+          <p:cNvSpPr/>
+          <p:nvPr/>
+        </p:nvSpPr>
+        <p:spPr>
+          <a:xfrm>
+            <a:off x="4370832" y="3364992"/>
+            <a:ext cx="1645920" cy="475488"/>
+          </a:xfrm>
+          <a:prstGeom prst="rect">
+            <a:avLst/>
+          </a:prstGeom>
+          <a:noFill/>
+          <a:ln/>
+        </p:spPr>
+        <p:txBody>
+          <a:bodyPr wrap="square" lIns="0" tIns="0" rIns="0" bIns="0" rtlCol="0" anchor="ctr"/>
+          <a:lstStyle/>
+          <a:p>
+            <a:pPr algn="ctr" indent="0" marL="0">
+              <a:buNone/>
+            </a:pPr>
+            <a:r>
+              <a:rPr lang="en-US" sz="1400" b="1" dirty="0">
+                <a:solidFill>
+                  <a:srgbClr val="0D9488"/>
+                </a:solidFill>
+                <a:latin typeface="Trebuchet MS" pitchFamily="34" charset="0"/>
+                <a:ea typeface="Trebuchet MS" pitchFamily="34" charset="-122"/>
+                <a:cs typeface="Trebuchet MS" pitchFamily="34" charset="-120"/>
+              </a:rPr>
+              <a:t>ful</a:t>
+            </a:r>
+            <a:endParaRPr lang="en-US" sz="1400" dirty="0"/>
+          </a:p>
+        </p:txBody>
+      </p:sp>
+      <p:sp>
+        <p:nvSpPr>
+          <p:cNvPr id="33" name="Text 31"/>
+          <p:cNvSpPr/>
+          <p:nvPr/>
+        </p:nvSpPr>
+        <p:spPr>
+          <a:xfrm>
+            <a:off x="6016752" y="3364992"/>
+            <a:ext cx="411480" cy="475488"/>
+          </a:xfrm>
+          <a:prstGeom prst="rect">
+            <a:avLst/>
+          </a:prstGeom>
+          <a:noFill/>
+          <a:ln/>
+        </p:spPr>
+        <p:txBody>
+          <a:bodyPr wrap="square" lIns="0" tIns="0" rIns="0" bIns="0" rtlCol="0" anchor="ctr"/>
+          <a:lstStyle/>
+          <a:p>
+            <a:pPr algn="ctr" indent="0" marL="0">
+              <a:buNone/>
+            </a:pPr>
+            <a:r>
+              <a:rPr lang="en-US" sz="1600" b="1" dirty="0">
+                <a:solidFill>
+                  <a:srgbClr val="0D9488"/>
+                </a:solidFill>
+                <a:latin typeface="Trebuchet MS" pitchFamily="34" charset="0"/>
+                <a:ea typeface="Trebuchet MS" pitchFamily="34" charset="-122"/>
+                <a:cs typeface="Trebuchet MS" pitchFamily="34" charset="-120"/>
+              </a:rPr>
+              <a:t>·</a:t>
+            </a:r>
+            <a:endParaRPr lang="en-US" sz="1600" dirty="0"/>
+          </a:p>
+        </p:txBody>
+      </p:sp>
+      <p:sp>
+        <p:nvSpPr>
+          <p:cNvPr id="34" name="Shape 32"/>
+          <p:cNvSpPr/>
+          <p:nvPr/>
+        </p:nvSpPr>
+        <p:spPr>
+          <a:xfrm>
+            <a:off x="6428232" y="3364992"/>
+            <a:ext cx="1645920" cy="475488"/>
+          </a:xfrm>
+          <a:prstGeom prst="rect">
+            <a:avLst>
+              <a:gd name="adj" fmla="val 9615"/>
+            </a:avLst>
+          </a:prstGeom>
+          <a:solidFill>
+            <a:srgbClr val="FFFFFF"/>
+          </a:solidFill>
+          <a:ln w="12700">
+            <a:solidFill>
+              <a:srgbClr val="0D9488"/>
+            </a:solidFill>
+            <a:prstDash val="solid"/>
+          </a:ln>
+        </p:spPr>
+      </p:sp>
+      <p:sp>
+        <p:nvSpPr>
+          <p:cNvPr id="35" name="Text 33"/>
+          <p:cNvSpPr/>
+          <p:nvPr/>
+        </p:nvSpPr>
+        <p:spPr>
+          <a:xfrm>
+            <a:off x="6428232" y="3364992"/>
+            <a:ext cx="1645920" cy="475488"/>
+          </a:xfrm>
+          <a:prstGeom prst="rect">
+            <a:avLst/>
+          </a:prstGeom>
+          <a:noFill/>
+          <a:ln/>
+        </p:spPr>
+        <p:txBody>
+          <a:bodyPr wrap="square" lIns="0" tIns="0" rIns="0" bIns="0" rtlCol="0" anchor="ctr"/>
+          <a:lstStyle/>
+          <a:p>
+            <a:pPr algn="ctr" indent="0" marL="0">
+              <a:buNone/>
+            </a:pPr>
+            <a:r>
+              <a:rPr lang="en-US" sz="1400" b="1" dirty="0">
+                <a:solidFill>
+                  <a:srgbClr val="0D9488"/>
+                </a:solidFill>
+                <a:latin typeface="Trebuchet MS" pitchFamily="34" charset="0"/>
+                <a:ea typeface="Trebuchet MS" pitchFamily="34" charset="-122"/>
+                <a:cs typeface="Trebuchet MS" pitchFamily="34" charset="-120"/>
+              </a:rPr>
+              <a:t>ness</a:t>
+            </a:r>
+            <a:endParaRPr lang="en-US" sz="1400" dirty="0"/>
+          </a:p>
+        </p:txBody>
+      </p:sp>
+      <p:sp>
+        <p:nvSpPr>
+          <p:cNvPr id="36" name="Shape 34"/>
           <p:cNvSpPr/>
           <p:nvPr/>
         </p:nvSpPr>
@@ -31012,7 +31524,7 @@
       </p:sp>
       <p:sp>
         <p:nvSpPr>
-          <p:cNvPr id="28" name="Text 26"/>
+          <p:cNvPr id="37" name="Text 35"/>
           <p:cNvSpPr/>
           <p:nvPr/>
         </p:nvSpPr>
@@ -31051,7 +31563,7 @@
       </p:sp>
       <p:sp>
         <p:nvSpPr>
-          <p:cNvPr id="29" name="Shape 27"/>
+          <p:cNvPr id="38" name="Shape 36"/>
           <p:cNvSpPr/>
           <p:nvPr/>
         </p:nvSpPr>
@@ -31078,7 +31590,7 @@
       </p:sp>
       <p:sp>
         <p:nvSpPr>
-          <p:cNvPr id="30" name="Text 28"/>
+          <p:cNvPr id="39" name="Text 37"/>
           <p:cNvSpPr/>
           <p:nvPr/>
         </p:nvSpPr>
@@ -31401,7 +31913,7 @@
                 <a:ea typeface="Calibri" pitchFamily="34" charset="-122"/>
                 <a:cs typeface="Calibri" pitchFamily="34" charset="-120"/>
               </a:rPr>
-              <a:t>Word Labs  •  wordlabs.app  •  Root: 'thank' = express gratitude or praise</a:t>
+              <a:t>Word Labs  •  wordlabs.app  •  Root: 'thank' = to show you are grateful</a:t>
             </a:r>
             <a:endParaRPr lang="en-US" sz="800" dirty="0"/>
           </a:p>
@@ -31540,7 +32052,7 @@
                 <a:ea typeface="Trebuchet MS" pitchFamily="34" charset="-122"/>
                 <a:cs typeface="Trebuchet MS" pitchFamily="34" charset="-120"/>
               </a:rPr>
-              <a:t>thanks</a:t>
+              <a:t>thankfulness</a:t>
             </a:r>
             <a:endParaRPr lang="en-US" sz="2800" dirty="0"/>
           </a:p>
@@ -31620,7 +32132,7 @@
         </p:nvSpPr>
         <p:spPr>
           <a:xfrm>
-            <a:off x="2938272" y="2258568"/>
+            <a:off x="2221992" y="2258568"/>
             <a:ext cx="1828800" cy="292608"/>
           </a:xfrm>
           <a:prstGeom prst="rect">
@@ -31654,7 +32166,7 @@
         </p:nvSpPr>
         <p:spPr>
           <a:xfrm>
-            <a:off x="2938272" y="2258568"/>
+            <a:off x="2221992" y="2258568"/>
             <a:ext cx="1828800" cy="292608"/>
           </a:xfrm>
           <a:prstGeom prst="rect">
@@ -31693,7 +32205,7 @@
         </p:nvSpPr>
         <p:spPr>
           <a:xfrm>
-            <a:off x="2938272" y="2569464"/>
+            <a:off x="2221992" y="2569464"/>
             <a:ext cx="1828800" cy="201168"/>
           </a:xfrm>
           <a:prstGeom prst="rect">
@@ -31718,7 +32230,7 @@
                 <a:ea typeface="Calibri" pitchFamily="34" charset="-122"/>
                 <a:cs typeface="Calibri" pitchFamily="34" charset="-120"/>
               </a:rPr>
-              <a:t>to express gratitude</a:t>
+              <a:t>to show you are grateful</a:t>
             </a:r>
             <a:endParaRPr lang="en-US" sz="850" dirty="0"/>
           </a:p>
@@ -31732,7 +32244,7 @@
         </p:nvSpPr>
         <p:spPr>
           <a:xfrm>
-            <a:off x="5803392" y="2258568"/>
+            <a:off x="4370832" y="2258568"/>
             <a:ext cx="1828800" cy="292608"/>
           </a:xfrm>
           <a:prstGeom prst="rect">
@@ -31766,7 +32278,7 @@
         </p:nvSpPr>
         <p:spPr>
           <a:xfrm>
-            <a:off x="5803392" y="2258568"/>
+            <a:off x="4370832" y="2258568"/>
             <a:ext cx="1828800" cy="292608"/>
           </a:xfrm>
           <a:prstGeom prst="rect">
@@ -31791,7 +32303,7 @@
                 <a:ea typeface="Trebuchet MS" pitchFamily="34" charset="-122"/>
                 <a:cs typeface="Trebuchet MS" pitchFamily="34" charset="-120"/>
               </a:rPr>
-              <a:t>s</a:t>
+              <a:t>ful</a:t>
             </a:r>
             <a:endParaRPr lang="en-US" sz="1300" dirty="0"/>
           </a:p>
@@ -31805,7 +32317,7 @@
         </p:nvSpPr>
         <p:spPr>
           <a:xfrm>
-            <a:off x="5803392" y="2569464"/>
+            <a:off x="4370832" y="2569464"/>
             <a:ext cx="1828800" cy="201168"/>
           </a:xfrm>
           <a:prstGeom prst="rect">
@@ -31830,7 +32342,7 @@
                 <a:ea typeface="Calibri" pitchFamily="34" charset="-122"/>
                 <a:cs typeface="Calibri" pitchFamily="34" charset="-120"/>
               </a:rPr>
-              <a:t>plural; more than one</a:t>
+              <a:t>full of</a:t>
             </a:r>
             <a:endParaRPr lang="en-US" sz="850" dirty="0"/>
           </a:p>
@@ -31839,6 +32351,118 @@
       <p:sp>
         <p:nvSpPr>
           <p:cNvPr id="22" name="Shape 20"/>
+          <p:cNvSpPr/>
+          <p:nvPr/>
+        </p:nvSpPr>
+        <p:spPr>
+          <a:xfrm>
+            <a:off x="6519672" y="2258568"/>
+            <a:ext cx="1828800" cy="292608"/>
+          </a:xfrm>
+          <a:prstGeom prst="rect">
+            <a:avLst>
+              <a:gd name="adj" fmla="val 25000"/>
+            </a:avLst>
+          </a:prstGeom>
+          <a:solidFill>
+            <a:srgbClr val="FCE7F3"/>
+          </a:solidFill>
+          <a:ln w="19050">
+            <a:solidFill>
+              <a:srgbClr val="DB2777"/>
+            </a:solidFill>
+            <a:prstDash val="solid"/>
+          </a:ln>
+          <a:effectLst>
+            <a:outerShdw sx="100000" sy="100000" kx="0" ky="0" algn="bl" rotWithShape="0" blurRad="101600" dist="38100" dir="8100000">
+              <a:srgbClr val="000000">
+                <a:alpha val="12000"/>
+              </a:srgbClr>
+            </a:outerShdw>
+          </a:effectLst>
+        </p:spPr>
+      </p:sp>
+      <p:sp>
+        <p:nvSpPr>
+          <p:cNvPr id="23" name="Text 21"/>
+          <p:cNvSpPr/>
+          <p:nvPr/>
+        </p:nvSpPr>
+        <p:spPr>
+          <a:xfrm>
+            <a:off x="6519672" y="2258568"/>
+            <a:ext cx="1828800" cy="292608"/>
+          </a:xfrm>
+          <a:prstGeom prst="rect">
+            <a:avLst/>
+          </a:prstGeom>
+          <a:noFill/>
+          <a:ln/>
+        </p:spPr>
+        <p:txBody>
+          <a:bodyPr wrap="square" lIns="0" tIns="0" rIns="0" bIns="0" rtlCol="0" anchor="ctr"/>
+          <a:lstStyle/>
+          <a:p>
+            <a:pPr algn="ctr" indent="0" marL="0">
+              <a:buNone/>
+            </a:pPr>
+            <a:r>
+              <a:rPr lang="en-US" sz="1300" b="1" dirty="0">
+                <a:solidFill>
+                  <a:srgbClr val="9D174D"/>
+                </a:solidFill>
+                <a:latin typeface="Trebuchet MS" pitchFamily="34" charset="0"/>
+                <a:ea typeface="Trebuchet MS" pitchFamily="34" charset="-122"/>
+                <a:cs typeface="Trebuchet MS" pitchFamily="34" charset="-120"/>
+              </a:rPr>
+              <a:t>ness</a:t>
+            </a:r>
+            <a:endParaRPr lang="en-US" sz="1300" dirty="0"/>
+          </a:p>
+        </p:txBody>
+      </p:sp>
+      <p:sp>
+        <p:nvSpPr>
+          <p:cNvPr id="24" name="Text 22"/>
+          <p:cNvSpPr/>
+          <p:nvPr/>
+        </p:nvSpPr>
+        <p:spPr>
+          <a:xfrm>
+            <a:off x="6519672" y="2569464"/>
+            <a:ext cx="1828800" cy="201168"/>
+          </a:xfrm>
+          <a:prstGeom prst="rect">
+            <a:avLst/>
+          </a:prstGeom>
+          <a:noFill/>
+          <a:ln/>
+        </p:spPr>
+        <p:txBody>
+          <a:bodyPr wrap="square" lIns="0" tIns="0" rIns="0" bIns="0" rtlCol="0" anchor="t"/>
+          <a:lstStyle/>
+          <a:p>
+            <a:pPr algn="ctr" indent="0" marL="0">
+              <a:buNone/>
+            </a:pPr>
+            <a:r>
+              <a:rPr lang="en-US" sz="850" dirty="0">
+                <a:solidFill>
+                  <a:srgbClr val="475569"/>
+                </a:solidFill>
+                <a:latin typeface="Calibri" pitchFamily="34" charset="0"/>
+                <a:ea typeface="Calibri" pitchFamily="34" charset="-122"/>
+                <a:cs typeface="Calibri" pitchFamily="34" charset="-120"/>
+              </a:rPr>
+              <a:t>state of</a:t>
+            </a:r>
+            <a:endParaRPr lang="en-US" sz="850" dirty="0"/>
+          </a:p>
+        </p:txBody>
+      </p:sp>
+      <p:sp>
+        <p:nvSpPr>
+          <p:cNvPr id="25" name="Shape 23"/>
           <p:cNvSpPr/>
           <p:nvPr/>
         </p:nvSpPr>
@@ -31865,7 +32489,7 @@
       </p:sp>
       <p:sp>
         <p:nvSpPr>
-          <p:cNvPr id="23" name="Text 21"/>
+          <p:cNvPr id="26" name="Text 24"/>
           <p:cNvSpPr/>
           <p:nvPr/>
         </p:nvSpPr>
@@ -31904,7 +32528,7 @@
       </p:sp>
       <p:sp>
         <p:nvSpPr>
-          <p:cNvPr id="24" name="Shape 22"/>
+          <p:cNvPr id="27" name="Shape 25"/>
           <p:cNvSpPr/>
           <p:nvPr/>
         </p:nvSpPr>
@@ -31931,13 +32555,13 @@
       </p:sp>
       <p:sp>
         <p:nvSpPr>
-          <p:cNvPr id="25" name="Shape 23"/>
-          <p:cNvSpPr/>
-          <p:nvPr/>
-        </p:nvSpPr>
-        <p:spPr>
-          <a:xfrm>
-            <a:off x="4370832" y="3364992"/>
+          <p:cNvPr id="28" name="Shape 26"/>
+          <p:cNvSpPr/>
+          <p:nvPr/>
+        </p:nvSpPr>
+        <p:spPr>
+          <a:xfrm>
+            <a:off x="2313432" y="3364992"/>
             <a:ext cx="1645920" cy="475488"/>
           </a:xfrm>
           <a:prstGeom prst="rect">
@@ -31958,13 +32582,13 @@
       </p:sp>
       <p:sp>
         <p:nvSpPr>
-          <p:cNvPr id="26" name="Text 24"/>
-          <p:cNvSpPr/>
-          <p:nvPr/>
-        </p:nvSpPr>
-        <p:spPr>
-          <a:xfrm>
-            <a:off x="4370832" y="3364992"/>
+          <p:cNvPr id="29" name="Text 27"/>
+          <p:cNvSpPr/>
+          <p:nvPr/>
+        </p:nvSpPr>
+        <p:spPr>
+          <a:xfrm>
+            <a:off x="2313432" y="3364992"/>
             <a:ext cx="1645920" cy="475488"/>
           </a:xfrm>
           <a:prstGeom prst="rect">
@@ -31989,7 +32613,7 @@
                 <a:ea typeface="Trebuchet MS" pitchFamily="34" charset="-122"/>
                 <a:cs typeface="Trebuchet MS" pitchFamily="34" charset="-120"/>
               </a:rPr>
-              <a:t>thanks</a:t>
+              <a:t>thank</a:t>
             </a:r>
             <a:endParaRPr lang="en-US" sz="1400" dirty="0"/>
           </a:p>
@@ -31997,7 +32621,217 @@
       </p:sp>
       <p:sp>
         <p:nvSpPr>
-          <p:cNvPr id="27" name="Shape 25"/>
+          <p:cNvPr id="30" name="Text 28"/>
+          <p:cNvSpPr/>
+          <p:nvPr/>
+        </p:nvSpPr>
+        <p:spPr>
+          <a:xfrm>
+            <a:off x="3959352" y="3364992"/>
+            <a:ext cx="411480" cy="475488"/>
+          </a:xfrm>
+          <a:prstGeom prst="rect">
+            <a:avLst/>
+          </a:prstGeom>
+          <a:noFill/>
+          <a:ln/>
+        </p:spPr>
+        <p:txBody>
+          <a:bodyPr wrap="square" lIns="0" tIns="0" rIns="0" bIns="0" rtlCol="0" anchor="ctr"/>
+          <a:lstStyle/>
+          <a:p>
+            <a:pPr algn="ctr" indent="0" marL="0">
+              <a:buNone/>
+            </a:pPr>
+            <a:r>
+              <a:rPr lang="en-US" sz="1600" b="1" dirty="0">
+                <a:solidFill>
+                  <a:srgbClr val="0D9488"/>
+                </a:solidFill>
+                <a:latin typeface="Trebuchet MS" pitchFamily="34" charset="0"/>
+                <a:ea typeface="Trebuchet MS" pitchFamily="34" charset="-122"/>
+                <a:cs typeface="Trebuchet MS" pitchFamily="34" charset="-120"/>
+              </a:rPr>
+              <a:t>·</a:t>
+            </a:r>
+            <a:endParaRPr lang="en-US" sz="1600" dirty="0"/>
+          </a:p>
+        </p:txBody>
+      </p:sp>
+      <p:sp>
+        <p:nvSpPr>
+          <p:cNvPr id="31" name="Shape 29"/>
+          <p:cNvSpPr/>
+          <p:nvPr/>
+        </p:nvSpPr>
+        <p:spPr>
+          <a:xfrm>
+            <a:off x="4370832" y="3364992"/>
+            <a:ext cx="1645920" cy="475488"/>
+          </a:xfrm>
+          <a:prstGeom prst="rect">
+            <a:avLst>
+              <a:gd name="adj" fmla="val 9615"/>
+            </a:avLst>
+          </a:prstGeom>
+          <a:solidFill>
+            <a:srgbClr val="FFFFFF"/>
+          </a:solidFill>
+          <a:ln w="12700">
+            <a:solidFill>
+              <a:srgbClr val="0D9488"/>
+            </a:solidFill>
+            <a:prstDash val="solid"/>
+          </a:ln>
+        </p:spPr>
+      </p:sp>
+      <p:sp>
+        <p:nvSpPr>
+          <p:cNvPr id="32" name="Text 30"/>
+          <p:cNvSpPr/>
+          <p:nvPr/>
+        </p:nvSpPr>
+        <p:spPr>
+          <a:xfrm>
+            <a:off x="4370832" y="3364992"/>
+            <a:ext cx="1645920" cy="475488"/>
+          </a:xfrm>
+          <a:prstGeom prst="rect">
+            <a:avLst/>
+          </a:prstGeom>
+          <a:noFill/>
+          <a:ln/>
+        </p:spPr>
+        <p:txBody>
+          <a:bodyPr wrap="square" lIns="0" tIns="0" rIns="0" bIns="0" rtlCol="0" anchor="ctr"/>
+          <a:lstStyle/>
+          <a:p>
+            <a:pPr algn="ctr" indent="0" marL="0">
+              <a:buNone/>
+            </a:pPr>
+            <a:r>
+              <a:rPr lang="en-US" sz="1400" b="1" dirty="0">
+                <a:solidFill>
+                  <a:srgbClr val="0D9488"/>
+                </a:solidFill>
+                <a:latin typeface="Trebuchet MS" pitchFamily="34" charset="0"/>
+                <a:ea typeface="Trebuchet MS" pitchFamily="34" charset="-122"/>
+                <a:cs typeface="Trebuchet MS" pitchFamily="34" charset="-120"/>
+              </a:rPr>
+              <a:t>ful</a:t>
+            </a:r>
+            <a:endParaRPr lang="en-US" sz="1400" dirty="0"/>
+          </a:p>
+        </p:txBody>
+      </p:sp>
+      <p:sp>
+        <p:nvSpPr>
+          <p:cNvPr id="33" name="Text 31"/>
+          <p:cNvSpPr/>
+          <p:nvPr/>
+        </p:nvSpPr>
+        <p:spPr>
+          <a:xfrm>
+            <a:off x="6016752" y="3364992"/>
+            <a:ext cx="411480" cy="475488"/>
+          </a:xfrm>
+          <a:prstGeom prst="rect">
+            <a:avLst/>
+          </a:prstGeom>
+          <a:noFill/>
+          <a:ln/>
+        </p:spPr>
+        <p:txBody>
+          <a:bodyPr wrap="square" lIns="0" tIns="0" rIns="0" bIns="0" rtlCol="0" anchor="ctr"/>
+          <a:lstStyle/>
+          <a:p>
+            <a:pPr algn="ctr" indent="0" marL="0">
+              <a:buNone/>
+            </a:pPr>
+            <a:r>
+              <a:rPr lang="en-US" sz="1600" b="1" dirty="0">
+                <a:solidFill>
+                  <a:srgbClr val="0D9488"/>
+                </a:solidFill>
+                <a:latin typeface="Trebuchet MS" pitchFamily="34" charset="0"/>
+                <a:ea typeface="Trebuchet MS" pitchFamily="34" charset="-122"/>
+                <a:cs typeface="Trebuchet MS" pitchFamily="34" charset="-120"/>
+              </a:rPr>
+              <a:t>·</a:t>
+            </a:r>
+            <a:endParaRPr lang="en-US" sz="1600" dirty="0"/>
+          </a:p>
+        </p:txBody>
+      </p:sp>
+      <p:sp>
+        <p:nvSpPr>
+          <p:cNvPr id="34" name="Shape 32"/>
+          <p:cNvSpPr/>
+          <p:nvPr/>
+        </p:nvSpPr>
+        <p:spPr>
+          <a:xfrm>
+            <a:off x="6428232" y="3364992"/>
+            <a:ext cx="1645920" cy="475488"/>
+          </a:xfrm>
+          <a:prstGeom prst="rect">
+            <a:avLst>
+              <a:gd name="adj" fmla="val 9615"/>
+            </a:avLst>
+          </a:prstGeom>
+          <a:solidFill>
+            <a:srgbClr val="FFFFFF"/>
+          </a:solidFill>
+          <a:ln w="12700">
+            <a:solidFill>
+              <a:srgbClr val="0D9488"/>
+            </a:solidFill>
+            <a:prstDash val="solid"/>
+          </a:ln>
+        </p:spPr>
+      </p:sp>
+      <p:sp>
+        <p:nvSpPr>
+          <p:cNvPr id="35" name="Text 33"/>
+          <p:cNvSpPr/>
+          <p:nvPr/>
+        </p:nvSpPr>
+        <p:spPr>
+          <a:xfrm>
+            <a:off x="6428232" y="3364992"/>
+            <a:ext cx="1645920" cy="475488"/>
+          </a:xfrm>
+          <a:prstGeom prst="rect">
+            <a:avLst/>
+          </a:prstGeom>
+          <a:noFill/>
+          <a:ln/>
+        </p:spPr>
+        <p:txBody>
+          <a:bodyPr wrap="square" lIns="0" tIns="0" rIns="0" bIns="0" rtlCol="0" anchor="ctr"/>
+          <a:lstStyle/>
+          <a:p>
+            <a:pPr algn="ctr" indent="0" marL="0">
+              <a:buNone/>
+            </a:pPr>
+            <a:r>
+              <a:rPr lang="en-US" sz="1400" b="1" dirty="0">
+                <a:solidFill>
+                  <a:srgbClr val="0D9488"/>
+                </a:solidFill>
+                <a:latin typeface="Trebuchet MS" pitchFamily="34" charset="0"/>
+                <a:ea typeface="Trebuchet MS" pitchFamily="34" charset="-122"/>
+                <a:cs typeface="Trebuchet MS" pitchFamily="34" charset="-120"/>
+              </a:rPr>
+              <a:t>ness</a:t>
+            </a:r>
+            <a:endParaRPr lang="en-US" sz="1400" dirty="0"/>
+          </a:p>
+        </p:txBody>
+      </p:sp>
+      <p:sp>
+        <p:nvSpPr>
+          <p:cNvPr id="36" name="Shape 34"/>
           <p:cNvSpPr/>
           <p:nvPr/>
         </p:nvSpPr>
@@ -32024,7 +32858,7 @@
       </p:sp>
       <p:sp>
         <p:nvSpPr>
-          <p:cNvPr id="28" name="Text 26"/>
+          <p:cNvPr id="37" name="Text 35"/>
           <p:cNvSpPr/>
           <p:nvPr/>
         </p:nvSpPr>
@@ -32063,7 +32897,7 @@
       </p:sp>
       <p:sp>
         <p:nvSpPr>
-          <p:cNvPr id="29" name="Shape 27"/>
+          <p:cNvPr id="38" name="Shape 36"/>
           <p:cNvSpPr/>
           <p:nvPr/>
         </p:nvSpPr>
@@ -32090,14 +32924,14 @@
       </p:sp>
       <p:sp>
         <p:nvSpPr>
-          <p:cNvPr id="30" name="Shape 28"/>
-          <p:cNvSpPr/>
-          <p:nvPr/>
-        </p:nvSpPr>
-        <p:spPr>
-          <a:xfrm>
-            <a:off x="2427732" y="4169664"/>
-            <a:ext cx="685800" cy="475488"/>
+          <p:cNvPr id="39" name="Shape 37"/>
+          <p:cNvSpPr/>
+          <p:nvPr/>
+        </p:nvSpPr>
+        <p:spPr>
+          <a:xfrm>
+            <a:off x="1951828" y="4169664"/>
+            <a:ext cx="603504" cy="475488"/>
           </a:xfrm>
           <a:prstGeom prst="rect">
             <a:avLst>
@@ -32117,14 +32951,14 @@
       </p:sp>
       <p:sp>
         <p:nvSpPr>
-          <p:cNvPr id="31" name="Text 29"/>
-          <p:cNvSpPr/>
-          <p:nvPr/>
-        </p:nvSpPr>
-        <p:spPr>
-          <a:xfrm>
-            <a:off x="2427732" y="4169664"/>
-            <a:ext cx="685800" cy="475488"/>
+          <p:cNvPr id="40" name="Text 38"/>
+          <p:cNvSpPr/>
+          <p:nvPr/>
+        </p:nvSpPr>
+        <p:spPr>
+          <a:xfrm>
+            <a:off x="1951828" y="4169664"/>
+            <a:ext cx="603504" cy="475488"/>
           </a:xfrm>
           <a:prstGeom prst="rect">
             <a:avLst/>
@@ -32156,14 +32990,14 @@
       </p:sp>
       <p:sp>
         <p:nvSpPr>
-          <p:cNvPr id="32" name="Shape 30"/>
-          <p:cNvSpPr/>
-          <p:nvPr/>
-        </p:nvSpPr>
-        <p:spPr>
-          <a:xfrm>
-            <a:off x="3639312" y="4169664"/>
-            <a:ext cx="685800" cy="475488"/>
+          <p:cNvPr id="41" name="Shape 39"/>
+          <p:cNvSpPr/>
+          <p:nvPr/>
+        </p:nvSpPr>
+        <p:spPr>
+          <a:xfrm>
+            <a:off x="2605209" y="4169664"/>
+            <a:ext cx="603504" cy="475488"/>
           </a:xfrm>
           <a:prstGeom prst="rect">
             <a:avLst>
@@ -32183,14 +33017,14 @@
       </p:sp>
       <p:sp>
         <p:nvSpPr>
-          <p:cNvPr id="33" name="Text 31"/>
-          <p:cNvSpPr/>
-          <p:nvPr/>
-        </p:nvSpPr>
-        <p:spPr>
-          <a:xfrm>
-            <a:off x="3639312" y="4169664"/>
-            <a:ext cx="685800" cy="475488"/>
+          <p:cNvPr id="42" name="Text 40"/>
+          <p:cNvSpPr/>
+          <p:nvPr/>
+        </p:nvSpPr>
+        <p:spPr>
+          <a:xfrm>
+            <a:off x="2605209" y="4169664"/>
+            <a:ext cx="603504" cy="475488"/>
           </a:xfrm>
           <a:prstGeom prst="rect">
             <a:avLst/>
@@ -32222,14 +33056,14 @@
       </p:sp>
       <p:sp>
         <p:nvSpPr>
-          <p:cNvPr id="34" name="Shape 32"/>
-          <p:cNvSpPr/>
-          <p:nvPr/>
-        </p:nvSpPr>
-        <p:spPr>
-          <a:xfrm>
-            <a:off x="4850892" y="4169664"/>
-            <a:ext cx="685800" cy="475488"/>
+          <p:cNvPr id="43" name="Shape 41"/>
+          <p:cNvSpPr/>
+          <p:nvPr/>
+        </p:nvSpPr>
+        <p:spPr>
+          <a:xfrm>
+            <a:off x="3258589" y="4169664"/>
+            <a:ext cx="603504" cy="475488"/>
           </a:xfrm>
           <a:prstGeom prst="rect">
             <a:avLst>
@@ -32249,14 +33083,14 @@
       </p:sp>
       <p:sp>
         <p:nvSpPr>
-          <p:cNvPr id="35" name="Text 33"/>
-          <p:cNvSpPr/>
-          <p:nvPr/>
-        </p:nvSpPr>
-        <p:spPr>
-          <a:xfrm>
-            <a:off x="4850892" y="4169664"/>
-            <a:ext cx="685800" cy="475488"/>
+          <p:cNvPr id="44" name="Text 42"/>
+          <p:cNvSpPr/>
+          <p:nvPr/>
+        </p:nvSpPr>
+        <p:spPr>
+          <a:xfrm>
+            <a:off x="3258589" y="4169664"/>
+            <a:ext cx="603504" cy="475488"/>
           </a:xfrm>
           <a:prstGeom prst="rect">
             <a:avLst/>
@@ -32288,14 +33122,14 @@
       </p:sp>
       <p:sp>
         <p:nvSpPr>
-          <p:cNvPr id="36" name="Shape 34"/>
-          <p:cNvSpPr/>
-          <p:nvPr/>
-        </p:nvSpPr>
-        <p:spPr>
-          <a:xfrm>
-            <a:off x="6062472" y="4169664"/>
-            <a:ext cx="685800" cy="475488"/>
+          <p:cNvPr id="45" name="Shape 43"/>
+          <p:cNvSpPr/>
+          <p:nvPr/>
+        </p:nvSpPr>
+        <p:spPr>
+          <a:xfrm>
+            <a:off x="3911969" y="4169664"/>
+            <a:ext cx="603504" cy="475488"/>
           </a:xfrm>
           <a:prstGeom prst="rect">
             <a:avLst>
@@ -32315,14 +33149,14 @@
       </p:sp>
       <p:sp>
         <p:nvSpPr>
-          <p:cNvPr id="37" name="Text 35"/>
-          <p:cNvSpPr/>
-          <p:nvPr/>
-        </p:nvSpPr>
-        <p:spPr>
-          <a:xfrm>
-            <a:off x="6062472" y="4169664"/>
-            <a:ext cx="685800" cy="475488"/>
+          <p:cNvPr id="46" name="Text 44"/>
+          <p:cNvSpPr/>
+          <p:nvPr/>
+        </p:nvSpPr>
+        <p:spPr>
+          <a:xfrm>
+            <a:off x="3911969" y="4169664"/>
+            <a:ext cx="603504" cy="475488"/>
           </a:xfrm>
           <a:prstGeom prst="rect">
             <a:avLst/>
@@ -32354,14 +33188,14 @@
       </p:sp>
       <p:sp>
         <p:nvSpPr>
-          <p:cNvPr id="38" name="Shape 36"/>
-          <p:cNvSpPr/>
-          <p:nvPr/>
-        </p:nvSpPr>
-        <p:spPr>
-          <a:xfrm>
-            <a:off x="7274052" y="4169664"/>
-            <a:ext cx="685800" cy="475488"/>
+          <p:cNvPr id="47" name="Shape 45"/>
+          <p:cNvSpPr/>
+          <p:nvPr/>
+        </p:nvSpPr>
+        <p:spPr>
+          <a:xfrm>
+            <a:off x="4565350" y="4169664"/>
+            <a:ext cx="603504" cy="475488"/>
           </a:xfrm>
           <a:prstGeom prst="rect">
             <a:avLst>
@@ -32381,14 +33215,14 @@
       </p:sp>
       <p:sp>
         <p:nvSpPr>
-          <p:cNvPr id="39" name="Text 37"/>
-          <p:cNvSpPr/>
-          <p:nvPr/>
-        </p:nvSpPr>
-        <p:spPr>
-          <a:xfrm>
-            <a:off x="7274052" y="4169664"/>
-            <a:ext cx="685800" cy="475488"/>
+          <p:cNvPr id="48" name="Text 46"/>
+          <p:cNvSpPr/>
+          <p:nvPr/>
+        </p:nvSpPr>
+        <p:spPr>
+          <a:xfrm>
+            <a:off x="4565350" y="4169664"/>
+            <a:ext cx="603504" cy="475488"/>
           </a:xfrm>
           <a:prstGeom prst="rect">
             <a:avLst/>
@@ -32412,7 +33246,337 @@
                 <a:ea typeface="Trebuchet MS" pitchFamily="34" charset="-122"/>
                 <a:cs typeface="Trebuchet MS" pitchFamily="34" charset="-120"/>
               </a:rPr>
-              <a:t>s</a:t>
+              <a:t>f</a:t>
+            </a:r>
+            <a:endParaRPr lang="en-US" sz="900" dirty="0"/>
+          </a:p>
+        </p:txBody>
+      </p:sp>
+      <p:sp>
+        <p:nvSpPr>
+          <p:cNvPr id="49" name="Shape 47"/>
+          <p:cNvSpPr/>
+          <p:nvPr/>
+        </p:nvSpPr>
+        <p:spPr>
+          <a:xfrm>
+            <a:off x="5218730" y="4169664"/>
+            <a:ext cx="603504" cy="475488"/>
+          </a:xfrm>
+          <a:prstGeom prst="rect">
+            <a:avLst>
+              <a:gd name="adj" fmla="val 7692"/>
+            </a:avLst>
+          </a:prstGeom>
+          <a:solidFill>
+            <a:srgbClr val="FFFFFF"/>
+          </a:solidFill>
+          <a:ln w="12700">
+            <a:solidFill>
+              <a:srgbClr val="DB2777"/>
+            </a:solidFill>
+            <a:prstDash val="solid"/>
+          </a:ln>
+        </p:spPr>
+      </p:sp>
+      <p:sp>
+        <p:nvSpPr>
+          <p:cNvPr id="50" name="Text 48"/>
+          <p:cNvSpPr/>
+          <p:nvPr/>
+        </p:nvSpPr>
+        <p:spPr>
+          <a:xfrm>
+            <a:off x="5218730" y="4169664"/>
+            <a:ext cx="603504" cy="475488"/>
+          </a:xfrm>
+          <a:prstGeom prst="rect">
+            <a:avLst/>
+          </a:prstGeom>
+          <a:noFill/>
+          <a:ln/>
+        </p:spPr>
+        <p:txBody>
+          <a:bodyPr wrap="square" lIns="0" tIns="0" rIns="0" bIns="0" rtlCol="0" anchor="ctr"/>
+          <a:lstStyle/>
+          <a:p>
+            <a:pPr algn="ctr" indent="0" marL="0">
+              <a:buNone/>
+            </a:pPr>
+            <a:r>
+              <a:rPr lang="en-US" sz="900" b="1" dirty="0">
+                <a:solidFill>
+                  <a:srgbClr val="9D174D"/>
+                </a:solidFill>
+                <a:latin typeface="Trebuchet MS" pitchFamily="34" charset="0"/>
+                <a:ea typeface="Trebuchet MS" pitchFamily="34" charset="-122"/>
+                <a:cs typeface="Trebuchet MS" pitchFamily="34" charset="-120"/>
+              </a:rPr>
+              <a:t>u</a:t>
+            </a:r>
+            <a:endParaRPr lang="en-US" sz="900" dirty="0"/>
+          </a:p>
+        </p:txBody>
+      </p:sp>
+      <p:sp>
+        <p:nvSpPr>
+          <p:cNvPr id="51" name="Shape 49"/>
+          <p:cNvSpPr/>
+          <p:nvPr/>
+        </p:nvSpPr>
+        <p:spPr>
+          <a:xfrm>
+            <a:off x="5872111" y="4169664"/>
+            <a:ext cx="603504" cy="475488"/>
+          </a:xfrm>
+          <a:prstGeom prst="rect">
+            <a:avLst>
+              <a:gd name="adj" fmla="val 7692"/>
+            </a:avLst>
+          </a:prstGeom>
+          <a:solidFill>
+            <a:srgbClr val="FFFFFF"/>
+          </a:solidFill>
+          <a:ln w="12700">
+            <a:solidFill>
+              <a:srgbClr val="DB2777"/>
+            </a:solidFill>
+            <a:prstDash val="solid"/>
+          </a:ln>
+        </p:spPr>
+      </p:sp>
+      <p:sp>
+        <p:nvSpPr>
+          <p:cNvPr id="52" name="Text 50"/>
+          <p:cNvSpPr/>
+          <p:nvPr/>
+        </p:nvSpPr>
+        <p:spPr>
+          <a:xfrm>
+            <a:off x="5872111" y="4169664"/>
+            <a:ext cx="603504" cy="475488"/>
+          </a:xfrm>
+          <a:prstGeom prst="rect">
+            <a:avLst/>
+          </a:prstGeom>
+          <a:noFill/>
+          <a:ln/>
+        </p:spPr>
+        <p:txBody>
+          <a:bodyPr wrap="square" lIns="0" tIns="0" rIns="0" bIns="0" rtlCol="0" anchor="ctr"/>
+          <a:lstStyle/>
+          <a:p>
+            <a:pPr algn="ctr" indent="0" marL="0">
+              <a:buNone/>
+            </a:pPr>
+            <a:r>
+              <a:rPr lang="en-US" sz="900" b="1" dirty="0">
+                <a:solidFill>
+                  <a:srgbClr val="9D174D"/>
+                </a:solidFill>
+                <a:latin typeface="Trebuchet MS" pitchFamily="34" charset="0"/>
+                <a:ea typeface="Trebuchet MS" pitchFamily="34" charset="-122"/>
+                <a:cs typeface="Trebuchet MS" pitchFamily="34" charset="-120"/>
+              </a:rPr>
+              <a:t>l</a:t>
+            </a:r>
+            <a:endParaRPr lang="en-US" sz="900" dirty="0"/>
+          </a:p>
+        </p:txBody>
+      </p:sp>
+      <p:sp>
+        <p:nvSpPr>
+          <p:cNvPr id="53" name="Shape 51"/>
+          <p:cNvSpPr/>
+          <p:nvPr/>
+        </p:nvSpPr>
+        <p:spPr>
+          <a:xfrm>
+            <a:off x="6525491" y="4169664"/>
+            <a:ext cx="603504" cy="475488"/>
+          </a:xfrm>
+          <a:prstGeom prst="rect">
+            <a:avLst>
+              <a:gd name="adj" fmla="val 7692"/>
+            </a:avLst>
+          </a:prstGeom>
+          <a:solidFill>
+            <a:srgbClr val="FFFFFF"/>
+          </a:solidFill>
+          <a:ln w="12700">
+            <a:solidFill>
+              <a:srgbClr val="DB2777"/>
+            </a:solidFill>
+            <a:prstDash val="solid"/>
+          </a:ln>
+        </p:spPr>
+      </p:sp>
+      <p:sp>
+        <p:nvSpPr>
+          <p:cNvPr id="54" name="Text 52"/>
+          <p:cNvSpPr/>
+          <p:nvPr/>
+        </p:nvSpPr>
+        <p:spPr>
+          <a:xfrm>
+            <a:off x="6525491" y="4169664"/>
+            <a:ext cx="603504" cy="475488"/>
+          </a:xfrm>
+          <a:prstGeom prst="rect">
+            <a:avLst/>
+          </a:prstGeom>
+          <a:noFill/>
+          <a:ln/>
+        </p:spPr>
+        <p:txBody>
+          <a:bodyPr wrap="square" lIns="0" tIns="0" rIns="0" bIns="0" rtlCol="0" anchor="ctr"/>
+          <a:lstStyle/>
+          <a:p>
+            <a:pPr algn="ctr" indent="0" marL="0">
+              <a:buNone/>
+            </a:pPr>
+            <a:r>
+              <a:rPr lang="en-US" sz="900" b="1" dirty="0">
+                <a:solidFill>
+                  <a:srgbClr val="9D174D"/>
+                </a:solidFill>
+                <a:latin typeface="Trebuchet MS" pitchFamily="34" charset="0"/>
+                <a:ea typeface="Trebuchet MS" pitchFamily="34" charset="-122"/>
+                <a:cs typeface="Trebuchet MS" pitchFamily="34" charset="-120"/>
+              </a:rPr>
+              <a:t>n</a:t>
+            </a:r>
+            <a:endParaRPr lang="en-US" sz="900" dirty="0"/>
+          </a:p>
+        </p:txBody>
+      </p:sp>
+      <p:sp>
+        <p:nvSpPr>
+          <p:cNvPr id="55" name="Shape 53"/>
+          <p:cNvSpPr/>
+          <p:nvPr/>
+        </p:nvSpPr>
+        <p:spPr>
+          <a:xfrm>
+            <a:off x="7178871" y="4169664"/>
+            <a:ext cx="603504" cy="475488"/>
+          </a:xfrm>
+          <a:prstGeom prst="rect">
+            <a:avLst>
+              <a:gd name="adj" fmla="val 7692"/>
+            </a:avLst>
+          </a:prstGeom>
+          <a:solidFill>
+            <a:srgbClr val="FFFFFF"/>
+          </a:solidFill>
+          <a:ln w="12700">
+            <a:solidFill>
+              <a:srgbClr val="DB2777"/>
+            </a:solidFill>
+            <a:prstDash val="solid"/>
+          </a:ln>
+        </p:spPr>
+      </p:sp>
+      <p:sp>
+        <p:nvSpPr>
+          <p:cNvPr id="56" name="Text 54"/>
+          <p:cNvSpPr/>
+          <p:nvPr/>
+        </p:nvSpPr>
+        <p:spPr>
+          <a:xfrm>
+            <a:off x="7178871" y="4169664"/>
+            <a:ext cx="603504" cy="475488"/>
+          </a:xfrm>
+          <a:prstGeom prst="rect">
+            <a:avLst/>
+          </a:prstGeom>
+          <a:noFill/>
+          <a:ln/>
+        </p:spPr>
+        <p:txBody>
+          <a:bodyPr wrap="square" lIns="0" tIns="0" rIns="0" bIns="0" rtlCol="0" anchor="ctr"/>
+          <a:lstStyle/>
+          <a:p>
+            <a:pPr algn="ctr" indent="0" marL="0">
+              <a:buNone/>
+            </a:pPr>
+            <a:r>
+              <a:rPr lang="en-US" sz="900" b="1" dirty="0">
+                <a:solidFill>
+                  <a:srgbClr val="9D174D"/>
+                </a:solidFill>
+                <a:latin typeface="Trebuchet MS" pitchFamily="34" charset="0"/>
+                <a:ea typeface="Trebuchet MS" pitchFamily="34" charset="-122"/>
+                <a:cs typeface="Trebuchet MS" pitchFamily="34" charset="-120"/>
+              </a:rPr>
+              <a:t>e</a:t>
+            </a:r>
+            <a:endParaRPr lang="en-US" sz="900" dirty="0"/>
+          </a:p>
+        </p:txBody>
+      </p:sp>
+      <p:sp>
+        <p:nvSpPr>
+          <p:cNvPr id="57" name="Shape 55"/>
+          <p:cNvSpPr/>
+          <p:nvPr/>
+        </p:nvSpPr>
+        <p:spPr>
+          <a:xfrm>
+            <a:off x="7832252" y="4169664"/>
+            <a:ext cx="603504" cy="475488"/>
+          </a:xfrm>
+          <a:prstGeom prst="rect">
+            <a:avLst>
+              <a:gd name="adj" fmla="val 7692"/>
+            </a:avLst>
+          </a:prstGeom>
+          <a:solidFill>
+            <a:srgbClr val="FFFFFF"/>
+          </a:solidFill>
+          <a:ln w="12700">
+            <a:solidFill>
+              <a:srgbClr val="DB2777"/>
+            </a:solidFill>
+            <a:prstDash val="solid"/>
+          </a:ln>
+        </p:spPr>
+      </p:sp>
+      <p:sp>
+        <p:nvSpPr>
+          <p:cNvPr id="58" name="Text 56"/>
+          <p:cNvSpPr/>
+          <p:nvPr/>
+        </p:nvSpPr>
+        <p:spPr>
+          <a:xfrm>
+            <a:off x="7832252" y="4169664"/>
+            <a:ext cx="603504" cy="475488"/>
+          </a:xfrm>
+          <a:prstGeom prst="rect">
+            <a:avLst/>
+          </a:prstGeom>
+          <a:noFill/>
+          <a:ln/>
+        </p:spPr>
+        <p:txBody>
+          <a:bodyPr wrap="square" lIns="0" tIns="0" rIns="0" bIns="0" rtlCol="0" anchor="ctr"/>
+          <a:lstStyle/>
+          <a:p>
+            <a:pPr algn="ctr" indent="0" marL="0">
+              <a:buNone/>
+            </a:pPr>
+            <a:r>
+              <a:rPr lang="en-US" sz="900" b="1" dirty="0">
+                <a:solidFill>
+                  <a:srgbClr val="9D174D"/>
+                </a:solidFill>
+                <a:latin typeface="Trebuchet MS" pitchFamily="34" charset="0"/>
+                <a:ea typeface="Trebuchet MS" pitchFamily="34" charset="-122"/>
+                <a:cs typeface="Trebuchet MS" pitchFamily="34" charset="-120"/>
+              </a:rPr>
+              <a:t>ss</a:t>
             </a:r>
             <a:endParaRPr lang="en-US" sz="900" dirty="0"/>
           </a:p>
@@ -32704,7 +33868,7 @@
                 <a:ea typeface="Calibri" pitchFamily="34" charset="-122"/>
                 <a:cs typeface="Calibri" pitchFamily="34" charset="-120"/>
               </a:rPr>
-              <a:t>Word Labs  •  wordlabs.app  •  Root: 'thank' = express gratitude or praise</a:t>
+              <a:t>Word Labs  •  wordlabs.app  •  Root: 'thank' = to show you are grateful</a:t>
             </a:r>
             <a:endParaRPr lang="en-US" sz="800" dirty="0"/>
           </a:p>
@@ -33873,7 +35037,7 @@
                 <a:ea typeface="Calibri" pitchFamily="34" charset="-122"/>
                 <a:cs typeface="Calibri" pitchFamily="34" charset="-120"/>
               </a:rPr>
-              <a:t>Word Labs  •  wordlabs.app  •  Root: 'thank' = express gratitude or praise</a:t>
+              <a:t>Word Labs  •  wordlabs.app  •  Root: 'thank' = to show you are grateful</a:t>
             </a:r>
             <a:endParaRPr lang="en-US" sz="800" dirty="0"/>
           </a:p>
@@ -34131,7 +35295,7 @@
             <a:avLst/>
           </a:prstGeom>
           <a:solidFill>
-            <a:srgbClr val="DDD6FE"/>
+            <a:srgbClr val="F8FAFC"/>
           </a:solidFill>
           <a:ln w="12700">
             <a:solidFill>
@@ -34143,14 +35307,39 @@
       </p:sp>
       <p:sp>
         <p:nvSpPr>
-          <p:cNvPr id="18" name="Text 16"/>
-          <p:cNvSpPr/>
-          <p:nvPr/>
-        </p:nvSpPr>
-        <p:spPr>
-          <a:xfrm>
-            <a:off x="365760" y="1563624"/>
-            <a:ext cx="2468880" cy="402336"/>
+          <p:cNvPr id="18" name="Shape 16"/>
+          <p:cNvSpPr/>
+          <p:nvPr/>
+        </p:nvSpPr>
+        <p:spPr>
+          <a:xfrm>
+            <a:off x="2971800" y="1563624"/>
+            <a:ext cx="2834640" cy="402336"/>
+          </a:xfrm>
+          <a:prstGeom prst="rect">
+            <a:avLst/>
+          </a:prstGeom>
+          <a:solidFill>
+            <a:srgbClr val="CCFBF1"/>
+          </a:solidFill>
+          <a:ln w="12700">
+            <a:solidFill>
+              <a:srgbClr val="E2E8F0"/>
+            </a:solidFill>
+            <a:prstDash val="solid"/>
+          </a:ln>
+        </p:spPr>
+      </p:sp>
+      <p:sp>
+        <p:nvSpPr>
+          <p:cNvPr id="19" name="Text 17"/>
+          <p:cNvSpPr/>
+          <p:nvPr/>
+        </p:nvSpPr>
+        <p:spPr>
+          <a:xfrm>
+            <a:off x="2971800" y="1563624"/>
+            <a:ext cx="2834640" cy="402336"/>
           </a:xfrm>
           <a:prstGeom prst="rect">
             <a:avLst/>
@@ -34168,13 +35357,13 @@
             <a:r>
               <a:rPr lang="en-US" sz="1300" b="1" dirty="0">
                 <a:solidFill>
-                  <a:srgbClr val="4C1D95"/>
+                  <a:srgbClr val="0F766E"/>
                 </a:solidFill>
                 <a:latin typeface="Trebuchet MS" pitchFamily="34" charset="0"/>
                 <a:ea typeface="Trebuchet MS" pitchFamily="34" charset="-122"/>
                 <a:cs typeface="Trebuchet MS" pitchFamily="34" charset="-120"/>
               </a:rPr>
-              <a:t>un-</a:t>
+              <a:t>thank</a:t>
             </a:r>
             <a:endParaRPr lang="en-US" sz="1300" dirty="0"/>
           </a:p>
@@ -34182,20 +35371,20 @@
       </p:sp>
       <p:sp>
         <p:nvSpPr>
-          <p:cNvPr id="19" name="Shape 17"/>
-          <p:cNvSpPr/>
-          <p:nvPr/>
-        </p:nvSpPr>
-        <p:spPr>
-          <a:xfrm>
-            <a:off x="2971800" y="1563624"/>
+          <p:cNvPr id="20" name="Shape 18"/>
+          <p:cNvSpPr/>
+          <p:nvPr/>
+        </p:nvSpPr>
+        <p:spPr>
+          <a:xfrm>
+            <a:off x="5943600" y="1563624"/>
             <a:ext cx="2834640" cy="402336"/>
           </a:xfrm>
           <a:prstGeom prst="rect">
             <a:avLst/>
           </a:prstGeom>
           <a:solidFill>
-            <a:srgbClr val="CCFBF1"/>
+            <a:srgbClr val="FCE7F3"/>
           </a:solidFill>
           <a:ln w="12700">
             <a:solidFill>
@@ -34207,13 +35396,13 @@
       </p:sp>
       <p:sp>
         <p:nvSpPr>
-          <p:cNvPr id="20" name="Text 18"/>
-          <p:cNvSpPr/>
-          <p:nvPr/>
-        </p:nvSpPr>
-        <p:spPr>
-          <a:xfrm>
-            <a:off x="2971800" y="1563624"/>
+          <p:cNvPr id="21" name="Text 19"/>
+          <p:cNvSpPr/>
+          <p:nvPr/>
+        </p:nvSpPr>
+        <p:spPr>
+          <a:xfrm>
+            <a:off x="5943600" y="1563624"/>
             <a:ext cx="2834640" cy="402336"/>
           </a:xfrm>
           <a:prstGeom prst="rect">
@@ -34232,13 +35421,13 @@
             <a:r>
               <a:rPr lang="en-US" sz="1300" b="1" dirty="0">
                 <a:solidFill>
-                  <a:srgbClr val="0F766E"/>
+                  <a:srgbClr val="9D174D"/>
                 </a:solidFill>
                 <a:latin typeface="Trebuchet MS" pitchFamily="34" charset="0"/>
                 <a:ea typeface="Trebuchet MS" pitchFamily="34" charset="-122"/>
                 <a:cs typeface="Trebuchet MS" pitchFamily="34" charset="-120"/>
               </a:rPr>
-              <a:t>thank</a:t>
+              <a:t>-ed</a:t>
             </a:r>
             <a:endParaRPr lang="en-US" sz="1300" dirty="0"/>
           </a:p>
@@ -34246,19 +35435,69 @@
       </p:sp>
       <p:sp>
         <p:nvSpPr>
-          <p:cNvPr id="21" name="Shape 19"/>
-          <p:cNvSpPr/>
-          <p:nvPr/>
-        </p:nvSpPr>
-        <p:spPr>
-          <a:xfrm>
-            <a:off x="5943600" y="1563624"/>
+          <p:cNvPr id="22" name="Shape 20"/>
+          <p:cNvSpPr/>
+          <p:nvPr/>
+        </p:nvSpPr>
+        <p:spPr>
+          <a:xfrm>
+            <a:off x="365760" y="1984248"/>
+            <a:ext cx="2468880" cy="402336"/>
+          </a:xfrm>
+          <a:prstGeom prst="rect">
+            <a:avLst/>
+          </a:prstGeom>
+          <a:solidFill>
+            <a:srgbClr val="F1F5F9"/>
+          </a:solidFill>
+          <a:ln w="12700">
+            <a:solidFill>
+              <a:srgbClr val="E2E8F0"/>
+            </a:solidFill>
+            <a:prstDash val="solid"/>
+          </a:ln>
+        </p:spPr>
+      </p:sp>
+      <p:sp>
+        <p:nvSpPr>
+          <p:cNvPr id="23" name="Shape 21"/>
+          <p:cNvSpPr/>
+          <p:nvPr/>
+        </p:nvSpPr>
+        <p:spPr>
+          <a:xfrm>
+            <a:off x="2971800" y="1984248"/>
             <a:ext cx="2834640" cy="402336"/>
           </a:xfrm>
           <a:prstGeom prst="rect">
             <a:avLst/>
           </a:prstGeom>
           <a:solidFill>
+            <a:srgbClr val="F1F5F9"/>
+          </a:solidFill>
+          <a:ln w="12700">
+            <a:solidFill>
+              <a:srgbClr val="E2E8F0"/>
+            </a:solidFill>
+            <a:prstDash val="solid"/>
+          </a:ln>
+        </p:spPr>
+      </p:sp>
+      <p:sp>
+        <p:nvSpPr>
+          <p:cNvPr id="24" name="Shape 22"/>
+          <p:cNvSpPr/>
+          <p:nvPr/>
+        </p:nvSpPr>
+        <p:spPr>
+          <a:xfrm>
+            <a:off x="5943600" y="1984248"/>
+            <a:ext cx="2834640" cy="402336"/>
+          </a:xfrm>
+          <a:prstGeom prst="rect">
+            <a:avLst/>
+          </a:prstGeom>
+          <a:solidFill>
             <a:srgbClr val="FCE7F3"/>
           </a:solidFill>
           <a:ln w="12700">
@@ -34271,13 +35510,13 @@
       </p:sp>
       <p:sp>
         <p:nvSpPr>
-          <p:cNvPr id="22" name="Text 20"/>
-          <p:cNvSpPr/>
-          <p:nvPr/>
-        </p:nvSpPr>
-        <p:spPr>
-          <a:xfrm>
-            <a:off x="5943600" y="1563624"/>
+          <p:cNvPr id="25" name="Text 23"/>
+          <p:cNvSpPr/>
+          <p:nvPr/>
+        </p:nvSpPr>
+        <p:spPr>
+          <a:xfrm>
+            <a:off x="5943600" y="1984248"/>
             <a:ext cx="2834640" cy="402336"/>
           </a:xfrm>
           <a:prstGeom prst="rect">
@@ -34302,7 +35541,7 @@
                 <a:ea typeface="Trebuchet MS" pitchFamily="34" charset="-122"/>
                 <a:cs typeface="Trebuchet MS" pitchFamily="34" charset="-120"/>
               </a:rPr>
-              <a:t>-s</a:t>
+              <a:t>-ful</a:t>
             </a:r>
             <a:endParaRPr lang="en-US" sz="1300" dirty="0"/>
           </a:p>
@@ -34310,20 +35549,20 @@
       </p:sp>
       <p:sp>
         <p:nvSpPr>
-          <p:cNvPr id="23" name="Shape 21"/>
-          <p:cNvSpPr/>
-          <p:nvPr/>
-        </p:nvSpPr>
-        <p:spPr>
-          <a:xfrm>
-            <a:off x="365760" y="1984248"/>
+          <p:cNvPr id="26" name="Shape 24"/>
+          <p:cNvSpPr/>
+          <p:nvPr/>
+        </p:nvSpPr>
+        <p:spPr>
+          <a:xfrm>
+            <a:off x="365760" y="2404872"/>
             <a:ext cx="2468880" cy="402336"/>
           </a:xfrm>
           <a:prstGeom prst="rect">
             <a:avLst/>
           </a:prstGeom>
           <a:solidFill>
-            <a:srgbClr val="DDD6FE"/>
+            <a:srgbClr val="F8FAFC"/>
           </a:solidFill>
           <a:ln w="12700">
             <a:solidFill>
@@ -34335,14 +35574,64 @@
       </p:sp>
       <p:sp>
         <p:nvSpPr>
-          <p:cNvPr id="24" name="Text 22"/>
-          <p:cNvSpPr/>
-          <p:nvPr/>
-        </p:nvSpPr>
-        <p:spPr>
-          <a:xfrm>
-            <a:off x="365760" y="1984248"/>
-            <a:ext cx="2468880" cy="402336"/>
+          <p:cNvPr id="27" name="Shape 25"/>
+          <p:cNvSpPr/>
+          <p:nvPr/>
+        </p:nvSpPr>
+        <p:spPr>
+          <a:xfrm>
+            <a:off x="2971800" y="2404872"/>
+            <a:ext cx="2834640" cy="402336"/>
+          </a:xfrm>
+          <a:prstGeom prst="rect">
+            <a:avLst/>
+          </a:prstGeom>
+          <a:solidFill>
+            <a:srgbClr val="F8FAFC"/>
+          </a:solidFill>
+          <a:ln w="12700">
+            <a:solidFill>
+              <a:srgbClr val="E2E8F0"/>
+            </a:solidFill>
+            <a:prstDash val="solid"/>
+          </a:ln>
+        </p:spPr>
+      </p:sp>
+      <p:sp>
+        <p:nvSpPr>
+          <p:cNvPr id="28" name="Shape 26"/>
+          <p:cNvSpPr/>
+          <p:nvPr/>
+        </p:nvSpPr>
+        <p:spPr>
+          <a:xfrm>
+            <a:off x="5943600" y="2404872"/>
+            <a:ext cx="2834640" cy="402336"/>
+          </a:xfrm>
+          <a:prstGeom prst="rect">
+            <a:avLst/>
+          </a:prstGeom>
+          <a:solidFill>
+            <a:srgbClr val="FCE7F3"/>
+          </a:solidFill>
+          <a:ln w="12700">
+            <a:solidFill>
+              <a:srgbClr val="E2E8F0"/>
+            </a:solidFill>
+            <a:prstDash val="solid"/>
+          </a:ln>
+        </p:spPr>
+      </p:sp>
+      <p:sp>
+        <p:nvSpPr>
+          <p:cNvPr id="29" name="Text 27"/>
+          <p:cNvSpPr/>
+          <p:nvPr/>
+        </p:nvSpPr>
+        <p:spPr>
+          <a:xfrm>
+            <a:off x="5943600" y="2404872"/>
+            <a:ext cx="2834640" cy="402336"/>
           </a:xfrm>
           <a:prstGeom prst="rect">
             <a:avLst/>
@@ -34360,13 +35649,13 @@
             <a:r>
               <a:rPr lang="en-US" sz="1300" b="1" dirty="0">
                 <a:solidFill>
-                  <a:srgbClr val="4C1D95"/>
+                  <a:srgbClr val="9D174D"/>
                 </a:solidFill>
                 <a:latin typeface="Trebuchet MS" pitchFamily="34" charset="0"/>
                 <a:ea typeface="Trebuchet MS" pitchFamily="34" charset="-122"/>
                 <a:cs typeface="Trebuchet MS" pitchFamily="34" charset="-120"/>
               </a:rPr>
-              <a:t>dis-</a:t>
+              <a:t>-ing</a:t>
             </a:r>
             <a:endParaRPr lang="en-US" sz="1300" dirty="0"/>
           </a:p>
@@ -34374,13 +35663,38 @@
       </p:sp>
       <p:sp>
         <p:nvSpPr>
-          <p:cNvPr id="25" name="Shape 23"/>
-          <p:cNvSpPr/>
-          <p:nvPr/>
-        </p:nvSpPr>
-        <p:spPr>
-          <a:xfrm>
-            <a:off x="2971800" y="1984248"/>
+          <p:cNvPr id="30" name="Shape 28"/>
+          <p:cNvSpPr/>
+          <p:nvPr/>
+        </p:nvSpPr>
+        <p:spPr>
+          <a:xfrm>
+            <a:off x="365760" y="2825496"/>
+            <a:ext cx="2468880" cy="402336"/>
+          </a:xfrm>
+          <a:prstGeom prst="rect">
+            <a:avLst/>
+          </a:prstGeom>
+          <a:solidFill>
+            <a:srgbClr val="F1F5F9"/>
+          </a:solidFill>
+          <a:ln w="12700">
+            <a:solidFill>
+              <a:srgbClr val="E2E8F0"/>
+            </a:solidFill>
+            <a:prstDash val="solid"/>
+          </a:ln>
+        </p:spPr>
+      </p:sp>
+      <p:sp>
+        <p:nvSpPr>
+          <p:cNvPr id="31" name="Shape 29"/>
+          <p:cNvSpPr/>
+          <p:nvPr/>
+        </p:nvSpPr>
+        <p:spPr>
+          <a:xfrm>
+            <a:off x="2971800" y="2825496"/>
             <a:ext cx="2834640" cy="402336"/>
           </a:xfrm>
           <a:prstGeom prst="rect">
@@ -34399,13 +35713,13 @@
       </p:sp>
       <p:sp>
         <p:nvSpPr>
-          <p:cNvPr id="26" name="Shape 24"/>
-          <p:cNvSpPr/>
-          <p:nvPr/>
-        </p:nvSpPr>
-        <p:spPr>
-          <a:xfrm>
-            <a:off x="5943600" y="1984248"/>
+          <p:cNvPr id="32" name="Shape 30"/>
+          <p:cNvSpPr/>
+          <p:nvPr/>
+        </p:nvSpPr>
+        <p:spPr>
+          <a:xfrm>
+            <a:off x="5943600" y="2825496"/>
             <a:ext cx="2834640" cy="402336"/>
           </a:xfrm>
           <a:prstGeom prst="rect">
@@ -34424,13 +35738,13 @@
       </p:sp>
       <p:sp>
         <p:nvSpPr>
-          <p:cNvPr id="27" name="Text 25"/>
-          <p:cNvSpPr/>
-          <p:nvPr/>
-        </p:nvSpPr>
-        <p:spPr>
-          <a:xfrm>
-            <a:off x="5943600" y="1984248"/>
+          <p:cNvPr id="33" name="Text 31"/>
+          <p:cNvSpPr/>
+          <p:nvPr/>
+        </p:nvSpPr>
+        <p:spPr>
+          <a:xfrm>
+            <a:off x="5943600" y="2825496"/>
             <a:ext cx="2834640" cy="402336"/>
           </a:xfrm>
           <a:prstGeom prst="rect">
@@ -34455,7 +35769,7 @@
                 <a:ea typeface="Trebuchet MS" pitchFamily="34" charset="-122"/>
                 <a:cs typeface="Trebuchet MS" pitchFamily="34" charset="-120"/>
               </a:rPr>
-              <a:t>-ed</a:t>
+              <a:t>-less</a:t>
             </a:r>
             <a:endParaRPr lang="en-US" sz="1300" dirty="0"/>
           </a:p>
@@ -34463,20 +35777,20 @@
       </p:sp>
       <p:sp>
         <p:nvSpPr>
-          <p:cNvPr id="28" name="Shape 26"/>
-          <p:cNvSpPr/>
-          <p:nvPr/>
-        </p:nvSpPr>
-        <p:spPr>
-          <a:xfrm>
-            <a:off x="365760" y="2404872"/>
+          <p:cNvPr id="34" name="Shape 32"/>
+          <p:cNvSpPr/>
+          <p:nvPr/>
+        </p:nvSpPr>
+        <p:spPr>
+          <a:xfrm>
+            <a:off x="365760" y="3246120"/>
             <a:ext cx="2468880" cy="402336"/>
           </a:xfrm>
           <a:prstGeom prst="rect">
             <a:avLst/>
           </a:prstGeom>
           <a:solidFill>
-            <a:srgbClr val="DDD6FE"/>
+            <a:srgbClr val="F8FAFC"/>
           </a:solidFill>
           <a:ln w="12700">
             <a:solidFill>
@@ -34488,14 +35802,64 @@
       </p:sp>
       <p:sp>
         <p:nvSpPr>
-          <p:cNvPr id="29" name="Text 27"/>
-          <p:cNvSpPr/>
-          <p:nvPr/>
-        </p:nvSpPr>
-        <p:spPr>
-          <a:xfrm>
-            <a:off x="365760" y="2404872"/>
-            <a:ext cx="2468880" cy="402336"/>
+          <p:cNvPr id="35" name="Shape 33"/>
+          <p:cNvSpPr/>
+          <p:nvPr/>
+        </p:nvSpPr>
+        <p:spPr>
+          <a:xfrm>
+            <a:off x="2971800" y="3246120"/>
+            <a:ext cx="2834640" cy="402336"/>
+          </a:xfrm>
+          <a:prstGeom prst="rect">
+            <a:avLst/>
+          </a:prstGeom>
+          <a:solidFill>
+            <a:srgbClr val="F8FAFC"/>
+          </a:solidFill>
+          <a:ln w="12700">
+            <a:solidFill>
+              <a:srgbClr val="E2E8F0"/>
+            </a:solidFill>
+            <a:prstDash val="solid"/>
+          </a:ln>
+        </p:spPr>
+      </p:sp>
+      <p:sp>
+        <p:nvSpPr>
+          <p:cNvPr id="36" name="Shape 34"/>
+          <p:cNvSpPr/>
+          <p:nvPr/>
+        </p:nvSpPr>
+        <p:spPr>
+          <a:xfrm>
+            <a:off x="5943600" y="3246120"/>
+            <a:ext cx="2834640" cy="402336"/>
+          </a:xfrm>
+          <a:prstGeom prst="rect">
+            <a:avLst/>
+          </a:prstGeom>
+          <a:solidFill>
+            <a:srgbClr val="FCE7F3"/>
+          </a:solidFill>
+          <a:ln w="12700">
+            <a:solidFill>
+              <a:srgbClr val="E2E8F0"/>
+            </a:solidFill>
+            <a:prstDash val="solid"/>
+          </a:ln>
+        </p:spPr>
+      </p:sp>
+      <p:sp>
+        <p:nvSpPr>
+          <p:cNvPr id="37" name="Text 35"/>
+          <p:cNvSpPr/>
+          <p:nvPr/>
+        </p:nvSpPr>
+        <p:spPr>
+          <a:xfrm>
+            <a:off x="5943600" y="3246120"/>
+            <a:ext cx="2834640" cy="402336"/>
           </a:xfrm>
           <a:prstGeom prst="rect">
             <a:avLst/>
@@ -34513,13 +35877,13 @@
             <a:r>
               <a:rPr lang="en-US" sz="1300" b="1" dirty="0">
                 <a:solidFill>
-                  <a:srgbClr val="4C1D95"/>
+                  <a:srgbClr val="9D174D"/>
                 </a:solidFill>
                 <a:latin typeface="Trebuchet MS" pitchFamily="34" charset="0"/>
                 <a:ea typeface="Trebuchet MS" pitchFamily="34" charset="-122"/>
                 <a:cs typeface="Trebuchet MS" pitchFamily="34" charset="-120"/>
               </a:rPr>
-              <a:t>over-</a:t>
+              <a:t>-s</a:t>
             </a:r>
             <a:endParaRPr lang="en-US" sz="1300" dirty="0"/>
           </a:p>
@@ -34527,64 +35891,14 @@
       </p:sp>
       <p:sp>
         <p:nvSpPr>
-          <p:cNvPr id="30" name="Shape 28"/>
-          <p:cNvSpPr/>
-          <p:nvPr/>
-        </p:nvSpPr>
-        <p:spPr>
-          <a:xfrm>
-            <a:off x="2971800" y="2404872"/>
-            <a:ext cx="2834640" cy="402336"/>
-          </a:xfrm>
-          <a:prstGeom prst="rect">
-            <a:avLst/>
-          </a:prstGeom>
-          <a:solidFill>
-            <a:srgbClr val="F8FAFC"/>
-          </a:solidFill>
-          <a:ln w="12700">
-            <a:solidFill>
-              <a:srgbClr val="E2E8F0"/>
-            </a:solidFill>
-            <a:prstDash val="solid"/>
-          </a:ln>
-        </p:spPr>
-      </p:sp>
-      <p:sp>
-        <p:nvSpPr>
-          <p:cNvPr id="31" name="Shape 29"/>
-          <p:cNvSpPr/>
-          <p:nvPr/>
-        </p:nvSpPr>
-        <p:spPr>
-          <a:xfrm>
-            <a:off x="5943600" y="2404872"/>
-            <a:ext cx="2834640" cy="402336"/>
-          </a:xfrm>
-          <a:prstGeom prst="rect">
-            <a:avLst/>
-          </a:prstGeom>
-          <a:solidFill>
-            <a:srgbClr val="FCE7F3"/>
-          </a:solidFill>
-          <a:ln w="12700">
-            <a:solidFill>
-              <a:srgbClr val="E2E8F0"/>
-            </a:solidFill>
-            <a:prstDash val="solid"/>
-          </a:ln>
-        </p:spPr>
-      </p:sp>
-      <p:sp>
-        <p:nvSpPr>
-          <p:cNvPr id="32" name="Text 30"/>
-          <p:cNvSpPr/>
-          <p:nvPr/>
-        </p:nvSpPr>
-        <p:spPr>
-          <a:xfrm>
-            <a:off x="5943600" y="2404872"/>
-            <a:ext cx="2834640" cy="402336"/>
+          <p:cNvPr id="38" name="Text 36"/>
+          <p:cNvSpPr/>
+          <p:nvPr/>
+        </p:nvSpPr>
+        <p:spPr>
+          <a:xfrm>
+            <a:off x="365760" y="3611880"/>
+            <a:ext cx="1828800" cy="347472"/>
           </a:xfrm>
           <a:prstGeom prst="rect">
             <a:avLst/>
@@ -34596,59 +35910,61 @@
           <a:bodyPr wrap="square" lIns="0" tIns="0" rIns="0" bIns="0" rtlCol="0" anchor="ctr"/>
           <a:lstStyle/>
           <a:p>
-            <a:pPr algn="ctr" indent="0" marL="0">
-              <a:buNone/>
-            </a:pPr>
-            <a:r>
-              <a:rPr lang="en-US" sz="1300" b="1" dirty="0">
-                <a:solidFill>
-                  <a:srgbClr val="9D174D"/>
+            <a:pPr algn="l" indent="0" marL="0">
+              <a:buNone/>
+            </a:pPr>
+            <a:r>
+              <a:rPr lang="en-US" sz="1200" b="1" dirty="0">
+                <a:solidFill>
+                  <a:srgbClr val="0F172A"/>
                 </a:solidFill>
                 <a:latin typeface="Trebuchet MS" pitchFamily="34" charset="0"/>
                 <a:ea typeface="Trebuchet MS" pitchFamily="34" charset="-122"/>
                 <a:cs typeface="Trebuchet MS" pitchFamily="34" charset="-120"/>
               </a:rPr>
-              <a:t>-ing</a:t>
-            </a:r>
-            <a:endParaRPr lang="en-US" sz="1300" dirty="0"/>
-          </a:p>
-        </p:txBody>
-      </p:sp>
-      <p:sp>
-        <p:nvSpPr>
-          <p:cNvPr id="33" name="Shape 31"/>
-          <p:cNvSpPr/>
-          <p:nvPr/>
-        </p:nvSpPr>
-        <p:spPr>
-          <a:xfrm>
-            <a:off x="365760" y="2825496"/>
-            <a:ext cx="2468880" cy="402336"/>
-          </a:xfrm>
-          <a:prstGeom prst="rect">
-            <a:avLst/>
-          </a:prstGeom>
-          <a:solidFill>
-            <a:srgbClr val="DDD6FE"/>
-          </a:solidFill>
-          <a:ln w="12700">
-            <a:solidFill>
-              <a:srgbClr val="E2E8F0"/>
-            </a:solidFill>
-            <a:prstDash val="solid"/>
-          </a:ln>
-        </p:spPr>
-      </p:sp>
-      <p:sp>
-        <p:nvSpPr>
-          <p:cNvPr id="34" name="Text 32"/>
-          <p:cNvSpPr/>
-          <p:nvPr/>
-        </p:nvSpPr>
-        <p:spPr>
-          <a:xfrm>
-            <a:off x="365760" y="2825496"/>
-            <a:ext cx="2468880" cy="402336"/>
+              <a:t>Sample words:</a:t>
+            </a:r>
+            <a:endParaRPr lang="en-US" sz="1200" dirty="0"/>
+          </a:p>
+        </p:txBody>
+      </p:sp>
+      <p:sp>
+        <p:nvSpPr>
+          <p:cNvPr id="39" name="Shape 37"/>
+          <p:cNvSpPr/>
+          <p:nvPr/>
+        </p:nvSpPr>
+        <p:spPr>
+          <a:xfrm>
+            <a:off x="365760" y="4023360"/>
+            <a:ext cx="2011680" cy="402336"/>
+          </a:xfrm>
+          <a:prstGeom prst="rect">
+            <a:avLst>
+              <a:gd name="adj" fmla="val 13636"/>
+            </a:avLst>
+          </a:prstGeom>
+          <a:solidFill>
+            <a:srgbClr val="EEF2FF"/>
+          </a:solidFill>
+          <a:ln w="12700">
+            <a:solidFill>
+              <a:srgbClr val="6366F1"/>
+            </a:solidFill>
+            <a:prstDash val="solid"/>
+          </a:ln>
+        </p:spPr>
+      </p:sp>
+      <p:sp>
+        <p:nvSpPr>
+          <p:cNvPr id="40" name="Text 38"/>
+          <p:cNvSpPr/>
+          <p:nvPr/>
+        </p:nvSpPr>
+        <p:spPr>
+          <a:xfrm>
+            <a:off x="365760" y="4023360"/>
+            <a:ext cx="2011680" cy="402336"/>
           </a:xfrm>
           <a:prstGeom prst="rect">
             <a:avLst/>
@@ -34664,80 +35980,57 @@
               <a:buNone/>
             </a:pPr>
             <a:r>
-              <a:rPr lang="en-US" sz="1300" b="1" dirty="0">
-                <a:solidFill>
-                  <a:srgbClr val="4C1D95"/>
+              <a:rPr lang="en-US" sz="1200" b="1" dirty="0">
+                <a:solidFill>
+                  <a:srgbClr val="4338CA"/>
                 </a:solidFill>
                 <a:latin typeface="Trebuchet MS" pitchFamily="34" charset="0"/>
                 <a:ea typeface="Trebuchet MS" pitchFamily="34" charset="-122"/>
                 <a:cs typeface="Trebuchet MS" pitchFamily="34" charset="-120"/>
               </a:rPr>
-              <a:t>self-</a:t>
-            </a:r>
-            <a:endParaRPr lang="en-US" sz="1300" dirty="0"/>
-          </a:p>
-        </p:txBody>
-      </p:sp>
-      <p:sp>
-        <p:nvSpPr>
-          <p:cNvPr id="35" name="Shape 33"/>
-          <p:cNvSpPr/>
-          <p:nvPr/>
-        </p:nvSpPr>
-        <p:spPr>
-          <a:xfrm>
-            <a:off x="2971800" y="2825496"/>
-            <a:ext cx="2834640" cy="402336"/>
-          </a:xfrm>
-          <a:prstGeom prst="rect">
-            <a:avLst/>
-          </a:prstGeom>
-          <a:solidFill>
-            <a:srgbClr val="F1F5F9"/>
-          </a:solidFill>
-          <a:ln w="12700">
-            <a:solidFill>
-              <a:srgbClr val="E2E8F0"/>
-            </a:solidFill>
-            <a:prstDash val="solid"/>
-          </a:ln>
-        </p:spPr>
-      </p:sp>
-      <p:sp>
-        <p:nvSpPr>
-          <p:cNvPr id="36" name="Shape 34"/>
-          <p:cNvSpPr/>
-          <p:nvPr/>
-        </p:nvSpPr>
-        <p:spPr>
-          <a:xfrm>
-            <a:off x="5943600" y="2825496"/>
-            <a:ext cx="2834640" cy="402336"/>
-          </a:xfrm>
-          <a:prstGeom prst="rect">
-            <a:avLst/>
-          </a:prstGeom>
-          <a:solidFill>
-            <a:srgbClr val="FCE7F3"/>
-          </a:solidFill>
-          <a:ln w="12700">
-            <a:solidFill>
-              <a:srgbClr val="E2E8F0"/>
-            </a:solidFill>
-            <a:prstDash val="solid"/>
-          </a:ln>
-        </p:spPr>
-      </p:sp>
-      <p:sp>
-        <p:nvSpPr>
-          <p:cNvPr id="37" name="Text 35"/>
-          <p:cNvSpPr/>
-          <p:nvPr/>
-        </p:nvSpPr>
-        <p:spPr>
-          <a:xfrm>
-            <a:off x="5943600" y="2825496"/>
-            <a:ext cx="2834640" cy="402336"/>
+              <a:t>thank</a:t>
+            </a:r>
+            <a:endParaRPr lang="en-US" sz="1200" dirty="0"/>
+          </a:p>
+        </p:txBody>
+      </p:sp>
+      <p:sp>
+        <p:nvSpPr>
+          <p:cNvPr id="41" name="Shape 39"/>
+          <p:cNvSpPr/>
+          <p:nvPr/>
+        </p:nvSpPr>
+        <p:spPr>
+          <a:xfrm>
+            <a:off x="2542032" y="4023360"/>
+            <a:ext cx="2011680" cy="402336"/>
+          </a:xfrm>
+          <a:prstGeom prst="rect">
+            <a:avLst>
+              <a:gd name="adj" fmla="val 13636"/>
+            </a:avLst>
+          </a:prstGeom>
+          <a:solidFill>
+            <a:srgbClr val="EEF2FF"/>
+          </a:solidFill>
+          <a:ln w="12700">
+            <a:solidFill>
+              <a:srgbClr val="6366F1"/>
+            </a:solidFill>
+            <a:prstDash val="solid"/>
+          </a:ln>
+        </p:spPr>
+      </p:sp>
+      <p:sp>
+        <p:nvSpPr>
+          <p:cNvPr id="42" name="Text 40"/>
+          <p:cNvSpPr/>
+          <p:nvPr/>
+        </p:nvSpPr>
+        <p:spPr>
+          <a:xfrm>
+            <a:off x="2542032" y="4023360"/>
+            <a:ext cx="2011680" cy="402336"/>
           </a:xfrm>
           <a:prstGeom prst="rect">
             <a:avLst/>
@@ -34753,55 +36046,57 @@
               <a:buNone/>
             </a:pPr>
             <a:r>
-              <a:rPr lang="en-US" sz="1300" b="1" dirty="0">
-                <a:solidFill>
-                  <a:srgbClr val="9D174D"/>
+              <a:rPr lang="en-US" sz="1200" b="1" dirty="0">
+                <a:solidFill>
+                  <a:srgbClr val="4338CA"/>
                 </a:solidFill>
                 <a:latin typeface="Trebuchet MS" pitchFamily="34" charset="0"/>
                 <a:ea typeface="Trebuchet MS" pitchFamily="34" charset="-122"/>
                 <a:cs typeface="Trebuchet MS" pitchFamily="34" charset="-120"/>
               </a:rPr>
-              <a:t>-ful</a:t>
-            </a:r>
-            <a:endParaRPr lang="en-US" sz="1300" dirty="0"/>
-          </a:p>
-        </p:txBody>
-      </p:sp>
-      <p:sp>
-        <p:nvSpPr>
-          <p:cNvPr id="38" name="Shape 36"/>
-          <p:cNvSpPr/>
-          <p:nvPr/>
-        </p:nvSpPr>
-        <p:spPr>
-          <a:xfrm>
-            <a:off x="365760" y="3246120"/>
-            <a:ext cx="2468880" cy="402336"/>
-          </a:xfrm>
-          <a:prstGeom prst="rect">
-            <a:avLst/>
-          </a:prstGeom>
-          <a:solidFill>
-            <a:srgbClr val="DDD6FE"/>
-          </a:solidFill>
-          <a:ln w="12700">
-            <a:solidFill>
-              <a:srgbClr val="E2E8F0"/>
-            </a:solidFill>
-            <a:prstDash val="solid"/>
-          </a:ln>
-        </p:spPr>
-      </p:sp>
-      <p:sp>
-        <p:nvSpPr>
-          <p:cNvPr id="39" name="Text 37"/>
-          <p:cNvSpPr/>
-          <p:nvPr/>
-        </p:nvSpPr>
-        <p:spPr>
-          <a:xfrm>
-            <a:off x="365760" y="3246120"/>
-            <a:ext cx="2468880" cy="402336"/>
+              <a:t>thanks</a:t>
+            </a:r>
+            <a:endParaRPr lang="en-US" sz="1200" dirty="0"/>
+          </a:p>
+        </p:txBody>
+      </p:sp>
+      <p:sp>
+        <p:nvSpPr>
+          <p:cNvPr id="43" name="Shape 41"/>
+          <p:cNvSpPr/>
+          <p:nvPr/>
+        </p:nvSpPr>
+        <p:spPr>
+          <a:xfrm>
+            <a:off x="4718304" y="4023360"/>
+            <a:ext cx="2011680" cy="402336"/>
+          </a:xfrm>
+          <a:prstGeom prst="rect">
+            <a:avLst>
+              <a:gd name="adj" fmla="val 13636"/>
+            </a:avLst>
+          </a:prstGeom>
+          <a:solidFill>
+            <a:srgbClr val="EEF2FF"/>
+          </a:solidFill>
+          <a:ln w="12700">
+            <a:solidFill>
+              <a:srgbClr val="6366F1"/>
+            </a:solidFill>
+            <a:prstDash val="solid"/>
+          </a:ln>
+        </p:spPr>
+      </p:sp>
+      <p:sp>
+        <p:nvSpPr>
+          <p:cNvPr id="44" name="Text 42"/>
+          <p:cNvSpPr/>
+          <p:nvPr/>
+        </p:nvSpPr>
+        <p:spPr>
+          <a:xfrm>
+            <a:off x="4718304" y="4023360"/>
+            <a:ext cx="2011680" cy="402336"/>
           </a:xfrm>
           <a:prstGeom prst="rect">
             <a:avLst/>
@@ -34817,80 +36112,57 @@
               <a:buNone/>
             </a:pPr>
             <a:r>
-              <a:rPr lang="en-US" sz="1300" b="1" dirty="0">
-                <a:solidFill>
-                  <a:srgbClr val="4C1D95"/>
+              <a:rPr lang="en-US" sz="1200" b="1" dirty="0">
+                <a:solidFill>
+                  <a:srgbClr val="4338CA"/>
                 </a:solidFill>
                 <a:latin typeface="Trebuchet MS" pitchFamily="34" charset="0"/>
                 <a:ea typeface="Trebuchet MS" pitchFamily="34" charset="-122"/>
                 <a:cs typeface="Trebuchet MS" pitchFamily="34" charset="-120"/>
               </a:rPr>
-              <a:t>whole-</a:t>
-            </a:r>
-            <a:endParaRPr lang="en-US" sz="1300" dirty="0"/>
-          </a:p>
-        </p:txBody>
-      </p:sp>
-      <p:sp>
-        <p:nvSpPr>
-          <p:cNvPr id="40" name="Shape 38"/>
-          <p:cNvSpPr/>
-          <p:nvPr/>
-        </p:nvSpPr>
-        <p:spPr>
-          <a:xfrm>
-            <a:off x="2971800" y="3246120"/>
-            <a:ext cx="2834640" cy="402336"/>
-          </a:xfrm>
-          <a:prstGeom prst="rect">
-            <a:avLst/>
-          </a:prstGeom>
-          <a:solidFill>
-            <a:srgbClr val="F8FAFC"/>
-          </a:solidFill>
-          <a:ln w="12700">
-            <a:solidFill>
-              <a:srgbClr val="E2E8F0"/>
-            </a:solidFill>
-            <a:prstDash val="solid"/>
-          </a:ln>
-        </p:spPr>
-      </p:sp>
-      <p:sp>
-        <p:nvSpPr>
-          <p:cNvPr id="41" name="Shape 39"/>
-          <p:cNvSpPr/>
-          <p:nvPr/>
-        </p:nvSpPr>
-        <p:spPr>
-          <a:xfrm>
-            <a:off x="5943600" y="3246120"/>
-            <a:ext cx="2834640" cy="402336"/>
-          </a:xfrm>
-          <a:prstGeom prst="rect">
-            <a:avLst/>
-          </a:prstGeom>
-          <a:solidFill>
-            <a:srgbClr val="FCE7F3"/>
-          </a:solidFill>
-          <a:ln w="12700">
-            <a:solidFill>
-              <a:srgbClr val="E2E8F0"/>
-            </a:solidFill>
-            <a:prstDash val="solid"/>
-          </a:ln>
-        </p:spPr>
-      </p:sp>
-      <p:sp>
-        <p:nvSpPr>
-          <p:cNvPr id="42" name="Text 40"/>
-          <p:cNvSpPr/>
-          <p:nvPr/>
-        </p:nvSpPr>
-        <p:spPr>
-          <a:xfrm>
-            <a:off x="5943600" y="3246120"/>
-            <a:ext cx="2834640" cy="402336"/>
+              <a:t>thanked</a:t>
+            </a:r>
+            <a:endParaRPr lang="en-US" sz="1200" dirty="0"/>
+          </a:p>
+        </p:txBody>
+      </p:sp>
+      <p:sp>
+        <p:nvSpPr>
+          <p:cNvPr id="45" name="Shape 43"/>
+          <p:cNvSpPr/>
+          <p:nvPr/>
+        </p:nvSpPr>
+        <p:spPr>
+          <a:xfrm>
+            <a:off x="6894576" y="4023360"/>
+            <a:ext cx="2011680" cy="402336"/>
+          </a:xfrm>
+          <a:prstGeom prst="rect">
+            <a:avLst>
+              <a:gd name="adj" fmla="val 13636"/>
+            </a:avLst>
+          </a:prstGeom>
+          <a:solidFill>
+            <a:srgbClr val="EEF2FF"/>
+          </a:solidFill>
+          <a:ln w="12700">
+            <a:solidFill>
+              <a:srgbClr val="6366F1"/>
+            </a:solidFill>
+            <a:prstDash val="solid"/>
+          </a:ln>
+        </p:spPr>
+      </p:sp>
+      <p:sp>
+        <p:nvSpPr>
+          <p:cNvPr id="46" name="Text 44"/>
+          <p:cNvSpPr/>
+          <p:nvPr/>
+        </p:nvSpPr>
+        <p:spPr>
+          <a:xfrm>
+            <a:off x="6894576" y="4023360"/>
+            <a:ext cx="2011680" cy="402336"/>
           </a:xfrm>
           <a:prstGeom prst="rect">
             <a:avLst/>
@@ -34906,582 +36178,15 @@
               <a:buNone/>
             </a:pPr>
             <a:r>
-              <a:rPr lang="en-US" sz="1300" b="1" dirty="0">
-                <a:solidFill>
-                  <a:srgbClr val="9D174D"/>
+              <a:rPr lang="en-US" sz="1200" b="1" dirty="0">
+                <a:solidFill>
+                  <a:srgbClr val="4338CA"/>
                 </a:solidFill>
                 <a:latin typeface="Trebuchet MS" pitchFamily="34" charset="0"/>
                 <a:ea typeface="Trebuchet MS" pitchFamily="34" charset="-122"/>
                 <a:cs typeface="Trebuchet MS" pitchFamily="34" charset="-120"/>
               </a:rPr>
-              <a:t>-less</a:t>
-            </a:r>
-            <a:endParaRPr lang="en-US" sz="1300" dirty="0"/>
-          </a:p>
-        </p:txBody>
-      </p:sp>
-      <p:sp>
-        <p:nvSpPr>
-          <p:cNvPr id="43" name="Text 41"/>
-          <p:cNvSpPr/>
-          <p:nvPr/>
-        </p:nvSpPr>
-        <p:spPr>
-          <a:xfrm>
-            <a:off x="365760" y="3611880"/>
-            <a:ext cx="1828800" cy="347472"/>
-          </a:xfrm>
-          <a:prstGeom prst="rect">
-            <a:avLst/>
-          </a:prstGeom>
-          <a:noFill/>
-          <a:ln/>
-        </p:spPr>
-        <p:txBody>
-          <a:bodyPr wrap="square" lIns="0" tIns="0" rIns="0" bIns="0" rtlCol="0" anchor="ctr"/>
-          <a:lstStyle/>
-          <a:p>
-            <a:pPr algn="l" indent="0" marL="0">
-              <a:buNone/>
-            </a:pPr>
-            <a:r>
-              <a:rPr lang="en-US" sz="1200" b="1" dirty="0">
-                <a:solidFill>
-                  <a:srgbClr val="0F172A"/>
-                </a:solidFill>
-                <a:latin typeface="Trebuchet MS" pitchFamily="34" charset="0"/>
-                <a:ea typeface="Trebuchet MS" pitchFamily="34" charset="-122"/>
-                <a:cs typeface="Trebuchet MS" pitchFamily="34" charset="-120"/>
-              </a:rPr>
-              <a:t>Sample words:</a:t>
-            </a:r>
-            <a:endParaRPr lang="en-US" sz="1200" dirty="0"/>
-          </a:p>
-        </p:txBody>
-      </p:sp>
-      <p:sp>
-        <p:nvSpPr>
-          <p:cNvPr id="44" name="Shape 42"/>
-          <p:cNvSpPr/>
-          <p:nvPr/>
-        </p:nvSpPr>
-        <p:spPr>
-          <a:xfrm>
-            <a:off x="365760" y="4023360"/>
-            <a:ext cx="2011680" cy="402336"/>
-          </a:xfrm>
-          <a:prstGeom prst="rect">
-            <a:avLst>
-              <a:gd name="adj" fmla="val 13636"/>
-            </a:avLst>
-          </a:prstGeom>
-          <a:solidFill>
-            <a:srgbClr val="EEF2FF"/>
-          </a:solidFill>
-          <a:ln w="12700">
-            <a:solidFill>
-              <a:srgbClr val="6366F1"/>
-            </a:solidFill>
-            <a:prstDash val="solid"/>
-          </a:ln>
-        </p:spPr>
-      </p:sp>
-      <p:sp>
-        <p:nvSpPr>
-          <p:cNvPr id="45" name="Text 43"/>
-          <p:cNvSpPr/>
-          <p:nvPr/>
-        </p:nvSpPr>
-        <p:spPr>
-          <a:xfrm>
-            <a:off x="365760" y="4023360"/>
-            <a:ext cx="2011680" cy="402336"/>
-          </a:xfrm>
-          <a:prstGeom prst="rect">
-            <a:avLst/>
-          </a:prstGeom>
-          <a:noFill/>
-          <a:ln/>
-        </p:spPr>
-        <p:txBody>
-          <a:bodyPr wrap="square" lIns="0" tIns="0" rIns="0" bIns="0" rtlCol="0" anchor="ctr"/>
-          <a:lstStyle/>
-          <a:p>
-            <a:pPr algn="ctr" indent="0" marL="0">
-              <a:buNone/>
-            </a:pPr>
-            <a:r>
-              <a:rPr lang="en-US" sz="1200" b="1" dirty="0">
-                <a:solidFill>
-                  <a:srgbClr val="4338CA"/>
-                </a:solidFill>
-                <a:latin typeface="Trebuchet MS" pitchFamily="34" charset="0"/>
-                <a:ea typeface="Trebuchet MS" pitchFamily="34" charset="-122"/>
-                <a:cs typeface="Trebuchet MS" pitchFamily="34" charset="-120"/>
-              </a:rPr>
-              <a:t>thanks</a:t>
-            </a:r>
-            <a:endParaRPr lang="en-US" sz="1200" dirty="0"/>
-          </a:p>
-        </p:txBody>
-      </p:sp>
-      <p:sp>
-        <p:nvSpPr>
-          <p:cNvPr id="46" name="Shape 44"/>
-          <p:cNvSpPr/>
-          <p:nvPr/>
-        </p:nvSpPr>
-        <p:spPr>
-          <a:xfrm>
-            <a:off x="2542032" y="4023360"/>
-            <a:ext cx="2011680" cy="402336"/>
-          </a:xfrm>
-          <a:prstGeom prst="rect">
-            <a:avLst>
-              <a:gd name="adj" fmla="val 13636"/>
-            </a:avLst>
-          </a:prstGeom>
-          <a:solidFill>
-            <a:srgbClr val="EEF2FF"/>
-          </a:solidFill>
-          <a:ln w="12700">
-            <a:solidFill>
-              <a:srgbClr val="6366F1"/>
-            </a:solidFill>
-            <a:prstDash val="solid"/>
-          </a:ln>
-        </p:spPr>
-      </p:sp>
-      <p:sp>
-        <p:nvSpPr>
-          <p:cNvPr id="47" name="Text 45"/>
-          <p:cNvSpPr/>
-          <p:nvPr/>
-        </p:nvSpPr>
-        <p:spPr>
-          <a:xfrm>
-            <a:off x="2542032" y="4023360"/>
-            <a:ext cx="2011680" cy="402336"/>
-          </a:xfrm>
-          <a:prstGeom prst="rect">
-            <a:avLst/>
-          </a:prstGeom>
-          <a:noFill/>
-          <a:ln/>
-        </p:spPr>
-        <p:txBody>
-          <a:bodyPr wrap="square" lIns="0" tIns="0" rIns="0" bIns="0" rtlCol="0" anchor="ctr"/>
-          <a:lstStyle/>
-          <a:p>
-            <a:pPr algn="ctr" indent="0" marL="0">
-              <a:buNone/>
-            </a:pPr>
-            <a:r>
-              <a:rPr lang="en-US" sz="1200" b="1" dirty="0">
-                <a:solidFill>
-                  <a:srgbClr val="4338CA"/>
-                </a:solidFill>
-                <a:latin typeface="Trebuchet MS" pitchFamily="34" charset="0"/>
-                <a:ea typeface="Trebuchet MS" pitchFamily="34" charset="-122"/>
-                <a:cs typeface="Trebuchet MS" pitchFamily="34" charset="-120"/>
-              </a:rPr>
-              <a:t>thanked</a:t>
-            </a:r>
-            <a:endParaRPr lang="en-US" sz="1200" dirty="0"/>
-          </a:p>
-        </p:txBody>
-      </p:sp>
-      <p:sp>
-        <p:nvSpPr>
-          <p:cNvPr id="48" name="Shape 46"/>
-          <p:cNvSpPr/>
-          <p:nvPr/>
-        </p:nvSpPr>
-        <p:spPr>
-          <a:xfrm>
-            <a:off x="4718304" y="4023360"/>
-            <a:ext cx="2011680" cy="402336"/>
-          </a:xfrm>
-          <a:prstGeom prst="rect">
-            <a:avLst>
-              <a:gd name="adj" fmla="val 13636"/>
-            </a:avLst>
-          </a:prstGeom>
-          <a:solidFill>
-            <a:srgbClr val="EEF2FF"/>
-          </a:solidFill>
-          <a:ln w="12700">
-            <a:solidFill>
-              <a:srgbClr val="6366F1"/>
-            </a:solidFill>
-            <a:prstDash val="solid"/>
-          </a:ln>
-        </p:spPr>
-      </p:sp>
-      <p:sp>
-        <p:nvSpPr>
-          <p:cNvPr id="49" name="Text 47"/>
-          <p:cNvSpPr/>
-          <p:nvPr/>
-        </p:nvSpPr>
-        <p:spPr>
-          <a:xfrm>
-            <a:off x="4718304" y="4023360"/>
-            <a:ext cx="2011680" cy="402336"/>
-          </a:xfrm>
-          <a:prstGeom prst="rect">
-            <a:avLst/>
-          </a:prstGeom>
-          <a:noFill/>
-          <a:ln/>
-        </p:spPr>
-        <p:txBody>
-          <a:bodyPr wrap="square" lIns="0" tIns="0" rIns="0" bIns="0" rtlCol="0" anchor="ctr"/>
-          <a:lstStyle/>
-          <a:p>
-            <a:pPr algn="ctr" indent="0" marL="0">
-              <a:buNone/>
-            </a:pPr>
-            <a:r>
-              <a:rPr lang="en-US" sz="1200" b="1" dirty="0">
-                <a:solidFill>
-                  <a:srgbClr val="4338CA"/>
-                </a:solidFill>
-                <a:latin typeface="Trebuchet MS" pitchFamily="34" charset="0"/>
-                <a:ea typeface="Trebuchet MS" pitchFamily="34" charset="-122"/>
-                <a:cs typeface="Trebuchet MS" pitchFamily="34" charset="-120"/>
-              </a:rPr>
-              <a:t>thanking</a:t>
-            </a:r>
-            <a:endParaRPr lang="en-US" sz="1200" dirty="0"/>
-          </a:p>
-        </p:txBody>
-      </p:sp>
-      <p:sp>
-        <p:nvSpPr>
-          <p:cNvPr id="50" name="Shape 48"/>
-          <p:cNvSpPr/>
-          <p:nvPr/>
-        </p:nvSpPr>
-        <p:spPr>
-          <a:xfrm>
-            <a:off x="6894576" y="4023360"/>
-            <a:ext cx="2011680" cy="402336"/>
-          </a:xfrm>
-          <a:prstGeom prst="rect">
-            <a:avLst>
-              <a:gd name="adj" fmla="val 13636"/>
-            </a:avLst>
-          </a:prstGeom>
-          <a:solidFill>
-            <a:srgbClr val="EEF2FF"/>
-          </a:solidFill>
-          <a:ln w="12700">
-            <a:solidFill>
-              <a:srgbClr val="6366F1"/>
-            </a:solidFill>
-            <a:prstDash val="solid"/>
-          </a:ln>
-        </p:spPr>
-      </p:sp>
-      <p:sp>
-        <p:nvSpPr>
-          <p:cNvPr id="51" name="Text 49"/>
-          <p:cNvSpPr/>
-          <p:nvPr/>
-        </p:nvSpPr>
-        <p:spPr>
-          <a:xfrm>
-            <a:off x="6894576" y="4023360"/>
-            <a:ext cx="2011680" cy="402336"/>
-          </a:xfrm>
-          <a:prstGeom prst="rect">
-            <a:avLst/>
-          </a:prstGeom>
-          <a:noFill/>
-          <a:ln/>
-        </p:spPr>
-        <p:txBody>
-          <a:bodyPr wrap="square" lIns="0" tIns="0" rIns="0" bIns="0" rtlCol="0" anchor="ctr"/>
-          <a:lstStyle/>
-          <a:p>
-            <a:pPr algn="ctr" indent="0" marL="0">
-              <a:buNone/>
-            </a:pPr>
-            <a:r>
-              <a:rPr lang="en-US" sz="1200" b="1" dirty="0">
-                <a:solidFill>
-                  <a:srgbClr val="4338CA"/>
-                </a:solidFill>
-                <a:latin typeface="Trebuchet MS" pitchFamily="34" charset="0"/>
-                <a:ea typeface="Trebuchet MS" pitchFamily="34" charset="-122"/>
-                <a:cs typeface="Trebuchet MS" pitchFamily="34" charset="-120"/>
-              </a:rPr>
               <a:t>thankful</a:t>
-            </a:r>
-            <a:endParaRPr lang="en-US" sz="1200" dirty="0"/>
-          </a:p>
-        </p:txBody>
-      </p:sp>
-      <p:sp>
-        <p:nvSpPr>
-          <p:cNvPr id="52" name="Shape 50"/>
-          <p:cNvSpPr/>
-          <p:nvPr/>
-        </p:nvSpPr>
-        <p:spPr>
-          <a:xfrm>
-            <a:off x="365760" y="4498848"/>
-            <a:ext cx="2011680" cy="402336"/>
-          </a:xfrm>
-          <a:prstGeom prst="rect">
-            <a:avLst>
-              <a:gd name="adj" fmla="val 13636"/>
-            </a:avLst>
-          </a:prstGeom>
-          <a:solidFill>
-            <a:srgbClr val="EEF2FF"/>
-          </a:solidFill>
-          <a:ln w="12700">
-            <a:solidFill>
-              <a:srgbClr val="6366F1"/>
-            </a:solidFill>
-            <a:prstDash val="solid"/>
-          </a:ln>
-        </p:spPr>
-      </p:sp>
-      <p:sp>
-        <p:nvSpPr>
-          <p:cNvPr id="53" name="Text 51"/>
-          <p:cNvSpPr/>
-          <p:nvPr/>
-        </p:nvSpPr>
-        <p:spPr>
-          <a:xfrm>
-            <a:off x="365760" y="4498848"/>
-            <a:ext cx="2011680" cy="402336"/>
-          </a:xfrm>
-          <a:prstGeom prst="rect">
-            <a:avLst/>
-          </a:prstGeom>
-          <a:noFill/>
-          <a:ln/>
-        </p:spPr>
-        <p:txBody>
-          <a:bodyPr wrap="square" lIns="0" tIns="0" rIns="0" bIns="0" rtlCol="0" anchor="ctr"/>
-          <a:lstStyle/>
-          <a:p>
-            <a:pPr algn="ctr" indent="0" marL="0">
-              <a:buNone/>
-            </a:pPr>
-            <a:r>
-              <a:rPr lang="en-US" sz="1200" b="1" dirty="0">
-                <a:solidFill>
-                  <a:srgbClr val="4338CA"/>
-                </a:solidFill>
-                <a:latin typeface="Trebuchet MS" pitchFamily="34" charset="0"/>
-                <a:ea typeface="Trebuchet MS" pitchFamily="34" charset="-122"/>
-                <a:cs typeface="Trebuchet MS" pitchFamily="34" charset="-120"/>
-              </a:rPr>
-              <a:t>thankless</a:t>
-            </a:r>
-            <a:endParaRPr lang="en-US" sz="1200" dirty="0"/>
-          </a:p>
-        </p:txBody>
-      </p:sp>
-      <p:sp>
-        <p:nvSpPr>
-          <p:cNvPr id="54" name="Shape 52"/>
-          <p:cNvSpPr/>
-          <p:nvPr/>
-        </p:nvSpPr>
-        <p:spPr>
-          <a:xfrm>
-            <a:off x="2542032" y="4498848"/>
-            <a:ext cx="2011680" cy="402336"/>
-          </a:xfrm>
-          <a:prstGeom prst="rect">
-            <a:avLst>
-              <a:gd name="adj" fmla="val 13636"/>
-            </a:avLst>
-          </a:prstGeom>
-          <a:solidFill>
-            <a:srgbClr val="EEF2FF"/>
-          </a:solidFill>
-          <a:ln w="12700">
-            <a:solidFill>
-              <a:srgbClr val="6366F1"/>
-            </a:solidFill>
-            <a:prstDash val="solid"/>
-          </a:ln>
-        </p:spPr>
-      </p:sp>
-      <p:sp>
-        <p:nvSpPr>
-          <p:cNvPr id="55" name="Text 53"/>
-          <p:cNvSpPr/>
-          <p:nvPr/>
-        </p:nvSpPr>
-        <p:spPr>
-          <a:xfrm>
-            <a:off x="2542032" y="4498848"/>
-            <a:ext cx="2011680" cy="402336"/>
-          </a:xfrm>
-          <a:prstGeom prst="rect">
-            <a:avLst/>
-          </a:prstGeom>
-          <a:noFill/>
-          <a:ln/>
-        </p:spPr>
-        <p:txBody>
-          <a:bodyPr wrap="square" lIns="0" tIns="0" rIns="0" bIns="0" rtlCol="0" anchor="ctr"/>
-          <a:lstStyle/>
-          <a:p>
-            <a:pPr algn="ctr" indent="0" marL="0">
-              <a:buNone/>
-            </a:pPr>
-            <a:r>
-              <a:rPr lang="en-US" sz="1200" b="1" dirty="0">
-                <a:solidFill>
-                  <a:srgbClr val="4338CA"/>
-                </a:solidFill>
-                <a:latin typeface="Trebuchet MS" pitchFamily="34" charset="0"/>
-                <a:ea typeface="Trebuchet MS" pitchFamily="34" charset="-122"/>
-                <a:cs typeface="Trebuchet MS" pitchFamily="34" charset="-120"/>
-              </a:rPr>
-              <a:t>thankfully</a:t>
-            </a:r>
-            <a:endParaRPr lang="en-US" sz="1200" dirty="0"/>
-          </a:p>
-        </p:txBody>
-      </p:sp>
-      <p:sp>
-        <p:nvSpPr>
-          <p:cNvPr id="56" name="Shape 54"/>
-          <p:cNvSpPr/>
-          <p:nvPr/>
-        </p:nvSpPr>
-        <p:spPr>
-          <a:xfrm>
-            <a:off x="4718304" y="4498848"/>
-            <a:ext cx="2011680" cy="402336"/>
-          </a:xfrm>
-          <a:prstGeom prst="rect">
-            <a:avLst>
-              <a:gd name="adj" fmla="val 13636"/>
-            </a:avLst>
-          </a:prstGeom>
-          <a:solidFill>
-            <a:srgbClr val="EEF2FF"/>
-          </a:solidFill>
-          <a:ln w="12700">
-            <a:solidFill>
-              <a:srgbClr val="6366F1"/>
-            </a:solidFill>
-            <a:prstDash val="solid"/>
-          </a:ln>
-        </p:spPr>
-      </p:sp>
-      <p:sp>
-        <p:nvSpPr>
-          <p:cNvPr id="57" name="Text 55"/>
-          <p:cNvSpPr/>
-          <p:nvPr/>
-        </p:nvSpPr>
-        <p:spPr>
-          <a:xfrm>
-            <a:off x="4718304" y="4498848"/>
-            <a:ext cx="2011680" cy="402336"/>
-          </a:xfrm>
-          <a:prstGeom prst="rect">
-            <a:avLst/>
-          </a:prstGeom>
-          <a:noFill/>
-          <a:ln/>
-        </p:spPr>
-        <p:txBody>
-          <a:bodyPr wrap="square" lIns="0" tIns="0" rIns="0" bIns="0" rtlCol="0" anchor="ctr"/>
-          <a:lstStyle/>
-          <a:p>
-            <a:pPr algn="ctr" indent="0" marL="0">
-              <a:buNone/>
-            </a:pPr>
-            <a:r>
-              <a:rPr lang="en-US" sz="1200" b="1" dirty="0">
-                <a:solidFill>
-                  <a:srgbClr val="4338CA"/>
-                </a:solidFill>
-                <a:latin typeface="Trebuchet MS" pitchFamily="34" charset="0"/>
-                <a:ea typeface="Trebuchet MS" pitchFamily="34" charset="-122"/>
-                <a:cs typeface="Trebuchet MS" pitchFamily="34" charset="-120"/>
-              </a:rPr>
-              <a:t>thankfulness</a:t>
-            </a:r>
-            <a:endParaRPr lang="en-US" sz="1200" dirty="0"/>
-          </a:p>
-        </p:txBody>
-      </p:sp>
-      <p:sp>
-        <p:nvSpPr>
-          <p:cNvPr id="58" name="Shape 56"/>
-          <p:cNvSpPr/>
-          <p:nvPr/>
-        </p:nvSpPr>
-        <p:spPr>
-          <a:xfrm>
-            <a:off x="6894576" y="4498848"/>
-            <a:ext cx="2011680" cy="402336"/>
-          </a:xfrm>
-          <a:prstGeom prst="rect">
-            <a:avLst>
-              <a:gd name="adj" fmla="val 13636"/>
-            </a:avLst>
-          </a:prstGeom>
-          <a:solidFill>
-            <a:srgbClr val="EEF2FF"/>
-          </a:solidFill>
-          <a:ln w="12700">
-            <a:solidFill>
-              <a:srgbClr val="6366F1"/>
-            </a:solidFill>
-            <a:prstDash val="solid"/>
-          </a:ln>
-        </p:spPr>
-      </p:sp>
-      <p:sp>
-        <p:nvSpPr>
-          <p:cNvPr id="59" name="Text 57"/>
-          <p:cNvSpPr/>
-          <p:nvPr/>
-        </p:nvSpPr>
-        <p:spPr>
-          <a:xfrm>
-            <a:off x="6894576" y="4498848"/>
-            <a:ext cx="2011680" cy="402336"/>
-          </a:xfrm>
-          <a:prstGeom prst="rect">
-            <a:avLst/>
-          </a:prstGeom>
-          <a:noFill/>
-          <a:ln/>
-        </p:spPr>
-        <p:txBody>
-          <a:bodyPr wrap="square" lIns="0" tIns="0" rIns="0" bIns="0" rtlCol="0" anchor="ctr"/>
-          <a:lstStyle/>
-          <a:p>
-            <a:pPr algn="ctr" indent="0" marL="0">
-              <a:buNone/>
-            </a:pPr>
-            <a:r>
-              <a:rPr lang="en-US" sz="1200" b="1" dirty="0">
-                <a:solidFill>
-                  <a:srgbClr val="4338CA"/>
-                </a:solidFill>
-                <a:latin typeface="Trebuchet MS" pitchFamily="34" charset="0"/>
-                <a:ea typeface="Trebuchet MS" pitchFamily="34" charset="-122"/>
-                <a:cs typeface="Trebuchet MS" pitchFamily="34" charset="-120"/>
-              </a:rPr>
-              <a:t>unthankful</a:t>
             </a:r>
             <a:endParaRPr lang="en-US" sz="1200" dirty="0"/>
           </a:p>
@@ -35773,7 +36478,7 @@
                 <a:ea typeface="Calibri" pitchFamily="34" charset="-122"/>
                 <a:cs typeface="Calibri" pitchFamily="34" charset="-120"/>
               </a:rPr>
-              <a:t>Word Labs  •  wordlabs.app  •  Root: 'thank' = express gratitude or praise</a:t>
+              <a:t>Word Labs  •  wordlabs.app  •  Root: 'thank' = to show you are grateful</a:t>
             </a:r>
             <a:endParaRPr lang="en-US" sz="800" dirty="0"/>
           </a:p>
@@ -35937,7 +36642,7 @@
                 <a:ea typeface="Calibri" pitchFamily="34" charset="-122"/>
                 <a:cs typeface="Calibri" pitchFamily="34" charset="-120"/>
               </a:rPr>
-              <a:t>The core part of a word carrying its basic meaning. For example, 'thank' means 'express gratitude or praise'.</a:t>
+              <a:t>The core part of a word carrying its basic meaning. For example, 'thank' means 'to show you are grateful'.</a:t>
             </a:r>
             <a:endParaRPr lang="en-US" sz="1350" dirty="0"/>
           </a:p>
@@ -36557,7 +37262,7 @@
                 <a:ea typeface="Calibri" pitchFamily="34" charset="-122"/>
                 <a:cs typeface="Calibri" pitchFamily="34" charset="-120"/>
               </a:rPr>
-              <a:t>Word Labs  •  wordlabs.app  •  Root: 'thank' = express gratitude or praise</a:t>
+              <a:t>Word Labs  •  wordlabs.app  •  Root: 'thank' = to show you are grateful</a:t>
             </a:r>
             <a:endParaRPr lang="en-US" sz="800" dirty="0"/>
           </a:p>
@@ -36669,7 +37374,7 @@
                 <a:ea typeface="Calibri" pitchFamily="34" charset="-122"/>
                 <a:cs typeface="Calibri" pitchFamily="34" charset="-120"/>
               </a:rPr>
-              <a:t>1.  'Thankless' means a task that nobody appreciates or notices.</a:t>
+              <a:t>1.  'thank' means 'to show you are grateful'.</a:t>
             </a:r>
             <a:endParaRPr lang="en-US" sz="1300" dirty="0"/>
           </a:p>
@@ -36808,7 +37513,7 @@
                 <a:ea typeface="Calibri" pitchFamily="34" charset="-122"/>
                 <a:cs typeface="Calibri" pitchFamily="34" charset="-120"/>
               </a:rPr>
-              <a:t>2.  Adding '-ful' to 'thank' changes the word into an adjective.</a:t>
+              <a:t>2.  'thank' means 'to tell someone you are grateful for something they did'.</a:t>
             </a:r>
             <a:endParaRPr lang="en-US" sz="1300" dirty="0"/>
           </a:p>
@@ -36947,7 +37652,7 @@
                 <a:ea typeface="Calibri" pitchFamily="34" charset="-122"/>
                 <a:cs typeface="Calibri" pitchFamily="34" charset="-120"/>
               </a:rPr>
-              <a:t>3.  The root 'thank' comes from the Latin language.</a:t>
+              <a:t>3.  'thanks' means 'words used to show you are grateful'.</a:t>
             </a:r>
             <a:endParaRPr lang="en-US" sz="1300" dirty="0"/>
           </a:p>
@@ -36970,11 +37675,11 @@
             </a:avLst>
           </a:prstGeom>
           <a:solidFill>
-            <a:srgbClr val="FEE2E2"/>
-          </a:solidFill>
-          <a:ln w="12700">
-            <a:solidFill>
-              <a:srgbClr val="DC2626"/>
+            <a:srgbClr val="DCFCE7"/>
+          </a:solidFill>
+          <a:ln w="12700">
+            <a:solidFill>
+              <a:srgbClr val="16A34A"/>
             </a:solidFill>
             <a:prstDash val="solid"/>
           </a:ln>
@@ -37007,13 +37712,13 @@
             <a:r>
               <a:rPr lang="en-US" sz="1100" b="1" dirty="0">
                 <a:solidFill>
-                  <a:srgbClr val="DC2626"/>
+                  <a:srgbClr val="16A34A"/>
                 </a:solidFill>
                 <a:latin typeface="Trebuchet MS" pitchFamily="34" charset="0"/>
                 <a:ea typeface="Trebuchet MS" pitchFamily="34" charset="-122"/>
                 <a:cs typeface="Trebuchet MS" pitchFamily="34" charset="-120"/>
               </a:rPr>
-              <a:t>FALSE</a:t>
+              <a:t>TRUE</a:t>
             </a:r>
             <a:endParaRPr lang="en-US" sz="1100" dirty="0"/>
           </a:p>
@@ -37086,7 +37791,7 @@
                 <a:ea typeface="Calibri" pitchFamily="34" charset="-122"/>
                 <a:cs typeface="Calibri" pitchFamily="34" charset="-120"/>
               </a:rPr>
-              <a:t>4.  The word 'thankfully' has only two morphemes.</a:t>
+              <a:t>4.  'thanks' means 'small coins used for shopping'.</a:t>
             </a:r>
             <a:endParaRPr lang="en-US" sz="1300" dirty="0"/>
           </a:p>
@@ -37225,7 +37930,7 @@
                 <a:ea typeface="Calibri" pitchFamily="34" charset="-122"/>
                 <a:cs typeface="Calibri" pitchFamily="34" charset="-120"/>
               </a:rPr>
-              <a:t>5.  The word 'thankful' contains the root 'thank' plus a suffix.</a:t>
+              <a:t>5.  'thank' means 'to paint a wall a bright colour'.</a:t>
             </a:r>
             <a:endParaRPr lang="en-US" sz="1300" dirty="0"/>
           </a:p>
@@ -37248,11 +37953,11 @@
             </a:avLst>
           </a:prstGeom>
           <a:solidFill>
-            <a:srgbClr val="DCFCE7"/>
-          </a:solidFill>
-          <a:ln w="12700">
-            <a:solidFill>
-              <a:srgbClr val="16A34A"/>
+            <a:srgbClr val="FEE2E2"/>
+          </a:solidFill>
+          <a:ln w="12700">
+            <a:solidFill>
+              <a:srgbClr val="DC2626"/>
             </a:solidFill>
             <a:prstDash val="solid"/>
           </a:ln>
@@ -37285,13 +37990,13 @@
             <a:r>
               <a:rPr lang="en-US" sz="1100" b="1" dirty="0">
                 <a:solidFill>
-                  <a:srgbClr val="16A34A"/>
+                  <a:srgbClr val="DC2626"/>
                 </a:solidFill>
                 <a:latin typeface="Trebuchet MS" pitchFamily="34" charset="0"/>
                 <a:ea typeface="Trebuchet MS" pitchFamily="34" charset="-122"/>
                 <a:cs typeface="Trebuchet MS" pitchFamily="34" charset="-120"/>
               </a:rPr>
-              <a:t>TRUE</a:t>
+              <a:t>FALSE</a:t>
             </a:r>
             <a:endParaRPr lang="en-US" sz="1100" dirty="0"/>
           </a:p>
@@ -37583,7 +38288,7 @@
                 <a:ea typeface="Calibri" pitchFamily="34" charset="-122"/>
                 <a:cs typeface="Calibri" pitchFamily="34" charset="-120"/>
               </a:rPr>
-              <a:t>Word Labs  •  wordlabs.app  •  Root: 'thank' = express gratitude or praise</a:t>
+              <a:t>Word Labs  •  wordlabs.app  •  Root: 'thank' = to show you are grateful</a:t>
             </a:r>
             <a:endParaRPr lang="en-US" sz="800" dirty="0"/>
           </a:p>
@@ -37720,7 +38425,7 @@
                 <a:ea typeface="Trebuchet MS" pitchFamily="34" charset="-122"/>
                 <a:cs typeface="Trebuchet MS" pitchFamily="34" charset="-120"/>
               </a:rPr>
-              <a:t>express gratitude or praise</a:t>
+              <a:t>to show you are grateful</a:t>
             </a:r>
             <a:endParaRPr lang="en-US" sz="2000" dirty="0"/>
           </a:p>
@@ -37759,7 +38464,7 @@
                 <a:ea typeface="Calibri" pitchFamily="34" charset="-122"/>
                 <a:cs typeface="Calibri" pitchFamily="34" charset="-120"/>
               </a:rPr>
-              <a:t>Origin: Old English: þancian</a:t>
+              <a:t>Origin: Anglo-Saxon (Old English) root</a:t>
             </a:r>
             <a:endParaRPr lang="en-US" sz="1100" dirty="0"/>
           </a:p>
@@ -37864,7 +38569,7 @@
                 <a:ea typeface="Trebuchet MS" pitchFamily="34" charset="-122"/>
                 <a:cs typeface="Trebuchet MS" pitchFamily="34" charset="-120"/>
               </a:rPr>
-              <a:t>thanks</a:t>
+              <a:t>thank</a:t>
             </a:r>
             <a:endParaRPr lang="en-US" sz="1300" dirty="0"/>
           </a:p>
@@ -37930,7 +38635,7 @@
                 <a:ea typeface="Trebuchet MS" pitchFamily="34" charset="-122"/>
                 <a:cs typeface="Trebuchet MS" pitchFamily="34" charset="-120"/>
               </a:rPr>
-              <a:t>thanked</a:t>
+              <a:t>thanks</a:t>
             </a:r>
             <a:endParaRPr lang="en-US" sz="1300" dirty="0"/>
           </a:p>
@@ -37996,7 +38701,7 @@
                 <a:ea typeface="Trebuchet MS" pitchFamily="34" charset="-122"/>
                 <a:cs typeface="Trebuchet MS" pitchFamily="34" charset="-120"/>
               </a:rPr>
-              <a:t>thanking</a:t>
+              <a:t>thanked</a:t>
             </a:r>
             <a:endParaRPr lang="en-US" sz="1300" dirty="0"/>
           </a:p>
@@ -38063,204 +38768,6 @@
                 <a:cs typeface="Trebuchet MS" pitchFamily="34" charset="-120"/>
               </a:rPr>
               <a:t>thankful</a:t>
-            </a:r>
-            <a:endParaRPr lang="en-US" sz="1300" dirty="0"/>
-          </a:p>
-        </p:txBody>
-      </p:sp>
-      <p:sp>
-        <p:nvSpPr>
-          <p:cNvPr id="24" name="Shape 22"/>
-          <p:cNvSpPr/>
-          <p:nvPr/>
-        </p:nvSpPr>
-        <p:spPr>
-          <a:xfrm>
-            <a:off x="365760" y="3401568"/>
-            <a:ext cx="2011680" cy="502920"/>
-          </a:xfrm>
-          <a:prstGeom prst="rect">
-            <a:avLst>
-              <a:gd name="adj" fmla="val 14545"/>
-            </a:avLst>
-          </a:prstGeom>
-          <a:solidFill>
-            <a:srgbClr val="EEF2FF"/>
-          </a:solidFill>
-          <a:ln w="12700">
-            <a:solidFill>
-              <a:srgbClr val="6366F1"/>
-            </a:solidFill>
-            <a:prstDash val="solid"/>
-          </a:ln>
-        </p:spPr>
-      </p:sp>
-      <p:sp>
-        <p:nvSpPr>
-          <p:cNvPr id="25" name="Text 23"/>
-          <p:cNvSpPr/>
-          <p:nvPr/>
-        </p:nvSpPr>
-        <p:spPr>
-          <a:xfrm>
-            <a:off x="365760" y="3401568"/>
-            <a:ext cx="2011680" cy="502920"/>
-          </a:xfrm>
-          <a:prstGeom prst="rect">
-            <a:avLst/>
-          </a:prstGeom>
-          <a:noFill/>
-          <a:ln/>
-        </p:spPr>
-        <p:txBody>
-          <a:bodyPr wrap="square" lIns="0" tIns="0" rIns="0" bIns="0" rtlCol="0" anchor="ctr"/>
-          <a:lstStyle/>
-          <a:p>
-            <a:pPr algn="ctr" indent="0" marL="0">
-              <a:buNone/>
-            </a:pPr>
-            <a:r>
-              <a:rPr lang="en-US" sz="1300" b="1" dirty="0">
-                <a:solidFill>
-                  <a:srgbClr val="4338CA"/>
-                </a:solidFill>
-                <a:latin typeface="Trebuchet MS" pitchFamily="34" charset="0"/>
-                <a:ea typeface="Trebuchet MS" pitchFamily="34" charset="-122"/>
-                <a:cs typeface="Trebuchet MS" pitchFamily="34" charset="-120"/>
-              </a:rPr>
-              <a:t>thankless</a:t>
-            </a:r>
-            <a:endParaRPr lang="en-US" sz="1300" dirty="0"/>
-          </a:p>
-        </p:txBody>
-      </p:sp>
-      <p:sp>
-        <p:nvSpPr>
-          <p:cNvPr id="26" name="Shape 24"/>
-          <p:cNvSpPr/>
-          <p:nvPr/>
-        </p:nvSpPr>
-        <p:spPr>
-          <a:xfrm>
-            <a:off x="2514600" y="3401568"/>
-            <a:ext cx="2011680" cy="502920"/>
-          </a:xfrm>
-          <a:prstGeom prst="rect">
-            <a:avLst>
-              <a:gd name="adj" fmla="val 14545"/>
-            </a:avLst>
-          </a:prstGeom>
-          <a:solidFill>
-            <a:srgbClr val="EEF2FF"/>
-          </a:solidFill>
-          <a:ln w="12700">
-            <a:solidFill>
-              <a:srgbClr val="6366F1"/>
-            </a:solidFill>
-            <a:prstDash val="solid"/>
-          </a:ln>
-        </p:spPr>
-      </p:sp>
-      <p:sp>
-        <p:nvSpPr>
-          <p:cNvPr id="27" name="Text 25"/>
-          <p:cNvSpPr/>
-          <p:nvPr/>
-        </p:nvSpPr>
-        <p:spPr>
-          <a:xfrm>
-            <a:off x="2514600" y="3401568"/>
-            <a:ext cx="2011680" cy="502920"/>
-          </a:xfrm>
-          <a:prstGeom prst="rect">
-            <a:avLst/>
-          </a:prstGeom>
-          <a:noFill/>
-          <a:ln/>
-        </p:spPr>
-        <p:txBody>
-          <a:bodyPr wrap="square" lIns="0" tIns="0" rIns="0" bIns="0" rtlCol="0" anchor="ctr"/>
-          <a:lstStyle/>
-          <a:p>
-            <a:pPr algn="ctr" indent="0" marL="0">
-              <a:buNone/>
-            </a:pPr>
-            <a:r>
-              <a:rPr lang="en-US" sz="1300" b="1" dirty="0">
-                <a:solidFill>
-                  <a:srgbClr val="4338CA"/>
-                </a:solidFill>
-                <a:latin typeface="Trebuchet MS" pitchFamily="34" charset="0"/>
-                <a:ea typeface="Trebuchet MS" pitchFamily="34" charset="-122"/>
-                <a:cs typeface="Trebuchet MS" pitchFamily="34" charset="-120"/>
-              </a:rPr>
-              <a:t>thankfully</a:t>
-            </a:r>
-            <a:endParaRPr lang="en-US" sz="1300" dirty="0"/>
-          </a:p>
-        </p:txBody>
-      </p:sp>
-      <p:sp>
-        <p:nvSpPr>
-          <p:cNvPr id="28" name="Shape 26"/>
-          <p:cNvSpPr/>
-          <p:nvPr/>
-        </p:nvSpPr>
-        <p:spPr>
-          <a:xfrm>
-            <a:off x="4663440" y="3401568"/>
-            <a:ext cx="2011680" cy="502920"/>
-          </a:xfrm>
-          <a:prstGeom prst="rect">
-            <a:avLst>
-              <a:gd name="adj" fmla="val 14545"/>
-            </a:avLst>
-          </a:prstGeom>
-          <a:solidFill>
-            <a:srgbClr val="EEF2FF"/>
-          </a:solidFill>
-          <a:ln w="12700">
-            <a:solidFill>
-              <a:srgbClr val="6366F1"/>
-            </a:solidFill>
-            <a:prstDash val="solid"/>
-          </a:ln>
-        </p:spPr>
-      </p:sp>
-      <p:sp>
-        <p:nvSpPr>
-          <p:cNvPr id="29" name="Text 27"/>
-          <p:cNvSpPr/>
-          <p:nvPr/>
-        </p:nvSpPr>
-        <p:spPr>
-          <a:xfrm>
-            <a:off x="4663440" y="3401568"/>
-            <a:ext cx="2011680" cy="502920"/>
-          </a:xfrm>
-          <a:prstGeom prst="rect">
-            <a:avLst/>
-          </a:prstGeom>
-          <a:noFill/>
-          <a:ln/>
-        </p:spPr>
-        <p:txBody>
-          <a:bodyPr wrap="square" lIns="0" tIns="0" rIns="0" bIns="0" rtlCol="0" anchor="ctr"/>
-          <a:lstStyle/>
-          <a:p>
-            <a:pPr algn="ctr" indent="0" marL="0">
-              <a:buNone/>
-            </a:pPr>
-            <a:r>
-              <a:rPr lang="en-US" sz="1300" b="1" dirty="0">
-                <a:solidFill>
-                  <a:srgbClr val="4338CA"/>
-                </a:solidFill>
-                <a:latin typeface="Trebuchet MS" pitchFamily="34" charset="0"/>
-                <a:ea typeface="Trebuchet MS" pitchFamily="34" charset="-122"/>
-                <a:cs typeface="Trebuchet MS" pitchFamily="34" charset="-120"/>
-              </a:rPr>
-              <a:t>thankfulness</a:t>
             </a:r>
             <a:endParaRPr lang="en-US" sz="1300" dirty="0"/>
           </a:p>
@@ -38552,7 +39059,7 @@
                 <a:ea typeface="Calibri" pitchFamily="34" charset="-122"/>
                 <a:cs typeface="Calibri" pitchFamily="34" charset="-120"/>
               </a:rPr>
-              <a:t>Word Labs  •  wordlabs.app  •  Root: 'thank' = express gratitude or praise</a:t>
+              <a:t>Word Labs  •  wordlabs.app  •  Root: 'thank' = to show you are grateful</a:t>
             </a:r>
             <a:endParaRPr lang="en-US" sz="800" dirty="0"/>
           </a:p>
@@ -38810,7 +39317,7 @@
             <a:avLst/>
           </a:prstGeom>
           <a:solidFill>
-            <a:srgbClr val="DDD6FE"/>
+            <a:srgbClr val="F8FAFC"/>
           </a:solidFill>
           <a:ln w="12700">
             <a:solidFill>
@@ -38822,14 +39329,39 @@
       </p:sp>
       <p:sp>
         <p:nvSpPr>
-          <p:cNvPr id="18" name="Text 16"/>
-          <p:cNvSpPr/>
-          <p:nvPr/>
-        </p:nvSpPr>
-        <p:spPr>
-          <a:xfrm>
-            <a:off x="640080" y="1755648"/>
-            <a:ext cx="1463040" cy="420624"/>
+          <p:cNvPr id="18" name="Shape 16"/>
+          <p:cNvSpPr/>
+          <p:nvPr/>
+        </p:nvSpPr>
+        <p:spPr>
+          <a:xfrm>
+            <a:off x="3291840" y="1755648"/>
+            <a:ext cx="1645920" cy="420624"/>
+          </a:xfrm>
+          <a:prstGeom prst="rect">
+            <a:avLst/>
+          </a:prstGeom>
+          <a:solidFill>
+            <a:srgbClr val="CCFBF1"/>
+          </a:solidFill>
+          <a:ln w="12700">
+            <a:solidFill>
+              <a:srgbClr val="E5E7EB"/>
+            </a:solidFill>
+            <a:prstDash val="solid"/>
+          </a:ln>
+        </p:spPr>
+      </p:sp>
+      <p:sp>
+        <p:nvSpPr>
+          <p:cNvPr id="19" name="Text 17"/>
+          <p:cNvSpPr/>
+          <p:nvPr/>
+        </p:nvSpPr>
+        <p:spPr>
+          <a:xfrm>
+            <a:off x="3291840" y="1755648"/>
+            <a:ext cx="1645920" cy="420624"/>
           </a:xfrm>
           <a:prstGeom prst="rect">
             <a:avLst/>
@@ -38847,13 +39379,13 @@
             <a:r>
               <a:rPr lang="en-US" sz="1300" b="1" dirty="0">
                 <a:solidFill>
-                  <a:srgbClr val="4C1D95"/>
+                  <a:srgbClr val="0F766E"/>
                 </a:solidFill>
                 <a:latin typeface="Trebuchet MS" pitchFamily="34" charset="0"/>
                 <a:ea typeface="Trebuchet MS" pitchFamily="34" charset="-122"/>
                 <a:cs typeface="Trebuchet MS" pitchFamily="34" charset="-120"/>
               </a:rPr>
-              <a:t>un-</a:t>
+              <a:t>thank</a:t>
             </a:r>
             <a:endParaRPr lang="en-US" sz="1300" dirty="0"/>
           </a:p>
@@ -38861,20 +39393,20 @@
       </p:sp>
       <p:sp>
         <p:nvSpPr>
-          <p:cNvPr id="19" name="Shape 17"/>
-          <p:cNvSpPr/>
-          <p:nvPr/>
-        </p:nvSpPr>
-        <p:spPr>
-          <a:xfrm>
-            <a:off x="3291840" y="1755648"/>
-            <a:ext cx="1645920" cy="420624"/>
-          </a:xfrm>
-          <a:prstGeom prst="rect">
-            <a:avLst/>
-          </a:prstGeom>
-          <a:solidFill>
-            <a:srgbClr val="CCFBF1"/>
+          <p:cNvPr id="20" name="Shape 18"/>
+          <p:cNvSpPr/>
+          <p:nvPr/>
+        </p:nvSpPr>
+        <p:spPr>
+          <a:xfrm>
+            <a:off x="5943600" y="1755648"/>
+            <a:ext cx="1463040" cy="420624"/>
+          </a:xfrm>
+          <a:prstGeom prst="rect">
+            <a:avLst/>
+          </a:prstGeom>
+          <a:solidFill>
+            <a:srgbClr val="FCE7F3"/>
           </a:solidFill>
           <a:ln w="12700">
             <a:solidFill>
@@ -38886,14 +39418,14 @@
       </p:sp>
       <p:sp>
         <p:nvSpPr>
-          <p:cNvPr id="20" name="Text 18"/>
-          <p:cNvSpPr/>
-          <p:nvPr/>
-        </p:nvSpPr>
-        <p:spPr>
-          <a:xfrm>
-            <a:off x="3291840" y="1755648"/>
-            <a:ext cx="1645920" cy="420624"/>
+          <p:cNvPr id="21" name="Text 19"/>
+          <p:cNvSpPr/>
+          <p:nvPr/>
+        </p:nvSpPr>
+        <p:spPr>
+          <a:xfrm>
+            <a:off x="5943600" y="1755648"/>
+            <a:ext cx="1463040" cy="420624"/>
           </a:xfrm>
           <a:prstGeom prst="rect">
             <a:avLst/>
@@ -38911,13 +39443,13 @@
             <a:r>
               <a:rPr lang="en-US" sz="1300" b="1" dirty="0">
                 <a:solidFill>
-                  <a:srgbClr val="0F766E"/>
+                  <a:srgbClr val="9D174D"/>
                 </a:solidFill>
                 <a:latin typeface="Trebuchet MS" pitchFamily="34" charset="0"/>
                 <a:ea typeface="Trebuchet MS" pitchFamily="34" charset="-122"/>
                 <a:cs typeface="Trebuchet MS" pitchFamily="34" charset="-120"/>
               </a:rPr>
-              <a:t>thank</a:t>
+              <a:t>-ed</a:t>
             </a:r>
             <a:endParaRPr lang="en-US" sz="1300" dirty="0"/>
           </a:p>
@@ -38925,19 +39457,69 @@
       </p:sp>
       <p:sp>
         <p:nvSpPr>
-          <p:cNvPr id="21" name="Shape 19"/>
-          <p:cNvSpPr/>
-          <p:nvPr/>
-        </p:nvSpPr>
-        <p:spPr>
-          <a:xfrm>
-            <a:off x="5943600" y="1755648"/>
+          <p:cNvPr id="22" name="Shape 20"/>
+          <p:cNvSpPr/>
+          <p:nvPr/>
+        </p:nvSpPr>
+        <p:spPr>
+          <a:xfrm>
+            <a:off x="640080" y="2212848"/>
             <a:ext cx="1463040" cy="420624"/>
           </a:xfrm>
           <a:prstGeom prst="rect">
             <a:avLst/>
           </a:prstGeom>
           <a:solidFill>
+            <a:srgbClr val="F1F5F9"/>
+          </a:solidFill>
+          <a:ln w="12700">
+            <a:solidFill>
+              <a:srgbClr val="E5E7EB"/>
+            </a:solidFill>
+            <a:prstDash val="solid"/>
+          </a:ln>
+        </p:spPr>
+      </p:sp>
+      <p:sp>
+        <p:nvSpPr>
+          <p:cNvPr id="23" name="Shape 21"/>
+          <p:cNvSpPr/>
+          <p:nvPr/>
+        </p:nvSpPr>
+        <p:spPr>
+          <a:xfrm>
+            <a:off x="3291840" y="2212848"/>
+            <a:ext cx="1645920" cy="420624"/>
+          </a:xfrm>
+          <a:prstGeom prst="rect">
+            <a:avLst/>
+          </a:prstGeom>
+          <a:solidFill>
+            <a:srgbClr val="F1F5F9"/>
+          </a:solidFill>
+          <a:ln w="12700">
+            <a:solidFill>
+              <a:srgbClr val="E5E7EB"/>
+            </a:solidFill>
+            <a:prstDash val="solid"/>
+          </a:ln>
+        </p:spPr>
+      </p:sp>
+      <p:sp>
+        <p:nvSpPr>
+          <p:cNvPr id="24" name="Shape 22"/>
+          <p:cNvSpPr/>
+          <p:nvPr/>
+        </p:nvSpPr>
+        <p:spPr>
+          <a:xfrm>
+            <a:off x="5943600" y="2212848"/>
+            <a:ext cx="1463040" cy="420624"/>
+          </a:xfrm>
+          <a:prstGeom prst="rect">
+            <a:avLst/>
+          </a:prstGeom>
+          <a:solidFill>
             <a:srgbClr val="FCE7F3"/>
           </a:solidFill>
           <a:ln w="12700">
@@ -38950,13 +39532,13 @@
       </p:sp>
       <p:sp>
         <p:nvSpPr>
-          <p:cNvPr id="22" name="Text 20"/>
-          <p:cNvSpPr/>
-          <p:nvPr/>
-        </p:nvSpPr>
-        <p:spPr>
-          <a:xfrm>
-            <a:off x="5943600" y="1755648"/>
+          <p:cNvPr id="25" name="Text 23"/>
+          <p:cNvSpPr/>
+          <p:nvPr/>
+        </p:nvSpPr>
+        <p:spPr>
+          <a:xfrm>
+            <a:off x="5943600" y="2212848"/>
             <a:ext cx="1463040" cy="420624"/>
           </a:xfrm>
           <a:prstGeom prst="rect">
@@ -38981,7 +39563,7 @@
                 <a:ea typeface="Trebuchet MS" pitchFamily="34" charset="-122"/>
                 <a:cs typeface="Trebuchet MS" pitchFamily="34" charset="-120"/>
               </a:rPr>
-              <a:t>-s</a:t>
+              <a:t>-ful</a:t>
             </a:r>
             <a:endParaRPr lang="en-US" sz="1300" dirty="0"/>
           </a:p>
@@ -38989,20 +39571,20 @@
       </p:sp>
       <p:sp>
         <p:nvSpPr>
-          <p:cNvPr id="23" name="Shape 21"/>
-          <p:cNvSpPr/>
-          <p:nvPr/>
-        </p:nvSpPr>
-        <p:spPr>
-          <a:xfrm>
-            <a:off x="640080" y="2212848"/>
+          <p:cNvPr id="26" name="Shape 24"/>
+          <p:cNvSpPr/>
+          <p:nvPr/>
+        </p:nvSpPr>
+        <p:spPr>
+          <a:xfrm>
+            <a:off x="640080" y="2670048"/>
             <a:ext cx="1463040" cy="420624"/>
           </a:xfrm>
           <a:prstGeom prst="rect">
             <a:avLst/>
           </a:prstGeom>
           <a:solidFill>
-            <a:srgbClr val="DDD6FE"/>
+            <a:srgbClr val="F8FAFC"/>
           </a:solidFill>
           <a:ln w="12700">
             <a:solidFill>
@@ -39014,18 +39596,68 @@
       </p:sp>
       <p:sp>
         <p:nvSpPr>
-          <p:cNvPr id="24" name="Text 22"/>
-          <p:cNvSpPr/>
-          <p:nvPr/>
-        </p:nvSpPr>
-        <p:spPr>
-          <a:xfrm>
-            <a:off x="640080" y="2212848"/>
+          <p:cNvPr id="27" name="Shape 25"/>
+          <p:cNvSpPr/>
+          <p:nvPr/>
+        </p:nvSpPr>
+        <p:spPr>
+          <a:xfrm>
+            <a:off x="3291840" y="2670048"/>
+            <a:ext cx="1645920" cy="420624"/>
+          </a:xfrm>
+          <a:prstGeom prst="rect">
+            <a:avLst/>
+          </a:prstGeom>
+          <a:solidFill>
+            <a:srgbClr val="F8FAFC"/>
+          </a:solidFill>
+          <a:ln w="12700">
+            <a:solidFill>
+              <a:srgbClr val="E5E7EB"/>
+            </a:solidFill>
+            <a:prstDash val="solid"/>
+          </a:ln>
+        </p:spPr>
+      </p:sp>
+      <p:sp>
+        <p:nvSpPr>
+          <p:cNvPr id="28" name="Shape 26"/>
+          <p:cNvSpPr/>
+          <p:nvPr/>
+        </p:nvSpPr>
+        <p:spPr>
+          <a:xfrm>
+            <a:off x="5943600" y="2670048"/>
             <a:ext cx="1463040" cy="420624"/>
           </a:xfrm>
           <a:prstGeom prst="rect">
             <a:avLst/>
           </a:prstGeom>
+          <a:solidFill>
+            <a:srgbClr val="FCE7F3"/>
+          </a:solidFill>
+          <a:ln w="12700">
+            <a:solidFill>
+              <a:srgbClr val="E5E7EB"/>
+            </a:solidFill>
+            <a:prstDash val="solid"/>
+          </a:ln>
+        </p:spPr>
+      </p:sp>
+      <p:sp>
+        <p:nvSpPr>
+          <p:cNvPr id="29" name="Text 27"/>
+          <p:cNvSpPr/>
+          <p:nvPr/>
+        </p:nvSpPr>
+        <p:spPr>
+          <a:xfrm>
+            <a:off x="5943600" y="2670048"/>
+            <a:ext cx="1463040" cy="420624"/>
+          </a:xfrm>
+          <a:prstGeom prst="rect">
+            <a:avLst/>
+          </a:prstGeom>
           <a:noFill/>
           <a:ln/>
         </p:spPr>
@@ -39039,13 +39671,13 @@
             <a:r>
               <a:rPr lang="en-US" sz="1300" b="1" dirty="0">
                 <a:solidFill>
-                  <a:srgbClr val="4C1D95"/>
+                  <a:srgbClr val="9D174D"/>
                 </a:solidFill>
                 <a:latin typeface="Trebuchet MS" pitchFamily="34" charset="0"/>
                 <a:ea typeface="Trebuchet MS" pitchFamily="34" charset="-122"/>
                 <a:cs typeface="Trebuchet MS" pitchFamily="34" charset="-120"/>
               </a:rPr>
-              <a:t>dis-</a:t>
+              <a:t>-ing</a:t>
             </a:r>
             <a:endParaRPr lang="en-US" sz="1300" dirty="0"/>
           </a:p>
@@ -39053,13 +39685,38 @@
       </p:sp>
       <p:sp>
         <p:nvSpPr>
-          <p:cNvPr id="25" name="Shape 23"/>
-          <p:cNvSpPr/>
-          <p:nvPr/>
-        </p:nvSpPr>
-        <p:spPr>
-          <a:xfrm>
-            <a:off x="3291840" y="2212848"/>
+          <p:cNvPr id="30" name="Shape 28"/>
+          <p:cNvSpPr/>
+          <p:nvPr/>
+        </p:nvSpPr>
+        <p:spPr>
+          <a:xfrm>
+            <a:off x="640080" y="3127248"/>
+            <a:ext cx="1463040" cy="420624"/>
+          </a:xfrm>
+          <a:prstGeom prst="rect">
+            <a:avLst/>
+          </a:prstGeom>
+          <a:solidFill>
+            <a:srgbClr val="F1F5F9"/>
+          </a:solidFill>
+          <a:ln w="12700">
+            <a:solidFill>
+              <a:srgbClr val="E5E7EB"/>
+            </a:solidFill>
+            <a:prstDash val="solid"/>
+          </a:ln>
+        </p:spPr>
+      </p:sp>
+      <p:sp>
+        <p:nvSpPr>
+          <p:cNvPr id="31" name="Shape 29"/>
+          <p:cNvSpPr/>
+          <p:nvPr/>
+        </p:nvSpPr>
+        <p:spPr>
+          <a:xfrm>
+            <a:off x="3291840" y="3127248"/>
             <a:ext cx="1645920" cy="420624"/>
           </a:xfrm>
           <a:prstGeom prst="rect">
@@ -39078,13 +39735,13 @@
       </p:sp>
       <p:sp>
         <p:nvSpPr>
-          <p:cNvPr id="26" name="Shape 24"/>
-          <p:cNvSpPr/>
-          <p:nvPr/>
-        </p:nvSpPr>
-        <p:spPr>
-          <a:xfrm>
-            <a:off x="5943600" y="2212848"/>
+          <p:cNvPr id="32" name="Shape 30"/>
+          <p:cNvSpPr/>
+          <p:nvPr/>
+        </p:nvSpPr>
+        <p:spPr>
+          <a:xfrm>
+            <a:off x="5943600" y="3127248"/>
             <a:ext cx="1463040" cy="420624"/>
           </a:xfrm>
           <a:prstGeom prst="rect">
@@ -39103,13 +39760,13 @@
       </p:sp>
       <p:sp>
         <p:nvSpPr>
-          <p:cNvPr id="27" name="Text 25"/>
-          <p:cNvSpPr/>
-          <p:nvPr/>
-        </p:nvSpPr>
-        <p:spPr>
-          <a:xfrm>
-            <a:off x="5943600" y="2212848"/>
+          <p:cNvPr id="33" name="Text 31"/>
+          <p:cNvSpPr/>
+          <p:nvPr/>
+        </p:nvSpPr>
+        <p:spPr>
+          <a:xfrm>
+            <a:off x="5943600" y="3127248"/>
             <a:ext cx="1463040" cy="420624"/>
           </a:xfrm>
           <a:prstGeom prst="rect">
@@ -39134,7 +39791,7 @@
                 <a:ea typeface="Trebuchet MS" pitchFamily="34" charset="-122"/>
                 <a:cs typeface="Trebuchet MS" pitchFamily="34" charset="-120"/>
               </a:rPr>
-              <a:t>-ed</a:t>
+              <a:t>-less</a:t>
             </a:r>
             <a:endParaRPr lang="en-US" sz="1300" dirty="0"/>
           </a:p>
@@ -39142,20 +39799,20 @@
       </p:sp>
       <p:sp>
         <p:nvSpPr>
-          <p:cNvPr id="28" name="Shape 26"/>
-          <p:cNvSpPr/>
-          <p:nvPr/>
-        </p:nvSpPr>
-        <p:spPr>
-          <a:xfrm>
-            <a:off x="640080" y="2670048"/>
+          <p:cNvPr id="34" name="Shape 32"/>
+          <p:cNvSpPr/>
+          <p:nvPr/>
+        </p:nvSpPr>
+        <p:spPr>
+          <a:xfrm>
+            <a:off x="640080" y="3584448"/>
             <a:ext cx="1463040" cy="420624"/>
           </a:xfrm>
           <a:prstGeom prst="rect">
             <a:avLst/>
           </a:prstGeom>
           <a:solidFill>
-            <a:srgbClr val="DDD6FE"/>
+            <a:srgbClr val="F8FAFC"/>
           </a:solidFill>
           <a:ln w="12700">
             <a:solidFill>
@@ -39167,18 +39824,68 @@
       </p:sp>
       <p:sp>
         <p:nvSpPr>
-          <p:cNvPr id="29" name="Text 27"/>
-          <p:cNvSpPr/>
-          <p:nvPr/>
-        </p:nvSpPr>
-        <p:spPr>
-          <a:xfrm>
-            <a:off x="640080" y="2670048"/>
+          <p:cNvPr id="35" name="Shape 33"/>
+          <p:cNvSpPr/>
+          <p:nvPr/>
+        </p:nvSpPr>
+        <p:spPr>
+          <a:xfrm>
+            <a:off x="3291840" y="3584448"/>
+            <a:ext cx="1645920" cy="420624"/>
+          </a:xfrm>
+          <a:prstGeom prst="rect">
+            <a:avLst/>
+          </a:prstGeom>
+          <a:solidFill>
+            <a:srgbClr val="F8FAFC"/>
+          </a:solidFill>
+          <a:ln w="12700">
+            <a:solidFill>
+              <a:srgbClr val="E5E7EB"/>
+            </a:solidFill>
+            <a:prstDash val="solid"/>
+          </a:ln>
+        </p:spPr>
+      </p:sp>
+      <p:sp>
+        <p:nvSpPr>
+          <p:cNvPr id="36" name="Shape 34"/>
+          <p:cNvSpPr/>
+          <p:nvPr/>
+        </p:nvSpPr>
+        <p:spPr>
+          <a:xfrm>
+            <a:off x="5943600" y="3584448"/>
             <a:ext cx="1463040" cy="420624"/>
           </a:xfrm>
           <a:prstGeom prst="rect">
             <a:avLst/>
           </a:prstGeom>
+          <a:solidFill>
+            <a:srgbClr val="FCE7F3"/>
+          </a:solidFill>
+          <a:ln w="12700">
+            <a:solidFill>
+              <a:srgbClr val="E5E7EB"/>
+            </a:solidFill>
+            <a:prstDash val="solid"/>
+          </a:ln>
+        </p:spPr>
+      </p:sp>
+      <p:sp>
+        <p:nvSpPr>
+          <p:cNvPr id="37" name="Text 35"/>
+          <p:cNvSpPr/>
+          <p:nvPr/>
+        </p:nvSpPr>
+        <p:spPr>
+          <a:xfrm>
+            <a:off x="5943600" y="3584448"/>
+            <a:ext cx="1463040" cy="420624"/>
+          </a:xfrm>
+          <a:prstGeom prst="rect">
+            <a:avLst/>
+          </a:prstGeom>
           <a:noFill/>
           <a:ln/>
         </p:spPr>
@@ -39192,13 +39899,13 @@
             <a:r>
               <a:rPr lang="en-US" sz="1300" b="1" dirty="0">
                 <a:solidFill>
-                  <a:srgbClr val="4C1D95"/>
+                  <a:srgbClr val="9D174D"/>
                 </a:solidFill>
                 <a:latin typeface="Trebuchet MS" pitchFamily="34" charset="0"/>
                 <a:ea typeface="Trebuchet MS" pitchFamily="34" charset="-122"/>
                 <a:cs typeface="Trebuchet MS" pitchFamily="34" charset="-120"/>
               </a:rPr>
-              <a:t>over-</a:t>
+              <a:t>-s</a:t>
             </a:r>
             <a:endParaRPr lang="en-US" sz="1300" dirty="0"/>
           </a:p>
@@ -39206,402 +39913,7 @@
       </p:sp>
       <p:sp>
         <p:nvSpPr>
-          <p:cNvPr id="30" name="Shape 28"/>
-          <p:cNvSpPr/>
-          <p:nvPr/>
-        </p:nvSpPr>
-        <p:spPr>
-          <a:xfrm>
-            <a:off x="3291840" y="2670048"/>
-            <a:ext cx="1645920" cy="420624"/>
-          </a:xfrm>
-          <a:prstGeom prst="rect">
-            <a:avLst/>
-          </a:prstGeom>
-          <a:solidFill>
-            <a:srgbClr val="F8FAFC"/>
-          </a:solidFill>
-          <a:ln w="12700">
-            <a:solidFill>
-              <a:srgbClr val="E5E7EB"/>
-            </a:solidFill>
-            <a:prstDash val="solid"/>
-          </a:ln>
-        </p:spPr>
-      </p:sp>
-      <p:sp>
-        <p:nvSpPr>
-          <p:cNvPr id="31" name="Shape 29"/>
-          <p:cNvSpPr/>
-          <p:nvPr/>
-        </p:nvSpPr>
-        <p:spPr>
-          <a:xfrm>
-            <a:off x="5943600" y="2670048"/>
-            <a:ext cx="1463040" cy="420624"/>
-          </a:xfrm>
-          <a:prstGeom prst="rect">
-            <a:avLst/>
-          </a:prstGeom>
-          <a:solidFill>
-            <a:srgbClr val="FCE7F3"/>
-          </a:solidFill>
-          <a:ln w="12700">
-            <a:solidFill>
-              <a:srgbClr val="E5E7EB"/>
-            </a:solidFill>
-            <a:prstDash val="solid"/>
-          </a:ln>
-        </p:spPr>
-      </p:sp>
-      <p:sp>
-        <p:nvSpPr>
-          <p:cNvPr id="32" name="Text 30"/>
-          <p:cNvSpPr/>
-          <p:nvPr/>
-        </p:nvSpPr>
-        <p:spPr>
-          <a:xfrm>
-            <a:off x="5943600" y="2670048"/>
-            <a:ext cx="1463040" cy="420624"/>
-          </a:xfrm>
-          <a:prstGeom prst="rect">
-            <a:avLst/>
-          </a:prstGeom>
-          <a:noFill/>
-          <a:ln/>
-        </p:spPr>
-        <p:txBody>
-          <a:bodyPr wrap="square" lIns="0" tIns="0" rIns="0" bIns="0" rtlCol="0" anchor="ctr"/>
-          <a:lstStyle/>
-          <a:p>
-            <a:pPr algn="ctr" indent="0" marL="0">
-              <a:buNone/>
-            </a:pPr>
-            <a:r>
-              <a:rPr lang="en-US" sz="1300" b="1" dirty="0">
-                <a:solidFill>
-                  <a:srgbClr val="9D174D"/>
-                </a:solidFill>
-                <a:latin typeface="Trebuchet MS" pitchFamily="34" charset="0"/>
-                <a:ea typeface="Trebuchet MS" pitchFamily="34" charset="-122"/>
-                <a:cs typeface="Trebuchet MS" pitchFamily="34" charset="-120"/>
-              </a:rPr>
-              <a:t>-ing</a:t>
-            </a:r>
-            <a:endParaRPr lang="en-US" sz="1300" dirty="0"/>
-          </a:p>
-        </p:txBody>
-      </p:sp>
-      <p:sp>
-        <p:nvSpPr>
-          <p:cNvPr id="33" name="Shape 31"/>
-          <p:cNvSpPr/>
-          <p:nvPr/>
-        </p:nvSpPr>
-        <p:spPr>
-          <a:xfrm>
-            <a:off x="640080" y="3127248"/>
-            <a:ext cx="1463040" cy="420624"/>
-          </a:xfrm>
-          <a:prstGeom prst="rect">
-            <a:avLst/>
-          </a:prstGeom>
-          <a:solidFill>
-            <a:srgbClr val="DDD6FE"/>
-          </a:solidFill>
-          <a:ln w="12700">
-            <a:solidFill>
-              <a:srgbClr val="E5E7EB"/>
-            </a:solidFill>
-            <a:prstDash val="solid"/>
-          </a:ln>
-        </p:spPr>
-      </p:sp>
-      <p:sp>
-        <p:nvSpPr>
-          <p:cNvPr id="34" name="Text 32"/>
-          <p:cNvSpPr/>
-          <p:nvPr/>
-        </p:nvSpPr>
-        <p:spPr>
-          <a:xfrm>
-            <a:off x="640080" y="3127248"/>
-            <a:ext cx="1463040" cy="420624"/>
-          </a:xfrm>
-          <a:prstGeom prst="rect">
-            <a:avLst/>
-          </a:prstGeom>
-          <a:noFill/>
-          <a:ln/>
-        </p:spPr>
-        <p:txBody>
-          <a:bodyPr wrap="square" lIns="0" tIns="0" rIns="0" bIns="0" rtlCol="0" anchor="ctr"/>
-          <a:lstStyle/>
-          <a:p>
-            <a:pPr algn="ctr" indent="0" marL="0">
-              <a:buNone/>
-            </a:pPr>
-            <a:r>
-              <a:rPr lang="en-US" sz="1300" b="1" dirty="0">
-                <a:solidFill>
-                  <a:srgbClr val="4C1D95"/>
-                </a:solidFill>
-                <a:latin typeface="Trebuchet MS" pitchFamily="34" charset="0"/>
-                <a:ea typeface="Trebuchet MS" pitchFamily="34" charset="-122"/>
-                <a:cs typeface="Trebuchet MS" pitchFamily="34" charset="-120"/>
-              </a:rPr>
-              <a:t>self-</a:t>
-            </a:r>
-            <a:endParaRPr lang="en-US" sz="1300" dirty="0"/>
-          </a:p>
-        </p:txBody>
-      </p:sp>
-      <p:sp>
-        <p:nvSpPr>
-          <p:cNvPr id="35" name="Shape 33"/>
-          <p:cNvSpPr/>
-          <p:nvPr/>
-        </p:nvSpPr>
-        <p:spPr>
-          <a:xfrm>
-            <a:off x="3291840" y="3127248"/>
-            <a:ext cx="1645920" cy="420624"/>
-          </a:xfrm>
-          <a:prstGeom prst="rect">
-            <a:avLst/>
-          </a:prstGeom>
-          <a:solidFill>
-            <a:srgbClr val="F1F5F9"/>
-          </a:solidFill>
-          <a:ln w="12700">
-            <a:solidFill>
-              <a:srgbClr val="E5E7EB"/>
-            </a:solidFill>
-            <a:prstDash val="solid"/>
-          </a:ln>
-        </p:spPr>
-      </p:sp>
-      <p:sp>
-        <p:nvSpPr>
-          <p:cNvPr id="36" name="Shape 34"/>
-          <p:cNvSpPr/>
-          <p:nvPr/>
-        </p:nvSpPr>
-        <p:spPr>
-          <a:xfrm>
-            <a:off x="5943600" y="3127248"/>
-            <a:ext cx="1463040" cy="420624"/>
-          </a:xfrm>
-          <a:prstGeom prst="rect">
-            <a:avLst/>
-          </a:prstGeom>
-          <a:solidFill>
-            <a:srgbClr val="FCE7F3"/>
-          </a:solidFill>
-          <a:ln w="12700">
-            <a:solidFill>
-              <a:srgbClr val="E5E7EB"/>
-            </a:solidFill>
-            <a:prstDash val="solid"/>
-          </a:ln>
-        </p:spPr>
-      </p:sp>
-      <p:sp>
-        <p:nvSpPr>
-          <p:cNvPr id="37" name="Text 35"/>
-          <p:cNvSpPr/>
-          <p:nvPr/>
-        </p:nvSpPr>
-        <p:spPr>
-          <a:xfrm>
-            <a:off x="5943600" y="3127248"/>
-            <a:ext cx="1463040" cy="420624"/>
-          </a:xfrm>
-          <a:prstGeom prst="rect">
-            <a:avLst/>
-          </a:prstGeom>
-          <a:noFill/>
-          <a:ln/>
-        </p:spPr>
-        <p:txBody>
-          <a:bodyPr wrap="square" lIns="0" tIns="0" rIns="0" bIns="0" rtlCol="0" anchor="ctr"/>
-          <a:lstStyle/>
-          <a:p>
-            <a:pPr algn="ctr" indent="0" marL="0">
-              <a:buNone/>
-            </a:pPr>
-            <a:r>
-              <a:rPr lang="en-US" sz="1300" b="1" dirty="0">
-                <a:solidFill>
-                  <a:srgbClr val="9D174D"/>
-                </a:solidFill>
-                <a:latin typeface="Trebuchet MS" pitchFamily="34" charset="0"/>
-                <a:ea typeface="Trebuchet MS" pitchFamily="34" charset="-122"/>
-                <a:cs typeface="Trebuchet MS" pitchFamily="34" charset="-120"/>
-              </a:rPr>
-              <a:t>-ful</a:t>
-            </a:r>
-            <a:endParaRPr lang="en-US" sz="1300" dirty="0"/>
-          </a:p>
-        </p:txBody>
-      </p:sp>
-      <p:sp>
-        <p:nvSpPr>
-          <p:cNvPr id="38" name="Shape 36"/>
-          <p:cNvSpPr/>
-          <p:nvPr/>
-        </p:nvSpPr>
-        <p:spPr>
-          <a:xfrm>
-            <a:off x="640080" y="3584448"/>
-            <a:ext cx="1463040" cy="420624"/>
-          </a:xfrm>
-          <a:prstGeom prst="rect">
-            <a:avLst/>
-          </a:prstGeom>
-          <a:solidFill>
-            <a:srgbClr val="DDD6FE"/>
-          </a:solidFill>
-          <a:ln w="12700">
-            <a:solidFill>
-              <a:srgbClr val="E5E7EB"/>
-            </a:solidFill>
-            <a:prstDash val="solid"/>
-          </a:ln>
-        </p:spPr>
-      </p:sp>
-      <p:sp>
-        <p:nvSpPr>
-          <p:cNvPr id="39" name="Text 37"/>
-          <p:cNvSpPr/>
-          <p:nvPr/>
-        </p:nvSpPr>
-        <p:spPr>
-          <a:xfrm>
-            <a:off x="640080" y="3584448"/>
-            <a:ext cx="1463040" cy="420624"/>
-          </a:xfrm>
-          <a:prstGeom prst="rect">
-            <a:avLst/>
-          </a:prstGeom>
-          <a:noFill/>
-          <a:ln/>
-        </p:spPr>
-        <p:txBody>
-          <a:bodyPr wrap="square" lIns="0" tIns="0" rIns="0" bIns="0" rtlCol="0" anchor="ctr"/>
-          <a:lstStyle/>
-          <a:p>
-            <a:pPr algn="ctr" indent="0" marL="0">
-              <a:buNone/>
-            </a:pPr>
-            <a:r>
-              <a:rPr lang="en-US" sz="1300" b="1" dirty="0">
-                <a:solidFill>
-                  <a:srgbClr val="4C1D95"/>
-                </a:solidFill>
-                <a:latin typeface="Trebuchet MS" pitchFamily="34" charset="0"/>
-                <a:ea typeface="Trebuchet MS" pitchFamily="34" charset="-122"/>
-                <a:cs typeface="Trebuchet MS" pitchFamily="34" charset="-120"/>
-              </a:rPr>
-              <a:t>whole-</a:t>
-            </a:r>
-            <a:endParaRPr lang="en-US" sz="1300" dirty="0"/>
-          </a:p>
-        </p:txBody>
-      </p:sp>
-      <p:sp>
-        <p:nvSpPr>
-          <p:cNvPr id="40" name="Shape 38"/>
-          <p:cNvSpPr/>
-          <p:nvPr/>
-        </p:nvSpPr>
-        <p:spPr>
-          <a:xfrm>
-            <a:off x="3291840" y="3584448"/>
-            <a:ext cx="1645920" cy="420624"/>
-          </a:xfrm>
-          <a:prstGeom prst="rect">
-            <a:avLst/>
-          </a:prstGeom>
-          <a:solidFill>
-            <a:srgbClr val="F8FAFC"/>
-          </a:solidFill>
-          <a:ln w="12700">
-            <a:solidFill>
-              <a:srgbClr val="E5E7EB"/>
-            </a:solidFill>
-            <a:prstDash val="solid"/>
-          </a:ln>
-        </p:spPr>
-      </p:sp>
-      <p:sp>
-        <p:nvSpPr>
-          <p:cNvPr id="41" name="Shape 39"/>
-          <p:cNvSpPr/>
-          <p:nvPr/>
-        </p:nvSpPr>
-        <p:spPr>
-          <a:xfrm>
-            <a:off x="5943600" y="3584448"/>
-            <a:ext cx="1463040" cy="420624"/>
-          </a:xfrm>
-          <a:prstGeom prst="rect">
-            <a:avLst/>
-          </a:prstGeom>
-          <a:solidFill>
-            <a:srgbClr val="FCE7F3"/>
-          </a:solidFill>
-          <a:ln w="12700">
-            <a:solidFill>
-              <a:srgbClr val="E5E7EB"/>
-            </a:solidFill>
-            <a:prstDash val="solid"/>
-          </a:ln>
-        </p:spPr>
-      </p:sp>
-      <p:sp>
-        <p:nvSpPr>
-          <p:cNvPr id="42" name="Text 40"/>
-          <p:cNvSpPr/>
-          <p:nvPr/>
-        </p:nvSpPr>
-        <p:spPr>
-          <a:xfrm>
-            <a:off x="5943600" y="3584448"/>
-            <a:ext cx="1463040" cy="420624"/>
-          </a:xfrm>
-          <a:prstGeom prst="rect">
-            <a:avLst/>
-          </a:prstGeom>
-          <a:noFill/>
-          <a:ln/>
-        </p:spPr>
-        <p:txBody>
-          <a:bodyPr wrap="square" lIns="0" tIns="0" rIns="0" bIns="0" rtlCol="0" anchor="ctr"/>
-          <a:lstStyle/>
-          <a:p>
-            <a:pPr algn="ctr" indent="0" marL="0">
-              <a:buNone/>
-            </a:pPr>
-            <a:r>
-              <a:rPr lang="en-US" sz="1300" b="1" dirty="0">
-                <a:solidFill>
-                  <a:srgbClr val="9D174D"/>
-                </a:solidFill>
-                <a:latin typeface="Trebuchet MS" pitchFamily="34" charset="0"/>
-                <a:ea typeface="Trebuchet MS" pitchFamily="34" charset="-122"/>
-                <a:cs typeface="Trebuchet MS" pitchFamily="34" charset="-120"/>
-              </a:rPr>
-              <a:t>-less</a:t>
-            </a:r>
-            <a:endParaRPr lang="en-US" sz="1300" dirty="0"/>
-          </a:p>
-        </p:txBody>
-      </p:sp>
-      <p:sp>
-        <p:nvSpPr>
-          <p:cNvPr id="43" name="Text 41"/>
+          <p:cNvPr id="38" name="Text 36"/>
           <p:cNvSpPr/>
           <p:nvPr/>
         </p:nvSpPr>
@@ -39640,14 +39952,14 @@
       </p:sp>
       <p:sp>
         <p:nvSpPr>
-          <p:cNvPr id="44" name="Shape 42"/>
+          <p:cNvPr id="39" name="Shape 37"/>
           <p:cNvSpPr/>
           <p:nvPr/>
         </p:nvSpPr>
         <p:spPr>
           <a:xfrm>
             <a:off x="1508760" y="4178808"/>
-            <a:ext cx="822960" cy="420624"/>
+            <a:ext cx="1389888" cy="420624"/>
           </a:xfrm>
           <a:prstGeom prst="rect">
             <a:avLst>
@@ -39655,11 +39967,11 @@
             </a:avLst>
           </a:prstGeom>
           <a:solidFill>
-            <a:srgbClr val="DDD6FE"/>
+            <a:srgbClr val="CCFBF1"/>
           </a:solidFill>
           <a:ln w="19050">
             <a:solidFill>
-              <a:srgbClr val="7C3AED"/>
+              <a:srgbClr val="0D9488"/>
             </a:solidFill>
             <a:prstDash val="solid"/>
           </a:ln>
@@ -39674,14 +39986,14 @@
       </p:sp>
       <p:sp>
         <p:nvSpPr>
-          <p:cNvPr id="45" name="Text 43"/>
+          <p:cNvPr id="40" name="Text 38"/>
           <p:cNvSpPr/>
           <p:nvPr/>
         </p:nvSpPr>
         <p:spPr>
           <a:xfrm>
             <a:off x="1508760" y="4178808"/>
-            <a:ext cx="822960" cy="420624"/>
+            <a:ext cx="1389888" cy="420624"/>
           </a:xfrm>
           <a:prstGeom prst="rect">
             <a:avLst/>
@@ -39699,13 +40011,13 @@
             <a:r>
               <a:rPr lang="en-US" sz="1300" b="1" dirty="0">
                 <a:solidFill>
-                  <a:srgbClr val="4C1D95"/>
+                  <a:srgbClr val="0F766E"/>
                 </a:solidFill>
                 <a:latin typeface="Trebuchet MS" pitchFamily="34" charset="0"/>
                 <a:ea typeface="Trebuchet MS" pitchFamily="34" charset="-122"/>
                 <a:cs typeface="Trebuchet MS" pitchFamily="34" charset="-120"/>
               </a:rPr>
-              <a:t>un-</a:t>
+              <a:t>'thank'</a:t>
             </a:r>
             <a:endParaRPr lang="en-US" sz="1300" dirty="0"/>
           </a:p>
@@ -39713,13 +40025,13 @@
       </p:sp>
       <p:sp>
         <p:nvSpPr>
-          <p:cNvPr id="46" name="Text 44"/>
-          <p:cNvSpPr/>
-          <p:nvPr/>
-        </p:nvSpPr>
-        <p:spPr>
-          <a:xfrm>
-            <a:off x="2359152" y="4178808"/>
+          <p:cNvPr id="41" name="Text 39"/>
+          <p:cNvSpPr/>
+          <p:nvPr/>
+        </p:nvSpPr>
+        <p:spPr>
+          <a:xfrm>
+            <a:off x="2926080" y="4178808"/>
             <a:ext cx="320040" cy="420624"/>
           </a:xfrm>
           <a:prstGeom prst="rect">
@@ -39752,14 +40064,14 @@
       </p:sp>
       <p:sp>
         <p:nvSpPr>
-          <p:cNvPr id="47" name="Shape 45"/>
-          <p:cNvSpPr/>
-          <p:nvPr/>
-        </p:nvSpPr>
-        <p:spPr>
-          <a:xfrm>
-            <a:off x="2706624" y="4178808"/>
-            <a:ext cx="1389888" cy="420624"/>
+          <p:cNvPr id="42" name="Shape 40"/>
+          <p:cNvSpPr/>
+          <p:nvPr/>
+        </p:nvSpPr>
+        <p:spPr>
+          <a:xfrm>
+            <a:off x="3273552" y="4178808"/>
+            <a:ext cx="822960" cy="420624"/>
           </a:xfrm>
           <a:prstGeom prst="rect">
             <a:avLst>
@@ -39767,11 +40079,11 @@
             </a:avLst>
           </a:prstGeom>
           <a:solidFill>
-            <a:srgbClr val="CCFBF1"/>
+            <a:srgbClr val="FCE7F3"/>
           </a:solidFill>
           <a:ln w="19050">
             <a:solidFill>
-              <a:srgbClr val="0D9488"/>
+              <a:srgbClr val="DB2777"/>
             </a:solidFill>
             <a:prstDash val="solid"/>
           </a:ln>
@@ -39786,14 +40098,14 @@
       </p:sp>
       <p:sp>
         <p:nvSpPr>
-          <p:cNvPr id="48" name="Text 46"/>
-          <p:cNvSpPr/>
-          <p:nvPr/>
-        </p:nvSpPr>
-        <p:spPr>
-          <a:xfrm>
-            <a:off x="2706624" y="4178808"/>
-            <a:ext cx="1389888" cy="420624"/>
+          <p:cNvPr id="43" name="Text 41"/>
+          <p:cNvSpPr/>
+          <p:nvPr/>
+        </p:nvSpPr>
+        <p:spPr>
+          <a:xfrm>
+            <a:off x="3273552" y="4178808"/>
+            <a:ext cx="822960" cy="420624"/>
           </a:xfrm>
           <a:prstGeom prst="rect">
             <a:avLst/>
@@ -39811,13 +40123,13 @@
             <a:r>
               <a:rPr lang="en-US" sz="1300" b="1" dirty="0">
                 <a:solidFill>
-                  <a:srgbClr val="0F766E"/>
+                  <a:srgbClr val="9D174D"/>
                 </a:solidFill>
                 <a:latin typeface="Trebuchet MS" pitchFamily="34" charset="0"/>
                 <a:ea typeface="Trebuchet MS" pitchFamily="34" charset="-122"/>
                 <a:cs typeface="Trebuchet MS" pitchFamily="34" charset="-120"/>
               </a:rPr>
-              <a:t>'thank'</a:t>
+              <a:t>-ed</a:t>
             </a:r>
             <a:endParaRPr lang="en-US" sz="1300" dirty="0"/>
           </a:p>
@@ -39825,14 +40137,14 @@
       </p:sp>
       <p:sp>
         <p:nvSpPr>
-          <p:cNvPr id="49" name="Text 47"/>
-          <p:cNvSpPr/>
-          <p:nvPr/>
-        </p:nvSpPr>
-        <p:spPr>
-          <a:xfrm>
-            <a:off x="4123944" y="4178808"/>
-            <a:ext cx="320040" cy="420624"/>
+          <p:cNvPr id="44" name="Text 42"/>
+          <p:cNvSpPr/>
+          <p:nvPr/>
+        </p:nvSpPr>
+        <p:spPr>
+          <a:xfrm>
+            <a:off x="4169664" y="4178808"/>
+            <a:ext cx="365760" cy="420624"/>
           </a:xfrm>
           <a:prstGeom prst="rect">
             <a:avLst/>
@@ -39848,30 +40160,30 @@
               <a:buNone/>
             </a:pPr>
             <a:r>
-              <a:rPr lang="en-US" sz="1400" dirty="0">
-                <a:solidFill>
-                  <a:srgbClr val="475569"/>
+              <a:rPr lang="en-US" sz="1800" b="1" dirty="0">
+                <a:solidFill>
+                  <a:srgbClr val="0D9488"/>
                 </a:solidFill>
                 <a:latin typeface="Trebuchet MS" pitchFamily="34" charset="0"/>
                 <a:ea typeface="Trebuchet MS" pitchFamily="34" charset="-122"/>
                 <a:cs typeface="Trebuchet MS" pitchFamily="34" charset="-120"/>
               </a:rPr>
-              <a:t>+</a:t>
-            </a:r>
-            <a:endParaRPr lang="en-US" sz="1400" dirty="0"/>
-          </a:p>
-        </p:txBody>
-      </p:sp>
-      <p:sp>
-        <p:nvSpPr>
-          <p:cNvPr id="50" name="Shape 48"/>
-          <p:cNvSpPr/>
-          <p:nvPr/>
-        </p:nvSpPr>
-        <p:spPr>
-          <a:xfrm>
-            <a:off x="4471416" y="4178808"/>
-            <a:ext cx="822960" cy="420624"/>
+              <a:t>=</a:t>
+            </a:r>
+            <a:endParaRPr lang="en-US" sz="1800" dirty="0"/>
+          </a:p>
+        </p:txBody>
+      </p:sp>
+      <p:sp>
+        <p:nvSpPr>
+          <p:cNvPr id="45" name="Shape 43"/>
+          <p:cNvSpPr/>
+          <p:nvPr/>
+        </p:nvSpPr>
+        <p:spPr>
+          <a:xfrm>
+            <a:off x="4581144" y="4178808"/>
+            <a:ext cx="2194560" cy="420624"/>
           </a:xfrm>
           <a:prstGeom prst="rect">
             <a:avLst>
@@ -39879,33 +40191,26 @@
             </a:avLst>
           </a:prstGeom>
           <a:solidFill>
-            <a:srgbClr val="FCE7F3"/>
-          </a:solidFill>
-          <a:ln w="19050">
-            <a:solidFill>
-              <a:srgbClr val="DB2777"/>
-            </a:solidFill>
-            <a:prstDash val="solid"/>
-          </a:ln>
-          <a:effectLst>
-            <a:outerShdw sx="100000" sy="100000" kx="0" ky="0" algn="bl" rotWithShape="0" blurRad="101600" dist="38100" dir="8100000">
-              <a:srgbClr val="000000">
-                <a:alpha val="12000"/>
-              </a:srgbClr>
-            </a:outerShdw>
-          </a:effectLst>
-        </p:spPr>
-      </p:sp>
-      <p:sp>
-        <p:nvSpPr>
-          <p:cNvPr id="51" name="Text 49"/>
-          <p:cNvSpPr/>
-          <p:nvPr/>
-        </p:nvSpPr>
-        <p:spPr>
-          <a:xfrm>
-            <a:off x="4471416" y="4178808"/>
-            <a:ext cx="822960" cy="420624"/>
+            <a:srgbClr val="0D9488"/>
+          </a:solidFill>
+          <a:ln w="12700">
+            <a:solidFill>
+              <a:srgbClr val="0D9488"/>
+            </a:solidFill>
+            <a:prstDash val="solid"/>
+          </a:ln>
+        </p:spPr>
+      </p:sp>
+      <p:sp>
+        <p:nvSpPr>
+          <p:cNvPr id="46" name="Text 44"/>
+          <p:cNvSpPr/>
+          <p:nvPr/>
+        </p:nvSpPr>
+        <p:spPr>
+          <a:xfrm>
+            <a:off x="4581144" y="4178808"/>
+            <a:ext cx="2194560" cy="420624"/>
           </a:xfrm>
           <a:prstGeom prst="rect">
             <a:avLst/>
@@ -39921,120 +40226,15 @@
               <a:buNone/>
             </a:pPr>
             <a:r>
-              <a:rPr lang="en-US" sz="1300" b="1" dirty="0">
-                <a:solidFill>
-                  <a:srgbClr val="9D174D"/>
+              <a:rPr lang="en-US" sz="1400" b="1" dirty="0">
+                <a:solidFill>
+                  <a:srgbClr val="FFFFFF"/>
                 </a:solidFill>
                 <a:latin typeface="Trebuchet MS" pitchFamily="34" charset="0"/>
                 <a:ea typeface="Trebuchet MS" pitchFamily="34" charset="-122"/>
                 <a:cs typeface="Trebuchet MS" pitchFamily="34" charset="-120"/>
               </a:rPr>
-              <a:t>-s</a:t>
-            </a:r>
-            <a:endParaRPr lang="en-US" sz="1300" dirty="0"/>
-          </a:p>
-        </p:txBody>
-      </p:sp>
-      <p:sp>
-        <p:nvSpPr>
-          <p:cNvPr id="52" name="Text 50"/>
-          <p:cNvSpPr/>
-          <p:nvPr/>
-        </p:nvSpPr>
-        <p:spPr>
-          <a:xfrm>
-            <a:off x="5367528" y="4178808"/>
-            <a:ext cx="365760" cy="420624"/>
-          </a:xfrm>
-          <a:prstGeom prst="rect">
-            <a:avLst/>
-          </a:prstGeom>
-          <a:noFill/>
-          <a:ln/>
-        </p:spPr>
-        <p:txBody>
-          <a:bodyPr wrap="square" lIns="0" tIns="0" rIns="0" bIns="0" rtlCol="0" anchor="ctr"/>
-          <a:lstStyle/>
-          <a:p>
-            <a:pPr algn="ctr" indent="0" marL="0">
-              <a:buNone/>
-            </a:pPr>
-            <a:r>
-              <a:rPr lang="en-US" sz="1800" b="1" dirty="0">
-                <a:solidFill>
-                  <a:srgbClr val="0D9488"/>
-                </a:solidFill>
-                <a:latin typeface="Trebuchet MS" pitchFamily="34" charset="0"/>
-                <a:ea typeface="Trebuchet MS" pitchFamily="34" charset="-122"/>
-                <a:cs typeface="Trebuchet MS" pitchFamily="34" charset="-120"/>
-              </a:rPr>
-              <a:t>=</a:t>
-            </a:r>
-            <a:endParaRPr lang="en-US" sz="1800" dirty="0"/>
-          </a:p>
-        </p:txBody>
-      </p:sp>
-      <p:sp>
-        <p:nvSpPr>
-          <p:cNvPr id="53" name="Shape 51"/>
-          <p:cNvSpPr/>
-          <p:nvPr/>
-        </p:nvSpPr>
-        <p:spPr>
-          <a:xfrm>
-            <a:off x="5779008" y="4178808"/>
-            <a:ext cx="2194560" cy="420624"/>
-          </a:xfrm>
-          <a:prstGeom prst="rect">
-            <a:avLst>
-              <a:gd name="adj" fmla="val 17391"/>
-            </a:avLst>
-          </a:prstGeom>
-          <a:solidFill>
-            <a:srgbClr val="0D9488"/>
-          </a:solidFill>
-          <a:ln w="12700">
-            <a:solidFill>
-              <a:srgbClr val="0D9488"/>
-            </a:solidFill>
-            <a:prstDash val="solid"/>
-          </a:ln>
-        </p:spPr>
-      </p:sp>
-      <p:sp>
-        <p:nvSpPr>
-          <p:cNvPr id="54" name="Text 52"/>
-          <p:cNvSpPr/>
-          <p:nvPr/>
-        </p:nvSpPr>
-        <p:spPr>
-          <a:xfrm>
-            <a:off x="5779008" y="4178808"/>
-            <a:ext cx="2194560" cy="420624"/>
-          </a:xfrm>
-          <a:prstGeom prst="rect">
-            <a:avLst/>
-          </a:prstGeom>
-          <a:noFill/>
-          <a:ln/>
-        </p:spPr>
-        <p:txBody>
-          <a:bodyPr wrap="square" lIns="0" tIns="0" rIns="0" bIns="0" rtlCol="0" anchor="ctr"/>
-          <a:lstStyle/>
-          <a:p>
-            <a:pPr algn="ctr" indent="0" marL="0">
-              <a:buNone/>
-            </a:pPr>
-            <a:r>
-              <a:rPr lang="en-US" sz="1400" b="1" dirty="0">
-                <a:solidFill>
-                  <a:srgbClr val="FFFFFF"/>
-                </a:solidFill>
-                <a:latin typeface="Trebuchet MS" pitchFamily="34" charset="0"/>
-                <a:ea typeface="Trebuchet MS" pitchFamily="34" charset="-122"/>
-                <a:cs typeface="Trebuchet MS" pitchFamily="34" charset="-120"/>
-              </a:rPr>
-              <a:t>thanks</a:t>
+              <a:t>thank</a:t>
             </a:r>
             <a:endParaRPr lang="en-US" sz="1400" dirty="0"/>
           </a:p>
@@ -40326,7 +40526,7 @@
                 <a:ea typeface="Calibri" pitchFamily="34" charset="-122"/>
                 <a:cs typeface="Calibri" pitchFamily="34" charset="-120"/>
               </a:rPr>
-              <a:t>Word Labs  •  wordlabs.app  •  Root: 'thank' = express gratitude or praise</a:t>
+              <a:t>Word Labs  •  wordlabs.app  •  Root: 'thank' = to show you are grateful</a:t>
             </a:r>
             <a:endParaRPr lang="en-US" sz="800" dirty="0"/>
           </a:p>
@@ -40438,7 +40638,7 @@
                 <a:ea typeface="Trebuchet MS" pitchFamily="34" charset="-122"/>
                 <a:cs typeface="Trebuchet MS" pitchFamily="34" charset="-120"/>
               </a:rPr>
-              <a:t>thanks</a:t>
+              <a:t>thank</a:t>
             </a:r>
             <a:endParaRPr lang="en-US" sz="1200" dirty="0"/>
           </a:p>
@@ -40504,7 +40704,7 @@
                 <a:ea typeface="Calibri" pitchFamily="34" charset="-122"/>
                 <a:cs typeface="Calibri" pitchFamily="34" charset="-120"/>
               </a:rPr>
-              <a:t>Words you say to show you are grateful for something someone did.</a:t>
+              <a:t>to tell someone you are grateful for something they did</a:t>
             </a:r>
             <a:endParaRPr lang="en-US" sz="1200" dirty="0"/>
           </a:p>
@@ -40577,7 +40777,7 @@
                 <a:ea typeface="Trebuchet MS" pitchFamily="34" charset="-122"/>
                 <a:cs typeface="Trebuchet MS" pitchFamily="34" charset="-120"/>
               </a:rPr>
-              <a:t>thanked</a:t>
+              <a:t>thanks</a:t>
             </a:r>
             <a:endParaRPr lang="en-US" sz="1200" dirty="0"/>
           </a:p>
@@ -40643,7 +40843,7 @@
                 <a:ea typeface="Calibri" pitchFamily="34" charset="-122"/>
                 <a:cs typeface="Calibri" pitchFamily="34" charset="-120"/>
               </a:rPr>
-              <a:t>The act of telling someone you appreciate what they have done right now.</a:t>
+              <a:t>told someone you were grateful for something they did</a:t>
             </a:r>
             <a:endParaRPr lang="en-US" sz="1200" dirty="0"/>
           </a:p>
@@ -40716,7 +40916,7 @@
                 <a:ea typeface="Trebuchet MS" pitchFamily="34" charset="-122"/>
                 <a:cs typeface="Trebuchet MS" pitchFamily="34" charset="-120"/>
               </a:rPr>
-              <a:t>thanking</a:t>
+              <a:t>thanked</a:t>
             </a:r>
             <a:endParaRPr lang="en-US" sz="1200" dirty="0"/>
           </a:p>
@@ -40782,7 +40982,7 @@
                 <a:ea typeface="Calibri" pitchFamily="34" charset="-122"/>
                 <a:cs typeface="Calibri" pitchFamily="34" charset="-120"/>
               </a:rPr>
-              <a:t>Used to say that something good happened and you are relieved about it.</a:t>
+              <a:t>words used to show you are grateful</a:t>
             </a:r>
             <a:endParaRPr lang="en-US" sz="1200" dirty="0"/>
           </a:p>
@@ -40921,424 +41121,7 @@
                 <a:ea typeface="Calibri" pitchFamily="34" charset="-122"/>
                 <a:cs typeface="Calibri" pitchFamily="34" charset="-120"/>
               </a:rPr>
-              <a:t>Feeling happy and glad about something good that happened to you.</a:t>
-            </a:r>
-            <a:endParaRPr lang="en-US" sz="1200" dirty="0"/>
-          </a:p>
-        </p:txBody>
-      </p:sp>
-      <p:sp>
-        <p:nvSpPr>
-          <p:cNvPr id="27" name="Shape 25"/>
-          <p:cNvSpPr/>
-          <p:nvPr/>
-        </p:nvSpPr>
-        <p:spPr>
-          <a:xfrm>
-            <a:off x="365760" y="3310128"/>
-            <a:ext cx="2011680" cy="457200"/>
-          </a:xfrm>
-          <a:prstGeom prst="rect">
-            <a:avLst>
-              <a:gd name="adj" fmla="val 12000"/>
-            </a:avLst>
-          </a:prstGeom>
-          <a:solidFill>
-            <a:srgbClr val="EEF2FF"/>
-          </a:solidFill>
-          <a:ln w="12700">
-            <a:solidFill>
-              <a:srgbClr val="6366F1"/>
-            </a:solidFill>
-            <a:prstDash val="solid"/>
-          </a:ln>
-          <a:effectLst>
-            <a:outerShdw sx="100000" sy="100000" kx="0" ky="0" algn="bl" rotWithShape="0" blurRad="101600" dist="38100" dir="8100000">
-              <a:srgbClr val="000000">
-                <a:alpha val="12000"/>
-              </a:srgbClr>
-            </a:outerShdw>
-          </a:effectLst>
-        </p:spPr>
-      </p:sp>
-      <p:sp>
-        <p:nvSpPr>
-          <p:cNvPr id="28" name="Text 26"/>
-          <p:cNvSpPr/>
-          <p:nvPr/>
-        </p:nvSpPr>
-        <p:spPr>
-          <a:xfrm>
-            <a:off x="365760" y="3310128"/>
-            <a:ext cx="2011680" cy="457200"/>
-          </a:xfrm>
-          <a:prstGeom prst="rect">
-            <a:avLst/>
-          </a:prstGeom>
-          <a:noFill/>
-          <a:ln/>
-        </p:spPr>
-        <p:txBody>
-          <a:bodyPr wrap="square" lIns="0" tIns="0" rIns="0" bIns="0" rtlCol="0" anchor="ctr"/>
-          <a:lstStyle/>
-          <a:p>
-            <a:pPr algn="ctr" indent="0" marL="0">
-              <a:buNone/>
-            </a:pPr>
-            <a:r>
-              <a:rPr lang="en-US" sz="1200" b="1" dirty="0">
-                <a:solidFill>
-                  <a:srgbClr val="4338CA"/>
-                </a:solidFill>
-                <a:latin typeface="Trebuchet MS" pitchFamily="34" charset="0"/>
-                <a:ea typeface="Trebuchet MS" pitchFamily="34" charset="-122"/>
-                <a:cs typeface="Trebuchet MS" pitchFamily="34" charset="-120"/>
-              </a:rPr>
-              <a:t>thankless</a:t>
-            </a:r>
-            <a:endParaRPr lang="en-US" sz="1200" dirty="0"/>
-          </a:p>
-        </p:txBody>
-      </p:sp>
-      <p:sp>
-        <p:nvSpPr>
-          <p:cNvPr id="29" name="Shape 27"/>
-          <p:cNvSpPr/>
-          <p:nvPr/>
-        </p:nvSpPr>
-        <p:spPr>
-          <a:xfrm>
-            <a:off x="2514600" y="3310128"/>
-            <a:ext cx="6263640" cy="457200"/>
-          </a:xfrm>
-          <a:prstGeom prst="rect">
-            <a:avLst>
-              <a:gd name="adj" fmla="val 12000"/>
-            </a:avLst>
-          </a:prstGeom>
-          <a:solidFill>
-            <a:srgbClr val="F8FAFC"/>
-          </a:solidFill>
-          <a:ln w="12700">
-            <a:solidFill>
-              <a:srgbClr val="E2E8F0"/>
-            </a:solidFill>
-            <a:prstDash val="solid"/>
-          </a:ln>
-        </p:spPr>
-      </p:sp>
-      <p:sp>
-        <p:nvSpPr>
-          <p:cNvPr id="30" name="Text 28"/>
-          <p:cNvSpPr/>
-          <p:nvPr/>
-        </p:nvSpPr>
-        <p:spPr>
-          <a:xfrm>
-            <a:off x="2651760" y="3310128"/>
-            <a:ext cx="6035040" cy="457200"/>
-          </a:xfrm>
-          <a:prstGeom prst="rect">
-            <a:avLst/>
-          </a:prstGeom>
-          <a:noFill/>
-          <a:ln/>
-        </p:spPr>
-        <p:txBody>
-          <a:bodyPr wrap="square" rtlCol="0" anchor="ctr"/>
-          <a:lstStyle/>
-          <a:p>
-            <a:pPr algn="l" indent="0" marL="0">
-              <a:buNone/>
-            </a:pPr>
-            <a:r>
-              <a:rPr lang="en-US" sz="1200" dirty="0">
-                <a:solidFill>
-                  <a:srgbClr val="0F172A"/>
-                </a:solidFill>
-                <a:latin typeface="Calibri" pitchFamily="34" charset="0"/>
-                <a:ea typeface="Calibri" pitchFamily="34" charset="-122"/>
-                <a:cs typeface="Calibri" pitchFamily="34" charset="-120"/>
-              </a:rPr>
-              <a:t>A job or task that nobody notices or appreciates, even when it is done well.</a:t>
-            </a:r>
-            <a:endParaRPr lang="en-US" sz="1200" dirty="0"/>
-          </a:p>
-        </p:txBody>
-      </p:sp>
-      <p:sp>
-        <p:nvSpPr>
-          <p:cNvPr id="31" name="Shape 29"/>
-          <p:cNvSpPr/>
-          <p:nvPr/>
-        </p:nvSpPr>
-        <p:spPr>
-          <a:xfrm>
-            <a:off x="365760" y="3840480"/>
-            <a:ext cx="2011680" cy="457200"/>
-          </a:xfrm>
-          <a:prstGeom prst="rect">
-            <a:avLst>
-              <a:gd name="adj" fmla="val 12000"/>
-            </a:avLst>
-          </a:prstGeom>
-          <a:solidFill>
-            <a:srgbClr val="EEF2FF"/>
-          </a:solidFill>
-          <a:ln w="12700">
-            <a:solidFill>
-              <a:srgbClr val="6366F1"/>
-            </a:solidFill>
-            <a:prstDash val="solid"/>
-          </a:ln>
-          <a:effectLst>
-            <a:outerShdw sx="100000" sy="100000" kx="0" ky="0" algn="bl" rotWithShape="0" blurRad="101600" dist="38100" dir="8100000">
-              <a:srgbClr val="000000">
-                <a:alpha val="12000"/>
-              </a:srgbClr>
-            </a:outerShdw>
-          </a:effectLst>
-        </p:spPr>
-      </p:sp>
-      <p:sp>
-        <p:nvSpPr>
-          <p:cNvPr id="32" name="Text 30"/>
-          <p:cNvSpPr/>
-          <p:nvPr/>
-        </p:nvSpPr>
-        <p:spPr>
-          <a:xfrm>
-            <a:off x="365760" y="3840480"/>
-            <a:ext cx="2011680" cy="457200"/>
-          </a:xfrm>
-          <a:prstGeom prst="rect">
-            <a:avLst/>
-          </a:prstGeom>
-          <a:noFill/>
-          <a:ln/>
-        </p:spPr>
-        <p:txBody>
-          <a:bodyPr wrap="square" lIns="0" tIns="0" rIns="0" bIns="0" rtlCol="0" anchor="ctr"/>
-          <a:lstStyle/>
-          <a:p>
-            <a:pPr algn="ctr" indent="0" marL="0">
-              <a:buNone/>
-            </a:pPr>
-            <a:r>
-              <a:rPr lang="en-US" sz="1200" b="1" dirty="0">
-                <a:solidFill>
-                  <a:srgbClr val="4338CA"/>
-                </a:solidFill>
-                <a:latin typeface="Trebuchet MS" pitchFamily="34" charset="0"/>
-                <a:ea typeface="Trebuchet MS" pitchFamily="34" charset="-122"/>
-                <a:cs typeface="Trebuchet MS" pitchFamily="34" charset="-120"/>
-              </a:rPr>
-              <a:t>thankfully</a:t>
-            </a:r>
-            <a:endParaRPr lang="en-US" sz="1200" dirty="0"/>
-          </a:p>
-        </p:txBody>
-      </p:sp>
-      <p:sp>
-        <p:nvSpPr>
-          <p:cNvPr id="33" name="Shape 31"/>
-          <p:cNvSpPr/>
-          <p:nvPr/>
-        </p:nvSpPr>
-        <p:spPr>
-          <a:xfrm>
-            <a:off x="2514600" y="3840480"/>
-            <a:ext cx="6263640" cy="457200"/>
-          </a:xfrm>
-          <a:prstGeom prst="rect">
-            <a:avLst>
-              <a:gd name="adj" fmla="val 12000"/>
-            </a:avLst>
-          </a:prstGeom>
-          <a:solidFill>
-            <a:srgbClr val="F8FAFC"/>
-          </a:solidFill>
-          <a:ln w="12700">
-            <a:solidFill>
-              <a:srgbClr val="E2E8F0"/>
-            </a:solidFill>
-            <a:prstDash val="solid"/>
-          </a:ln>
-        </p:spPr>
-      </p:sp>
-      <p:sp>
-        <p:nvSpPr>
-          <p:cNvPr id="34" name="Text 32"/>
-          <p:cNvSpPr/>
-          <p:nvPr/>
-        </p:nvSpPr>
-        <p:spPr>
-          <a:xfrm>
-            <a:off x="2651760" y="3840480"/>
-            <a:ext cx="6035040" cy="457200"/>
-          </a:xfrm>
-          <a:prstGeom prst="rect">
-            <a:avLst/>
-          </a:prstGeom>
-          <a:noFill/>
-          <a:ln/>
-        </p:spPr>
-        <p:txBody>
-          <a:bodyPr wrap="square" rtlCol="0" anchor="ctr"/>
-          <a:lstStyle/>
-          <a:p>
-            <a:pPr algn="l" indent="0" marL="0">
-              <a:buNone/>
-            </a:pPr>
-            <a:r>
-              <a:rPr lang="en-US" sz="1200" dirty="0">
-                <a:solidFill>
-                  <a:srgbClr val="0F172A"/>
-                </a:solidFill>
-                <a:latin typeface="Calibri" pitchFamily="34" charset="0"/>
-                <a:ea typeface="Calibri" pitchFamily="34" charset="-122"/>
-                <a:cs typeface="Calibri" pitchFamily="34" charset="-120"/>
-              </a:rPr>
-              <a:t>The feeling of being deeply grateful and appreciating what you have.</a:t>
-            </a:r>
-            <a:endParaRPr lang="en-US" sz="1200" dirty="0"/>
-          </a:p>
-        </p:txBody>
-      </p:sp>
-      <p:sp>
-        <p:nvSpPr>
-          <p:cNvPr id="35" name="Shape 33"/>
-          <p:cNvSpPr/>
-          <p:nvPr/>
-        </p:nvSpPr>
-        <p:spPr>
-          <a:xfrm>
-            <a:off x="365760" y="4370832"/>
-            <a:ext cx="2011680" cy="457200"/>
-          </a:xfrm>
-          <a:prstGeom prst="rect">
-            <a:avLst>
-              <a:gd name="adj" fmla="val 12000"/>
-            </a:avLst>
-          </a:prstGeom>
-          <a:solidFill>
-            <a:srgbClr val="EEF2FF"/>
-          </a:solidFill>
-          <a:ln w="12700">
-            <a:solidFill>
-              <a:srgbClr val="6366F1"/>
-            </a:solidFill>
-            <a:prstDash val="solid"/>
-          </a:ln>
-          <a:effectLst>
-            <a:outerShdw sx="100000" sy="100000" kx="0" ky="0" algn="bl" rotWithShape="0" blurRad="101600" dist="38100" dir="8100000">
-              <a:srgbClr val="000000">
-                <a:alpha val="12000"/>
-              </a:srgbClr>
-            </a:outerShdw>
-          </a:effectLst>
-        </p:spPr>
-      </p:sp>
-      <p:sp>
-        <p:nvSpPr>
-          <p:cNvPr id="36" name="Text 34"/>
-          <p:cNvSpPr/>
-          <p:nvPr/>
-        </p:nvSpPr>
-        <p:spPr>
-          <a:xfrm>
-            <a:off x="365760" y="4370832"/>
-            <a:ext cx="2011680" cy="457200"/>
-          </a:xfrm>
-          <a:prstGeom prst="rect">
-            <a:avLst/>
-          </a:prstGeom>
-          <a:noFill/>
-          <a:ln/>
-        </p:spPr>
-        <p:txBody>
-          <a:bodyPr wrap="square" lIns="0" tIns="0" rIns="0" bIns="0" rtlCol="0" anchor="ctr"/>
-          <a:lstStyle/>
-          <a:p>
-            <a:pPr algn="ctr" indent="0" marL="0">
-              <a:buNone/>
-            </a:pPr>
-            <a:r>
-              <a:rPr lang="en-US" sz="1200" b="1" dirty="0">
-                <a:solidFill>
-                  <a:srgbClr val="4338CA"/>
-                </a:solidFill>
-                <a:latin typeface="Trebuchet MS" pitchFamily="34" charset="0"/>
-                <a:ea typeface="Trebuchet MS" pitchFamily="34" charset="-122"/>
-                <a:cs typeface="Trebuchet MS" pitchFamily="34" charset="-120"/>
-              </a:rPr>
-              <a:t>thankfulness</a:t>
-            </a:r>
-            <a:endParaRPr lang="en-US" sz="1200" dirty="0"/>
-          </a:p>
-        </p:txBody>
-      </p:sp>
-      <p:sp>
-        <p:nvSpPr>
-          <p:cNvPr id="37" name="Shape 35"/>
-          <p:cNvSpPr/>
-          <p:nvPr/>
-        </p:nvSpPr>
-        <p:spPr>
-          <a:xfrm>
-            <a:off x="2514600" y="4370832"/>
-            <a:ext cx="6263640" cy="457200"/>
-          </a:xfrm>
-          <a:prstGeom prst="rect">
-            <a:avLst>
-              <a:gd name="adj" fmla="val 12000"/>
-            </a:avLst>
-          </a:prstGeom>
-          <a:solidFill>
-            <a:srgbClr val="F8FAFC"/>
-          </a:solidFill>
-          <a:ln w="12700">
-            <a:solidFill>
-              <a:srgbClr val="E2E8F0"/>
-            </a:solidFill>
-            <a:prstDash val="solid"/>
-          </a:ln>
-        </p:spPr>
-      </p:sp>
-      <p:sp>
-        <p:nvSpPr>
-          <p:cNvPr id="38" name="Text 36"/>
-          <p:cNvSpPr/>
-          <p:nvPr/>
-        </p:nvSpPr>
-        <p:spPr>
-          <a:xfrm>
-            <a:off x="2651760" y="4370832"/>
-            <a:ext cx="6035040" cy="457200"/>
-          </a:xfrm>
-          <a:prstGeom prst="rect">
-            <a:avLst/>
-          </a:prstGeom>
-          <a:noFill/>
-          <a:ln/>
-        </p:spPr>
-        <p:txBody>
-          <a:bodyPr wrap="square" rtlCol="0" anchor="ctr"/>
-          <a:lstStyle/>
-          <a:p>
-            <a:pPr algn="l" indent="0" marL="0">
-              <a:buNone/>
-            </a:pPr>
-            <a:r>
-              <a:rPr lang="en-US" sz="1200" dirty="0">
-                <a:solidFill>
-                  <a:srgbClr val="0F172A"/>
-                </a:solidFill>
-                <a:latin typeface="Calibri" pitchFamily="34" charset="0"/>
-                <a:ea typeface="Calibri" pitchFamily="34" charset="-122"/>
-                <a:cs typeface="Calibri" pitchFamily="34" charset="-120"/>
-              </a:rPr>
-              <a:t>When someone already told another person they were grateful for something.</a:t>
+              <a:t>feeling grateful for something</a:t>
             </a:r>
             <a:endParaRPr lang="en-US" sz="1200" dirty="0"/>
           </a:p>
@@ -41630,7 +41413,7 @@
                 <a:ea typeface="Calibri" pitchFamily="34" charset="-122"/>
                 <a:cs typeface="Calibri" pitchFamily="34" charset="-120"/>
               </a:rPr>
-              <a:t>Word Labs  •  wordlabs.app  •  Root: 'thank' = express gratitude or praise</a:t>
+              <a:t>Word Labs  •  wordlabs.app  •  Root: 'thank' = to show you are grateful</a:t>
             </a:r>
             <a:endParaRPr lang="en-US" sz="800" dirty="0"/>
           </a:p>
@@ -41833,7 +41616,7 @@
                 <a:ea typeface="Calibri" pitchFamily="34" charset="-122"/>
                 <a:cs typeface="Calibri" pitchFamily="34" charset="-120"/>
               </a:rPr>
-              <a:t>She was thankful that her friend helped her carry the heavy bags home from school.</a:t>
+              <a:t>I want to thank you for helping me with my homework.</a:t>
             </a:r>
             <a:endParaRPr lang="en-US" sz="1500" dirty="0"/>
           </a:p>
@@ -41997,7 +41780,7 @@
                 <a:ea typeface="Calibri" pitchFamily="34" charset="-122"/>
                 <a:cs typeface="Calibri" pitchFamily="34" charset="-120"/>
               </a:rPr>
-              <a:t>It can feel thankless to clean up after others when no one notices the effort you put in.</a:t>
+              <a:t>She gave her thanks to everyone who helped organise the fete.</a:t>
             </a:r>
             <a:endParaRPr lang="en-US" sz="1500" dirty="0"/>
           </a:p>
@@ -42161,7 +41944,7 @@
                 <a:ea typeface="Calibri" pitchFamily="34" charset="-122"/>
                 <a:cs typeface="Calibri" pitchFamily="34" charset="-120"/>
               </a:rPr>
-              <a:t>He thanked his teacher for staying after class to explain the maths problem again.</a:t>
+              <a:t>She thanked her grandmother for the birthday present.</a:t>
             </a:r>
             <a:endParaRPr lang="en-US" sz="1500" dirty="0"/>
           </a:p>
